--- a/kits/kit04/Kit04_PresentationDeck.pptx
+++ b/kits/kit04/Kit04_PresentationDeck.pptx
@@ -971,7 +971,7 @@
           <a:p>
             <a:r>
               <a:rPr lang="en-US" dirty="0"/>
-              <a:t>FOUNDER STORY slot lands here; read it from the script: a piece of feedback that only worked because you knew the kid and what they were attempting.</a:t>
+              <a:t>A personal beat fits here if you have one: a piece of feedback that only worked because you knew the kid and what they were attempting.</a:t>
             </a:r>
             <a:endParaRPr lang="en-US" dirty="0"/>
           </a:p>
@@ -1235,7 +1235,7 @@
           <a:p>
             <a:r>
               <a:rPr lang="en-US" dirty="0"/>
-              <a:t>YOUR TAKE slot lands here; read the authors’ stated line from the script: what feedback they refuse to let AI even draft, and why there.</a:t>
+              <a:t>If you chose to share the founders’ note, their personal line on AI and assessment lands well here. Your own line lands even better; staff trust red lines more when the presenter shows theirs.</a:t>
             </a:r>
             <a:endParaRPr lang="en-US" dirty="0"/>
           </a:p>
@@ -1323,7 +1323,7 @@
           <a:p>
             <a:r>
               <a:rPr lang="en-US" dirty="0"/>
-              <a:t>Pairs, devices out inside two minutes, announce the tool. LOCAL EXAMPLE slot: show one of the authors’ real rubrics from the script (Adam’s shop rubric or Katelyn’s K-8 writing rubric).</a:t>
+              <a:t>Pairs, devices out inside two minutes, announce the tool. If you grade with a rubric of your own, show it here; one real rubric from a real room tells the lab what "done" looks like.</a:t>
             </a:r>
             <a:endParaRPr lang="en-US" dirty="0"/>
           </a:p>
@@ -1499,7 +1499,7 @@
           <a:p>
             <a:r>
               <a:rPr lang="en-US" dirty="0"/>
-              <a:t>FOUNDER STORY slot lands here; read it from the script: the grading night you still remember, what the stack was, and what it cost. Sixty seconds, told plainly.</a:t>
+              <a:t>If you have your own grading-night story, sixty seconds on it lands here: what the stack was, how long it took, what it cost.</a:t>
             </a:r>
             <a:endParaRPr lang="en-US" dirty="0"/>
           </a:p>

--- a/kits/kit04/Kit04_PresentationDeck.pptx
+++ b/kits/kit04/Kit04_PresentationDeck.pptx
@@ -13848,8 +13848,8 @@
         </p:nvSpPr>
         <p:spPr>
           <a:xfrm>
-            <a:off x="640080" y="1920240"/>
-            <a:ext cx="5257800" cy="1097280"/>
+            <a:off x="640080" y="1783080"/>
+            <a:ext cx="5257800" cy="320040"/>
           </a:xfrm>
           <a:prstGeom prst="rect">
             <a:avLst/>
@@ -13865,7 +13865,7 @@
               <a:buNone/>
             </a:pPr>
             <a:r>
-              <a:rPr lang="en-US" sz="5800" b="1" dirty="0">
+              <a:rPr lang="en-US" sz="1300" b="1" spc="200" kern="0" dirty="0">
                 <a:solidFill>
                   <a:srgbClr val="2A9D8F"/>
                 </a:solidFill>
@@ -13873,22 +13873,61 @@
                 <a:ea typeface="Inter" pitchFamily="34" charset="-122"/>
                 <a:cs typeface="Inter" pitchFamily="34" charset="-120"/>
               </a:rPr>
+              <a:t>THE POWER OF FEEDBACK</a:t>
+            </a:r>
+            <a:endParaRPr lang="en-US" sz="1300" dirty="0"/>
+          </a:p>
+        </p:txBody>
+      </p:sp>
+      <p:sp>
+        <p:nvSpPr>
+          <p:cNvPr id="9" name="Text 6"/>
+          <p:cNvSpPr/>
+          <p:nvPr/>
+        </p:nvSpPr>
+        <p:spPr>
+          <a:xfrm>
+            <a:off x="640080" y="2103120"/>
+            <a:ext cx="5257800" cy="960120"/>
+          </a:xfrm>
+          <a:prstGeom prst="rect">
+            <a:avLst/>
+          </a:prstGeom>
+          <a:noFill/>
+          <a:ln/>
+        </p:spPr>
+        <p:txBody>
+          <a:bodyPr wrap="square" lIns="0" tIns="0" rIns="0" bIns="0" rtlCol="0" anchor="ctr"/>
+          <a:lstStyle/>
+          <a:p>
+            <a:pPr algn="ctr" indent="0" marL="0">
+              <a:buNone/>
+            </a:pPr>
+            <a:r>
+              <a:rPr lang="en-US" sz="5200" b="1" dirty="0">
+                <a:solidFill>
+                  <a:srgbClr val="2A9D8F"/>
+                </a:solidFill>
+                <a:latin typeface="Inter" pitchFamily="34" charset="0"/>
+                <a:ea typeface="Inter" pitchFamily="34" charset="-122"/>
+                <a:cs typeface="Inter" pitchFamily="34" charset="-120"/>
+              </a:rPr>
               <a:t>0.79</a:t>
             </a:r>
-            <a:endParaRPr lang="en-US" sz="5800" dirty="0"/>
-          </a:p>
-        </p:txBody>
-      </p:sp>
-      <p:sp>
-        <p:nvSpPr>
-          <p:cNvPr id="9" name="Text 6"/>
+            <a:endParaRPr lang="en-US" sz="5200" dirty="0"/>
+          </a:p>
+        </p:txBody>
+      </p:sp>
+      <p:sp>
+        <p:nvSpPr>
+          <p:cNvPr id="10" name="Text 7"/>
           <p:cNvSpPr/>
           <p:nvPr/>
         </p:nvSpPr>
         <p:spPr>
           <a:xfrm>
             <a:off x="914400" y="3108960"/>
-            <a:ext cx="4709160" cy="1645920"/>
+            <a:ext cx="4709160" cy="1737360"/>
           </a:xfrm>
           <a:prstGeom prst="rect">
             <a:avLst/>
@@ -13904,7 +13943,7 @@
               <a:buNone/>
             </a:pPr>
             <a:r>
-              <a:rPr lang="en-US" sz="1550" dirty="0">
+              <a:rPr lang="en-US" sz="1600" dirty="0">
                 <a:solidFill>
                   <a:srgbClr val="1B1F24"/>
                 </a:solidFill>
@@ -13912,49 +13951,15 @@
                 <a:ea typeface="Inter" pitchFamily="34" charset="-122"/>
                 <a:cs typeface="Inter" pitchFamily="34" charset="-120"/>
               </a:rPr>
-              <a:t>average effect size of feedback,</a:t>
-            </a:r>
-            <a:endParaRPr lang="en-US" sz="1550" dirty="0"/>
-          </a:p>
-          <a:p>
-            <a:pPr algn="ctr" indent="0" marL="0">
-              <a:buNone/>
-            </a:pPr>
-            <a:r>
-              <a:rPr lang="en-US" sz="1550" dirty="0">
-                <a:solidFill>
-                  <a:srgbClr val="1B1F24"/>
-                </a:solidFill>
-                <a:latin typeface="Inter" pitchFamily="34" charset="0"/>
-                <a:ea typeface="Inter" pitchFamily="34" charset="-122"/>
-                <a:cs typeface="Inter" pitchFamily="34" charset="-120"/>
-              </a:rPr>
-              <a:t>among the most powerful influences</a:t>
-            </a:r>
-            <a:endParaRPr lang="en-US" sz="1550" dirty="0"/>
-          </a:p>
-          <a:p>
-            <a:pPr algn="ctr" indent="0" marL="0">
-              <a:buNone/>
-            </a:pPr>
-            <a:r>
-              <a:rPr lang="en-US" sz="1550" dirty="0">
-                <a:solidFill>
-                  <a:srgbClr val="1B1F24"/>
-                </a:solidFill>
-                <a:latin typeface="Inter" pitchFamily="34" charset="0"/>
-                <a:ea typeface="Inter" pitchFamily="34" charset="-122"/>
-                <a:cs typeface="Inter" pitchFamily="34" charset="-120"/>
-              </a:rPr>
-              <a:t>on achievement (Hattie &amp; Timperley)</a:t>
-            </a:r>
-            <a:endParaRPr lang="en-US" sz="1550" dirty="0"/>
-          </a:p>
-        </p:txBody>
-      </p:sp>
-      <p:sp>
-        <p:nvSpPr>
-          <p:cNvPr id="10" name="Shape 7"/>
+              <a:t>Feedback’s average “effect size” on student achievement: roughly double the impact of the typical educational intervention. (Hattie &amp; Timperley, 2007)</a:t>
+            </a:r>
+            <a:endParaRPr lang="en-US" sz="1600" dirty="0"/>
+          </a:p>
+        </p:txBody>
+      </p:sp>
+      <p:sp>
+        <p:nvSpPr>
+          <p:cNvPr id="11" name="Shape 8"/>
           <p:cNvSpPr/>
           <p:nvPr/>
         </p:nvSpPr>
@@ -13981,14 +13986,14 @@
       </p:sp>
       <p:sp>
         <p:nvSpPr>
-          <p:cNvPr id="11" name="Text 8"/>
-          <p:cNvSpPr/>
-          <p:nvPr/>
-        </p:nvSpPr>
-        <p:spPr>
-          <a:xfrm>
-            <a:off x="6263640" y="1920240"/>
-            <a:ext cx="5257800" cy="1097280"/>
+          <p:cNvPr id="12" name="Text 9"/>
+          <p:cNvSpPr/>
+          <p:nvPr/>
+        </p:nvSpPr>
+        <p:spPr>
+          <a:xfrm>
+            <a:off x="6263640" y="1783080"/>
+            <a:ext cx="5257800" cy="320040"/>
           </a:xfrm>
           <a:prstGeom prst="rect">
             <a:avLst/>
@@ -14004,7 +14009,7 @@
               <a:buNone/>
             </a:pPr>
             <a:r>
-              <a:rPr lang="en-US" sz="5800" b="1" dirty="0">
+              <a:rPr lang="en-US" sz="1300" b="1" spc="200" kern="0" dirty="0">
                 <a:solidFill>
                   <a:srgbClr val="5B6B7A"/>
                 </a:solidFill>
@@ -14012,22 +14017,61 @@
                 <a:ea typeface="Inter" pitchFamily="34" charset="-122"/>
                 <a:cs typeface="Inter" pitchFamily="34" charset="-120"/>
               </a:rPr>
+              <a:t>HOW MANY TEACHERS TAP IT WITH AI</a:t>
+            </a:r>
+            <a:endParaRPr lang="en-US" sz="1300" dirty="0"/>
+          </a:p>
+        </p:txBody>
+      </p:sp>
+      <p:sp>
+        <p:nvSpPr>
+          <p:cNvPr id="13" name="Text 10"/>
+          <p:cNvSpPr/>
+          <p:nvPr/>
+        </p:nvSpPr>
+        <p:spPr>
+          <a:xfrm>
+            <a:off x="6263640" y="2103120"/>
+            <a:ext cx="5257800" cy="960120"/>
+          </a:xfrm>
+          <a:prstGeom prst="rect">
+            <a:avLst/>
+          </a:prstGeom>
+          <a:noFill/>
+          <a:ln/>
+        </p:spPr>
+        <p:txBody>
+          <a:bodyPr wrap="square" lIns="0" tIns="0" rIns="0" bIns="0" rtlCol="0" anchor="ctr"/>
+          <a:lstStyle/>
+          <a:p>
+            <a:pPr algn="ctr" indent="0" marL="0">
+              <a:buNone/>
+            </a:pPr>
+            <a:r>
+              <a:rPr lang="en-US" sz="5200" b="1" dirty="0">
+                <a:solidFill>
+                  <a:srgbClr val="5B6B7A"/>
+                </a:solidFill>
+                <a:latin typeface="Inter" pitchFamily="34" charset="0"/>
+                <a:ea typeface="Inter" pitchFamily="34" charset="-122"/>
+                <a:cs typeface="Inter" pitchFamily="34" charset="-120"/>
+              </a:rPr>
               <a:t>≤15%</a:t>
             </a:r>
-            <a:endParaRPr lang="en-US" sz="5800" dirty="0"/>
-          </a:p>
-        </p:txBody>
-      </p:sp>
-      <p:sp>
-        <p:nvSpPr>
-          <p:cNvPr id="12" name="Text 9"/>
+            <a:endParaRPr lang="en-US" sz="5200" dirty="0"/>
+          </a:p>
+        </p:txBody>
+      </p:sp>
+      <p:sp>
+        <p:nvSpPr>
+          <p:cNvPr id="14" name="Text 11"/>
           <p:cNvSpPr/>
           <p:nvPr/>
         </p:nvSpPr>
         <p:spPr>
           <a:xfrm>
             <a:off x="6537960" y="3108960"/>
-            <a:ext cx="4709160" cy="1645920"/>
+            <a:ext cx="4709160" cy="1737360"/>
           </a:xfrm>
           <a:prstGeom prst="rect">
             <a:avLst/>
@@ -14043,7 +14087,7 @@
               <a:buNone/>
             </a:pPr>
             <a:r>
-              <a:rPr lang="en-US" sz="1550" dirty="0">
+              <a:rPr lang="en-US" sz="1600" dirty="0">
                 <a:solidFill>
                   <a:srgbClr val="1B1F24"/>
                 </a:solidFill>
@@ -14051,49 +14095,15 @@
                 <a:ea typeface="Inter" pitchFamily="34" charset="-122"/>
                 <a:cs typeface="Inter" pitchFamily="34" charset="-120"/>
               </a:rPr>
-              <a:t>of AI-using teachers used AI</a:t>
-            </a:r>
-            <a:endParaRPr lang="en-US" sz="1550" dirty="0"/>
-          </a:p>
-          <a:p>
-            <a:pPr algn="ctr" indent="0" marL="0">
-              <a:buNone/>
-            </a:pPr>
-            <a:r>
-              <a:rPr lang="en-US" sz="1550" dirty="0">
-                <a:solidFill>
-                  <a:srgbClr val="1B1F24"/>
-                </a:solidFill>
-                <a:latin typeface="Inter" pitchFamily="34" charset="0"/>
-                <a:ea typeface="Inter" pitchFamily="34" charset="-122"/>
-                <a:cs typeface="Inter" pitchFamily="34" charset="-120"/>
-              </a:rPr>
-              <a:t>for writing assessments in 2023–24</a:t>
-            </a:r>
-            <a:endParaRPr lang="en-US" sz="1550" dirty="0"/>
-          </a:p>
-          <a:p>
-            <a:pPr algn="ctr" indent="0" marL="0">
-              <a:buNone/>
-            </a:pPr>
-            <a:r>
-              <a:rPr lang="en-US" sz="1550" dirty="0">
-                <a:solidFill>
-                  <a:srgbClr val="1B1F24"/>
-                </a:solidFill>
-                <a:latin typeface="Inter" pitchFamily="34" charset="0"/>
-                <a:ea typeface="Inter" pitchFamily="34" charset="-122"/>
-                <a:cs typeface="Inter" pitchFamily="34" charset="-120"/>
-              </a:rPr>
-              <a:t>(RAND, 2025)</a:t>
-            </a:r>
-            <a:endParaRPr lang="en-US" sz="1550" dirty="0"/>
-          </a:p>
-        </p:txBody>
-      </p:sp>
-      <p:sp>
-        <p:nvSpPr>
-          <p:cNvPr id="13" name="Text 10"/>
+              <a:t>Of teachers who already used AI in 2023–24, 15% or fewer used it for writing assessments: the least-tapped use, sitting under the highest-leverage work. (RAND, 2025)</a:t>
+            </a:r>
+            <a:endParaRPr lang="en-US" sz="1600" dirty="0"/>
+          </a:p>
+        </p:txBody>
+      </p:sp>
+      <p:sp>
+        <p:nvSpPr>
+          <p:cNvPr id="15" name="Text 12"/>
           <p:cNvSpPr/>
           <p:nvPr/>
         </p:nvSpPr>

--- a/kits/kit04/Kit04_PresentationDeck.pptx
+++ b/kits/kit04/Kit04_PresentationDeck.pptx
@@ -4736,8 +4736,8 @@
         </p:nvSpPr>
         <p:spPr>
           <a:xfrm>
-            <a:off x="640080" y="1874520"/>
-            <a:ext cx="5257800" cy="1005840"/>
+            <a:off x="640080" y="1737360"/>
+            <a:ext cx="5257800" cy="292608"/>
           </a:xfrm>
           <a:prstGeom prst="rect">
             <a:avLst/>
@@ -4753,7 +4753,7 @@
               <a:buNone/>
             </a:pPr>
             <a:r>
-              <a:rPr lang="en-US" sz="5400" b="1" dirty="0">
+              <a:rPr lang="en-US" sz="1300" b="1" spc="200" kern="0" dirty="0">
                 <a:solidFill>
                   <a:srgbClr val="2A9D8F"/>
                 </a:solidFill>
@@ -4761,22 +4761,61 @@
                 <a:ea typeface="Inter" pitchFamily="34" charset="-122"/>
                 <a:cs typeface="Inter" pitchFamily="34" charset="-120"/>
               </a:rPr>
+              <a:t>HOW OFTEN DRAFTS ARE ON-TOPIC</a:t>
+            </a:r>
+            <a:endParaRPr lang="en-US" sz="1300" dirty="0"/>
+          </a:p>
+        </p:txBody>
+      </p:sp>
+      <p:sp>
+        <p:nvSpPr>
+          <p:cNvPr id="9" name="Text 6"/>
+          <p:cNvSpPr/>
+          <p:nvPr/>
+        </p:nvSpPr>
+        <p:spPr>
+          <a:xfrm>
+            <a:off x="640080" y="2029968"/>
+            <a:ext cx="5257800" cy="868680"/>
+          </a:xfrm>
+          <a:prstGeom prst="rect">
+            <a:avLst/>
+          </a:prstGeom>
+          <a:noFill/>
+          <a:ln/>
+        </p:spPr>
+        <p:txBody>
+          <a:bodyPr wrap="square" lIns="0" tIns="0" rIns="0" bIns="0" rtlCol="0" anchor="ctr"/>
+          <a:lstStyle/>
+          <a:p>
+            <a:pPr algn="ctr" indent="0" marL="0">
+              <a:buNone/>
+            </a:pPr>
+            <a:r>
+              <a:rPr lang="en-US" sz="4800" b="1" dirty="0">
+                <a:solidFill>
+                  <a:srgbClr val="2A9D8F"/>
+                </a:solidFill>
+                <a:latin typeface="Inter" pitchFamily="34" charset="0"/>
+                <a:ea typeface="Inter" pitchFamily="34" charset="-122"/>
+                <a:cs typeface="Inter" pitchFamily="34" charset="-120"/>
+              </a:rPr>
               <a:t>97%</a:t>
             </a:r>
-            <a:endParaRPr lang="en-US" sz="5400" dirty="0"/>
-          </a:p>
-        </p:txBody>
-      </p:sp>
-      <p:sp>
-        <p:nvSpPr>
-          <p:cNvPr id="9" name="Text 6"/>
-          <p:cNvSpPr/>
-          <p:nvPr/>
-        </p:nvSpPr>
-        <p:spPr>
-          <a:xfrm>
-            <a:off x="914400" y="2926080"/>
-            <a:ext cx="4709160" cy="1371600"/>
+            <a:endParaRPr lang="en-US" sz="4800" dirty="0"/>
+          </a:p>
+        </p:txBody>
+      </p:sp>
+      <p:sp>
+        <p:nvSpPr>
+          <p:cNvPr id="10" name="Text 7"/>
+          <p:cNvSpPr/>
+          <p:nvPr/>
+        </p:nvSpPr>
+        <p:spPr>
+          <a:xfrm>
+            <a:off x="914400" y="2971800"/>
+            <a:ext cx="4709160" cy="1463040"/>
           </a:xfrm>
           <a:prstGeom prst="rect">
             <a:avLst/>
@@ -4792,7 +4831,7 @@
               <a:buNone/>
             </a:pPr>
             <a:r>
-              <a:rPr lang="en-US" sz="1550" dirty="0">
+              <a:rPr lang="en-US" sz="1600" dirty="0">
                 <a:solidFill>
                   <a:srgbClr val="1B1F24"/>
                 </a:solidFill>
@@ -4800,49 +4839,15 @@
                 <a:ea typeface="Inter" pitchFamily="34" charset="-122"/>
                 <a:cs typeface="Inter" pitchFamily="34" charset="-120"/>
               </a:rPr>
-              <a:t>of LLM-drafted questions rated</a:t>
-            </a:r>
-            <a:endParaRPr lang="en-US" sz="1550" dirty="0"/>
-          </a:p>
-          <a:p>
-            <a:pPr algn="ctr" indent="0" marL="0">
-              <a:buNone/>
-            </a:pPr>
-            <a:r>
-              <a:rPr lang="en-US" sz="1550" dirty="0">
-                <a:solidFill>
-                  <a:srgbClr val="1B1F24"/>
-                </a:solidFill>
-                <a:latin typeface="Inter" pitchFamily="34" charset="0"/>
-                <a:ea typeface="Inter" pitchFamily="34" charset="-122"/>
-                <a:cs typeface="Inter" pitchFamily="34" charset="-120"/>
-              </a:rPr>
-              <a:t>topic-relevant by teachers</a:t>
-            </a:r>
-            <a:endParaRPr lang="en-US" sz="1550" dirty="0"/>
-          </a:p>
-          <a:p>
-            <a:pPr algn="ctr" indent="0" marL="0">
-              <a:buNone/>
-            </a:pPr>
-            <a:r>
-              <a:rPr lang="en-US" sz="1550" dirty="0">
-                <a:solidFill>
-                  <a:srgbClr val="1B1F24"/>
-                </a:solidFill>
-                <a:latin typeface="Inter" pitchFamily="34" charset="0"/>
-                <a:ea typeface="Inter" pitchFamily="34" charset="-122"/>
-                <a:cs typeface="Inter" pitchFamily="34" charset="-120"/>
-              </a:rPr>
-              <a:t>(Elkins et al., 2023)</a:t>
-            </a:r>
-            <a:endParaRPr lang="en-US" sz="1550" dirty="0"/>
-          </a:p>
-        </p:txBody>
-      </p:sp>
-      <p:sp>
-        <p:nvSpPr>
-          <p:cNvPr id="10" name="Shape 7"/>
+              <a:t>When teachers rated quiz questions drafted by AI, 97 in 100 were judged relevant to the topic they asked for. (Elkins et al., 2023)</a:t>
+            </a:r>
+            <a:endParaRPr lang="en-US" sz="1600" dirty="0"/>
+          </a:p>
+        </p:txBody>
+      </p:sp>
+      <p:sp>
+        <p:nvSpPr>
+          <p:cNvPr id="11" name="Shape 8"/>
           <p:cNvSpPr/>
           <p:nvPr/>
         </p:nvSpPr>
@@ -4869,14 +4874,14 @@
       </p:sp>
       <p:sp>
         <p:nvSpPr>
-          <p:cNvPr id="11" name="Text 8"/>
-          <p:cNvSpPr/>
-          <p:nvPr/>
-        </p:nvSpPr>
-        <p:spPr>
-          <a:xfrm>
-            <a:off x="6263640" y="1874520"/>
-            <a:ext cx="5257800" cy="1005840"/>
+          <p:cNvPr id="12" name="Text 9"/>
+          <p:cNvSpPr/>
+          <p:nvPr/>
+        </p:nvSpPr>
+        <p:spPr>
+          <a:xfrm>
+            <a:off x="6263640" y="1737360"/>
+            <a:ext cx="5257800" cy="292608"/>
           </a:xfrm>
           <a:prstGeom prst="rect">
             <a:avLst/>
@@ -4892,7 +4897,7 @@
               <a:buNone/>
             </a:pPr>
             <a:r>
-              <a:rPr lang="en-US" sz="5400" b="1" dirty="0">
+              <a:rPr lang="en-US" sz="1300" b="1" spc="200" kern="0" dirty="0">
                 <a:solidFill>
                   <a:srgbClr val="2A9D8F"/>
                 </a:solidFill>
@@ -4900,22 +4905,61 @@
                 <a:ea typeface="Inter" pitchFamily="34" charset="-122"/>
                 <a:cs typeface="Inter" pitchFamily="34" charset="-120"/>
               </a:rPr>
+              <a:t>HOW USEFUL TEACHERS FOUND THEM</a:t>
+            </a:r>
+            <a:endParaRPr lang="en-US" sz="1300" dirty="0"/>
+          </a:p>
+        </p:txBody>
+      </p:sp>
+      <p:sp>
+        <p:nvSpPr>
+          <p:cNvPr id="13" name="Text 10"/>
+          <p:cNvSpPr/>
+          <p:nvPr/>
+        </p:nvSpPr>
+        <p:spPr>
+          <a:xfrm>
+            <a:off x="6263640" y="2029968"/>
+            <a:ext cx="5257800" cy="868680"/>
+          </a:xfrm>
+          <a:prstGeom prst="rect">
+            <a:avLst/>
+          </a:prstGeom>
+          <a:noFill/>
+          <a:ln/>
+        </p:spPr>
+        <p:txBody>
+          <a:bodyPr wrap="square" lIns="0" tIns="0" rIns="0" bIns="0" rtlCol="0" anchor="ctr"/>
+          <a:lstStyle/>
+          <a:p>
+            <a:pPr algn="ctr" indent="0" marL="0">
+              <a:buNone/>
+            </a:pPr>
+            <a:r>
+              <a:rPr lang="en-US" sz="4800" b="1" dirty="0">
+                <a:solidFill>
+                  <a:srgbClr val="2A9D8F"/>
+                </a:solidFill>
+                <a:latin typeface="Inter" pitchFamily="34" charset="0"/>
+                <a:ea typeface="Inter" pitchFamily="34" charset="-122"/>
+                <a:cs typeface="Inter" pitchFamily="34" charset="-120"/>
+              </a:rPr>
               <a:t>3.6 / 4</a:t>
             </a:r>
-            <a:endParaRPr lang="en-US" sz="5400" dirty="0"/>
-          </a:p>
-        </p:txBody>
-      </p:sp>
-      <p:sp>
-        <p:nvSpPr>
-          <p:cNvPr id="12" name="Text 9"/>
-          <p:cNvSpPr/>
-          <p:nvPr/>
-        </p:nvSpPr>
-        <p:spPr>
-          <a:xfrm>
-            <a:off x="6537960" y="2926080"/>
-            <a:ext cx="4709160" cy="1371600"/>
+            <a:endParaRPr lang="en-US" sz="4800" dirty="0"/>
+          </a:p>
+        </p:txBody>
+      </p:sp>
+      <p:sp>
+        <p:nvSpPr>
+          <p:cNvPr id="14" name="Text 11"/>
+          <p:cNvSpPr/>
+          <p:nvPr/>
+        </p:nvSpPr>
+        <p:spPr>
+          <a:xfrm>
+            <a:off x="6537960" y="2971800"/>
+            <a:ext cx="4709160" cy="1463040"/>
           </a:xfrm>
           <a:prstGeom prst="rect">
             <a:avLst/>
@@ -4931,7 +4975,7 @@
               <a:buNone/>
             </a:pPr>
             <a:r>
-              <a:rPr lang="en-US" sz="1550" dirty="0">
+              <a:rPr lang="en-US" sz="1600" dirty="0">
                 <a:solidFill>
                   <a:srgbClr val="1B1F24"/>
                 </a:solidFill>
@@ -4939,49 +4983,15 @@
                 <a:ea typeface="Inter" pitchFamily="34" charset="-122"/>
                 <a:cs typeface="Inter" pitchFamily="34" charset="-120"/>
               </a:rPr>
-              <a:t>average usefulness rating,</a:t>
-            </a:r>
-            <a:endParaRPr lang="en-US" sz="1550" dirty="0"/>
-          </a:p>
-          <a:p>
-            <a:pPr algn="ctr" indent="0" marL="0">
-              <a:buNone/>
-            </a:pPr>
-            <a:r>
-              <a:rPr lang="en-US" sz="1550" dirty="0">
-                <a:solidFill>
-                  <a:srgbClr val="1B1F24"/>
-                </a:solidFill>
-                <a:latin typeface="Inter" pitchFamily="34" charset="0"/>
-                <a:ea typeface="Inter" pitchFamily="34" charset="-122"/>
-                <a:cs typeface="Inter" pitchFamily="34" charset="-120"/>
-              </a:rPr>
-              <a:t>with teacher vetting integral</a:t>
-            </a:r>
-            <a:endParaRPr lang="en-US" sz="1550" dirty="0"/>
-          </a:p>
-          <a:p>
-            <a:pPr algn="ctr" indent="0" marL="0">
-              <a:buNone/>
-            </a:pPr>
-            <a:r>
-              <a:rPr lang="en-US" sz="1550" dirty="0">
-                <a:solidFill>
-                  <a:srgbClr val="1B1F24"/>
-                </a:solidFill>
-                <a:latin typeface="Inter" pitchFamily="34" charset="0"/>
-                <a:ea typeface="Inter" pitchFamily="34" charset="-122"/>
-                <a:cs typeface="Inter" pitchFamily="34" charset="-120"/>
-              </a:rPr>
-              <a:t>(same study)</a:t>
-            </a:r>
-            <a:endParaRPr lang="en-US" sz="1550" dirty="0"/>
-          </a:p>
-        </p:txBody>
-      </p:sp>
-      <p:sp>
-        <p:nvSpPr>
-          <p:cNvPr id="13" name="Text 10"/>
+              <a:t>The same teachers scored the questions’ usefulness 3.6 out of 4, and the study treats teacher vetting as integral, not optional. (same study)</a:t>
+            </a:r>
+            <a:endParaRPr lang="en-US" sz="1600" dirty="0"/>
+          </a:p>
+        </p:txBody>
+      </p:sp>
+      <p:sp>
+        <p:nvSpPr>
+          <p:cNvPr id="15" name="Text 12"/>
           <p:cNvSpPr/>
           <p:nvPr/>
         </p:nvSpPr>

--- a/kits/kit04/Kit04_PresentationDeck.pptx
+++ b/kits/kit04/Kit04_PresentationDeck.pptx
@@ -8056,7 +8056,7 @@
                 <a:ea typeface="Inter" pitchFamily="34" charset="-122"/>
                 <a:cs typeface="Inter" pitchFamily="34" charset="-120"/>
               </a:rPr>
-              <a:t>At least one weak question dies by your hand before the lab ends</a:t>
+              <a:t>You catch and cut at least one weak question before the lab ends</a:t>
             </a:r>
             <a:endParaRPr lang="en-US" sz="2000" dirty="0"/>
           </a:p>
@@ -11014,7 +11014,7 @@
                 <a:ea typeface="Inter" pitchFamily="34" charset="-122"/>
                 <a:cs typeface="Inter" pitchFamily="34" charset="-120"/>
               </a:rPr>
-              <a:t>A four-level rubric a student can read. A vetted question bank with a checked answer key. Three feedback starters for the comments you write most. One dead weak question as proof the reflex works.
+              <a:t>A four-level rubric a student can read. A vetted question bank with a checked answer key. Three feedback starters for the comments you write most. One weak question caught and cut as proof the reflex works.
 </a:t>
             </a:r>
             <a:pPr indent="0" marL="0">

--- a/kits/kit04/Kit04_PresentationDeck.pptx
+++ b/kits/kit04/Kit04_PresentationDeck.pptx
@@ -2643,7 +2643,7 @@
           <a:p>
             <a:r>
               <a:rPr lang="en-US" dirty="0"/>
-              <a:t>Keep this quick. The promise line matters: real materials for a real assessment, built today.</a:t>
+              <a:t>Say: five stops this hour: what makes assessment materials work, three prompt workshops (rubrics, question banks, feedback starters), the red lines in writing, a lab where you build for an assessment already on your calendar, and how it sticks. The promise line matters: real materials for a real assessment, built today. Keep this quick.</a:t>
             </a:r>
             <a:endParaRPr lang="en-US" dirty="0"/>
           </a:p>

--- a/kits/kit04/Kit04_PresentationDeck.pptx
+++ b/kits/kit04/Kit04_PresentationDeck.pptx
@@ -3083,7 +3083,7 @@
           <a:p>
             <a:r>
               <a:rPr lang="en-US" dirty="0"/>
-              <a:t>Your messy grading notes are the context; that is Kit 2’s formula doing assessment work. The "ask me up to three questions" line is the escape hatch from Kit 2’s spice rack.</a:t>
+              <a:t>Say: workshop one, on Ms. Rivera's screen, our running composite example. Her messy grading notes are the context; that is Kit 2's formula doing assessment work: role teal, task navy, context amber, format green. The "ask me up to three questions" line is the escape hatch from Kit 2's spice rack. In the lab you'll mimic this shape with your own notes.</a:t>
             </a:r>
             <a:endParaRPr lang="en-US" dirty="0"/>
           </a:p>
@@ -16987,7 +16987,7 @@
                 <a:ea typeface="Inter" pitchFamily="34" charset="-122"/>
                 <a:cs typeface="Inter" pitchFamily="34" charset="-120"/>
               </a:rPr>
-              <a:t>WORKSHOP #1 · RUBRICS</a:t>
+              <a:t>WORKSHOP #1 · RUBRICS · ON MS. RIVERA'S SCREEN</a:t>
             </a:r>
             <a:endParaRPr lang="en-US" sz="1200" dirty="0"/>
           </a:p>
@@ -17034,26 +17034,106 @@
       </p:sp>
       <p:sp>
         <p:nvSpPr>
-          <p:cNvPr id="7" name="Shape 4"/>
-          <p:cNvSpPr/>
-          <p:nvPr/>
-        </p:nvSpPr>
-        <p:spPr>
-          <a:xfrm>
-            <a:off x="640080" y="1417320"/>
-            <a:ext cx="10972800" cy="1371600"/>
+          <p:cNvPr id="7" name="Text 4"/>
+          <p:cNvSpPr/>
+          <p:nvPr/>
+        </p:nvSpPr>
+        <p:spPr>
+          <a:xfrm>
+            <a:off x="640080" y="1298448"/>
+            <a:ext cx="10972800" cy="365760"/>
+          </a:xfrm>
+          <a:prstGeom prst="rect">
+            <a:avLst/>
+          </a:prstGeom>
+          <a:noFill/>
+          <a:ln/>
+        </p:spPr>
+        <p:txBody>
+          <a:bodyPr wrap="square" lIns="0" tIns="0" rIns="0" bIns="0" rtlCol="0" anchor="ctr"/>
+          <a:lstStyle/>
+          <a:p>
+            <a:pPr indent="0" marL="0">
+              <a:buNone/>
+            </a:pPr>
+            <a:r>
+              <a:rPr lang="en-US" sz="1600" b="1" dirty="0">
+                <a:solidFill>
+                  <a:srgbClr val="B4453A"/>
+                </a:solidFill>
+                <a:latin typeface="Inter" pitchFamily="34" charset="0"/>
+                <a:ea typeface="Inter" pitchFamily="34" charset="-122"/>
+                <a:cs typeface="Inter" pitchFamily="34" charset="-120"/>
+              </a:rPr>
+              <a:t>BEFORE   </a:t>
+            </a:r>
+            <a:pPr indent="0" marL="0">
+              <a:buNone/>
+            </a:pPr>
+            <a:r>
+              <a:rPr lang="en-US" sz="1600" i="1" dirty="0">
+                <a:solidFill>
+                  <a:srgbClr val="5B6B7A"/>
+                </a:solidFill>
+                <a:latin typeface="Inter" pitchFamily="34" charset="0"/>
+                <a:ea typeface="Inter" pitchFamily="34" charset="-122"/>
+                <a:cs typeface="Inter" pitchFamily="34" charset="-120"/>
+              </a:rPr>
+              <a:t>“Make a rubric for my essay assignment.”</a:t>
+            </a:r>
+            <a:endParaRPr lang="en-US" sz="1600" dirty="0"/>
+          </a:p>
+        </p:txBody>
+      </p:sp>
+      <p:sp>
+        <p:nvSpPr>
+          <p:cNvPr id="8" name="Shape 5"/>
+          <p:cNvSpPr/>
+          <p:nvPr/>
+        </p:nvSpPr>
+        <p:spPr>
+          <a:xfrm>
+            <a:off x="640080" y="1783080"/>
+            <a:ext cx="10972800" cy="3520440"/>
           </a:xfrm>
           <a:prstGeom prst="roundRect">
             <a:avLst>
-              <a:gd name="adj" fmla="val 6000"/>
+              <a:gd name="adj" fmla="val 2597"/>
             </a:avLst>
           </a:prstGeom>
           <a:solidFill>
-            <a:srgbClr val="FBEFED"/>
+            <a:srgbClr val="FFFFFF"/>
+          </a:solidFill>
+          <a:ln w="19050">
+            <a:solidFill>
+              <a:srgbClr val="DCE3EA"/>
+            </a:solidFill>
+            <a:prstDash val="solid"/>
+          </a:ln>
+        </p:spPr>
+      </p:sp>
+      <p:sp>
+        <p:nvSpPr>
+          <p:cNvPr id="9" name="Shape 6"/>
+          <p:cNvSpPr/>
+          <p:nvPr/>
+        </p:nvSpPr>
+        <p:spPr>
+          <a:xfrm>
+            <a:off x="640080" y="1783080"/>
+            <a:ext cx="10972800" cy="384048"/>
+          </a:xfrm>
+          <a:prstGeom prst="roundRect">
+            <a:avLst>
+              <a:gd name="adj" fmla="val 23810"/>
+            </a:avLst>
+          </a:prstGeom>
+          <a:solidFill>
+            <a:srgbClr val="13293D"/>
           </a:solidFill>
           <a:ln w="12700">
             <a:solidFill>
-              <a:srgbClr val="FBEFED"/>
+              <a:srgbClr val="13293D"/>
             </a:solidFill>
             <a:prstDash val="solid"/>
           </a:ln>
@@ -17061,104 +17141,24 @@
       </p:sp>
       <p:sp>
         <p:nvSpPr>
-          <p:cNvPr id="8" name="Text 5"/>
-          <p:cNvSpPr/>
-          <p:nvPr/>
-        </p:nvSpPr>
-        <p:spPr>
-          <a:xfrm>
-            <a:off x="914400" y="1554480"/>
-            <a:ext cx="1828800" cy="320040"/>
-          </a:xfrm>
-          <a:prstGeom prst="rect">
-            <a:avLst/>
-          </a:prstGeom>
-          <a:noFill/>
-          <a:ln/>
-        </p:spPr>
-        <p:txBody>
-          <a:bodyPr wrap="square" lIns="0" tIns="0" rIns="0" bIns="0" rtlCol="0" anchor="ctr"/>
-          <a:lstStyle/>
-          <a:p>
-            <a:pPr indent="0" marL="0">
-              <a:buNone/>
-            </a:pPr>
-            <a:r>
-              <a:rPr lang="en-US" sz="1400" b="1" dirty="0">
-                <a:solidFill>
-                  <a:srgbClr val="B4453A"/>
-                </a:solidFill>
-                <a:latin typeface="Inter" pitchFamily="34" charset="0"/>
-                <a:ea typeface="Inter" pitchFamily="34" charset="-122"/>
-                <a:cs typeface="Inter" pitchFamily="34" charset="-120"/>
-              </a:rPr>
-              <a:t>BEFORE</a:t>
-            </a:r>
-            <a:endParaRPr lang="en-US" sz="1400" dirty="0"/>
-          </a:p>
-        </p:txBody>
-      </p:sp>
-      <p:sp>
-        <p:nvSpPr>
-          <p:cNvPr id="9" name="Text 6"/>
-          <p:cNvSpPr/>
-          <p:nvPr/>
-        </p:nvSpPr>
-        <p:spPr>
-          <a:xfrm>
-            <a:off x="914400" y="1874520"/>
-            <a:ext cx="10424160" cy="822960"/>
-          </a:xfrm>
-          <a:prstGeom prst="rect">
-            <a:avLst/>
-          </a:prstGeom>
-          <a:noFill/>
-          <a:ln/>
-        </p:spPr>
-        <p:txBody>
-          <a:bodyPr wrap="square" lIns="0" tIns="0" rIns="0" bIns="0" rtlCol="0" anchor="ctr"/>
-          <a:lstStyle/>
-          <a:p>
-            <a:pPr indent="0" marL="0">
-              <a:buNone/>
-            </a:pPr>
-            <a:r>
-              <a:rPr lang="en-US" sz="1800" i="1" dirty="0">
-                <a:solidFill>
-                  <a:srgbClr val="1B1F24"/>
-                </a:solidFill>
-                <a:latin typeface="Inter" pitchFamily="34" charset="0"/>
-                <a:ea typeface="Inter" pitchFamily="34" charset="-122"/>
-                <a:cs typeface="Inter" pitchFamily="34" charset="-120"/>
-              </a:rPr>
-              <a:t>“Make a rubric for my essay assignment.”</a:t>
-            </a:r>
-            <a:endParaRPr lang="en-US" sz="1800" dirty="0"/>
-          </a:p>
-        </p:txBody>
-      </p:sp>
-      <p:sp>
-        <p:nvSpPr>
           <p:cNvPr id="10" name="Shape 7"/>
           <p:cNvSpPr/>
           <p:nvPr/>
         </p:nvSpPr>
         <p:spPr>
           <a:xfrm>
-            <a:off x="640080" y="3017520"/>
-            <a:ext cx="10972800" cy="2834640"/>
-          </a:xfrm>
-          <a:prstGeom prst="roundRect">
-            <a:avLst>
-              <a:gd name="adj" fmla="val 2903"/>
-            </a:avLst>
+            <a:off x="868680" y="1901952"/>
+            <a:ext cx="146304" cy="146304"/>
+          </a:xfrm>
+          <a:prstGeom prst="ellipse">
+            <a:avLst/>
           </a:prstGeom>
           <a:solidFill>
-            <a:srgbClr val="EAF5F3"/>
+            <a:srgbClr val="E8837A"/>
           </a:solidFill>
           <a:ln w="12700">
             <a:solidFill>
-              <a:srgbClr val="EAF5F3"/>
+              <a:srgbClr val="E8837A"/>
             </a:solidFill>
             <a:prstDash val="solid"/>
           </a:ln>
@@ -17166,30 +17166,200 @@
       </p:sp>
       <p:sp>
         <p:nvSpPr>
-          <p:cNvPr id="11" name="Text 8"/>
-          <p:cNvSpPr/>
-          <p:nvPr/>
-        </p:nvSpPr>
-        <p:spPr>
-          <a:xfrm>
-            <a:off x="914400" y="3154680"/>
-            <a:ext cx="1828800" cy="320040"/>
-          </a:xfrm>
-          <a:prstGeom prst="rect">
-            <a:avLst/>
-          </a:prstGeom>
-          <a:noFill/>
-          <a:ln/>
-        </p:spPr>
-        <p:txBody>
-          <a:bodyPr wrap="square" lIns="0" tIns="0" rIns="0" bIns="0" rtlCol="0" anchor="ctr"/>
-          <a:lstStyle/>
-          <a:p>
-            <a:pPr indent="0" marL="0">
-              <a:buNone/>
-            </a:pPr>
-            <a:r>
-              <a:rPr lang="en-US" sz="1400" b="1" dirty="0">
+          <p:cNvPr id="11" name="Shape 8"/>
+          <p:cNvSpPr/>
+          <p:nvPr/>
+        </p:nvSpPr>
+        <p:spPr>
+          <a:xfrm>
+            <a:off x="1115568" y="1901952"/>
+            <a:ext cx="146304" cy="146304"/>
+          </a:xfrm>
+          <a:prstGeom prst="ellipse">
+            <a:avLst/>
+          </a:prstGeom>
+          <a:solidFill>
+            <a:srgbClr val="F4A825"/>
+          </a:solidFill>
+          <a:ln w="12700">
+            <a:solidFill>
+              <a:srgbClr val="F4A825"/>
+            </a:solidFill>
+            <a:prstDash val="solid"/>
+          </a:ln>
+        </p:spPr>
+      </p:sp>
+      <p:sp>
+        <p:nvSpPr>
+          <p:cNvPr id="12" name="Shape 9"/>
+          <p:cNvSpPr/>
+          <p:nvPr/>
+        </p:nvSpPr>
+        <p:spPr>
+          <a:xfrm>
+            <a:off x="1362456" y="1901952"/>
+            <a:ext cx="146304" cy="146304"/>
+          </a:xfrm>
+          <a:prstGeom prst="ellipse">
+            <a:avLst/>
+          </a:prstGeom>
+          <a:solidFill>
+            <a:srgbClr val="2E7D5B"/>
+          </a:solidFill>
+          <a:ln w="12700">
+            <a:solidFill>
+              <a:srgbClr val="2E7D5B"/>
+            </a:solidFill>
+            <a:prstDash val="solid"/>
+          </a:ln>
+        </p:spPr>
+      </p:sp>
+      <p:sp>
+        <p:nvSpPr>
+          <p:cNvPr id="13" name="Text 10"/>
+          <p:cNvSpPr/>
+          <p:nvPr/>
+        </p:nvSpPr>
+        <p:spPr>
+          <a:xfrm>
+            <a:off x="1783080" y="1783080"/>
+            <a:ext cx="9692640" cy="384048"/>
+          </a:xfrm>
+          <a:prstGeom prst="rect">
+            <a:avLst/>
+          </a:prstGeom>
+          <a:noFill/>
+          <a:ln/>
+        </p:spPr>
+        <p:txBody>
+          <a:bodyPr wrap="square" lIns="0" tIns="0" rIns="0" bIns="0" rtlCol="0" anchor="ctr"/>
+          <a:lstStyle/>
+          <a:p>
+            <a:pPr indent="0" marL="0">
+              <a:buNone/>
+            </a:pPr>
+            <a:r>
+              <a:rPr lang="en-US" sz="1100" dirty="0">
+                <a:solidFill>
+                  <a:srgbClr val="9FB2C2"/>
+                </a:solidFill>
+                <a:latin typeface="Inter" pitchFamily="34" charset="0"/>
+                <a:ea typeface="Inter" pitchFamily="34" charset="-122"/>
+                <a:cs typeface="Inter" pitchFamily="34" charset="-120"/>
+              </a:rPr>
+              <a:t>AI chat tool (any of them) · Ms. Rivera, our running example teacher (a composite, not a real person)</a:t>
+            </a:r>
+            <a:endParaRPr lang="en-US" sz="1100" dirty="0"/>
+          </a:p>
+        </p:txBody>
+      </p:sp>
+      <p:sp>
+        <p:nvSpPr>
+          <p:cNvPr id="14" name="Shape 11"/>
+          <p:cNvSpPr/>
+          <p:nvPr/>
+        </p:nvSpPr>
+        <p:spPr>
+          <a:xfrm>
+            <a:off x="1554480" y="2377440"/>
+            <a:ext cx="9646920" cy="2697480"/>
+          </a:xfrm>
+          <a:prstGeom prst="roundRect">
+            <a:avLst>
+              <a:gd name="adj" fmla="val 4068"/>
+            </a:avLst>
+          </a:prstGeom>
+          <a:solidFill>
+            <a:srgbClr val="F7F5F0"/>
+          </a:solidFill>
+          <a:ln w="12700">
+            <a:solidFill>
+              <a:srgbClr val="F7F5F0"/>
+            </a:solidFill>
+            <a:prstDash val="solid"/>
+          </a:ln>
+        </p:spPr>
+      </p:sp>
+      <p:sp>
+        <p:nvSpPr>
+          <p:cNvPr id="15" name="Text 12"/>
+          <p:cNvSpPr/>
+          <p:nvPr/>
+        </p:nvSpPr>
+        <p:spPr>
+          <a:xfrm>
+            <a:off x="1783080" y="2487168"/>
+            <a:ext cx="9189720" cy="2514600"/>
+          </a:xfrm>
+          <a:prstGeom prst="rect">
+            <a:avLst/>
+          </a:prstGeom>
+          <a:noFill/>
+          <a:ln/>
+        </p:spPr>
+        <p:txBody>
+          <a:bodyPr wrap="square" lIns="0" tIns="0" rIns="0" bIns="0" rtlCol="0" anchor="t"/>
+          <a:lstStyle/>
+          <a:p>
+            <a:pPr indent="0" marL="0">
+              <a:lnSpc>
+                <a:spcPct val="110000"/>
+              </a:lnSpc>
+              <a:buNone/>
+            </a:pPr>
+            <a:r>
+              <a:rPr lang="en-US" sz="1600" b="1" dirty="0">
+                <a:solidFill>
+                  <a:srgbClr val="2A9D8F"/>
+                </a:solidFill>
+                <a:latin typeface="Inter" pitchFamily="34" charset="0"/>
+                <a:ea typeface="Inter" pitchFamily="34" charset="-122"/>
+                <a:cs typeface="Inter" pitchFamily="34" charset="-120"/>
+              </a:rPr>
+              <a:t>“You are an experienced 7th grade ELA teacher. </a:t>
+            </a:r>
+            <a:pPr indent="0" marL="0">
+              <a:lnSpc>
+                <a:spcPct val="110000"/>
+              </a:lnSpc>
+              <a:buNone/>
+            </a:pPr>
+            <a:r>
+              <a:rPr lang="en-US" sz="1600" b="1" dirty="0">
+                <a:solidFill>
+                  <a:srgbClr val="13293D"/>
+                </a:solidFill>
+                <a:latin typeface="Inter" pitchFamily="34" charset="0"/>
+                <a:ea typeface="Inter" pitchFamily="34" charset="-122"/>
+                <a:cs typeface="Inter" pitchFamily="34" charset="-120"/>
+              </a:rPr>
+              <a:t>Turn my notes into a 4-level analytic rubric (Beginning · Developing · Proficient · Advanced) for a persuasive essay. </a:t>
+            </a:r>
+            <a:pPr indent="0" marL="0">
+              <a:lnSpc>
+                <a:spcPct val="110000"/>
+              </a:lnSpc>
+              <a:buNone/>
+            </a:pPr>
+            <a:r>
+              <a:rPr lang="en-US" sz="1600" b="1" dirty="0">
+                <a:solidFill>
+                  <a:srgbClr val="B07914"/>
+                </a:solidFill>
+                <a:latin typeface="Inter" pitchFamily="34" charset="0"/>
+                <a:ea typeface="Inter" pitchFamily="34" charset="-122"/>
+                <a:cs typeface="Inter" pitchFamily="34" charset="-120"/>
+              </a:rPr>
+              <a:t>Criteria: claim, evidence, organization, conventions. Write every descriptor in language a 7th grader can read, and make each level describe what the work does, not what it lacks. </a:t>
+            </a:r>
+            <a:pPr indent="0" marL="0">
+              <a:lnSpc>
+                <a:spcPct val="110000"/>
+              </a:lnSpc>
+              <a:buNone/>
+            </a:pPr>
+            <a:r>
+              <a:rPr lang="en-US" sz="1600" b="1" dirty="0">
                 <a:solidFill>
                   <a:srgbClr val="2E7D5B"/>
                 </a:solidFill>
@@ -17197,7 +17367,73 @@
                 <a:ea typeface="Inter" pitchFamily="34" charset="-122"/>
                 <a:cs typeface="Inter" pitchFamily="34" charset="-120"/>
               </a:rPr>
-              <a:t>AFTER</a:t>
+              <a:t>Format: a table with criteria down the side. Then ask me up to three questions about anything unclear in my notes.”  [paste your notes]</a:t>
+            </a:r>
+            <a:endParaRPr lang="en-US" sz="1600" dirty="0"/>
+          </a:p>
+        </p:txBody>
+      </p:sp>
+      <p:sp>
+        <p:nvSpPr>
+          <p:cNvPr id="16" name="Shape 13"/>
+          <p:cNvSpPr/>
+          <p:nvPr/>
+        </p:nvSpPr>
+        <p:spPr>
+          <a:xfrm>
+            <a:off x="640080" y="5532120"/>
+            <a:ext cx="2606040" cy="457200"/>
+          </a:xfrm>
+          <a:prstGeom prst="roundRect">
+            <a:avLst>
+              <a:gd name="adj" fmla="val 50000"/>
+            </a:avLst>
+          </a:prstGeom>
+          <a:solidFill>
+            <a:srgbClr val="2A9D8F"/>
+          </a:solidFill>
+          <a:ln w="12700">
+            <a:solidFill>
+              <a:srgbClr val="2A9D8F"/>
+            </a:solidFill>
+            <a:prstDash val="solid"/>
+          </a:ln>
+        </p:spPr>
+      </p:sp>
+      <p:sp>
+        <p:nvSpPr>
+          <p:cNvPr id="17" name="Text 14"/>
+          <p:cNvSpPr/>
+          <p:nvPr/>
+        </p:nvSpPr>
+        <p:spPr>
+          <a:xfrm>
+            <a:off x="640080" y="5532120"/>
+            <a:ext cx="2606040" cy="457200"/>
+          </a:xfrm>
+          <a:prstGeom prst="rect">
+            <a:avLst/>
+          </a:prstGeom>
+          <a:noFill/>
+          <a:ln/>
+        </p:spPr>
+        <p:txBody>
+          <a:bodyPr wrap="square" lIns="0" tIns="0" rIns="0" bIns="0" rtlCol="0" anchor="ctr"/>
+          <a:lstStyle/>
+          <a:p>
+            <a:pPr algn="ctr" indent="0" marL="0">
+              <a:buNone/>
+            </a:pPr>
+            <a:r>
+              <a:rPr lang="en-US" sz="1400" b="1" spc="200" kern="0" dirty="0">
+                <a:solidFill>
+                  <a:srgbClr val="FFFFFF"/>
+                </a:solidFill>
+                <a:latin typeface="Inter" pitchFamily="34" charset="0"/>
+                <a:ea typeface="Inter" pitchFamily="34" charset="-122"/>
+                <a:cs typeface="Inter" pitchFamily="34" charset="-120"/>
+              </a:rPr>
+              <a:t>ROLE</a:t>
             </a:r>
             <a:endParaRPr lang="en-US" sz="1400" dirty="0"/>
           </a:p>
@@ -17205,40 +17441,199 @@
       </p:sp>
       <p:sp>
         <p:nvSpPr>
-          <p:cNvPr id="12" name="Text 9"/>
-          <p:cNvSpPr/>
-          <p:nvPr/>
-        </p:nvSpPr>
-        <p:spPr>
-          <a:xfrm>
-            <a:off x="914400" y="3474720"/>
-            <a:ext cx="10424160" cy="2286000"/>
-          </a:xfrm>
-          <a:prstGeom prst="rect">
-            <a:avLst/>
-          </a:prstGeom>
-          <a:noFill/>
-          <a:ln/>
-        </p:spPr>
-        <p:txBody>
-          <a:bodyPr wrap="square" lIns="0" tIns="0" rIns="0" bIns="0" rtlCol="0" anchor="t"/>
-          <a:lstStyle/>
-          <a:p>
-            <a:pPr indent="0" marL="0">
-              <a:buNone/>
-            </a:pPr>
-            <a:r>
-              <a:rPr lang="en-US" sz="1550" i="1" dirty="0">
-                <a:solidFill>
-                  <a:srgbClr val="1B1F24"/>
-                </a:solidFill>
-                <a:latin typeface="Inter" pitchFamily="34" charset="0"/>
-                <a:ea typeface="Inter" pitchFamily="34" charset="-122"/>
-                <a:cs typeface="Inter" pitchFamily="34" charset="-120"/>
-              </a:rPr>
-              <a:t>“You are an experienced 7th grade ELA teacher. Turn my notes into a 4-level analytic rubric (Beginning · Developing · Proficient · Advanced) for a persuasive essay. Criteria: claim, evidence, organization, conventions. Write every descriptor in language a 7th grader can read, and make each level describe what the work does, not what it lacks. Format: a table with criteria down the side. Then ask me up to three questions about anything unclear in my notes.”  [paste your notes]</a:t>
-            </a:r>
-            <a:endParaRPr lang="en-US" sz="1550" dirty="0"/>
+          <p:cNvPr id="18" name="Shape 15"/>
+          <p:cNvSpPr/>
+          <p:nvPr/>
+        </p:nvSpPr>
+        <p:spPr>
+          <a:xfrm>
+            <a:off x="3456432" y="5532120"/>
+            <a:ext cx="2606040" cy="457200"/>
+          </a:xfrm>
+          <a:prstGeom prst="roundRect">
+            <a:avLst>
+              <a:gd name="adj" fmla="val 50000"/>
+            </a:avLst>
+          </a:prstGeom>
+          <a:solidFill>
+            <a:srgbClr val="13293D"/>
+          </a:solidFill>
+          <a:ln w="12700">
+            <a:solidFill>
+              <a:srgbClr val="13293D"/>
+            </a:solidFill>
+            <a:prstDash val="solid"/>
+          </a:ln>
+        </p:spPr>
+      </p:sp>
+      <p:sp>
+        <p:nvSpPr>
+          <p:cNvPr id="19" name="Text 16"/>
+          <p:cNvSpPr/>
+          <p:nvPr/>
+        </p:nvSpPr>
+        <p:spPr>
+          <a:xfrm>
+            <a:off x="3456432" y="5532120"/>
+            <a:ext cx="2606040" cy="457200"/>
+          </a:xfrm>
+          <a:prstGeom prst="rect">
+            <a:avLst/>
+          </a:prstGeom>
+          <a:noFill/>
+          <a:ln/>
+        </p:spPr>
+        <p:txBody>
+          <a:bodyPr wrap="square" lIns="0" tIns="0" rIns="0" bIns="0" rtlCol="0" anchor="ctr"/>
+          <a:lstStyle/>
+          <a:p>
+            <a:pPr algn="ctr" indent="0" marL="0">
+              <a:buNone/>
+            </a:pPr>
+            <a:r>
+              <a:rPr lang="en-US" sz="1400" b="1" spc="200" kern="0" dirty="0">
+                <a:solidFill>
+                  <a:srgbClr val="FFFFFF"/>
+                </a:solidFill>
+                <a:latin typeface="Inter" pitchFamily="34" charset="0"/>
+                <a:ea typeface="Inter" pitchFamily="34" charset="-122"/>
+                <a:cs typeface="Inter" pitchFamily="34" charset="-120"/>
+              </a:rPr>
+              <a:t>TASK</a:t>
+            </a:r>
+            <a:endParaRPr lang="en-US" sz="1400" dirty="0"/>
+          </a:p>
+        </p:txBody>
+      </p:sp>
+      <p:sp>
+        <p:nvSpPr>
+          <p:cNvPr id="20" name="Shape 17"/>
+          <p:cNvSpPr/>
+          <p:nvPr/>
+        </p:nvSpPr>
+        <p:spPr>
+          <a:xfrm>
+            <a:off x="6272784" y="5532120"/>
+            <a:ext cx="2606040" cy="457200"/>
+          </a:xfrm>
+          <a:prstGeom prst="roundRect">
+            <a:avLst>
+              <a:gd name="adj" fmla="val 50000"/>
+            </a:avLst>
+          </a:prstGeom>
+          <a:solidFill>
+            <a:srgbClr val="B07914"/>
+          </a:solidFill>
+          <a:ln w="12700">
+            <a:solidFill>
+              <a:srgbClr val="B07914"/>
+            </a:solidFill>
+            <a:prstDash val="solid"/>
+          </a:ln>
+        </p:spPr>
+      </p:sp>
+      <p:sp>
+        <p:nvSpPr>
+          <p:cNvPr id="21" name="Text 18"/>
+          <p:cNvSpPr/>
+          <p:nvPr/>
+        </p:nvSpPr>
+        <p:spPr>
+          <a:xfrm>
+            <a:off x="6272784" y="5532120"/>
+            <a:ext cx="2606040" cy="457200"/>
+          </a:xfrm>
+          <a:prstGeom prst="rect">
+            <a:avLst/>
+          </a:prstGeom>
+          <a:noFill/>
+          <a:ln/>
+        </p:spPr>
+        <p:txBody>
+          <a:bodyPr wrap="square" lIns="0" tIns="0" rIns="0" bIns="0" rtlCol="0" anchor="ctr"/>
+          <a:lstStyle/>
+          <a:p>
+            <a:pPr algn="ctr" indent="0" marL="0">
+              <a:buNone/>
+            </a:pPr>
+            <a:r>
+              <a:rPr lang="en-US" sz="1400" b="1" spc="200" kern="0" dirty="0">
+                <a:solidFill>
+                  <a:srgbClr val="FFFFFF"/>
+                </a:solidFill>
+                <a:latin typeface="Inter" pitchFamily="34" charset="0"/>
+                <a:ea typeface="Inter" pitchFamily="34" charset="-122"/>
+                <a:cs typeface="Inter" pitchFamily="34" charset="-120"/>
+              </a:rPr>
+              <a:t>CONTEXT</a:t>
+            </a:r>
+            <a:endParaRPr lang="en-US" sz="1400" dirty="0"/>
+          </a:p>
+        </p:txBody>
+      </p:sp>
+      <p:sp>
+        <p:nvSpPr>
+          <p:cNvPr id="22" name="Shape 19"/>
+          <p:cNvSpPr/>
+          <p:nvPr/>
+        </p:nvSpPr>
+        <p:spPr>
+          <a:xfrm>
+            <a:off x="9089136" y="5532120"/>
+            <a:ext cx="2606040" cy="457200"/>
+          </a:xfrm>
+          <a:prstGeom prst="roundRect">
+            <a:avLst>
+              <a:gd name="adj" fmla="val 50000"/>
+            </a:avLst>
+          </a:prstGeom>
+          <a:solidFill>
+            <a:srgbClr val="2E7D5B"/>
+          </a:solidFill>
+          <a:ln w="12700">
+            <a:solidFill>
+              <a:srgbClr val="2E7D5B"/>
+            </a:solidFill>
+            <a:prstDash val="solid"/>
+          </a:ln>
+        </p:spPr>
+      </p:sp>
+      <p:sp>
+        <p:nvSpPr>
+          <p:cNvPr id="23" name="Text 20"/>
+          <p:cNvSpPr/>
+          <p:nvPr/>
+        </p:nvSpPr>
+        <p:spPr>
+          <a:xfrm>
+            <a:off x="9089136" y="5532120"/>
+            <a:ext cx="2606040" cy="457200"/>
+          </a:xfrm>
+          <a:prstGeom prst="rect">
+            <a:avLst/>
+          </a:prstGeom>
+          <a:noFill/>
+          <a:ln/>
+        </p:spPr>
+        <p:txBody>
+          <a:bodyPr wrap="square" lIns="0" tIns="0" rIns="0" bIns="0" rtlCol="0" anchor="ctr"/>
+          <a:lstStyle/>
+          <a:p>
+            <a:pPr algn="ctr" indent="0" marL="0">
+              <a:buNone/>
+            </a:pPr>
+            <a:r>
+              <a:rPr lang="en-US" sz="1400" b="1" spc="200" kern="0" dirty="0">
+                <a:solidFill>
+                  <a:srgbClr val="FFFFFF"/>
+                </a:solidFill>
+                <a:latin typeface="Inter" pitchFamily="34" charset="0"/>
+                <a:ea typeface="Inter" pitchFamily="34" charset="-122"/>
+                <a:cs typeface="Inter" pitchFamily="34" charset="-120"/>
+              </a:rPr>
+              <a:t>FORMAT</a:t>
+            </a:r>
+            <a:endParaRPr lang="en-US" sz="1400" dirty="0"/>
           </a:p>
         </p:txBody>
       </p:sp>

--- a/kits/kit04/Kit04_PresentationDeck.pptx
+++ b/kits/kit04/Kit04_PresentationDeck.pptx
@@ -3862,7 +3862,214 @@
       </p:sp>
       <p:sp>
         <p:nvSpPr>
-          <p:cNvPr id="5" name="Text 2"/>
+          <p:cNvPr id="5" name="Shape 2"/>
+          <p:cNvSpPr/>
+          <p:nvPr/>
+        </p:nvSpPr>
+        <p:spPr>
+          <a:xfrm>
+            <a:off x="8732520" y="109728"/>
+            <a:ext cx="2926080" cy="896112"/>
+          </a:xfrm>
+          <a:prstGeom prst="roundRect">
+            <a:avLst>
+              <a:gd name="adj" fmla="val 7143"/>
+            </a:avLst>
+          </a:prstGeom>
+          <a:solidFill>
+            <a:srgbClr val="1E3A50"/>
+          </a:solidFill>
+          <a:ln w="12700">
+            <a:solidFill>
+              <a:srgbClr val="2A4A63"/>
+            </a:solidFill>
+            <a:prstDash val="solid"/>
+          </a:ln>
+        </p:spPr>
+      </p:sp>
+      <p:sp>
+        <p:nvSpPr>
+          <p:cNvPr id="6" name="Shape 3"/>
+          <p:cNvSpPr/>
+          <p:nvPr/>
+        </p:nvSpPr>
+        <p:spPr>
+          <a:xfrm>
+            <a:off x="8732520" y="109728"/>
+            <a:ext cx="2926080" cy="237744"/>
+          </a:xfrm>
+          <a:prstGeom prst="roundRect">
+            <a:avLst>
+              <a:gd name="adj" fmla="val 26923"/>
+            </a:avLst>
+          </a:prstGeom>
+          <a:solidFill>
+            <a:srgbClr val="0D1E2E"/>
+          </a:solidFill>
+          <a:ln w="12700">
+            <a:solidFill>
+              <a:srgbClr val="0D1E2E"/>
+            </a:solidFill>
+            <a:prstDash val="solid"/>
+          </a:ln>
+        </p:spPr>
+      </p:sp>
+      <p:sp>
+        <p:nvSpPr>
+          <p:cNvPr id="7" name="Shape 4"/>
+          <p:cNvSpPr/>
+          <p:nvPr/>
+        </p:nvSpPr>
+        <p:spPr>
+          <a:xfrm>
+            <a:off x="8823960" y="182880"/>
+            <a:ext cx="91440" cy="91440"/>
+          </a:xfrm>
+          <a:prstGeom prst="ellipse">
+            <a:avLst/>
+          </a:prstGeom>
+          <a:solidFill>
+            <a:srgbClr val="E8837A"/>
+          </a:solidFill>
+          <a:ln w="12700">
+            <a:solidFill>
+              <a:srgbClr val="E8837A"/>
+            </a:solidFill>
+            <a:prstDash val="solid"/>
+          </a:ln>
+        </p:spPr>
+      </p:sp>
+      <p:sp>
+        <p:nvSpPr>
+          <p:cNvPr id="8" name="Shape 5"/>
+          <p:cNvSpPr/>
+          <p:nvPr/>
+        </p:nvSpPr>
+        <p:spPr>
+          <a:xfrm>
+            <a:off x="8970264" y="182880"/>
+            <a:ext cx="91440" cy="91440"/>
+          </a:xfrm>
+          <a:prstGeom prst="ellipse">
+            <a:avLst/>
+          </a:prstGeom>
+          <a:solidFill>
+            <a:srgbClr val="F4A825"/>
+          </a:solidFill>
+          <a:ln w="12700">
+            <a:solidFill>
+              <a:srgbClr val="F4A825"/>
+            </a:solidFill>
+            <a:prstDash val="solid"/>
+          </a:ln>
+        </p:spPr>
+      </p:sp>
+      <p:sp>
+        <p:nvSpPr>
+          <p:cNvPr id="9" name="Shape 6"/>
+          <p:cNvSpPr/>
+          <p:nvPr/>
+        </p:nvSpPr>
+        <p:spPr>
+          <a:xfrm>
+            <a:off x="9116568" y="182880"/>
+            <a:ext cx="91440" cy="91440"/>
+          </a:xfrm>
+          <a:prstGeom prst="ellipse">
+            <a:avLst/>
+          </a:prstGeom>
+          <a:solidFill>
+            <a:srgbClr val="2E7D5B"/>
+          </a:solidFill>
+          <a:ln w="12700">
+            <a:solidFill>
+              <a:srgbClr val="2E7D5B"/>
+            </a:solidFill>
+            <a:prstDash val="solid"/>
+          </a:ln>
+        </p:spPr>
+      </p:sp>
+      <p:sp>
+        <p:nvSpPr>
+          <p:cNvPr id="10" name="Text 7"/>
+          <p:cNvSpPr/>
+          <p:nvPr/>
+        </p:nvSpPr>
+        <p:spPr>
+          <a:xfrm>
+            <a:off x="9299448" y="109728"/>
+            <a:ext cx="2286000" cy="237744"/>
+          </a:xfrm>
+          <a:prstGeom prst="rect">
+            <a:avLst/>
+          </a:prstGeom>
+          <a:noFill/>
+          <a:ln/>
+        </p:spPr>
+        <p:txBody>
+          <a:bodyPr wrap="square" lIns="0" tIns="0" rIns="0" bIns="0" rtlCol="0" anchor="ctr"/>
+          <a:lstStyle/>
+          <a:p>
+            <a:pPr indent="0" marL="0">
+              <a:buNone/>
+            </a:pPr>
+            <a:r>
+              <a:rPr lang="en-US" sz="800" b="1" spc="100" kern="0" dirty="0">
+                <a:solidFill>
+                  <a:srgbClr val="9FB2C2"/>
+                </a:solidFill>
+                <a:latin typeface="Inter" pitchFamily="34" charset="0"/>
+                <a:ea typeface="Inter" pitchFamily="34" charset="-122"/>
+                <a:cs typeface="Inter" pitchFamily="34" charset="-120"/>
+              </a:rPr>
+              <a:t>MS. RIVERA'S SCREEN · SO FAR</a:t>
+            </a:r>
+            <a:endParaRPr lang="en-US" sz="800" dirty="0"/>
+          </a:p>
+        </p:txBody>
+      </p:sp>
+      <p:sp>
+        <p:nvSpPr>
+          <p:cNvPr id="11" name="Text 8"/>
+          <p:cNvSpPr/>
+          <p:nvPr/>
+        </p:nvSpPr>
+        <p:spPr>
+          <a:xfrm>
+            <a:off x="8860536" y="365760"/>
+            <a:ext cx="2670048" cy="566928"/>
+          </a:xfrm>
+          <a:prstGeom prst="rect">
+            <a:avLst/>
+          </a:prstGeom>
+          <a:noFill/>
+          <a:ln/>
+        </p:spPr>
+        <p:txBody>
+          <a:bodyPr wrap="square" lIns="0" tIns="0" rIns="0" bIns="0" rtlCol="0" anchor="ctr"/>
+          <a:lstStyle/>
+          <a:p>
+            <a:pPr indent="0" marL="0">
+              <a:buNone/>
+            </a:pPr>
+            <a:r>
+              <a:rPr lang="en-US" sz="1000" dirty="0">
+                <a:solidFill>
+                  <a:srgbClr val="C9D4DE"/>
+                </a:solidFill>
+                <a:latin typeface="Inter" pitchFamily="34" charset="0"/>
+                <a:ea typeface="Inter" pitchFamily="34" charset="-122"/>
+                <a:cs typeface="Inter" pitchFamily="34" charset="-120"/>
+              </a:rPr>
+              <a:t>Her rubric test: hand it to a student. 'Limited understanding' fails.</a:t>
+            </a:r>
+            <a:endParaRPr lang="en-US" sz="1000" dirty="0"/>
+          </a:p>
+        </p:txBody>
+      </p:sp>
+      <p:sp>
+        <p:nvSpPr>
+          <p:cNvPr id="12" name="Text 9"/>
           <p:cNvSpPr/>
           <p:nvPr/>
         </p:nvSpPr>
@@ -3901,7 +4108,7 @@
       </p:sp>
       <p:sp>
         <p:nvSpPr>
-          <p:cNvPr id="6" name="Text 3"/>
+          <p:cNvPr id="13" name="Text 10"/>
           <p:cNvSpPr/>
           <p:nvPr/>
         </p:nvSpPr>
@@ -3940,7 +4147,7 @@
       </p:sp>
       <p:sp>
         <p:nvSpPr>
-          <p:cNvPr id="7" name="Text 4"/>
+          <p:cNvPr id="14" name="Text 11"/>
           <p:cNvSpPr/>
           <p:nvPr/>
         </p:nvSpPr>
@@ -4002,7 +4209,7 @@
       </p:sp>
       <p:sp>
         <p:nvSpPr>
-          <p:cNvPr id="8" name="Text 5"/>
+          <p:cNvPr id="15" name="Text 12"/>
           <p:cNvSpPr/>
           <p:nvPr/>
         </p:nvSpPr>
@@ -4189,7 +4396,214 @@
       </p:sp>
       <p:sp>
         <p:nvSpPr>
-          <p:cNvPr id="5" name="Text 2"/>
+          <p:cNvPr id="5" name="Shape 2"/>
+          <p:cNvSpPr/>
+          <p:nvPr/>
+        </p:nvSpPr>
+        <p:spPr>
+          <a:xfrm>
+            <a:off x="8732520" y="109728"/>
+            <a:ext cx="2926080" cy="896112"/>
+          </a:xfrm>
+          <a:prstGeom prst="roundRect">
+            <a:avLst>
+              <a:gd name="adj" fmla="val 7143"/>
+            </a:avLst>
+          </a:prstGeom>
+          <a:solidFill>
+            <a:srgbClr val="F7F5F0"/>
+          </a:solidFill>
+          <a:ln w="12700">
+            <a:solidFill>
+              <a:srgbClr val="DCE3EA"/>
+            </a:solidFill>
+            <a:prstDash val="solid"/>
+          </a:ln>
+        </p:spPr>
+      </p:sp>
+      <p:sp>
+        <p:nvSpPr>
+          <p:cNvPr id="6" name="Shape 3"/>
+          <p:cNvSpPr/>
+          <p:nvPr/>
+        </p:nvSpPr>
+        <p:spPr>
+          <a:xfrm>
+            <a:off x="8732520" y="109728"/>
+            <a:ext cx="2926080" cy="237744"/>
+          </a:xfrm>
+          <a:prstGeom prst="roundRect">
+            <a:avLst>
+              <a:gd name="adj" fmla="val 26923"/>
+            </a:avLst>
+          </a:prstGeom>
+          <a:solidFill>
+            <a:srgbClr val="0D1E2E"/>
+          </a:solidFill>
+          <a:ln w="12700">
+            <a:solidFill>
+              <a:srgbClr val="0D1E2E"/>
+            </a:solidFill>
+            <a:prstDash val="solid"/>
+          </a:ln>
+        </p:spPr>
+      </p:sp>
+      <p:sp>
+        <p:nvSpPr>
+          <p:cNvPr id="7" name="Shape 4"/>
+          <p:cNvSpPr/>
+          <p:nvPr/>
+        </p:nvSpPr>
+        <p:spPr>
+          <a:xfrm>
+            <a:off x="8823960" y="182880"/>
+            <a:ext cx="91440" cy="91440"/>
+          </a:xfrm>
+          <a:prstGeom prst="ellipse">
+            <a:avLst/>
+          </a:prstGeom>
+          <a:solidFill>
+            <a:srgbClr val="E8837A"/>
+          </a:solidFill>
+          <a:ln w="12700">
+            <a:solidFill>
+              <a:srgbClr val="E8837A"/>
+            </a:solidFill>
+            <a:prstDash val="solid"/>
+          </a:ln>
+        </p:spPr>
+      </p:sp>
+      <p:sp>
+        <p:nvSpPr>
+          <p:cNvPr id="8" name="Shape 5"/>
+          <p:cNvSpPr/>
+          <p:nvPr/>
+        </p:nvSpPr>
+        <p:spPr>
+          <a:xfrm>
+            <a:off x="8970264" y="182880"/>
+            <a:ext cx="91440" cy="91440"/>
+          </a:xfrm>
+          <a:prstGeom prst="ellipse">
+            <a:avLst/>
+          </a:prstGeom>
+          <a:solidFill>
+            <a:srgbClr val="F4A825"/>
+          </a:solidFill>
+          <a:ln w="12700">
+            <a:solidFill>
+              <a:srgbClr val="F4A825"/>
+            </a:solidFill>
+            <a:prstDash val="solid"/>
+          </a:ln>
+        </p:spPr>
+      </p:sp>
+      <p:sp>
+        <p:nvSpPr>
+          <p:cNvPr id="9" name="Shape 6"/>
+          <p:cNvSpPr/>
+          <p:nvPr/>
+        </p:nvSpPr>
+        <p:spPr>
+          <a:xfrm>
+            <a:off x="9116568" y="182880"/>
+            <a:ext cx="91440" cy="91440"/>
+          </a:xfrm>
+          <a:prstGeom prst="ellipse">
+            <a:avLst/>
+          </a:prstGeom>
+          <a:solidFill>
+            <a:srgbClr val="2E7D5B"/>
+          </a:solidFill>
+          <a:ln w="12700">
+            <a:solidFill>
+              <a:srgbClr val="2E7D5B"/>
+            </a:solidFill>
+            <a:prstDash val="solid"/>
+          </a:ln>
+        </p:spPr>
+      </p:sp>
+      <p:sp>
+        <p:nvSpPr>
+          <p:cNvPr id="10" name="Text 7"/>
+          <p:cNvSpPr/>
+          <p:nvPr/>
+        </p:nvSpPr>
+        <p:spPr>
+          <a:xfrm>
+            <a:off x="9299448" y="109728"/>
+            <a:ext cx="2286000" cy="237744"/>
+          </a:xfrm>
+          <a:prstGeom prst="rect">
+            <a:avLst/>
+          </a:prstGeom>
+          <a:noFill/>
+          <a:ln/>
+        </p:spPr>
+        <p:txBody>
+          <a:bodyPr wrap="square" lIns="0" tIns="0" rIns="0" bIns="0" rtlCol="0" anchor="ctr"/>
+          <a:lstStyle/>
+          <a:p>
+            <a:pPr indent="0" marL="0">
+              <a:buNone/>
+            </a:pPr>
+            <a:r>
+              <a:rPr lang="en-US" sz="800" b="1" spc="100" kern="0" dirty="0">
+                <a:solidFill>
+                  <a:srgbClr val="9FB2C2"/>
+                </a:solidFill>
+                <a:latin typeface="Inter" pitchFamily="34" charset="0"/>
+                <a:ea typeface="Inter" pitchFamily="34" charset="-122"/>
+                <a:cs typeface="Inter" pitchFamily="34" charset="-120"/>
+              </a:rPr>
+              <a:t>MS. RIVERA'S SCREEN · SO FAR</a:t>
+            </a:r>
+            <a:endParaRPr lang="en-US" sz="800" dirty="0"/>
+          </a:p>
+        </p:txBody>
+      </p:sp>
+      <p:sp>
+        <p:nvSpPr>
+          <p:cNvPr id="11" name="Text 8"/>
+          <p:cNvSpPr/>
+          <p:nvPr/>
+        </p:nvSpPr>
+        <p:spPr>
+          <a:xfrm>
+            <a:off x="8860536" y="365760"/>
+            <a:ext cx="2670048" cy="566928"/>
+          </a:xfrm>
+          <a:prstGeom prst="rect">
+            <a:avLst/>
+          </a:prstGeom>
+          <a:noFill/>
+          <a:ln/>
+        </p:spPr>
+        <p:txBody>
+          <a:bodyPr wrap="square" lIns="0" tIns="0" rIns="0" bIns="0" rtlCol="0" anchor="ctr"/>
+          <a:lstStyle/>
+          <a:p>
+            <a:pPr indent="0" marL="0">
+              <a:buNone/>
+            </a:pPr>
+            <a:r>
+              <a:rPr lang="en-US" sz="1000" dirty="0">
+                <a:solidFill>
+                  <a:srgbClr val="1B1F24"/>
+                </a:solidFill>
+                <a:latin typeface="Inter" pitchFamily="34" charset="0"/>
+                <a:ea typeface="Inter" pitchFamily="34" charset="-122"/>
+                <a:cs typeface="Inter" pitchFamily="34" charset="-120"/>
+              </a:rPr>
+              <a:t>Her bank prompt: topic plus the confusion her students actually have.</a:t>
+            </a:r>
+            <a:endParaRPr lang="en-US" sz="1000" dirty="0"/>
+          </a:p>
+        </p:txBody>
+      </p:sp>
+      <p:sp>
+        <p:nvSpPr>
+          <p:cNvPr id="12" name="Text 9"/>
           <p:cNvSpPr/>
           <p:nvPr/>
         </p:nvSpPr>
@@ -4228,7 +4642,7 @@
       </p:sp>
       <p:sp>
         <p:nvSpPr>
-          <p:cNvPr id="6" name="Text 3"/>
+          <p:cNvPr id="13" name="Text 10"/>
           <p:cNvSpPr/>
           <p:nvPr/>
         </p:nvSpPr>
@@ -4267,7 +4681,7 @@
       </p:sp>
       <p:sp>
         <p:nvSpPr>
-          <p:cNvPr id="7" name="Shape 4"/>
+          <p:cNvPr id="14" name="Shape 11"/>
           <p:cNvSpPr/>
           <p:nvPr/>
         </p:nvSpPr>
@@ -4294,7 +4708,7 @@
       </p:sp>
       <p:sp>
         <p:nvSpPr>
-          <p:cNvPr id="8" name="Text 5"/>
+          <p:cNvPr id="15" name="Text 12"/>
           <p:cNvSpPr/>
           <p:nvPr/>
         </p:nvSpPr>
@@ -4333,7 +4747,7 @@
       </p:sp>
       <p:sp>
         <p:nvSpPr>
-          <p:cNvPr id="9" name="Text 6"/>
+          <p:cNvPr id="16" name="Text 13"/>
           <p:cNvSpPr/>
           <p:nvPr/>
         </p:nvSpPr>
@@ -4372,7 +4786,7 @@
       </p:sp>
       <p:sp>
         <p:nvSpPr>
-          <p:cNvPr id="10" name="Shape 7"/>
+          <p:cNvPr id="17" name="Shape 14"/>
           <p:cNvSpPr/>
           <p:nvPr/>
         </p:nvSpPr>
@@ -4399,7 +4813,7 @@
       </p:sp>
       <p:sp>
         <p:nvSpPr>
-          <p:cNvPr id="11" name="Text 8"/>
+          <p:cNvPr id="18" name="Text 15"/>
           <p:cNvSpPr/>
           <p:nvPr/>
         </p:nvSpPr>
@@ -4438,7 +4852,7 @@
       </p:sp>
       <p:sp>
         <p:nvSpPr>
-          <p:cNvPr id="12" name="Text 9"/>
+          <p:cNvPr id="19" name="Text 16"/>
           <p:cNvSpPr/>
           <p:nvPr/>
         </p:nvSpPr>
@@ -4625,7 +5039,214 @@
       </p:sp>
       <p:sp>
         <p:nvSpPr>
-          <p:cNvPr id="5" name="Text 2"/>
+          <p:cNvPr id="5" name="Shape 2"/>
+          <p:cNvSpPr/>
+          <p:nvPr/>
+        </p:nvSpPr>
+        <p:spPr>
+          <a:xfrm>
+            <a:off x="8732520" y="109728"/>
+            <a:ext cx="2926080" cy="896112"/>
+          </a:xfrm>
+          <a:prstGeom prst="roundRect">
+            <a:avLst>
+              <a:gd name="adj" fmla="val 7143"/>
+            </a:avLst>
+          </a:prstGeom>
+          <a:solidFill>
+            <a:srgbClr val="F7F5F0"/>
+          </a:solidFill>
+          <a:ln w="12700">
+            <a:solidFill>
+              <a:srgbClr val="DCE3EA"/>
+            </a:solidFill>
+            <a:prstDash val="solid"/>
+          </a:ln>
+        </p:spPr>
+      </p:sp>
+      <p:sp>
+        <p:nvSpPr>
+          <p:cNvPr id="6" name="Shape 3"/>
+          <p:cNvSpPr/>
+          <p:nvPr/>
+        </p:nvSpPr>
+        <p:spPr>
+          <a:xfrm>
+            <a:off x="8732520" y="109728"/>
+            <a:ext cx="2926080" cy="237744"/>
+          </a:xfrm>
+          <a:prstGeom prst="roundRect">
+            <a:avLst>
+              <a:gd name="adj" fmla="val 26923"/>
+            </a:avLst>
+          </a:prstGeom>
+          <a:solidFill>
+            <a:srgbClr val="0D1E2E"/>
+          </a:solidFill>
+          <a:ln w="12700">
+            <a:solidFill>
+              <a:srgbClr val="0D1E2E"/>
+            </a:solidFill>
+            <a:prstDash val="solid"/>
+          </a:ln>
+        </p:spPr>
+      </p:sp>
+      <p:sp>
+        <p:nvSpPr>
+          <p:cNvPr id="7" name="Shape 4"/>
+          <p:cNvSpPr/>
+          <p:nvPr/>
+        </p:nvSpPr>
+        <p:spPr>
+          <a:xfrm>
+            <a:off x="8823960" y="182880"/>
+            <a:ext cx="91440" cy="91440"/>
+          </a:xfrm>
+          <a:prstGeom prst="ellipse">
+            <a:avLst/>
+          </a:prstGeom>
+          <a:solidFill>
+            <a:srgbClr val="E8837A"/>
+          </a:solidFill>
+          <a:ln w="12700">
+            <a:solidFill>
+              <a:srgbClr val="E8837A"/>
+            </a:solidFill>
+            <a:prstDash val="solid"/>
+          </a:ln>
+        </p:spPr>
+      </p:sp>
+      <p:sp>
+        <p:nvSpPr>
+          <p:cNvPr id="8" name="Shape 5"/>
+          <p:cNvSpPr/>
+          <p:nvPr/>
+        </p:nvSpPr>
+        <p:spPr>
+          <a:xfrm>
+            <a:off x="8970264" y="182880"/>
+            <a:ext cx="91440" cy="91440"/>
+          </a:xfrm>
+          <a:prstGeom prst="ellipse">
+            <a:avLst/>
+          </a:prstGeom>
+          <a:solidFill>
+            <a:srgbClr val="F4A825"/>
+          </a:solidFill>
+          <a:ln w="12700">
+            <a:solidFill>
+              <a:srgbClr val="F4A825"/>
+            </a:solidFill>
+            <a:prstDash val="solid"/>
+          </a:ln>
+        </p:spPr>
+      </p:sp>
+      <p:sp>
+        <p:nvSpPr>
+          <p:cNvPr id="9" name="Shape 6"/>
+          <p:cNvSpPr/>
+          <p:nvPr/>
+        </p:nvSpPr>
+        <p:spPr>
+          <a:xfrm>
+            <a:off x="9116568" y="182880"/>
+            <a:ext cx="91440" cy="91440"/>
+          </a:xfrm>
+          <a:prstGeom prst="ellipse">
+            <a:avLst/>
+          </a:prstGeom>
+          <a:solidFill>
+            <a:srgbClr val="2E7D5B"/>
+          </a:solidFill>
+          <a:ln w="12700">
+            <a:solidFill>
+              <a:srgbClr val="2E7D5B"/>
+            </a:solidFill>
+            <a:prstDash val="solid"/>
+          </a:ln>
+        </p:spPr>
+      </p:sp>
+      <p:sp>
+        <p:nvSpPr>
+          <p:cNvPr id="10" name="Text 7"/>
+          <p:cNvSpPr/>
+          <p:nvPr/>
+        </p:nvSpPr>
+        <p:spPr>
+          <a:xfrm>
+            <a:off x="9299448" y="109728"/>
+            <a:ext cx="2286000" cy="237744"/>
+          </a:xfrm>
+          <a:prstGeom prst="rect">
+            <a:avLst/>
+          </a:prstGeom>
+          <a:noFill/>
+          <a:ln/>
+        </p:spPr>
+        <p:txBody>
+          <a:bodyPr wrap="square" lIns="0" tIns="0" rIns="0" bIns="0" rtlCol="0" anchor="ctr"/>
+          <a:lstStyle/>
+          <a:p>
+            <a:pPr indent="0" marL="0">
+              <a:buNone/>
+            </a:pPr>
+            <a:r>
+              <a:rPr lang="en-US" sz="800" b="1" spc="100" kern="0" dirty="0">
+                <a:solidFill>
+                  <a:srgbClr val="9FB2C2"/>
+                </a:solidFill>
+                <a:latin typeface="Inter" pitchFamily="34" charset="0"/>
+                <a:ea typeface="Inter" pitchFamily="34" charset="-122"/>
+                <a:cs typeface="Inter" pitchFamily="34" charset="-120"/>
+              </a:rPr>
+              <a:t>MS. RIVERA'S SCREEN · SO FAR</a:t>
+            </a:r>
+            <a:endParaRPr lang="en-US" sz="800" dirty="0"/>
+          </a:p>
+        </p:txBody>
+      </p:sp>
+      <p:sp>
+        <p:nvSpPr>
+          <p:cNvPr id="11" name="Text 8"/>
+          <p:cNvSpPr/>
+          <p:nvPr/>
+        </p:nvSpPr>
+        <p:spPr>
+          <a:xfrm>
+            <a:off x="8860536" y="365760"/>
+            <a:ext cx="2670048" cy="566928"/>
+          </a:xfrm>
+          <a:prstGeom prst="rect">
+            <a:avLst/>
+          </a:prstGeom>
+          <a:noFill/>
+          <a:ln/>
+        </p:spPr>
+        <p:txBody>
+          <a:bodyPr wrap="square" lIns="0" tIns="0" rIns="0" bIns="0" rtlCol="0" anchor="ctr"/>
+          <a:lstStyle/>
+          <a:p>
+            <a:pPr indent="0" marL="0">
+              <a:buNone/>
+            </a:pPr>
+            <a:r>
+              <a:rPr lang="en-US" sz="1000" dirty="0">
+                <a:solidFill>
+                  <a:srgbClr val="1B1F24"/>
+                </a:solidFill>
+                <a:latin typeface="Inter" pitchFamily="34" charset="0"/>
+                <a:ea typeface="Inter" pitchFamily="34" charset="-122"/>
+                <a:cs typeface="Inter" pitchFamily="34" charset="-120"/>
+              </a:rPr>
+              <a:t>Her vetting stance: 97% on-topic still isn't 100%. Every key gets checked.</a:t>
+            </a:r>
+            <a:endParaRPr lang="en-US" sz="1000" dirty="0"/>
+          </a:p>
+        </p:txBody>
+      </p:sp>
+      <p:sp>
+        <p:nvSpPr>
+          <p:cNvPr id="12" name="Text 9"/>
           <p:cNvSpPr/>
           <p:nvPr/>
         </p:nvSpPr>
@@ -4664,7 +5285,7 @@
       </p:sp>
       <p:sp>
         <p:nvSpPr>
-          <p:cNvPr id="6" name="Text 3"/>
+          <p:cNvPr id="13" name="Text 10"/>
           <p:cNvSpPr/>
           <p:nvPr/>
         </p:nvSpPr>
@@ -4703,7 +5324,7 @@
       </p:sp>
       <p:sp>
         <p:nvSpPr>
-          <p:cNvPr id="7" name="Shape 4"/>
+          <p:cNvPr id="14" name="Shape 11"/>
           <p:cNvSpPr/>
           <p:nvPr/>
         </p:nvSpPr>
@@ -4730,7 +5351,7 @@
       </p:sp>
       <p:sp>
         <p:nvSpPr>
-          <p:cNvPr id="8" name="Text 5"/>
+          <p:cNvPr id="15" name="Text 12"/>
           <p:cNvSpPr/>
           <p:nvPr/>
         </p:nvSpPr>
@@ -4769,7 +5390,7 @@
       </p:sp>
       <p:sp>
         <p:nvSpPr>
-          <p:cNvPr id="9" name="Text 6"/>
+          <p:cNvPr id="16" name="Text 13"/>
           <p:cNvSpPr/>
           <p:nvPr/>
         </p:nvSpPr>
@@ -4808,7 +5429,7 @@
       </p:sp>
       <p:sp>
         <p:nvSpPr>
-          <p:cNvPr id="10" name="Text 7"/>
+          <p:cNvPr id="17" name="Text 14"/>
           <p:cNvSpPr/>
           <p:nvPr/>
         </p:nvSpPr>
@@ -4847,7 +5468,7 @@
       </p:sp>
       <p:sp>
         <p:nvSpPr>
-          <p:cNvPr id="11" name="Shape 8"/>
+          <p:cNvPr id="18" name="Shape 15"/>
           <p:cNvSpPr/>
           <p:nvPr/>
         </p:nvSpPr>
@@ -4874,7 +5495,7 @@
       </p:sp>
       <p:sp>
         <p:nvSpPr>
-          <p:cNvPr id="12" name="Text 9"/>
+          <p:cNvPr id="19" name="Text 16"/>
           <p:cNvSpPr/>
           <p:nvPr/>
         </p:nvSpPr>
@@ -4913,7 +5534,7 @@
       </p:sp>
       <p:sp>
         <p:nvSpPr>
-          <p:cNvPr id="13" name="Text 10"/>
+          <p:cNvPr id="20" name="Text 17"/>
           <p:cNvSpPr/>
           <p:nvPr/>
         </p:nvSpPr>
@@ -4952,7 +5573,7 @@
       </p:sp>
       <p:sp>
         <p:nvSpPr>
-          <p:cNvPr id="14" name="Text 11"/>
+          <p:cNvPr id="21" name="Text 18"/>
           <p:cNvSpPr/>
           <p:nvPr/>
         </p:nvSpPr>
@@ -4991,7 +5612,7 @@
       </p:sp>
       <p:sp>
         <p:nvSpPr>
-          <p:cNvPr id="15" name="Text 12"/>
+          <p:cNvPr id="22" name="Text 19"/>
           <p:cNvSpPr/>
           <p:nvPr/>
         </p:nvSpPr>
@@ -5178,7 +5799,214 @@
       </p:sp>
       <p:sp>
         <p:nvSpPr>
-          <p:cNvPr id="5" name="Text 2"/>
+          <p:cNvPr id="5" name="Shape 2"/>
+          <p:cNvSpPr/>
+          <p:nvPr/>
+        </p:nvSpPr>
+        <p:spPr>
+          <a:xfrm>
+            <a:off x="8732520" y="109728"/>
+            <a:ext cx="2926080" cy="896112"/>
+          </a:xfrm>
+          <a:prstGeom prst="roundRect">
+            <a:avLst>
+              <a:gd name="adj" fmla="val 7143"/>
+            </a:avLst>
+          </a:prstGeom>
+          <a:solidFill>
+            <a:srgbClr val="F7F5F0"/>
+          </a:solidFill>
+          <a:ln w="12700">
+            <a:solidFill>
+              <a:srgbClr val="DCE3EA"/>
+            </a:solidFill>
+            <a:prstDash val="solid"/>
+          </a:ln>
+        </p:spPr>
+      </p:sp>
+      <p:sp>
+        <p:nvSpPr>
+          <p:cNvPr id="6" name="Shape 3"/>
+          <p:cNvSpPr/>
+          <p:nvPr/>
+        </p:nvSpPr>
+        <p:spPr>
+          <a:xfrm>
+            <a:off x="8732520" y="109728"/>
+            <a:ext cx="2926080" cy="237744"/>
+          </a:xfrm>
+          <a:prstGeom prst="roundRect">
+            <a:avLst>
+              <a:gd name="adj" fmla="val 26923"/>
+            </a:avLst>
+          </a:prstGeom>
+          <a:solidFill>
+            <a:srgbClr val="0D1E2E"/>
+          </a:solidFill>
+          <a:ln w="12700">
+            <a:solidFill>
+              <a:srgbClr val="0D1E2E"/>
+            </a:solidFill>
+            <a:prstDash val="solid"/>
+          </a:ln>
+        </p:spPr>
+      </p:sp>
+      <p:sp>
+        <p:nvSpPr>
+          <p:cNvPr id="7" name="Shape 4"/>
+          <p:cNvSpPr/>
+          <p:nvPr/>
+        </p:nvSpPr>
+        <p:spPr>
+          <a:xfrm>
+            <a:off x="8823960" y="182880"/>
+            <a:ext cx="91440" cy="91440"/>
+          </a:xfrm>
+          <a:prstGeom prst="ellipse">
+            <a:avLst/>
+          </a:prstGeom>
+          <a:solidFill>
+            <a:srgbClr val="E8837A"/>
+          </a:solidFill>
+          <a:ln w="12700">
+            <a:solidFill>
+              <a:srgbClr val="E8837A"/>
+            </a:solidFill>
+            <a:prstDash val="solid"/>
+          </a:ln>
+        </p:spPr>
+      </p:sp>
+      <p:sp>
+        <p:nvSpPr>
+          <p:cNvPr id="8" name="Shape 5"/>
+          <p:cNvSpPr/>
+          <p:nvPr/>
+        </p:nvSpPr>
+        <p:spPr>
+          <a:xfrm>
+            <a:off x="8970264" y="182880"/>
+            <a:ext cx="91440" cy="91440"/>
+          </a:xfrm>
+          <a:prstGeom prst="ellipse">
+            <a:avLst/>
+          </a:prstGeom>
+          <a:solidFill>
+            <a:srgbClr val="F4A825"/>
+          </a:solidFill>
+          <a:ln w="12700">
+            <a:solidFill>
+              <a:srgbClr val="F4A825"/>
+            </a:solidFill>
+            <a:prstDash val="solid"/>
+          </a:ln>
+        </p:spPr>
+      </p:sp>
+      <p:sp>
+        <p:nvSpPr>
+          <p:cNvPr id="9" name="Shape 6"/>
+          <p:cNvSpPr/>
+          <p:nvPr/>
+        </p:nvSpPr>
+        <p:spPr>
+          <a:xfrm>
+            <a:off x="9116568" y="182880"/>
+            <a:ext cx="91440" cy="91440"/>
+          </a:xfrm>
+          <a:prstGeom prst="ellipse">
+            <a:avLst/>
+          </a:prstGeom>
+          <a:solidFill>
+            <a:srgbClr val="2E7D5B"/>
+          </a:solidFill>
+          <a:ln w="12700">
+            <a:solidFill>
+              <a:srgbClr val="2E7D5B"/>
+            </a:solidFill>
+            <a:prstDash val="solid"/>
+          </a:ln>
+        </p:spPr>
+      </p:sp>
+      <p:sp>
+        <p:nvSpPr>
+          <p:cNvPr id="10" name="Text 7"/>
+          <p:cNvSpPr/>
+          <p:nvPr/>
+        </p:nvSpPr>
+        <p:spPr>
+          <a:xfrm>
+            <a:off x="9299448" y="109728"/>
+            <a:ext cx="2286000" cy="237744"/>
+          </a:xfrm>
+          <a:prstGeom prst="rect">
+            <a:avLst/>
+          </a:prstGeom>
+          <a:noFill/>
+          <a:ln/>
+        </p:spPr>
+        <p:txBody>
+          <a:bodyPr wrap="square" lIns="0" tIns="0" rIns="0" bIns="0" rtlCol="0" anchor="ctr"/>
+          <a:lstStyle/>
+          <a:p>
+            <a:pPr indent="0" marL="0">
+              <a:buNone/>
+            </a:pPr>
+            <a:r>
+              <a:rPr lang="en-US" sz="800" b="1" spc="100" kern="0" dirty="0">
+                <a:solidFill>
+                  <a:srgbClr val="9FB2C2"/>
+                </a:solidFill>
+                <a:latin typeface="Inter" pitchFamily="34" charset="0"/>
+                <a:ea typeface="Inter" pitchFamily="34" charset="-122"/>
+                <a:cs typeface="Inter" pitchFamily="34" charset="-120"/>
+              </a:rPr>
+              <a:t>MS. RIVERA'S SCREEN · SO FAR</a:t>
+            </a:r>
+            <a:endParaRPr lang="en-US" sz="800" dirty="0"/>
+          </a:p>
+        </p:txBody>
+      </p:sp>
+      <p:sp>
+        <p:nvSpPr>
+          <p:cNvPr id="11" name="Text 8"/>
+          <p:cNvSpPr/>
+          <p:nvPr/>
+        </p:nvSpPr>
+        <p:spPr>
+          <a:xfrm>
+            <a:off x="8860536" y="365760"/>
+            <a:ext cx="2670048" cy="566928"/>
+          </a:xfrm>
+          <a:prstGeom prst="rect">
+            <a:avLst/>
+          </a:prstGeom>
+          <a:noFill/>
+          <a:ln/>
+        </p:spPr>
+        <p:txBody>
+          <a:bodyPr wrap="square" lIns="0" tIns="0" rIns="0" bIns="0" rtlCol="0" anchor="ctr"/>
+          <a:lstStyle/>
+          <a:p>
+            <a:pPr indent="0" marL="0">
+              <a:buNone/>
+            </a:pPr>
+            <a:r>
+              <a:rPr lang="en-US" sz="1000" dirty="0">
+                <a:solidFill>
+                  <a:srgbClr val="1B1F24"/>
+                </a:solidFill>
+                <a:latin typeface="Inter" pitchFamily="34" charset="0"/>
+                <a:ea typeface="Inter" pitchFamily="34" charset="-122"/>
+                <a:cs typeface="Inter" pitchFamily="34" charset="-120"/>
+              </a:rPr>
+              <a:t>Her read of the evidence: AI feedback is a floor. She is the ceiling.</a:t>
+            </a:r>
+            <a:endParaRPr lang="en-US" sz="1000" dirty="0"/>
+          </a:p>
+        </p:txBody>
+      </p:sp>
+      <p:sp>
+        <p:nvSpPr>
+          <p:cNvPr id="12" name="Text 9"/>
           <p:cNvSpPr/>
           <p:nvPr/>
         </p:nvSpPr>
@@ -5217,7 +6045,7 @@
       </p:sp>
       <p:sp>
         <p:nvSpPr>
-          <p:cNvPr id="6" name="Text 3"/>
+          <p:cNvPr id="13" name="Text 10"/>
           <p:cNvSpPr/>
           <p:nvPr/>
         </p:nvSpPr>
@@ -5256,7 +6084,7 @@
       </p:sp>
       <p:sp>
         <p:nvSpPr>
-          <p:cNvPr id="7" name="Shape 4"/>
+          <p:cNvPr id="14" name="Shape 11"/>
           <p:cNvSpPr/>
           <p:nvPr/>
         </p:nvSpPr>
@@ -5283,7 +6111,7 @@
       </p:sp>
       <p:sp>
         <p:nvSpPr>
-          <p:cNvPr id="8" name="Text 5"/>
+          <p:cNvPr id="15" name="Text 12"/>
           <p:cNvSpPr/>
           <p:nvPr/>
         </p:nvSpPr>
@@ -5322,7 +6150,7 @@
       </p:sp>
       <p:sp>
         <p:nvSpPr>
-          <p:cNvPr id="9" name="Text 6"/>
+          <p:cNvPr id="16" name="Text 13"/>
           <p:cNvSpPr/>
           <p:nvPr/>
         </p:nvSpPr>
@@ -5361,7 +6189,7 @@
       </p:sp>
       <p:sp>
         <p:nvSpPr>
-          <p:cNvPr id="10" name="Shape 7"/>
+          <p:cNvPr id="17" name="Shape 14"/>
           <p:cNvSpPr/>
           <p:nvPr/>
         </p:nvSpPr>
@@ -5388,7 +6216,7 @@
       </p:sp>
       <p:sp>
         <p:nvSpPr>
-          <p:cNvPr id="11" name="Text 8"/>
+          <p:cNvPr id="18" name="Text 15"/>
           <p:cNvSpPr/>
           <p:nvPr/>
         </p:nvSpPr>
@@ -5427,7 +6255,7 @@
       </p:sp>
       <p:sp>
         <p:nvSpPr>
-          <p:cNvPr id="12" name="Text 9"/>
+          <p:cNvPr id="19" name="Text 16"/>
           <p:cNvSpPr/>
           <p:nvPr/>
         </p:nvSpPr>
@@ -5466,7 +6294,7 @@
       </p:sp>
       <p:sp>
         <p:nvSpPr>
-          <p:cNvPr id="13" name="Text 10"/>
+          <p:cNvPr id="20" name="Text 17"/>
           <p:cNvSpPr/>
           <p:nvPr/>
         </p:nvSpPr>
@@ -5653,7 +6481,214 @@
       </p:sp>
       <p:sp>
         <p:nvSpPr>
-          <p:cNvPr id="5" name="Text 2"/>
+          <p:cNvPr id="5" name="Shape 2"/>
+          <p:cNvSpPr/>
+          <p:nvPr/>
+        </p:nvSpPr>
+        <p:spPr>
+          <a:xfrm>
+            <a:off x="8732520" y="109728"/>
+            <a:ext cx="2926080" cy="896112"/>
+          </a:xfrm>
+          <a:prstGeom prst="roundRect">
+            <a:avLst>
+              <a:gd name="adj" fmla="val 7143"/>
+            </a:avLst>
+          </a:prstGeom>
+          <a:solidFill>
+            <a:srgbClr val="F7F5F0"/>
+          </a:solidFill>
+          <a:ln w="12700">
+            <a:solidFill>
+              <a:srgbClr val="DCE3EA"/>
+            </a:solidFill>
+            <a:prstDash val="solid"/>
+          </a:ln>
+        </p:spPr>
+      </p:sp>
+      <p:sp>
+        <p:nvSpPr>
+          <p:cNvPr id="6" name="Shape 3"/>
+          <p:cNvSpPr/>
+          <p:nvPr/>
+        </p:nvSpPr>
+        <p:spPr>
+          <a:xfrm>
+            <a:off x="8732520" y="109728"/>
+            <a:ext cx="2926080" cy="237744"/>
+          </a:xfrm>
+          <a:prstGeom prst="roundRect">
+            <a:avLst>
+              <a:gd name="adj" fmla="val 26923"/>
+            </a:avLst>
+          </a:prstGeom>
+          <a:solidFill>
+            <a:srgbClr val="0D1E2E"/>
+          </a:solidFill>
+          <a:ln w="12700">
+            <a:solidFill>
+              <a:srgbClr val="0D1E2E"/>
+            </a:solidFill>
+            <a:prstDash val="solid"/>
+          </a:ln>
+        </p:spPr>
+      </p:sp>
+      <p:sp>
+        <p:nvSpPr>
+          <p:cNvPr id="7" name="Shape 4"/>
+          <p:cNvSpPr/>
+          <p:nvPr/>
+        </p:nvSpPr>
+        <p:spPr>
+          <a:xfrm>
+            <a:off x="8823960" y="182880"/>
+            <a:ext cx="91440" cy="91440"/>
+          </a:xfrm>
+          <a:prstGeom prst="ellipse">
+            <a:avLst/>
+          </a:prstGeom>
+          <a:solidFill>
+            <a:srgbClr val="E8837A"/>
+          </a:solidFill>
+          <a:ln w="12700">
+            <a:solidFill>
+              <a:srgbClr val="E8837A"/>
+            </a:solidFill>
+            <a:prstDash val="solid"/>
+          </a:ln>
+        </p:spPr>
+      </p:sp>
+      <p:sp>
+        <p:nvSpPr>
+          <p:cNvPr id="8" name="Shape 5"/>
+          <p:cNvSpPr/>
+          <p:nvPr/>
+        </p:nvSpPr>
+        <p:spPr>
+          <a:xfrm>
+            <a:off x="8970264" y="182880"/>
+            <a:ext cx="91440" cy="91440"/>
+          </a:xfrm>
+          <a:prstGeom prst="ellipse">
+            <a:avLst/>
+          </a:prstGeom>
+          <a:solidFill>
+            <a:srgbClr val="F4A825"/>
+          </a:solidFill>
+          <a:ln w="12700">
+            <a:solidFill>
+              <a:srgbClr val="F4A825"/>
+            </a:solidFill>
+            <a:prstDash val="solid"/>
+          </a:ln>
+        </p:spPr>
+      </p:sp>
+      <p:sp>
+        <p:nvSpPr>
+          <p:cNvPr id="9" name="Shape 6"/>
+          <p:cNvSpPr/>
+          <p:nvPr/>
+        </p:nvSpPr>
+        <p:spPr>
+          <a:xfrm>
+            <a:off x="9116568" y="182880"/>
+            <a:ext cx="91440" cy="91440"/>
+          </a:xfrm>
+          <a:prstGeom prst="ellipse">
+            <a:avLst/>
+          </a:prstGeom>
+          <a:solidFill>
+            <a:srgbClr val="2E7D5B"/>
+          </a:solidFill>
+          <a:ln w="12700">
+            <a:solidFill>
+              <a:srgbClr val="2E7D5B"/>
+            </a:solidFill>
+            <a:prstDash val="solid"/>
+          </a:ln>
+        </p:spPr>
+      </p:sp>
+      <p:sp>
+        <p:nvSpPr>
+          <p:cNvPr id="10" name="Text 7"/>
+          <p:cNvSpPr/>
+          <p:nvPr/>
+        </p:nvSpPr>
+        <p:spPr>
+          <a:xfrm>
+            <a:off x="9299448" y="109728"/>
+            <a:ext cx="2286000" cy="237744"/>
+          </a:xfrm>
+          <a:prstGeom prst="rect">
+            <a:avLst/>
+          </a:prstGeom>
+          <a:noFill/>
+          <a:ln/>
+        </p:spPr>
+        <p:txBody>
+          <a:bodyPr wrap="square" lIns="0" tIns="0" rIns="0" bIns="0" rtlCol="0" anchor="ctr"/>
+          <a:lstStyle/>
+          <a:p>
+            <a:pPr indent="0" marL="0">
+              <a:buNone/>
+            </a:pPr>
+            <a:r>
+              <a:rPr lang="en-US" sz="800" b="1" spc="100" kern="0" dirty="0">
+                <a:solidFill>
+                  <a:srgbClr val="9FB2C2"/>
+                </a:solidFill>
+                <a:latin typeface="Inter" pitchFamily="34" charset="0"/>
+                <a:ea typeface="Inter" pitchFamily="34" charset="-122"/>
+                <a:cs typeface="Inter" pitchFamily="34" charset="-120"/>
+              </a:rPr>
+              <a:t>MS. RIVERA'S SCREEN · SO FAR</a:t>
+            </a:r>
+            <a:endParaRPr lang="en-US" sz="800" dirty="0"/>
+          </a:p>
+        </p:txBody>
+      </p:sp>
+      <p:sp>
+        <p:nvSpPr>
+          <p:cNvPr id="11" name="Text 8"/>
+          <p:cNvSpPr/>
+          <p:nvPr/>
+        </p:nvSpPr>
+        <p:spPr>
+          <a:xfrm>
+            <a:off x="8860536" y="365760"/>
+            <a:ext cx="2670048" cy="566928"/>
+          </a:xfrm>
+          <a:prstGeom prst="rect">
+            <a:avLst/>
+          </a:prstGeom>
+          <a:noFill/>
+          <a:ln/>
+        </p:spPr>
+        <p:txBody>
+          <a:bodyPr wrap="square" lIns="0" tIns="0" rIns="0" bIns="0" rtlCol="0" anchor="ctr"/>
+          <a:lstStyle/>
+          <a:p>
+            <a:pPr indent="0" marL="0">
+              <a:buNone/>
+            </a:pPr>
+            <a:r>
+              <a:rPr lang="en-US" sz="1000" dirty="0">
+                <a:solidFill>
+                  <a:srgbClr val="1B1F24"/>
+                </a:solidFill>
+                <a:latin typeface="Inter" pitchFamily="34" charset="0"/>
+                <a:ea typeface="Inter" pitchFamily="34" charset="-122"/>
+                <a:cs typeface="Inter" pitchFamily="34" charset="-120"/>
+              </a:rPr>
+              <a:t>Her starters: drafted for patterns, personalized before any student sees one.</a:t>
+            </a:r>
+            <a:endParaRPr lang="en-US" sz="1000" dirty="0"/>
+          </a:p>
+        </p:txBody>
+      </p:sp>
+      <p:sp>
+        <p:nvSpPr>
+          <p:cNvPr id="12" name="Text 9"/>
           <p:cNvSpPr/>
           <p:nvPr/>
         </p:nvSpPr>
@@ -5692,7 +6727,7 @@
       </p:sp>
       <p:sp>
         <p:nvSpPr>
-          <p:cNvPr id="6" name="Text 3"/>
+          <p:cNvPr id="13" name="Text 10"/>
           <p:cNvSpPr/>
           <p:nvPr/>
         </p:nvSpPr>
@@ -5731,7 +6766,7 @@
       </p:sp>
       <p:sp>
         <p:nvSpPr>
-          <p:cNvPr id="7" name="Shape 4"/>
+          <p:cNvPr id="14" name="Shape 11"/>
           <p:cNvSpPr/>
           <p:nvPr/>
         </p:nvSpPr>
@@ -5758,7 +6793,7 @@
       </p:sp>
       <p:sp>
         <p:nvSpPr>
-          <p:cNvPr id="8" name="Text 5"/>
+          <p:cNvPr id="15" name="Text 12"/>
           <p:cNvSpPr/>
           <p:nvPr/>
         </p:nvSpPr>
@@ -5797,7 +6832,7 @@
       </p:sp>
       <p:sp>
         <p:nvSpPr>
-          <p:cNvPr id="9" name="Text 6"/>
+          <p:cNvPr id="16" name="Text 13"/>
           <p:cNvSpPr/>
           <p:nvPr/>
         </p:nvSpPr>
@@ -6009,81 +7044,57 @@
       </p:sp>
       <p:sp>
         <p:nvSpPr>
-          <p:cNvPr id="5" name="Text 2"/>
-          <p:cNvSpPr/>
-          <p:nvPr/>
-        </p:nvSpPr>
-        <p:spPr>
-          <a:xfrm>
-            <a:off x="566928" y="128016"/>
-            <a:ext cx="11055096" cy="274320"/>
-          </a:xfrm>
-          <a:prstGeom prst="rect">
-            <a:avLst/>
-          </a:prstGeom>
-          <a:noFill/>
-          <a:ln/>
-        </p:spPr>
-        <p:txBody>
-          <a:bodyPr wrap="square" lIns="0" tIns="0" rIns="0" bIns="0" rtlCol="0" anchor="ctr"/>
-          <a:lstStyle/>
-          <a:p>
-            <a:pPr indent="0" marL="0">
-              <a:buNone/>
-            </a:pPr>
-            <a:r>
-              <a:rPr lang="en-US" sz="1200" b="1" spc="200" kern="0" dirty="0">
-                <a:solidFill>
-                  <a:srgbClr val="F4A825"/>
-                </a:solidFill>
-                <a:latin typeface="Inter" pitchFamily="34" charset="0"/>
-                <a:ea typeface="Inter" pitchFamily="34" charset="-122"/>
-                <a:cs typeface="Inter" pitchFamily="34" charset="-120"/>
-              </a:rPr>
-              <a:t>IN WRITING, SO NOBODY GUESSES</a:t>
-            </a:r>
-            <a:endParaRPr lang="en-US" sz="1200" dirty="0"/>
-          </a:p>
-        </p:txBody>
-      </p:sp>
-      <p:sp>
-        <p:nvSpPr>
-          <p:cNvPr id="6" name="Text 3"/>
-          <p:cNvSpPr/>
-          <p:nvPr/>
-        </p:nvSpPr>
-        <p:spPr>
-          <a:xfrm>
-            <a:off x="640080" y="1097280"/>
-            <a:ext cx="10972800" cy="731520"/>
-          </a:xfrm>
-          <a:prstGeom prst="rect">
-            <a:avLst/>
-          </a:prstGeom>
-          <a:noFill/>
-          <a:ln/>
-        </p:spPr>
-        <p:txBody>
-          <a:bodyPr wrap="square" lIns="0" tIns="0" rIns="0" bIns="0" rtlCol="0" anchor="ctr"/>
-          <a:lstStyle/>
-          <a:p>
-            <a:pPr indent="0" marL="0">
-              <a:buNone/>
-            </a:pPr>
-            <a:r>
-              <a:rPr lang="en-US" sz="4000" b="1" dirty="0">
-                <a:solidFill>
-                  <a:srgbClr val="FFFFFF"/>
-                </a:solidFill>
-                <a:latin typeface="Inter" pitchFamily="34" charset="0"/>
-                <a:ea typeface="Inter" pitchFamily="34" charset="-122"/>
-                <a:cs typeface="Inter" pitchFamily="34" charset="-120"/>
-              </a:rPr>
-              <a:t>The red lines</a:t>
-            </a:r>
-            <a:endParaRPr lang="en-US" sz="4000" dirty="0"/>
-          </a:p>
-        </p:txBody>
+          <p:cNvPr id="5" name="Shape 2"/>
+          <p:cNvSpPr/>
+          <p:nvPr/>
+        </p:nvSpPr>
+        <p:spPr>
+          <a:xfrm>
+            <a:off x="8732520" y="109728"/>
+            <a:ext cx="2926080" cy="896112"/>
+          </a:xfrm>
+          <a:prstGeom prst="roundRect">
+            <a:avLst>
+              <a:gd name="adj" fmla="val 7143"/>
+            </a:avLst>
+          </a:prstGeom>
+          <a:solidFill>
+            <a:srgbClr val="1E3A50"/>
+          </a:solidFill>
+          <a:ln w="12700">
+            <a:solidFill>
+              <a:srgbClr val="2A4A63"/>
+            </a:solidFill>
+            <a:prstDash val="solid"/>
+          </a:ln>
+        </p:spPr>
+      </p:sp>
+      <p:sp>
+        <p:nvSpPr>
+          <p:cNvPr id="6" name="Shape 3"/>
+          <p:cNvSpPr/>
+          <p:nvPr/>
+        </p:nvSpPr>
+        <p:spPr>
+          <a:xfrm>
+            <a:off x="8732520" y="109728"/>
+            <a:ext cx="2926080" cy="237744"/>
+          </a:xfrm>
+          <a:prstGeom prst="roundRect">
+            <a:avLst>
+              <a:gd name="adj" fmla="val 26923"/>
+            </a:avLst>
+          </a:prstGeom>
+          <a:solidFill>
+            <a:srgbClr val="0D1E2E"/>
+          </a:solidFill>
+          <a:ln w="12700">
+            <a:solidFill>
+              <a:srgbClr val="0D1E2E"/>
+            </a:solidFill>
+            <a:prstDash val="solid"/>
+          </a:ln>
+        </p:spPr>
       </p:sp>
       <p:sp>
         <p:nvSpPr>
@@ -6093,8 +7104,33 @@
         </p:nvSpPr>
         <p:spPr>
           <a:xfrm>
-            <a:off x="822960" y="2194560"/>
-            <a:ext cx="658368" cy="658368"/>
+            <a:off x="8823960" y="182880"/>
+            <a:ext cx="91440" cy="91440"/>
+          </a:xfrm>
+          <a:prstGeom prst="ellipse">
+            <a:avLst/>
+          </a:prstGeom>
+          <a:solidFill>
+            <a:srgbClr val="E8837A"/>
+          </a:solidFill>
+          <a:ln w="12700">
+            <a:solidFill>
+              <a:srgbClr val="E8837A"/>
+            </a:solidFill>
+            <a:prstDash val="solid"/>
+          </a:ln>
+        </p:spPr>
+      </p:sp>
+      <p:sp>
+        <p:nvSpPr>
+          <p:cNvPr id="8" name="Shape 5"/>
+          <p:cNvSpPr/>
+          <p:nvPr/>
+        </p:nvSpPr>
+        <p:spPr>
+          <a:xfrm>
+            <a:off x="8970264" y="182880"/>
+            <a:ext cx="91440" cy="91440"/>
           </a:xfrm>
           <a:prstGeom prst="ellipse">
             <a:avLst/>
@@ -6112,91 +7148,194 @@
       </p:sp>
       <p:sp>
         <p:nvSpPr>
-          <p:cNvPr id="8" name="Text 5"/>
+          <p:cNvPr id="9" name="Shape 6"/>
+          <p:cNvSpPr/>
+          <p:nvPr/>
+        </p:nvSpPr>
+        <p:spPr>
+          <a:xfrm>
+            <a:off x="9116568" y="182880"/>
+            <a:ext cx="91440" cy="91440"/>
+          </a:xfrm>
+          <a:prstGeom prst="ellipse">
+            <a:avLst/>
+          </a:prstGeom>
+          <a:solidFill>
+            <a:srgbClr val="2E7D5B"/>
+          </a:solidFill>
+          <a:ln w="12700">
+            <a:solidFill>
+              <a:srgbClr val="2E7D5B"/>
+            </a:solidFill>
+            <a:prstDash val="solid"/>
+          </a:ln>
+        </p:spPr>
+      </p:sp>
+      <p:sp>
+        <p:nvSpPr>
+          <p:cNvPr id="10" name="Text 7"/>
+          <p:cNvSpPr/>
+          <p:nvPr/>
+        </p:nvSpPr>
+        <p:spPr>
+          <a:xfrm>
+            <a:off x="9299448" y="109728"/>
+            <a:ext cx="2286000" cy="237744"/>
+          </a:xfrm>
+          <a:prstGeom prst="rect">
+            <a:avLst/>
+          </a:prstGeom>
+          <a:noFill/>
+          <a:ln/>
+        </p:spPr>
+        <p:txBody>
+          <a:bodyPr wrap="square" lIns="0" tIns="0" rIns="0" bIns="0" rtlCol="0" anchor="ctr"/>
+          <a:lstStyle/>
+          <a:p>
+            <a:pPr indent="0" marL="0">
+              <a:buNone/>
+            </a:pPr>
+            <a:r>
+              <a:rPr lang="en-US" sz="800" b="1" spc="100" kern="0" dirty="0">
+                <a:solidFill>
+                  <a:srgbClr val="9FB2C2"/>
+                </a:solidFill>
+                <a:latin typeface="Inter" pitchFamily="34" charset="0"/>
+                <a:ea typeface="Inter" pitchFamily="34" charset="-122"/>
+                <a:cs typeface="Inter" pitchFamily="34" charset="-120"/>
+              </a:rPr>
+              <a:t>MS. RIVERA'S SCREEN · SO FAR</a:t>
+            </a:r>
+            <a:endParaRPr lang="en-US" sz="800" dirty="0"/>
+          </a:p>
+        </p:txBody>
+      </p:sp>
+      <p:sp>
+        <p:nvSpPr>
+          <p:cNvPr id="11" name="Text 8"/>
+          <p:cNvSpPr/>
+          <p:nvPr/>
+        </p:nvSpPr>
+        <p:spPr>
+          <a:xfrm>
+            <a:off x="8860536" y="365760"/>
+            <a:ext cx="2670048" cy="566928"/>
+          </a:xfrm>
+          <a:prstGeom prst="rect">
+            <a:avLst/>
+          </a:prstGeom>
+          <a:noFill/>
+          <a:ln/>
+        </p:spPr>
+        <p:txBody>
+          <a:bodyPr wrap="square" lIns="0" tIns="0" rIns="0" bIns="0" rtlCol="0" anchor="ctr"/>
+          <a:lstStyle/>
+          <a:p>
+            <a:pPr indent="0" marL="0">
+              <a:buNone/>
+            </a:pPr>
+            <a:r>
+              <a:rPr lang="en-US" sz="1000" dirty="0">
+                <a:solidFill>
+                  <a:srgbClr val="C9D4DE"/>
+                </a:solidFill>
+                <a:latin typeface="Inter" pitchFamily="34" charset="0"/>
+                <a:ea typeface="Inter" pitchFamily="34" charset="-122"/>
+                <a:cs typeface="Inter" pitchFamily="34" charset="-120"/>
+              </a:rPr>
+              <a:t>Her red lines: AI never grades, never sees names, never decides.</a:t>
+            </a:r>
+            <a:endParaRPr lang="en-US" sz="1000" dirty="0"/>
+          </a:p>
+        </p:txBody>
+      </p:sp>
+      <p:sp>
+        <p:nvSpPr>
+          <p:cNvPr id="12" name="Text 9"/>
+          <p:cNvSpPr/>
+          <p:nvPr/>
+        </p:nvSpPr>
+        <p:spPr>
+          <a:xfrm>
+            <a:off x="566928" y="128016"/>
+            <a:ext cx="11055096" cy="274320"/>
+          </a:xfrm>
+          <a:prstGeom prst="rect">
+            <a:avLst/>
+          </a:prstGeom>
+          <a:noFill/>
+          <a:ln/>
+        </p:spPr>
+        <p:txBody>
+          <a:bodyPr wrap="square" lIns="0" tIns="0" rIns="0" bIns="0" rtlCol="0" anchor="ctr"/>
+          <a:lstStyle/>
+          <a:p>
+            <a:pPr indent="0" marL="0">
+              <a:buNone/>
+            </a:pPr>
+            <a:r>
+              <a:rPr lang="en-US" sz="1200" b="1" spc="200" kern="0" dirty="0">
+                <a:solidFill>
+                  <a:srgbClr val="F4A825"/>
+                </a:solidFill>
+                <a:latin typeface="Inter" pitchFamily="34" charset="0"/>
+                <a:ea typeface="Inter" pitchFamily="34" charset="-122"/>
+                <a:cs typeface="Inter" pitchFamily="34" charset="-120"/>
+              </a:rPr>
+              <a:t>IN WRITING, SO NOBODY GUESSES</a:t>
+            </a:r>
+            <a:endParaRPr lang="en-US" sz="1200" dirty="0"/>
+          </a:p>
+        </p:txBody>
+      </p:sp>
+      <p:sp>
+        <p:nvSpPr>
+          <p:cNvPr id="13" name="Text 10"/>
+          <p:cNvSpPr/>
+          <p:nvPr/>
+        </p:nvSpPr>
+        <p:spPr>
+          <a:xfrm>
+            <a:off x="640080" y="1097280"/>
+            <a:ext cx="10972800" cy="731520"/>
+          </a:xfrm>
+          <a:prstGeom prst="rect">
+            <a:avLst/>
+          </a:prstGeom>
+          <a:noFill/>
+          <a:ln/>
+        </p:spPr>
+        <p:txBody>
+          <a:bodyPr wrap="square" lIns="0" tIns="0" rIns="0" bIns="0" rtlCol="0" anchor="ctr"/>
+          <a:lstStyle/>
+          <a:p>
+            <a:pPr indent="0" marL="0">
+              <a:buNone/>
+            </a:pPr>
+            <a:r>
+              <a:rPr lang="en-US" sz="4000" b="1" dirty="0">
+                <a:solidFill>
+                  <a:srgbClr val="FFFFFF"/>
+                </a:solidFill>
+                <a:latin typeface="Inter" pitchFamily="34" charset="0"/>
+                <a:ea typeface="Inter" pitchFamily="34" charset="-122"/>
+                <a:cs typeface="Inter" pitchFamily="34" charset="-120"/>
+              </a:rPr>
+              <a:t>The red lines</a:t>
+            </a:r>
+            <a:endParaRPr lang="en-US" sz="4000" dirty="0"/>
+          </a:p>
+        </p:txBody>
+      </p:sp>
+      <p:sp>
+        <p:nvSpPr>
+          <p:cNvPr id="14" name="Shape 11"/>
           <p:cNvSpPr/>
           <p:nvPr/>
         </p:nvSpPr>
         <p:spPr>
           <a:xfrm>
             <a:off x="822960" y="2194560"/>
-            <a:ext cx="658368" cy="658368"/>
-          </a:xfrm>
-          <a:prstGeom prst="rect">
-            <a:avLst/>
-          </a:prstGeom>
-          <a:noFill/>
-          <a:ln/>
-        </p:spPr>
-        <p:txBody>
-          <a:bodyPr wrap="square" lIns="0" tIns="0" rIns="0" bIns="0" rtlCol="0" anchor="ctr"/>
-          <a:lstStyle/>
-          <a:p>
-            <a:pPr algn="ctr" indent="0" marL="0">
-              <a:buNone/>
-            </a:pPr>
-            <a:r>
-              <a:rPr lang="en-US" sz="2400" b="1" dirty="0">
-                <a:solidFill>
-                  <a:srgbClr val="13293D"/>
-                </a:solidFill>
-                <a:latin typeface="Inter" pitchFamily="34" charset="0"/>
-                <a:ea typeface="Inter" pitchFamily="34" charset="-122"/>
-                <a:cs typeface="Inter" pitchFamily="34" charset="-120"/>
-              </a:rPr>
-              <a:t>1</a:t>
-            </a:r>
-            <a:endParaRPr lang="en-US" sz="2400" dirty="0"/>
-          </a:p>
-        </p:txBody>
-      </p:sp>
-      <p:sp>
-        <p:nvSpPr>
-          <p:cNvPr id="9" name="Text 6"/>
-          <p:cNvSpPr/>
-          <p:nvPr/>
-        </p:nvSpPr>
-        <p:spPr>
-          <a:xfrm>
-            <a:off x="1691640" y="2084832"/>
-            <a:ext cx="9784080" cy="877824"/>
-          </a:xfrm>
-          <a:prstGeom prst="rect">
-            <a:avLst/>
-          </a:prstGeom>
-          <a:noFill/>
-          <a:ln/>
-        </p:spPr>
-        <p:txBody>
-          <a:bodyPr wrap="square" lIns="0" tIns="0" rIns="0" bIns="0" rtlCol="0" anchor="ctr"/>
-          <a:lstStyle/>
-          <a:p>
-            <a:pPr indent="0" marL="0">
-              <a:buNone/>
-            </a:pPr>
-            <a:r>
-              <a:rPr lang="en-US" sz="2000" dirty="0">
-                <a:solidFill>
-                  <a:srgbClr val="FFFFFF"/>
-                </a:solidFill>
-                <a:latin typeface="Inter" pitchFamily="34" charset="0"/>
-                <a:ea typeface="Inter" pitchFamily="34" charset="-122"/>
-                <a:cs typeface="Inter" pitchFamily="34" charset="-120"/>
-              </a:rPr>
-              <a:t>AI never grades. No score or decision about a student ever comes from a machine.</a:t>
-            </a:r>
-            <a:endParaRPr lang="en-US" sz="2000" dirty="0"/>
-          </a:p>
-        </p:txBody>
-      </p:sp>
-      <p:sp>
-        <p:nvSpPr>
-          <p:cNvPr id="10" name="Shape 7"/>
-          <p:cNvSpPr/>
-          <p:nvPr/>
-        </p:nvSpPr>
-        <p:spPr>
-          <a:xfrm>
-            <a:off x="822960" y="3246120"/>
             <a:ext cx="658368" cy="658368"/>
           </a:xfrm>
           <a:prstGeom prst="ellipse">
@@ -6215,91 +7354,91 @@
       </p:sp>
       <p:sp>
         <p:nvSpPr>
-          <p:cNvPr id="11" name="Text 8"/>
+          <p:cNvPr id="15" name="Text 12"/>
+          <p:cNvSpPr/>
+          <p:nvPr/>
+        </p:nvSpPr>
+        <p:spPr>
+          <a:xfrm>
+            <a:off x="822960" y="2194560"/>
+            <a:ext cx="658368" cy="658368"/>
+          </a:xfrm>
+          <a:prstGeom prst="rect">
+            <a:avLst/>
+          </a:prstGeom>
+          <a:noFill/>
+          <a:ln/>
+        </p:spPr>
+        <p:txBody>
+          <a:bodyPr wrap="square" lIns="0" tIns="0" rIns="0" bIns="0" rtlCol="0" anchor="ctr"/>
+          <a:lstStyle/>
+          <a:p>
+            <a:pPr algn="ctr" indent="0" marL="0">
+              <a:buNone/>
+            </a:pPr>
+            <a:r>
+              <a:rPr lang="en-US" sz="2400" b="1" dirty="0">
+                <a:solidFill>
+                  <a:srgbClr val="13293D"/>
+                </a:solidFill>
+                <a:latin typeface="Inter" pitchFamily="34" charset="0"/>
+                <a:ea typeface="Inter" pitchFamily="34" charset="-122"/>
+                <a:cs typeface="Inter" pitchFamily="34" charset="-120"/>
+              </a:rPr>
+              <a:t>1</a:t>
+            </a:r>
+            <a:endParaRPr lang="en-US" sz="2400" dirty="0"/>
+          </a:p>
+        </p:txBody>
+      </p:sp>
+      <p:sp>
+        <p:nvSpPr>
+          <p:cNvPr id="16" name="Text 13"/>
+          <p:cNvSpPr/>
+          <p:nvPr/>
+        </p:nvSpPr>
+        <p:spPr>
+          <a:xfrm>
+            <a:off x="1691640" y="2084832"/>
+            <a:ext cx="9784080" cy="877824"/>
+          </a:xfrm>
+          <a:prstGeom prst="rect">
+            <a:avLst/>
+          </a:prstGeom>
+          <a:noFill/>
+          <a:ln/>
+        </p:spPr>
+        <p:txBody>
+          <a:bodyPr wrap="square" lIns="0" tIns="0" rIns="0" bIns="0" rtlCol="0" anchor="ctr"/>
+          <a:lstStyle/>
+          <a:p>
+            <a:pPr indent="0" marL="0">
+              <a:buNone/>
+            </a:pPr>
+            <a:r>
+              <a:rPr lang="en-US" sz="2000" dirty="0">
+                <a:solidFill>
+                  <a:srgbClr val="FFFFFF"/>
+                </a:solidFill>
+                <a:latin typeface="Inter" pitchFamily="34" charset="0"/>
+                <a:ea typeface="Inter" pitchFamily="34" charset="-122"/>
+                <a:cs typeface="Inter" pitchFamily="34" charset="-120"/>
+              </a:rPr>
+              <a:t>AI never grades. No score or decision about a student ever comes from a machine.</a:t>
+            </a:r>
+            <a:endParaRPr lang="en-US" sz="2000" dirty="0"/>
+          </a:p>
+        </p:txBody>
+      </p:sp>
+      <p:sp>
+        <p:nvSpPr>
+          <p:cNvPr id="17" name="Shape 14"/>
           <p:cNvSpPr/>
           <p:nvPr/>
         </p:nvSpPr>
         <p:spPr>
           <a:xfrm>
             <a:off x="822960" y="3246120"/>
-            <a:ext cx="658368" cy="658368"/>
-          </a:xfrm>
-          <a:prstGeom prst="rect">
-            <a:avLst/>
-          </a:prstGeom>
-          <a:noFill/>
-          <a:ln/>
-        </p:spPr>
-        <p:txBody>
-          <a:bodyPr wrap="square" lIns="0" tIns="0" rIns="0" bIns="0" rtlCol="0" anchor="ctr"/>
-          <a:lstStyle/>
-          <a:p>
-            <a:pPr algn="ctr" indent="0" marL="0">
-              <a:buNone/>
-            </a:pPr>
-            <a:r>
-              <a:rPr lang="en-US" sz="2400" b="1" dirty="0">
-                <a:solidFill>
-                  <a:srgbClr val="13293D"/>
-                </a:solidFill>
-                <a:latin typeface="Inter" pitchFamily="34" charset="0"/>
-                <a:ea typeface="Inter" pitchFamily="34" charset="-122"/>
-                <a:cs typeface="Inter" pitchFamily="34" charset="-120"/>
-              </a:rPr>
-              <a:t>2</a:t>
-            </a:r>
-            <a:endParaRPr lang="en-US" sz="2400" dirty="0"/>
-          </a:p>
-        </p:txBody>
-      </p:sp>
-      <p:sp>
-        <p:nvSpPr>
-          <p:cNvPr id="12" name="Text 9"/>
-          <p:cNvSpPr/>
-          <p:nvPr/>
-        </p:nvSpPr>
-        <p:spPr>
-          <a:xfrm>
-            <a:off x="1691640" y="3136392"/>
-            <a:ext cx="9784080" cy="877824"/>
-          </a:xfrm>
-          <a:prstGeom prst="rect">
-            <a:avLst/>
-          </a:prstGeom>
-          <a:noFill/>
-          <a:ln/>
-        </p:spPr>
-        <p:txBody>
-          <a:bodyPr wrap="square" lIns="0" tIns="0" rIns="0" bIns="0" rtlCol="0" anchor="ctr"/>
-          <a:lstStyle/>
-          <a:p>
-            <a:pPr indent="0" marL="0">
-              <a:buNone/>
-            </a:pPr>
-            <a:r>
-              <a:rPr lang="en-US" sz="2000" dirty="0">
-                <a:solidFill>
-                  <a:srgbClr val="FFFFFF"/>
-                </a:solidFill>
-                <a:latin typeface="Inter" pitchFamily="34" charset="0"/>
-                <a:ea typeface="Inter" pitchFamily="34" charset="-122"/>
-                <a:cs typeface="Inter" pitchFamily="34" charset="-120"/>
-              </a:rPr>
-              <a:t>No student names, and no identifying student work, in public AI tools. Ever.</a:t>
-            </a:r>
-            <a:endParaRPr lang="en-US" sz="2000" dirty="0"/>
-          </a:p>
-        </p:txBody>
-      </p:sp>
-      <p:sp>
-        <p:nvSpPr>
-          <p:cNvPr id="13" name="Shape 10"/>
-          <p:cNvSpPr/>
-          <p:nvPr/>
-        </p:nvSpPr>
-        <p:spPr>
-          <a:xfrm>
-            <a:off x="822960" y="4297680"/>
             <a:ext cx="658368" cy="658368"/>
           </a:xfrm>
           <a:prstGeom prst="ellipse">
@@ -6318,7 +7457,85 @@
       </p:sp>
       <p:sp>
         <p:nvSpPr>
-          <p:cNvPr id="14" name="Text 11"/>
+          <p:cNvPr id="18" name="Text 15"/>
+          <p:cNvSpPr/>
+          <p:nvPr/>
+        </p:nvSpPr>
+        <p:spPr>
+          <a:xfrm>
+            <a:off x="822960" y="3246120"/>
+            <a:ext cx="658368" cy="658368"/>
+          </a:xfrm>
+          <a:prstGeom prst="rect">
+            <a:avLst/>
+          </a:prstGeom>
+          <a:noFill/>
+          <a:ln/>
+        </p:spPr>
+        <p:txBody>
+          <a:bodyPr wrap="square" lIns="0" tIns="0" rIns="0" bIns="0" rtlCol="0" anchor="ctr"/>
+          <a:lstStyle/>
+          <a:p>
+            <a:pPr algn="ctr" indent="0" marL="0">
+              <a:buNone/>
+            </a:pPr>
+            <a:r>
+              <a:rPr lang="en-US" sz="2400" b="1" dirty="0">
+                <a:solidFill>
+                  <a:srgbClr val="13293D"/>
+                </a:solidFill>
+                <a:latin typeface="Inter" pitchFamily="34" charset="0"/>
+                <a:ea typeface="Inter" pitchFamily="34" charset="-122"/>
+                <a:cs typeface="Inter" pitchFamily="34" charset="-120"/>
+              </a:rPr>
+              <a:t>2</a:t>
+            </a:r>
+            <a:endParaRPr lang="en-US" sz="2400" dirty="0"/>
+          </a:p>
+        </p:txBody>
+      </p:sp>
+      <p:sp>
+        <p:nvSpPr>
+          <p:cNvPr id="19" name="Text 16"/>
+          <p:cNvSpPr/>
+          <p:nvPr/>
+        </p:nvSpPr>
+        <p:spPr>
+          <a:xfrm>
+            <a:off x="1691640" y="3136392"/>
+            <a:ext cx="9784080" cy="877824"/>
+          </a:xfrm>
+          <a:prstGeom prst="rect">
+            <a:avLst/>
+          </a:prstGeom>
+          <a:noFill/>
+          <a:ln/>
+        </p:spPr>
+        <p:txBody>
+          <a:bodyPr wrap="square" lIns="0" tIns="0" rIns="0" bIns="0" rtlCol="0" anchor="ctr"/>
+          <a:lstStyle/>
+          <a:p>
+            <a:pPr indent="0" marL="0">
+              <a:buNone/>
+            </a:pPr>
+            <a:r>
+              <a:rPr lang="en-US" sz="2000" dirty="0">
+                <a:solidFill>
+                  <a:srgbClr val="FFFFFF"/>
+                </a:solidFill>
+                <a:latin typeface="Inter" pitchFamily="34" charset="0"/>
+                <a:ea typeface="Inter" pitchFamily="34" charset="-122"/>
+                <a:cs typeface="Inter" pitchFamily="34" charset="-120"/>
+              </a:rPr>
+              <a:t>No student names, and no identifying student work, in public AI tools. Ever.</a:t>
+            </a:r>
+            <a:endParaRPr lang="en-US" sz="2000" dirty="0"/>
+          </a:p>
+        </p:txBody>
+      </p:sp>
+      <p:sp>
+        <p:nvSpPr>
+          <p:cNvPr id="20" name="Shape 17"/>
           <p:cNvSpPr/>
           <p:nvPr/>
         </p:nvSpPr>
@@ -6327,6 +7544,31 @@
             <a:off x="822960" y="4297680"/>
             <a:ext cx="658368" cy="658368"/>
           </a:xfrm>
+          <a:prstGeom prst="ellipse">
+            <a:avLst/>
+          </a:prstGeom>
+          <a:solidFill>
+            <a:srgbClr val="F4A825"/>
+          </a:solidFill>
+          <a:ln w="12700">
+            <a:solidFill>
+              <a:srgbClr val="F4A825"/>
+            </a:solidFill>
+            <a:prstDash val="solid"/>
+          </a:ln>
+        </p:spPr>
+      </p:sp>
+      <p:sp>
+        <p:nvSpPr>
+          <p:cNvPr id="21" name="Text 18"/>
+          <p:cNvSpPr/>
+          <p:nvPr/>
+        </p:nvSpPr>
+        <p:spPr>
+          <a:xfrm>
+            <a:off x="822960" y="4297680"/>
+            <a:ext cx="658368" cy="658368"/>
+          </a:xfrm>
           <a:prstGeom prst="rect">
             <a:avLst/>
           </a:prstGeom>
@@ -6357,7 +7599,7 @@
       </p:sp>
       <p:sp>
         <p:nvSpPr>
-          <p:cNvPr id="15" name="Text 12"/>
+          <p:cNvPr id="22" name="Text 19"/>
           <p:cNvSpPr/>
           <p:nvPr/>
         </p:nvSpPr>
@@ -6396,7 +7638,7 @@
       </p:sp>
       <p:sp>
         <p:nvSpPr>
-          <p:cNvPr id="16" name="Text 13"/>
+          <p:cNvPr id="23" name="Text 20"/>
           <p:cNvSpPr/>
           <p:nvPr/>
         </p:nvSpPr>
@@ -6583,7 +7825,214 @@
       </p:sp>
       <p:sp>
         <p:nvSpPr>
-          <p:cNvPr id="5" name="Text 2"/>
+          <p:cNvPr id="5" name="Shape 2"/>
+          <p:cNvSpPr/>
+          <p:nvPr/>
+        </p:nvSpPr>
+        <p:spPr>
+          <a:xfrm>
+            <a:off x="8732520" y="109728"/>
+            <a:ext cx="2926080" cy="896112"/>
+          </a:xfrm>
+          <a:prstGeom prst="roundRect">
+            <a:avLst>
+              <a:gd name="adj" fmla="val 7143"/>
+            </a:avLst>
+          </a:prstGeom>
+          <a:solidFill>
+            <a:srgbClr val="F7F5F0"/>
+          </a:solidFill>
+          <a:ln w="12700">
+            <a:solidFill>
+              <a:srgbClr val="DCE3EA"/>
+            </a:solidFill>
+            <a:prstDash val="solid"/>
+          </a:ln>
+        </p:spPr>
+      </p:sp>
+      <p:sp>
+        <p:nvSpPr>
+          <p:cNvPr id="6" name="Shape 3"/>
+          <p:cNvSpPr/>
+          <p:nvPr/>
+        </p:nvSpPr>
+        <p:spPr>
+          <a:xfrm>
+            <a:off x="8732520" y="109728"/>
+            <a:ext cx="2926080" cy="237744"/>
+          </a:xfrm>
+          <a:prstGeom prst="roundRect">
+            <a:avLst>
+              <a:gd name="adj" fmla="val 26923"/>
+            </a:avLst>
+          </a:prstGeom>
+          <a:solidFill>
+            <a:srgbClr val="0D1E2E"/>
+          </a:solidFill>
+          <a:ln w="12700">
+            <a:solidFill>
+              <a:srgbClr val="0D1E2E"/>
+            </a:solidFill>
+            <a:prstDash val="solid"/>
+          </a:ln>
+        </p:spPr>
+      </p:sp>
+      <p:sp>
+        <p:nvSpPr>
+          <p:cNvPr id="7" name="Shape 4"/>
+          <p:cNvSpPr/>
+          <p:nvPr/>
+        </p:nvSpPr>
+        <p:spPr>
+          <a:xfrm>
+            <a:off x="8823960" y="182880"/>
+            <a:ext cx="91440" cy="91440"/>
+          </a:xfrm>
+          <a:prstGeom prst="ellipse">
+            <a:avLst/>
+          </a:prstGeom>
+          <a:solidFill>
+            <a:srgbClr val="E8837A"/>
+          </a:solidFill>
+          <a:ln w="12700">
+            <a:solidFill>
+              <a:srgbClr val="E8837A"/>
+            </a:solidFill>
+            <a:prstDash val="solid"/>
+          </a:ln>
+        </p:spPr>
+      </p:sp>
+      <p:sp>
+        <p:nvSpPr>
+          <p:cNvPr id="8" name="Shape 5"/>
+          <p:cNvSpPr/>
+          <p:nvPr/>
+        </p:nvSpPr>
+        <p:spPr>
+          <a:xfrm>
+            <a:off x="8970264" y="182880"/>
+            <a:ext cx="91440" cy="91440"/>
+          </a:xfrm>
+          <a:prstGeom prst="ellipse">
+            <a:avLst/>
+          </a:prstGeom>
+          <a:solidFill>
+            <a:srgbClr val="F4A825"/>
+          </a:solidFill>
+          <a:ln w="12700">
+            <a:solidFill>
+              <a:srgbClr val="F4A825"/>
+            </a:solidFill>
+            <a:prstDash val="solid"/>
+          </a:ln>
+        </p:spPr>
+      </p:sp>
+      <p:sp>
+        <p:nvSpPr>
+          <p:cNvPr id="9" name="Shape 6"/>
+          <p:cNvSpPr/>
+          <p:nvPr/>
+        </p:nvSpPr>
+        <p:spPr>
+          <a:xfrm>
+            <a:off x="9116568" y="182880"/>
+            <a:ext cx="91440" cy="91440"/>
+          </a:xfrm>
+          <a:prstGeom prst="ellipse">
+            <a:avLst/>
+          </a:prstGeom>
+          <a:solidFill>
+            <a:srgbClr val="2E7D5B"/>
+          </a:solidFill>
+          <a:ln w="12700">
+            <a:solidFill>
+              <a:srgbClr val="2E7D5B"/>
+            </a:solidFill>
+            <a:prstDash val="solid"/>
+          </a:ln>
+        </p:spPr>
+      </p:sp>
+      <p:sp>
+        <p:nvSpPr>
+          <p:cNvPr id="10" name="Text 7"/>
+          <p:cNvSpPr/>
+          <p:nvPr/>
+        </p:nvSpPr>
+        <p:spPr>
+          <a:xfrm>
+            <a:off x="9299448" y="109728"/>
+            <a:ext cx="2286000" cy="237744"/>
+          </a:xfrm>
+          <a:prstGeom prst="rect">
+            <a:avLst/>
+          </a:prstGeom>
+          <a:noFill/>
+          <a:ln/>
+        </p:spPr>
+        <p:txBody>
+          <a:bodyPr wrap="square" lIns="0" tIns="0" rIns="0" bIns="0" rtlCol="0" anchor="ctr"/>
+          <a:lstStyle/>
+          <a:p>
+            <a:pPr indent="0" marL="0">
+              <a:buNone/>
+            </a:pPr>
+            <a:r>
+              <a:rPr lang="en-US" sz="800" b="1" spc="100" kern="0" dirty="0">
+                <a:solidFill>
+                  <a:srgbClr val="9FB2C2"/>
+                </a:solidFill>
+                <a:latin typeface="Inter" pitchFamily="34" charset="0"/>
+                <a:ea typeface="Inter" pitchFamily="34" charset="-122"/>
+                <a:cs typeface="Inter" pitchFamily="34" charset="-120"/>
+              </a:rPr>
+              <a:t>MS. RIVERA'S SCREEN · SO FAR</a:t>
+            </a:r>
+            <a:endParaRPr lang="en-US" sz="800" dirty="0"/>
+          </a:p>
+        </p:txBody>
+      </p:sp>
+      <p:sp>
+        <p:nvSpPr>
+          <p:cNvPr id="11" name="Text 8"/>
+          <p:cNvSpPr/>
+          <p:nvPr/>
+        </p:nvSpPr>
+        <p:spPr>
+          <a:xfrm>
+            <a:off x="8860536" y="365760"/>
+            <a:ext cx="2670048" cy="566928"/>
+          </a:xfrm>
+          <a:prstGeom prst="rect">
+            <a:avLst/>
+          </a:prstGeom>
+          <a:noFill/>
+          <a:ln/>
+        </p:spPr>
+        <p:txBody>
+          <a:bodyPr wrap="square" lIns="0" tIns="0" rIns="0" bIns="0" rtlCol="0" anchor="ctr"/>
+          <a:lstStyle/>
+          <a:p>
+            <a:pPr indent="0" marL="0">
+              <a:buNone/>
+            </a:pPr>
+            <a:r>
+              <a:rPr lang="en-US" sz="1000" dirty="0">
+                <a:solidFill>
+                  <a:srgbClr val="1B1F24"/>
+                </a:solidFill>
+                <a:latin typeface="Inter" pitchFamily="34" charset="0"/>
+                <a:ea typeface="Inter" pitchFamily="34" charset="-122"/>
+                <a:cs typeface="Inter" pitchFamily="34" charset="-120"/>
+              </a:rPr>
+              <a:t>Her excerpt rule: anonymous or described, never pasted with identity.</a:t>
+            </a:r>
+            <a:endParaRPr lang="en-US" sz="1000" dirty="0"/>
+          </a:p>
+        </p:txBody>
+      </p:sp>
+      <p:sp>
+        <p:nvSpPr>
+          <p:cNvPr id="12" name="Text 9"/>
           <p:cNvSpPr/>
           <p:nvPr/>
         </p:nvSpPr>
@@ -6622,7 +8071,7 @@
       </p:sp>
       <p:sp>
         <p:nvSpPr>
-          <p:cNvPr id="6" name="Text 3"/>
+          <p:cNvPr id="13" name="Text 10"/>
           <p:cNvSpPr/>
           <p:nvPr/>
         </p:nvSpPr>
@@ -6661,7 +8110,7 @@
       </p:sp>
       <p:sp>
         <p:nvSpPr>
-          <p:cNvPr id="7" name="Shape 4"/>
+          <p:cNvPr id="14" name="Shape 11"/>
           <p:cNvSpPr/>
           <p:nvPr/>
         </p:nvSpPr>
@@ -6688,7 +8137,7 @@
       </p:sp>
       <p:sp>
         <p:nvSpPr>
-          <p:cNvPr id="8" name="Text 5"/>
+          <p:cNvPr id="15" name="Text 12"/>
           <p:cNvSpPr/>
           <p:nvPr/>
         </p:nvSpPr>
@@ -6727,7 +8176,7 @@
       </p:sp>
       <p:sp>
         <p:nvSpPr>
-          <p:cNvPr id="9" name="Text 6"/>
+          <p:cNvPr id="16" name="Text 13"/>
           <p:cNvSpPr/>
           <p:nvPr/>
         </p:nvSpPr>
@@ -6766,7 +8215,7 @@
       </p:sp>
       <p:sp>
         <p:nvSpPr>
-          <p:cNvPr id="10" name="Shape 7"/>
+          <p:cNvPr id="17" name="Shape 14"/>
           <p:cNvSpPr/>
           <p:nvPr/>
         </p:nvSpPr>
@@ -6793,7 +8242,7 @@
       </p:sp>
       <p:sp>
         <p:nvSpPr>
-          <p:cNvPr id="11" name="Text 8"/>
+          <p:cNvPr id="18" name="Text 15"/>
           <p:cNvSpPr/>
           <p:nvPr/>
         </p:nvSpPr>
@@ -6832,7 +8281,7 @@
       </p:sp>
       <p:sp>
         <p:nvSpPr>
-          <p:cNvPr id="12" name="Text 9"/>
+          <p:cNvPr id="19" name="Text 16"/>
           <p:cNvSpPr/>
           <p:nvPr/>
         </p:nvSpPr>
@@ -6871,7 +8320,7 @@
       </p:sp>
       <p:sp>
         <p:nvSpPr>
-          <p:cNvPr id="13" name="Text 10"/>
+          <p:cNvPr id="20" name="Text 17"/>
           <p:cNvSpPr/>
           <p:nvPr/>
         </p:nvSpPr>
@@ -7058,7 +8507,214 @@
       </p:sp>
       <p:sp>
         <p:nvSpPr>
-          <p:cNvPr id="5" name="Text 2"/>
+          <p:cNvPr id="5" name="Shape 2"/>
+          <p:cNvSpPr/>
+          <p:nvPr/>
+        </p:nvSpPr>
+        <p:spPr>
+          <a:xfrm>
+            <a:off x="8732520" y="109728"/>
+            <a:ext cx="2926080" cy="896112"/>
+          </a:xfrm>
+          <a:prstGeom prst="roundRect">
+            <a:avLst>
+              <a:gd name="adj" fmla="val 7143"/>
+            </a:avLst>
+          </a:prstGeom>
+          <a:solidFill>
+            <a:srgbClr val="F7F5F0"/>
+          </a:solidFill>
+          <a:ln w="12700">
+            <a:solidFill>
+              <a:srgbClr val="DCE3EA"/>
+            </a:solidFill>
+            <a:prstDash val="solid"/>
+          </a:ln>
+        </p:spPr>
+      </p:sp>
+      <p:sp>
+        <p:nvSpPr>
+          <p:cNvPr id="6" name="Shape 3"/>
+          <p:cNvSpPr/>
+          <p:nvPr/>
+        </p:nvSpPr>
+        <p:spPr>
+          <a:xfrm>
+            <a:off x="8732520" y="109728"/>
+            <a:ext cx="2926080" cy="237744"/>
+          </a:xfrm>
+          <a:prstGeom prst="roundRect">
+            <a:avLst>
+              <a:gd name="adj" fmla="val 26923"/>
+            </a:avLst>
+          </a:prstGeom>
+          <a:solidFill>
+            <a:srgbClr val="0D1E2E"/>
+          </a:solidFill>
+          <a:ln w="12700">
+            <a:solidFill>
+              <a:srgbClr val="0D1E2E"/>
+            </a:solidFill>
+            <a:prstDash val="solid"/>
+          </a:ln>
+        </p:spPr>
+      </p:sp>
+      <p:sp>
+        <p:nvSpPr>
+          <p:cNvPr id="7" name="Shape 4"/>
+          <p:cNvSpPr/>
+          <p:nvPr/>
+        </p:nvSpPr>
+        <p:spPr>
+          <a:xfrm>
+            <a:off x="8823960" y="182880"/>
+            <a:ext cx="91440" cy="91440"/>
+          </a:xfrm>
+          <a:prstGeom prst="ellipse">
+            <a:avLst/>
+          </a:prstGeom>
+          <a:solidFill>
+            <a:srgbClr val="E8837A"/>
+          </a:solidFill>
+          <a:ln w="12700">
+            <a:solidFill>
+              <a:srgbClr val="E8837A"/>
+            </a:solidFill>
+            <a:prstDash val="solid"/>
+          </a:ln>
+        </p:spPr>
+      </p:sp>
+      <p:sp>
+        <p:nvSpPr>
+          <p:cNvPr id="8" name="Shape 5"/>
+          <p:cNvSpPr/>
+          <p:nvPr/>
+        </p:nvSpPr>
+        <p:spPr>
+          <a:xfrm>
+            <a:off x="8970264" y="182880"/>
+            <a:ext cx="91440" cy="91440"/>
+          </a:xfrm>
+          <a:prstGeom prst="ellipse">
+            <a:avLst/>
+          </a:prstGeom>
+          <a:solidFill>
+            <a:srgbClr val="F4A825"/>
+          </a:solidFill>
+          <a:ln w="12700">
+            <a:solidFill>
+              <a:srgbClr val="F4A825"/>
+            </a:solidFill>
+            <a:prstDash val="solid"/>
+          </a:ln>
+        </p:spPr>
+      </p:sp>
+      <p:sp>
+        <p:nvSpPr>
+          <p:cNvPr id="9" name="Shape 6"/>
+          <p:cNvSpPr/>
+          <p:nvPr/>
+        </p:nvSpPr>
+        <p:spPr>
+          <a:xfrm>
+            <a:off x="9116568" y="182880"/>
+            <a:ext cx="91440" cy="91440"/>
+          </a:xfrm>
+          <a:prstGeom prst="ellipse">
+            <a:avLst/>
+          </a:prstGeom>
+          <a:solidFill>
+            <a:srgbClr val="2E7D5B"/>
+          </a:solidFill>
+          <a:ln w="12700">
+            <a:solidFill>
+              <a:srgbClr val="2E7D5B"/>
+            </a:solidFill>
+            <a:prstDash val="solid"/>
+          </a:ln>
+        </p:spPr>
+      </p:sp>
+      <p:sp>
+        <p:nvSpPr>
+          <p:cNvPr id="10" name="Text 7"/>
+          <p:cNvSpPr/>
+          <p:nvPr/>
+        </p:nvSpPr>
+        <p:spPr>
+          <a:xfrm>
+            <a:off x="9299448" y="109728"/>
+            <a:ext cx="2286000" cy="237744"/>
+          </a:xfrm>
+          <a:prstGeom prst="rect">
+            <a:avLst/>
+          </a:prstGeom>
+          <a:noFill/>
+          <a:ln/>
+        </p:spPr>
+        <p:txBody>
+          <a:bodyPr wrap="square" lIns="0" tIns="0" rIns="0" bIns="0" rtlCol="0" anchor="ctr"/>
+          <a:lstStyle/>
+          <a:p>
+            <a:pPr indent="0" marL="0">
+              <a:buNone/>
+            </a:pPr>
+            <a:r>
+              <a:rPr lang="en-US" sz="800" b="1" spc="100" kern="0" dirty="0">
+                <a:solidFill>
+                  <a:srgbClr val="9FB2C2"/>
+                </a:solidFill>
+                <a:latin typeface="Inter" pitchFamily="34" charset="0"/>
+                <a:ea typeface="Inter" pitchFamily="34" charset="-122"/>
+                <a:cs typeface="Inter" pitchFamily="34" charset="-120"/>
+              </a:rPr>
+              <a:t>MS. RIVERA'S SCREEN · SO FAR</a:t>
+            </a:r>
+            <a:endParaRPr lang="en-US" sz="800" dirty="0"/>
+          </a:p>
+        </p:txBody>
+      </p:sp>
+      <p:sp>
+        <p:nvSpPr>
+          <p:cNvPr id="11" name="Text 8"/>
+          <p:cNvSpPr/>
+          <p:nvPr/>
+        </p:nvSpPr>
+        <p:spPr>
+          <a:xfrm>
+            <a:off x="8860536" y="365760"/>
+            <a:ext cx="2670048" cy="566928"/>
+          </a:xfrm>
+          <a:prstGeom prst="rect">
+            <a:avLst/>
+          </a:prstGeom>
+          <a:noFill/>
+          <a:ln/>
+        </p:spPr>
+        <p:txBody>
+          <a:bodyPr wrap="square" lIns="0" tIns="0" rIns="0" bIns="0" rtlCol="0" anchor="ctr"/>
+          <a:lstStyle/>
+          <a:p>
+            <a:pPr indent="0" marL="0">
+              <a:buNone/>
+            </a:pPr>
+            <a:r>
+              <a:rPr lang="en-US" sz="1000" dirty="0">
+                <a:solidFill>
+                  <a:srgbClr val="1B1F24"/>
+                </a:solidFill>
+                <a:latin typeface="Inter" pitchFamily="34" charset="0"/>
+                <a:ea typeface="Inter" pitchFamily="34" charset="-122"/>
+                <a:cs typeface="Inter" pitchFamily="34" charset="-120"/>
+              </a:rPr>
+              <a:t>Her red lines, adopted out loud, with the presenter's own.</a:t>
+            </a:r>
+            <a:endParaRPr lang="en-US" sz="1000" dirty="0"/>
+          </a:p>
+        </p:txBody>
+      </p:sp>
+      <p:sp>
+        <p:nvSpPr>
+          <p:cNvPr id="12" name="Text 9"/>
           <p:cNvSpPr/>
           <p:nvPr/>
         </p:nvSpPr>
@@ -7097,7 +8753,7 @@
       </p:sp>
       <p:sp>
         <p:nvSpPr>
-          <p:cNvPr id="6" name="Text 3"/>
+          <p:cNvPr id="13" name="Text 10"/>
           <p:cNvSpPr/>
           <p:nvPr/>
         </p:nvSpPr>
@@ -7136,7 +8792,7 @@
       </p:sp>
       <p:sp>
         <p:nvSpPr>
-          <p:cNvPr id="7" name="Shape 4"/>
+          <p:cNvPr id="14" name="Shape 11"/>
           <p:cNvSpPr/>
           <p:nvPr/>
         </p:nvSpPr>
@@ -7163,7 +8819,7 @@
       </p:sp>
       <p:sp>
         <p:nvSpPr>
-          <p:cNvPr id="8" name="Text 5"/>
+          <p:cNvPr id="15" name="Text 12"/>
           <p:cNvSpPr/>
           <p:nvPr/>
         </p:nvSpPr>
@@ -7202,7 +8858,7 @@
       </p:sp>
       <p:sp>
         <p:nvSpPr>
-          <p:cNvPr id="9" name="Text 6"/>
+          <p:cNvPr id="16" name="Text 13"/>
           <p:cNvSpPr/>
           <p:nvPr/>
         </p:nvSpPr>
@@ -7241,7 +8897,7 @@
       </p:sp>
       <p:sp>
         <p:nvSpPr>
-          <p:cNvPr id="10" name="Shape 7"/>
+          <p:cNvPr id="17" name="Shape 14"/>
           <p:cNvSpPr/>
           <p:nvPr/>
         </p:nvSpPr>
@@ -7268,7 +8924,7 @@
       </p:sp>
       <p:sp>
         <p:nvSpPr>
-          <p:cNvPr id="11" name="Text 8"/>
+          <p:cNvPr id="18" name="Text 15"/>
           <p:cNvSpPr/>
           <p:nvPr/>
         </p:nvSpPr>
@@ -7307,7 +8963,7 @@
       </p:sp>
       <p:sp>
         <p:nvSpPr>
-          <p:cNvPr id="12" name="Text 9"/>
+          <p:cNvPr id="19" name="Text 16"/>
           <p:cNvSpPr/>
           <p:nvPr/>
         </p:nvSpPr>
@@ -7346,7 +9002,7 @@
       </p:sp>
       <p:sp>
         <p:nvSpPr>
-          <p:cNvPr id="13" name="Shape 10"/>
+          <p:cNvPr id="20" name="Shape 17"/>
           <p:cNvSpPr/>
           <p:nvPr/>
         </p:nvSpPr>
@@ -7373,7 +9029,7 @@
       </p:sp>
       <p:sp>
         <p:nvSpPr>
-          <p:cNvPr id="14" name="Text 11"/>
+          <p:cNvPr id="21" name="Text 18"/>
           <p:cNvSpPr/>
           <p:nvPr/>
         </p:nvSpPr>
@@ -7412,7 +9068,7 @@
       </p:sp>
       <p:sp>
         <p:nvSpPr>
-          <p:cNvPr id="15" name="Text 12"/>
+          <p:cNvPr id="22" name="Text 19"/>
           <p:cNvSpPr/>
           <p:nvPr/>
         </p:nvSpPr>
@@ -7451,7 +9107,7 @@
       </p:sp>
       <p:sp>
         <p:nvSpPr>
-          <p:cNvPr id="16" name="Text 13"/>
+          <p:cNvPr id="23" name="Text 20"/>
           <p:cNvSpPr/>
           <p:nvPr/>
         </p:nvSpPr>
@@ -7638,7 +9294,214 @@
       </p:sp>
       <p:sp>
         <p:nvSpPr>
-          <p:cNvPr id="5" name="Text 2"/>
+          <p:cNvPr id="5" name="Shape 2"/>
+          <p:cNvSpPr/>
+          <p:nvPr/>
+        </p:nvSpPr>
+        <p:spPr>
+          <a:xfrm>
+            <a:off x="8732520" y="109728"/>
+            <a:ext cx="2926080" cy="896112"/>
+          </a:xfrm>
+          <a:prstGeom prst="roundRect">
+            <a:avLst>
+              <a:gd name="adj" fmla="val 7143"/>
+            </a:avLst>
+          </a:prstGeom>
+          <a:solidFill>
+            <a:srgbClr val="1E3A50"/>
+          </a:solidFill>
+          <a:ln w="12700">
+            <a:solidFill>
+              <a:srgbClr val="2A4A63"/>
+            </a:solidFill>
+            <a:prstDash val="solid"/>
+          </a:ln>
+        </p:spPr>
+      </p:sp>
+      <p:sp>
+        <p:nvSpPr>
+          <p:cNvPr id="6" name="Shape 3"/>
+          <p:cNvSpPr/>
+          <p:nvPr/>
+        </p:nvSpPr>
+        <p:spPr>
+          <a:xfrm>
+            <a:off x="8732520" y="109728"/>
+            <a:ext cx="2926080" cy="237744"/>
+          </a:xfrm>
+          <a:prstGeom prst="roundRect">
+            <a:avLst>
+              <a:gd name="adj" fmla="val 26923"/>
+            </a:avLst>
+          </a:prstGeom>
+          <a:solidFill>
+            <a:srgbClr val="0D1E2E"/>
+          </a:solidFill>
+          <a:ln w="12700">
+            <a:solidFill>
+              <a:srgbClr val="0D1E2E"/>
+            </a:solidFill>
+            <a:prstDash val="solid"/>
+          </a:ln>
+        </p:spPr>
+      </p:sp>
+      <p:sp>
+        <p:nvSpPr>
+          <p:cNvPr id="7" name="Shape 4"/>
+          <p:cNvSpPr/>
+          <p:nvPr/>
+        </p:nvSpPr>
+        <p:spPr>
+          <a:xfrm>
+            <a:off x="8823960" y="182880"/>
+            <a:ext cx="91440" cy="91440"/>
+          </a:xfrm>
+          <a:prstGeom prst="ellipse">
+            <a:avLst/>
+          </a:prstGeom>
+          <a:solidFill>
+            <a:srgbClr val="E8837A"/>
+          </a:solidFill>
+          <a:ln w="12700">
+            <a:solidFill>
+              <a:srgbClr val="E8837A"/>
+            </a:solidFill>
+            <a:prstDash val="solid"/>
+          </a:ln>
+        </p:spPr>
+      </p:sp>
+      <p:sp>
+        <p:nvSpPr>
+          <p:cNvPr id="8" name="Shape 5"/>
+          <p:cNvSpPr/>
+          <p:nvPr/>
+        </p:nvSpPr>
+        <p:spPr>
+          <a:xfrm>
+            <a:off x="8970264" y="182880"/>
+            <a:ext cx="91440" cy="91440"/>
+          </a:xfrm>
+          <a:prstGeom prst="ellipse">
+            <a:avLst/>
+          </a:prstGeom>
+          <a:solidFill>
+            <a:srgbClr val="F4A825"/>
+          </a:solidFill>
+          <a:ln w="12700">
+            <a:solidFill>
+              <a:srgbClr val="F4A825"/>
+            </a:solidFill>
+            <a:prstDash val="solid"/>
+          </a:ln>
+        </p:spPr>
+      </p:sp>
+      <p:sp>
+        <p:nvSpPr>
+          <p:cNvPr id="9" name="Shape 6"/>
+          <p:cNvSpPr/>
+          <p:nvPr/>
+        </p:nvSpPr>
+        <p:spPr>
+          <a:xfrm>
+            <a:off x="9116568" y="182880"/>
+            <a:ext cx="91440" cy="91440"/>
+          </a:xfrm>
+          <a:prstGeom prst="ellipse">
+            <a:avLst/>
+          </a:prstGeom>
+          <a:solidFill>
+            <a:srgbClr val="2E7D5B"/>
+          </a:solidFill>
+          <a:ln w="12700">
+            <a:solidFill>
+              <a:srgbClr val="2E7D5B"/>
+            </a:solidFill>
+            <a:prstDash val="solid"/>
+          </a:ln>
+        </p:spPr>
+      </p:sp>
+      <p:sp>
+        <p:nvSpPr>
+          <p:cNvPr id="10" name="Text 7"/>
+          <p:cNvSpPr/>
+          <p:nvPr/>
+        </p:nvSpPr>
+        <p:spPr>
+          <a:xfrm>
+            <a:off x="9299448" y="109728"/>
+            <a:ext cx="2286000" cy="237744"/>
+          </a:xfrm>
+          <a:prstGeom prst="rect">
+            <a:avLst/>
+          </a:prstGeom>
+          <a:noFill/>
+          <a:ln/>
+        </p:spPr>
+        <p:txBody>
+          <a:bodyPr wrap="square" lIns="0" tIns="0" rIns="0" bIns="0" rtlCol="0" anchor="ctr"/>
+          <a:lstStyle/>
+          <a:p>
+            <a:pPr indent="0" marL="0">
+              <a:buNone/>
+            </a:pPr>
+            <a:r>
+              <a:rPr lang="en-US" sz="800" b="1" spc="100" kern="0" dirty="0">
+                <a:solidFill>
+                  <a:srgbClr val="9FB2C2"/>
+                </a:solidFill>
+                <a:latin typeface="Inter" pitchFamily="34" charset="0"/>
+                <a:ea typeface="Inter" pitchFamily="34" charset="-122"/>
+                <a:cs typeface="Inter" pitchFamily="34" charset="-120"/>
+              </a:rPr>
+              <a:t>MS. RIVERA'S SCREEN · SO FAR</a:t>
+            </a:r>
+            <a:endParaRPr lang="en-US" sz="800" dirty="0"/>
+          </a:p>
+        </p:txBody>
+      </p:sp>
+      <p:sp>
+        <p:nvSpPr>
+          <p:cNvPr id="11" name="Text 8"/>
+          <p:cNvSpPr/>
+          <p:nvPr/>
+        </p:nvSpPr>
+        <p:spPr>
+          <a:xfrm>
+            <a:off x="8860536" y="365760"/>
+            <a:ext cx="2670048" cy="566928"/>
+          </a:xfrm>
+          <a:prstGeom prst="rect">
+            <a:avLst/>
+          </a:prstGeom>
+          <a:noFill/>
+          <a:ln/>
+        </p:spPr>
+        <p:txBody>
+          <a:bodyPr wrap="square" lIns="0" tIns="0" rIns="0" bIns="0" rtlCol="0" anchor="ctr"/>
+          <a:lstStyle/>
+          <a:p>
+            <a:pPr indent="0" marL="0">
+              <a:buNone/>
+            </a:pPr>
+            <a:r>
+              <a:rPr lang="en-US" sz="1000" dirty="0">
+                <a:solidFill>
+                  <a:srgbClr val="C9D4DE"/>
+                </a:solidFill>
+                <a:latin typeface="Inter" pitchFamily="34" charset="0"/>
+                <a:ea typeface="Inter" pitchFamily="34" charset="-122"/>
+                <a:cs typeface="Inter" pitchFamily="34" charset="-120"/>
+              </a:rPr>
+              <a:t>Her lab: the assessment on her calendar, materials built tonight-free.</a:t>
+            </a:r>
+            <a:endParaRPr lang="en-US" sz="1000" dirty="0"/>
+          </a:p>
+        </p:txBody>
+      </p:sp>
+      <p:sp>
+        <p:nvSpPr>
+          <p:cNvPr id="12" name="Text 9"/>
           <p:cNvSpPr/>
           <p:nvPr/>
         </p:nvSpPr>
@@ -7677,7 +9540,7 @@
       </p:sp>
       <p:sp>
         <p:nvSpPr>
-          <p:cNvPr id="6" name="Text 3"/>
+          <p:cNvPr id="13" name="Text 10"/>
           <p:cNvSpPr/>
           <p:nvPr/>
         </p:nvSpPr>
@@ -7716,7 +9579,7 @@
       </p:sp>
       <p:sp>
         <p:nvSpPr>
-          <p:cNvPr id="7" name="Text 4"/>
+          <p:cNvPr id="14" name="Text 11"/>
           <p:cNvSpPr/>
           <p:nvPr/>
         </p:nvSpPr>
@@ -7755,7 +9618,7 @@
       </p:sp>
       <p:sp>
         <p:nvSpPr>
-          <p:cNvPr id="8" name="Shape 5"/>
+          <p:cNvPr id="15" name="Shape 12"/>
           <p:cNvSpPr/>
           <p:nvPr/>
         </p:nvSpPr>
@@ -7780,7 +9643,7 @@
       </p:sp>
       <p:sp>
         <p:nvSpPr>
-          <p:cNvPr id="9" name="Text 6"/>
+          <p:cNvPr id="16" name="Text 13"/>
           <p:cNvSpPr/>
           <p:nvPr/>
         </p:nvSpPr>
@@ -7819,7 +9682,7 @@
       </p:sp>
       <p:sp>
         <p:nvSpPr>
-          <p:cNvPr id="10" name="Text 7"/>
+          <p:cNvPr id="17" name="Text 14"/>
           <p:cNvSpPr/>
           <p:nvPr/>
         </p:nvSpPr>
@@ -7858,7 +9721,7 @@
       </p:sp>
       <p:sp>
         <p:nvSpPr>
-          <p:cNvPr id="11" name="Shape 8"/>
+          <p:cNvPr id="18" name="Shape 15"/>
           <p:cNvSpPr/>
           <p:nvPr/>
         </p:nvSpPr>
@@ -7883,7 +9746,7 @@
       </p:sp>
       <p:sp>
         <p:nvSpPr>
-          <p:cNvPr id="12" name="Text 9"/>
+          <p:cNvPr id="19" name="Text 16"/>
           <p:cNvSpPr/>
           <p:nvPr/>
         </p:nvSpPr>
@@ -7922,7 +9785,7 @@
       </p:sp>
       <p:sp>
         <p:nvSpPr>
-          <p:cNvPr id="13" name="Text 10"/>
+          <p:cNvPr id="20" name="Text 17"/>
           <p:cNvSpPr/>
           <p:nvPr/>
         </p:nvSpPr>
@@ -7961,7 +9824,7 @@
       </p:sp>
       <p:sp>
         <p:nvSpPr>
-          <p:cNvPr id="14" name="Shape 11"/>
+          <p:cNvPr id="21" name="Shape 18"/>
           <p:cNvSpPr/>
           <p:nvPr/>
         </p:nvSpPr>
@@ -7986,7 +9849,7 @@
       </p:sp>
       <p:sp>
         <p:nvSpPr>
-          <p:cNvPr id="15" name="Text 12"/>
+          <p:cNvPr id="22" name="Text 19"/>
           <p:cNvSpPr/>
           <p:nvPr/>
         </p:nvSpPr>
@@ -8025,7 +9888,7 @@
       </p:sp>
       <p:sp>
         <p:nvSpPr>
-          <p:cNvPr id="16" name="Text 13"/>
+          <p:cNvPr id="23" name="Text 20"/>
           <p:cNvSpPr/>
           <p:nvPr/>
         </p:nvSpPr>
@@ -8212,7 +10075,214 @@
       </p:sp>
       <p:sp>
         <p:nvSpPr>
-          <p:cNvPr id="5" name="Text 2"/>
+          <p:cNvPr id="5" name="Shape 2"/>
+          <p:cNvSpPr/>
+          <p:nvPr/>
+        </p:nvSpPr>
+        <p:spPr>
+          <a:xfrm>
+            <a:off x="8732520" y="109728"/>
+            <a:ext cx="2926080" cy="896112"/>
+          </a:xfrm>
+          <a:prstGeom prst="roundRect">
+            <a:avLst>
+              <a:gd name="adj" fmla="val 7143"/>
+            </a:avLst>
+          </a:prstGeom>
+          <a:solidFill>
+            <a:srgbClr val="F7F5F0"/>
+          </a:solidFill>
+          <a:ln w="12700">
+            <a:solidFill>
+              <a:srgbClr val="DCE3EA"/>
+            </a:solidFill>
+            <a:prstDash val="solid"/>
+          </a:ln>
+        </p:spPr>
+      </p:sp>
+      <p:sp>
+        <p:nvSpPr>
+          <p:cNvPr id="6" name="Shape 3"/>
+          <p:cNvSpPr/>
+          <p:nvPr/>
+        </p:nvSpPr>
+        <p:spPr>
+          <a:xfrm>
+            <a:off x="8732520" y="109728"/>
+            <a:ext cx="2926080" cy="237744"/>
+          </a:xfrm>
+          <a:prstGeom prst="roundRect">
+            <a:avLst>
+              <a:gd name="adj" fmla="val 26923"/>
+            </a:avLst>
+          </a:prstGeom>
+          <a:solidFill>
+            <a:srgbClr val="0D1E2E"/>
+          </a:solidFill>
+          <a:ln w="12700">
+            <a:solidFill>
+              <a:srgbClr val="0D1E2E"/>
+            </a:solidFill>
+            <a:prstDash val="solid"/>
+          </a:ln>
+        </p:spPr>
+      </p:sp>
+      <p:sp>
+        <p:nvSpPr>
+          <p:cNvPr id="7" name="Shape 4"/>
+          <p:cNvSpPr/>
+          <p:nvPr/>
+        </p:nvSpPr>
+        <p:spPr>
+          <a:xfrm>
+            <a:off x="8823960" y="182880"/>
+            <a:ext cx="91440" cy="91440"/>
+          </a:xfrm>
+          <a:prstGeom prst="ellipse">
+            <a:avLst/>
+          </a:prstGeom>
+          <a:solidFill>
+            <a:srgbClr val="E8837A"/>
+          </a:solidFill>
+          <a:ln w="12700">
+            <a:solidFill>
+              <a:srgbClr val="E8837A"/>
+            </a:solidFill>
+            <a:prstDash val="solid"/>
+          </a:ln>
+        </p:spPr>
+      </p:sp>
+      <p:sp>
+        <p:nvSpPr>
+          <p:cNvPr id="8" name="Shape 5"/>
+          <p:cNvSpPr/>
+          <p:nvPr/>
+        </p:nvSpPr>
+        <p:spPr>
+          <a:xfrm>
+            <a:off x="8970264" y="182880"/>
+            <a:ext cx="91440" cy="91440"/>
+          </a:xfrm>
+          <a:prstGeom prst="ellipse">
+            <a:avLst/>
+          </a:prstGeom>
+          <a:solidFill>
+            <a:srgbClr val="F4A825"/>
+          </a:solidFill>
+          <a:ln w="12700">
+            <a:solidFill>
+              <a:srgbClr val="F4A825"/>
+            </a:solidFill>
+            <a:prstDash val="solid"/>
+          </a:ln>
+        </p:spPr>
+      </p:sp>
+      <p:sp>
+        <p:nvSpPr>
+          <p:cNvPr id="9" name="Shape 6"/>
+          <p:cNvSpPr/>
+          <p:nvPr/>
+        </p:nvSpPr>
+        <p:spPr>
+          <a:xfrm>
+            <a:off x="9116568" y="182880"/>
+            <a:ext cx="91440" cy="91440"/>
+          </a:xfrm>
+          <a:prstGeom prst="ellipse">
+            <a:avLst/>
+          </a:prstGeom>
+          <a:solidFill>
+            <a:srgbClr val="2E7D5B"/>
+          </a:solidFill>
+          <a:ln w="12700">
+            <a:solidFill>
+              <a:srgbClr val="2E7D5B"/>
+            </a:solidFill>
+            <a:prstDash val="solid"/>
+          </a:ln>
+        </p:spPr>
+      </p:sp>
+      <p:sp>
+        <p:nvSpPr>
+          <p:cNvPr id="10" name="Text 7"/>
+          <p:cNvSpPr/>
+          <p:nvPr/>
+        </p:nvSpPr>
+        <p:spPr>
+          <a:xfrm>
+            <a:off x="9299448" y="109728"/>
+            <a:ext cx="2286000" cy="237744"/>
+          </a:xfrm>
+          <a:prstGeom prst="rect">
+            <a:avLst/>
+          </a:prstGeom>
+          <a:noFill/>
+          <a:ln/>
+        </p:spPr>
+        <p:txBody>
+          <a:bodyPr wrap="square" lIns="0" tIns="0" rIns="0" bIns="0" rtlCol="0" anchor="ctr"/>
+          <a:lstStyle/>
+          <a:p>
+            <a:pPr indent="0" marL="0">
+              <a:buNone/>
+            </a:pPr>
+            <a:r>
+              <a:rPr lang="en-US" sz="800" b="1" spc="100" kern="0" dirty="0">
+                <a:solidFill>
+                  <a:srgbClr val="9FB2C2"/>
+                </a:solidFill>
+                <a:latin typeface="Inter" pitchFamily="34" charset="0"/>
+                <a:ea typeface="Inter" pitchFamily="34" charset="-122"/>
+                <a:cs typeface="Inter" pitchFamily="34" charset="-120"/>
+              </a:rPr>
+              <a:t>MS. RIVERA'S SCREEN · SO FAR</a:t>
+            </a:r>
+            <a:endParaRPr lang="en-US" sz="800" dirty="0"/>
+          </a:p>
+        </p:txBody>
+      </p:sp>
+      <p:sp>
+        <p:nvSpPr>
+          <p:cNvPr id="11" name="Text 8"/>
+          <p:cNvSpPr/>
+          <p:nvPr/>
+        </p:nvSpPr>
+        <p:spPr>
+          <a:xfrm>
+            <a:off x="8860536" y="365760"/>
+            <a:ext cx="2670048" cy="566928"/>
+          </a:xfrm>
+          <a:prstGeom prst="rect">
+            <a:avLst/>
+          </a:prstGeom>
+          <a:noFill/>
+          <a:ln/>
+        </p:spPr>
+        <p:txBody>
+          <a:bodyPr wrap="square" lIns="0" tIns="0" rIns="0" bIns="0" rtlCol="0" anchor="ctr"/>
+          <a:lstStyle/>
+          <a:p>
+            <a:pPr indent="0" marL="0">
+              <a:buNone/>
+            </a:pPr>
+            <a:r>
+              <a:rPr lang="en-US" sz="1000" dirty="0">
+                <a:solidFill>
+                  <a:srgbClr val="1B1F24"/>
+                </a:solidFill>
+                <a:latin typeface="Inter" pitchFamily="34" charset="0"/>
+                <a:ea typeface="Inter" pitchFamily="34" charset="-122"/>
+                <a:cs typeface="Inter" pitchFamily="34" charset="-120"/>
+              </a:rPr>
+              <a:t>On her screen: notes in, rubric out, hand-it-to-a-student pass next.</a:t>
+            </a:r>
+            <a:endParaRPr lang="en-US" sz="1000" dirty="0"/>
+          </a:p>
+        </p:txBody>
+      </p:sp>
+      <p:sp>
+        <p:nvSpPr>
+          <p:cNvPr id="12" name="Text 9"/>
           <p:cNvSpPr/>
           <p:nvPr/>
         </p:nvSpPr>
@@ -8251,7 +10321,7 @@
       </p:sp>
       <p:sp>
         <p:nvSpPr>
-          <p:cNvPr id="6" name="Text 3"/>
+          <p:cNvPr id="13" name="Text 10"/>
           <p:cNvSpPr/>
           <p:nvPr/>
         </p:nvSpPr>
@@ -8290,7 +10360,7 @@
       </p:sp>
       <p:sp>
         <p:nvSpPr>
-          <p:cNvPr id="7" name="Shape 4"/>
+          <p:cNvPr id="14" name="Shape 11"/>
           <p:cNvSpPr/>
           <p:nvPr/>
         </p:nvSpPr>
@@ -8317,7 +10387,7 @@
       </p:sp>
       <p:sp>
         <p:nvSpPr>
-          <p:cNvPr id="8" name="Text 5"/>
+          <p:cNvPr id="15" name="Text 12"/>
           <p:cNvSpPr/>
           <p:nvPr/>
         </p:nvSpPr>
@@ -8356,7 +10426,7 @@
       </p:sp>
       <p:sp>
         <p:nvSpPr>
-          <p:cNvPr id="9" name="Shape 6"/>
+          <p:cNvPr id="16" name="Shape 13"/>
           <p:cNvSpPr/>
           <p:nvPr/>
         </p:nvSpPr>
@@ -8383,7 +10453,7 @@
       </p:sp>
       <p:sp>
         <p:nvSpPr>
-          <p:cNvPr id="10" name="Text 7"/>
+          <p:cNvPr id="17" name="Text 14"/>
           <p:cNvSpPr/>
           <p:nvPr/>
         </p:nvSpPr>
@@ -8422,7 +10492,7 @@
       </p:sp>
       <p:sp>
         <p:nvSpPr>
-          <p:cNvPr id="11" name="Shape 8"/>
+          <p:cNvPr id="18" name="Shape 15"/>
           <p:cNvSpPr/>
           <p:nvPr/>
         </p:nvSpPr>
@@ -8449,7 +10519,7 @@
       </p:sp>
       <p:sp>
         <p:nvSpPr>
-          <p:cNvPr id="12" name="Text 9"/>
+          <p:cNvPr id="19" name="Text 16"/>
           <p:cNvSpPr/>
           <p:nvPr/>
         </p:nvSpPr>
@@ -8488,7 +10558,7 @@
       </p:sp>
       <p:sp>
         <p:nvSpPr>
-          <p:cNvPr id="13" name="Shape 10"/>
+          <p:cNvPr id="20" name="Shape 17"/>
           <p:cNvSpPr/>
           <p:nvPr/>
         </p:nvSpPr>
@@ -8515,7 +10585,7 @@
       </p:sp>
       <p:sp>
         <p:nvSpPr>
-          <p:cNvPr id="14" name="Text 11"/>
+          <p:cNvPr id="21" name="Text 18"/>
           <p:cNvSpPr/>
           <p:nvPr/>
         </p:nvSpPr>
@@ -8554,7 +10624,7 @@
       </p:sp>
       <p:sp>
         <p:nvSpPr>
-          <p:cNvPr id="15" name="Text 12"/>
+          <p:cNvPr id="22" name="Text 19"/>
           <p:cNvSpPr/>
           <p:nvPr/>
         </p:nvSpPr>
@@ -8741,7 +10811,214 @@
       </p:sp>
       <p:sp>
         <p:nvSpPr>
-          <p:cNvPr id="5" name="Text 2"/>
+          <p:cNvPr id="5" name="Shape 2"/>
+          <p:cNvSpPr/>
+          <p:nvPr/>
+        </p:nvSpPr>
+        <p:spPr>
+          <a:xfrm>
+            <a:off x="8732520" y="109728"/>
+            <a:ext cx="2926080" cy="896112"/>
+          </a:xfrm>
+          <a:prstGeom prst="roundRect">
+            <a:avLst>
+              <a:gd name="adj" fmla="val 7143"/>
+            </a:avLst>
+          </a:prstGeom>
+          <a:solidFill>
+            <a:srgbClr val="F7F5F0"/>
+          </a:solidFill>
+          <a:ln w="12700">
+            <a:solidFill>
+              <a:srgbClr val="DCE3EA"/>
+            </a:solidFill>
+            <a:prstDash val="solid"/>
+          </a:ln>
+        </p:spPr>
+      </p:sp>
+      <p:sp>
+        <p:nvSpPr>
+          <p:cNvPr id="6" name="Shape 3"/>
+          <p:cNvSpPr/>
+          <p:nvPr/>
+        </p:nvSpPr>
+        <p:spPr>
+          <a:xfrm>
+            <a:off x="8732520" y="109728"/>
+            <a:ext cx="2926080" cy="237744"/>
+          </a:xfrm>
+          <a:prstGeom prst="roundRect">
+            <a:avLst>
+              <a:gd name="adj" fmla="val 26923"/>
+            </a:avLst>
+          </a:prstGeom>
+          <a:solidFill>
+            <a:srgbClr val="0D1E2E"/>
+          </a:solidFill>
+          <a:ln w="12700">
+            <a:solidFill>
+              <a:srgbClr val="0D1E2E"/>
+            </a:solidFill>
+            <a:prstDash val="solid"/>
+          </a:ln>
+        </p:spPr>
+      </p:sp>
+      <p:sp>
+        <p:nvSpPr>
+          <p:cNvPr id="7" name="Shape 4"/>
+          <p:cNvSpPr/>
+          <p:nvPr/>
+        </p:nvSpPr>
+        <p:spPr>
+          <a:xfrm>
+            <a:off x="8823960" y="182880"/>
+            <a:ext cx="91440" cy="91440"/>
+          </a:xfrm>
+          <a:prstGeom prst="ellipse">
+            <a:avLst/>
+          </a:prstGeom>
+          <a:solidFill>
+            <a:srgbClr val="E8837A"/>
+          </a:solidFill>
+          <a:ln w="12700">
+            <a:solidFill>
+              <a:srgbClr val="E8837A"/>
+            </a:solidFill>
+            <a:prstDash val="solid"/>
+          </a:ln>
+        </p:spPr>
+      </p:sp>
+      <p:sp>
+        <p:nvSpPr>
+          <p:cNvPr id="8" name="Shape 5"/>
+          <p:cNvSpPr/>
+          <p:nvPr/>
+        </p:nvSpPr>
+        <p:spPr>
+          <a:xfrm>
+            <a:off x="8970264" y="182880"/>
+            <a:ext cx="91440" cy="91440"/>
+          </a:xfrm>
+          <a:prstGeom prst="ellipse">
+            <a:avLst/>
+          </a:prstGeom>
+          <a:solidFill>
+            <a:srgbClr val="F4A825"/>
+          </a:solidFill>
+          <a:ln w="12700">
+            <a:solidFill>
+              <a:srgbClr val="F4A825"/>
+            </a:solidFill>
+            <a:prstDash val="solid"/>
+          </a:ln>
+        </p:spPr>
+      </p:sp>
+      <p:sp>
+        <p:nvSpPr>
+          <p:cNvPr id="9" name="Shape 6"/>
+          <p:cNvSpPr/>
+          <p:nvPr/>
+        </p:nvSpPr>
+        <p:spPr>
+          <a:xfrm>
+            <a:off x="9116568" y="182880"/>
+            <a:ext cx="91440" cy="91440"/>
+          </a:xfrm>
+          <a:prstGeom prst="ellipse">
+            <a:avLst/>
+          </a:prstGeom>
+          <a:solidFill>
+            <a:srgbClr val="2E7D5B"/>
+          </a:solidFill>
+          <a:ln w="12700">
+            <a:solidFill>
+              <a:srgbClr val="2E7D5B"/>
+            </a:solidFill>
+            <a:prstDash val="solid"/>
+          </a:ln>
+        </p:spPr>
+      </p:sp>
+      <p:sp>
+        <p:nvSpPr>
+          <p:cNvPr id="10" name="Text 7"/>
+          <p:cNvSpPr/>
+          <p:nvPr/>
+        </p:nvSpPr>
+        <p:spPr>
+          <a:xfrm>
+            <a:off x="9299448" y="109728"/>
+            <a:ext cx="2286000" cy="237744"/>
+          </a:xfrm>
+          <a:prstGeom prst="rect">
+            <a:avLst/>
+          </a:prstGeom>
+          <a:noFill/>
+          <a:ln/>
+        </p:spPr>
+        <p:txBody>
+          <a:bodyPr wrap="square" lIns="0" tIns="0" rIns="0" bIns="0" rtlCol="0" anchor="ctr"/>
+          <a:lstStyle/>
+          <a:p>
+            <a:pPr indent="0" marL="0">
+              <a:buNone/>
+            </a:pPr>
+            <a:r>
+              <a:rPr lang="en-US" sz="800" b="1" spc="100" kern="0" dirty="0">
+                <a:solidFill>
+                  <a:srgbClr val="9FB2C2"/>
+                </a:solidFill>
+                <a:latin typeface="Inter" pitchFamily="34" charset="0"/>
+                <a:ea typeface="Inter" pitchFamily="34" charset="-122"/>
+                <a:cs typeface="Inter" pitchFamily="34" charset="-120"/>
+              </a:rPr>
+              <a:t>MS. RIVERA'S SCREEN · SO FAR</a:t>
+            </a:r>
+            <a:endParaRPr lang="en-US" sz="800" dirty="0"/>
+          </a:p>
+        </p:txBody>
+      </p:sp>
+      <p:sp>
+        <p:nvSpPr>
+          <p:cNvPr id="11" name="Text 8"/>
+          <p:cNvSpPr/>
+          <p:nvPr/>
+        </p:nvSpPr>
+        <p:spPr>
+          <a:xfrm>
+            <a:off x="8860536" y="365760"/>
+            <a:ext cx="2670048" cy="566928"/>
+          </a:xfrm>
+          <a:prstGeom prst="rect">
+            <a:avLst/>
+          </a:prstGeom>
+          <a:noFill/>
+          <a:ln/>
+        </p:spPr>
+        <p:txBody>
+          <a:bodyPr wrap="square" lIns="0" tIns="0" rIns="0" bIns="0" rtlCol="0" anchor="ctr"/>
+          <a:lstStyle/>
+          <a:p>
+            <a:pPr indent="0" marL="0">
+              <a:buNone/>
+            </a:pPr>
+            <a:r>
+              <a:rPr lang="en-US" sz="1000" dirty="0">
+                <a:solidFill>
+                  <a:srgbClr val="1B1F24"/>
+                </a:solidFill>
+                <a:latin typeface="Inter" pitchFamily="34" charset="0"/>
+                <a:ea typeface="Inter" pitchFamily="34" charset="-122"/>
+                <a:cs typeface="Inter" pitchFamily="34" charset="-120"/>
+              </a:rPr>
+              <a:t>Her pile: 5 hours a week of grading and feedback, most after dinner.</a:t>
+            </a:r>
+            <a:endParaRPr lang="en-US" sz="1000" dirty="0"/>
+          </a:p>
+        </p:txBody>
+      </p:sp>
+      <p:sp>
+        <p:nvSpPr>
+          <p:cNvPr id="12" name="Text 9"/>
           <p:cNvSpPr/>
           <p:nvPr/>
         </p:nvSpPr>
@@ -8780,7 +11057,7 @@
       </p:sp>
       <p:sp>
         <p:nvSpPr>
-          <p:cNvPr id="6" name="Text 3"/>
+          <p:cNvPr id="13" name="Text 10"/>
           <p:cNvSpPr/>
           <p:nvPr/>
         </p:nvSpPr>
@@ -8819,7 +11096,7 @@
       </p:sp>
       <p:sp>
         <p:nvSpPr>
-          <p:cNvPr id="7" name="Shape 4"/>
+          <p:cNvPr id="14" name="Shape 11"/>
           <p:cNvSpPr/>
           <p:nvPr/>
         </p:nvSpPr>
@@ -8846,7 +11123,7 @@
       </p:sp>
       <p:sp>
         <p:nvSpPr>
-          <p:cNvPr id="8" name="Text 5"/>
+          <p:cNvPr id="15" name="Text 12"/>
           <p:cNvSpPr/>
           <p:nvPr/>
         </p:nvSpPr>
@@ -8885,7 +11162,7 @@
       </p:sp>
       <p:sp>
         <p:nvSpPr>
-          <p:cNvPr id="9" name="Text 6"/>
+          <p:cNvPr id="16" name="Text 13"/>
           <p:cNvSpPr/>
           <p:nvPr/>
         </p:nvSpPr>
@@ -8958,7 +11235,7 @@
       </p:sp>
       <p:sp>
         <p:nvSpPr>
-          <p:cNvPr id="10" name="Shape 7"/>
+          <p:cNvPr id="17" name="Shape 14"/>
           <p:cNvSpPr/>
           <p:nvPr/>
         </p:nvSpPr>
@@ -8985,7 +11262,7 @@
       </p:sp>
       <p:sp>
         <p:nvSpPr>
-          <p:cNvPr id="11" name="Text 8"/>
+          <p:cNvPr id="18" name="Text 15"/>
           <p:cNvSpPr/>
           <p:nvPr/>
         </p:nvSpPr>
@@ -9024,7 +11301,7 @@
       </p:sp>
       <p:sp>
         <p:nvSpPr>
-          <p:cNvPr id="12" name="Text 9"/>
+          <p:cNvPr id="19" name="Text 16"/>
           <p:cNvSpPr/>
           <p:nvPr/>
         </p:nvSpPr>
@@ -9097,7 +11374,7 @@
       </p:sp>
       <p:sp>
         <p:nvSpPr>
-          <p:cNvPr id="13" name="Text 10"/>
+          <p:cNvPr id="20" name="Text 17"/>
           <p:cNvSpPr/>
           <p:nvPr/>
         </p:nvSpPr>
@@ -9284,7 +11561,214 @@
       </p:sp>
       <p:sp>
         <p:nvSpPr>
-          <p:cNvPr id="5" name="Text 2"/>
+          <p:cNvPr id="5" name="Shape 2"/>
+          <p:cNvSpPr/>
+          <p:nvPr/>
+        </p:nvSpPr>
+        <p:spPr>
+          <a:xfrm>
+            <a:off x="8732520" y="109728"/>
+            <a:ext cx="2926080" cy="896112"/>
+          </a:xfrm>
+          <a:prstGeom prst="roundRect">
+            <a:avLst>
+              <a:gd name="adj" fmla="val 7143"/>
+            </a:avLst>
+          </a:prstGeom>
+          <a:solidFill>
+            <a:srgbClr val="F7F5F0"/>
+          </a:solidFill>
+          <a:ln w="12700">
+            <a:solidFill>
+              <a:srgbClr val="DCE3EA"/>
+            </a:solidFill>
+            <a:prstDash val="solid"/>
+          </a:ln>
+        </p:spPr>
+      </p:sp>
+      <p:sp>
+        <p:nvSpPr>
+          <p:cNvPr id="6" name="Shape 3"/>
+          <p:cNvSpPr/>
+          <p:nvPr/>
+        </p:nvSpPr>
+        <p:spPr>
+          <a:xfrm>
+            <a:off x="8732520" y="109728"/>
+            <a:ext cx="2926080" cy="237744"/>
+          </a:xfrm>
+          <a:prstGeom prst="roundRect">
+            <a:avLst>
+              <a:gd name="adj" fmla="val 26923"/>
+            </a:avLst>
+          </a:prstGeom>
+          <a:solidFill>
+            <a:srgbClr val="0D1E2E"/>
+          </a:solidFill>
+          <a:ln w="12700">
+            <a:solidFill>
+              <a:srgbClr val="0D1E2E"/>
+            </a:solidFill>
+            <a:prstDash val="solid"/>
+          </a:ln>
+        </p:spPr>
+      </p:sp>
+      <p:sp>
+        <p:nvSpPr>
+          <p:cNvPr id="7" name="Shape 4"/>
+          <p:cNvSpPr/>
+          <p:nvPr/>
+        </p:nvSpPr>
+        <p:spPr>
+          <a:xfrm>
+            <a:off x="8823960" y="182880"/>
+            <a:ext cx="91440" cy="91440"/>
+          </a:xfrm>
+          <a:prstGeom prst="ellipse">
+            <a:avLst/>
+          </a:prstGeom>
+          <a:solidFill>
+            <a:srgbClr val="E8837A"/>
+          </a:solidFill>
+          <a:ln w="12700">
+            <a:solidFill>
+              <a:srgbClr val="E8837A"/>
+            </a:solidFill>
+            <a:prstDash val="solid"/>
+          </a:ln>
+        </p:spPr>
+      </p:sp>
+      <p:sp>
+        <p:nvSpPr>
+          <p:cNvPr id="8" name="Shape 5"/>
+          <p:cNvSpPr/>
+          <p:nvPr/>
+        </p:nvSpPr>
+        <p:spPr>
+          <a:xfrm>
+            <a:off x="8970264" y="182880"/>
+            <a:ext cx="91440" cy="91440"/>
+          </a:xfrm>
+          <a:prstGeom prst="ellipse">
+            <a:avLst/>
+          </a:prstGeom>
+          <a:solidFill>
+            <a:srgbClr val="F4A825"/>
+          </a:solidFill>
+          <a:ln w="12700">
+            <a:solidFill>
+              <a:srgbClr val="F4A825"/>
+            </a:solidFill>
+            <a:prstDash val="solid"/>
+          </a:ln>
+        </p:spPr>
+      </p:sp>
+      <p:sp>
+        <p:nvSpPr>
+          <p:cNvPr id="9" name="Shape 6"/>
+          <p:cNvSpPr/>
+          <p:nvPr/>
+        </p:nvSpPr>
+        <p:spPr>
+          <a:xfrm>
+            <a:off x="9116568" y="182880"/>
+            <a:ext cx="91440" cy="91440"/>
+          </a:xfrm>
+          <a:prstGeom prst="ellipse">
+            <a:avLst/>
+          </a:prstGeom>
+          <a:solidFill>
+            <a:srgbClr val="2E7D5B"/>
+          </a:solidFill>
+          <a:ln w="12700">
+            <a:solidFill>
+              <a:srgbClr val="2E7D5B"/>
+            </a:solidFill>
+            <a:prstDash val="solid"/>
+          </a:ln>
+        </p:spPr>
+      </p:sp>
+      <p:sp>
+        <p:nvSpPr>
+          <p:cNvPr id="10" name="Text 7"/>
+          <p:cNvSpPr/>
+          <p:nvPr/>
+        </p:nvSpPr>
+        <p:spPr>
+          <a:xfrm>
+            <a:off x="9299448" y="109728"/>
+            <a:ext cx="2286000" cy="237744"/>
+          </a:xfrm>
+          <a:prstGeom prst="rect">
+            <a:avLst/>
+          </a:prstGeom>
+          <a:noFill/>
+          <a:ln/>
+        </p:spPr>
+        <p:txBody>
+          <a:bodyPr wrap="square" lIns="0" tIns="0" rIns="0" bIns="0" rtlCol="0" anchor="ctr"/>
+          <a:lstStyle/>
+          <a:p>
+            <a:pPr indent="0" marL="0">
+              <a:buNone/>
+            </a:pPr>
+            <a:r>
+              <a:rPr lang="en-US" sz="800" b="1" spc="100" kern="0" dirty="0">
+                <a:solidFill>
+                  <a:srgbClr val="9FB2C2"/>
+                </a:solidFill>
+                <a:latin typeface="Inter" pitchFamily="34" charset="0"/>
+                <a:ea typeface="Inter" pitchFamily="34" charset="-122"/>
+                <a:cs typeface="Inter" pitchFamily="34" charset="-120"/>
+              </a:rPr>
+              <a:t>MS. RIVERA'S SCREEN · SO FAR</a:t>
+            </a:r>
+            <a:endParaRPr lang="en-US" sz="800" dirty="0"/>
+          </a:p>
+        </p:txBody>
+      </p:sp>
+      <p:sp>
+        <p:nvSpPr>
+          <p:cNvPr id="11" name="Text 8"/>
+          <p:cNvSpPr/>
+          <p:nvPr/>
+        </p:nvSpPr>
+        <p:spPr>
+          <a:xfrm>
+            <a:off x="8860536" y="365760"/>
+            <a:ext cx="2670048" cy="566928"/>
+          </a:xfrm>
+          <a:prstGeom prst="rect">
+            <a:avLst/>
+          </a:prstGeom>
+          <a:noFill/>
+          <a:ln/>
+        </p:spPr>
+        <p:txBody>
+          <a:bodyPr wrap="square" lIns="0" tIns="0" rIns="0" bIns="0" rtlCol="0" anchor="ctr"/>
+          <a:lstStyle/>
+          <a:p>
+            <a:pPr indent="0" marL="0">
+              <a:buNone/>
+            </a:pPr>
+            <a:r>
+              <a:rPr lang="en-US" sz="1000" dirty="0">
+                <a:solidFill>
+                  <a:srgbClr val="1B1F24"/>
+                </a:solidFill>
+                <a:latin typeface="Inter" pitchFamily="34" charset="0"/>
+                <a:ea typeface="Inter" pitchFamily="34" charset="-122"/>
+                <a:cs typeface="Inter" pitchFamily="34" charset="-120"/>
+              </a:rPr>
+              <a:t>Her bank: ten questions, misconception distractors, key checked.</a:t>
+            </a:r>
+            <a:endParaRPr lang="en-US" sz="1000" dirty="0"/>
+          </a:p>
+        </p:txBody>
+      </p:sp>
+      <p:sp>
+        <p:nvSpPr>
+          <p:cNvPr id="12" name="Text 9"/>
           <p:cNvSpPr/>
           <p:nvPr/>
         </p:nvSpPr>
@@ -9323,7 +11807,7 @@
       </p:sp>
       <p:sp>
         <p:nvSpPr>
-          <p:cNvPr id="6" name="Text 3"/>
+          <p:cNvPr id="13" name="Text 10"/>
           <p:cNvSpPr/>
           <p:nvPr/>
         </p:nvSpPr>
@@ -9362,7 +11846,7 @@
       </p:sp>
       <p:sp>
         <p:nvSpPr>
-          <p:cNvPr id="7" name="Text 4"/>
+          <p:cNvPr id="14" name="Text 11"/>
           <p:cNvSpPr/>
           <p:nvPr/>
         </p:nvSpPr>
@@ -9447,7 +11931,7 @@
       </p:sp>
       <p:sp>
         <p:nvSpPr>
-          <p:cNvPr id="8" name="Shape 5"/>
+          <p:cNvPr id="15" name="Shape 12"/>
           <p:cNvSpPr/>
           <p:nvPr/>
         </p:nvSpPr>
@@ -9474,7 +11958,7 @@
       </p:sp>
       <p:sp>
         <p:nvSpPr>
-          <p:cNvPr id="9" name="Text 6"/>
+          <p:cNvPr id="16" name="Text 13"/>
           <p:cNvSpPr/>
           <p:nvPr/>
         </p:nvSpPr>
@@ -9661,7 +12145,214 @@
       </p:sp>
       <p:sp>
         <p:nvSpPr>
-          <p:cNvPr id="5" name="Text 2"/>
+          <p:cNvPr id="5" name="Shape 2"/>
+          <p:cNvSpPr/>
+          <p:nvPr/>
+        </p:nvSpPr>
+        <p:spPr>
+          <a:xfrm>
+            <a:off x="8732520" y="109728"/>
+            <a:ext cx="2926080" cy="896112"/>
+          </a:xfrm>
+          <a:prstGeom prst="roundRect">
+            <a:avLst>
+              <a:gd name="adj" fmla="val 7143"/>
+            </a:avLst>
+          </a:prstGeom>
+          <a:solidFill>
+            <a:srgbClr val="F7F5F0"/>
+          </a:solidFill>
+          <a:ln w="12700">
+            <a:solidFill>
+              <a:srgbClr val="DCE3EA"/>
+            </a:solidFill>
+            <a:prstDash val="solid"/>
+          </a:ln>
+        </p:spPr>
+      </p:sp>
+      <p:sp>
+        <p:nvSpPr>
+          <p:cNvPr id="6" name="Shape 3"/>
+          <p:cNvSpPr/>
+          <p:nvPr/>
+        </p:nvSpPr>
+        <p:spPr>
+          <a:xfrm>
+            <a:off x="8732520" y="109728"/>
+            <a:ext cx="2926080" cy="237744"/>
+          </a:xfrm>
+          <a:prstGeom prst="roundRect">
+            <a:avLst>
+              <a:gd name="adj" fmla="val 26923"/>
+            </a:avLst>
+          </a:prstGeom>
+          <a:solidFill>
+            <a:srgbClr val="0D1E2E"/>
+          </a:solidFill>
+          <a:ln w="12700">
+            <a:solidFill>
+              <a:srgbClr val="0D1E2E"/>
+            </a:solidFill>
+            <a:prstDash val="solid"/>
+          </a:ln>
+        </p:spPr>
+      </p:sp>
+      <p:sp>
+        <p:nvSpPr>
+          <p:cNvPr id="7" name="Shape 4"/>
+          <p:cNvSpPr/>
+          <p:nvPr/>
+        </p:nvSpPr>
+        <p:spPr>
+          <a:xfrm>
+            <a:off x="8823960" y="182880"/>
+            <a:ext cx="91440" cy="91440"/>
+          </a:xfrm>
+          <a:prstGeom prst="ellipse">
+            <a:avLst/>
+          </a:prstGeom>
+          <a:solidFill>
+            <a:srgbClr val="E8837A"/>
+          </a:solidFill>
+          <a:ln w="12700">
+            <a:solidFill>
+              <a:srgbClr val="E8837A"/>
+            </a:solidFill>
+            <a:prstDash val="solid"/>
+          </a:ln>
+        </p:spPr>
+      </p:sp>
+      <p:sp>
+        <p:nvSpPr>
+          <p:cNvPr id="8" name="Shape 5"/>
+          <p:cNvSpPr/>
+          <p:nvPr/>
+        </p:nvSpPr>
+        <p:spPr>
+          <a:xfrm>
+            <a:off x="8970264" y="182880"/>
+            <a:ext cx="91440" cy="91440"/>
+          </a:xfrm>
+          <a:prstGeom prst="ellipse">
+            <a:avLst/>
+          </a:prstGeom>
+          <a:solidFill>
+            <a:srgbClr val="F4A825"/>
+          </a:solidFill>
+          <a:ln w="12700">
+            <a:solidFill>
+              <a:srgbClr val="F4A825"/>
+            </a:solidFill>
+            <a:prstDash val="solid"/>
+          </a:ln>
+        </p:spPr>
+      </p:sp>
+      <p:sp>
+        <p:nvSpPr>
+          <p:cNvPr id="9" name="Shape 6"/>
+          <p:cNvSpPr/>
+          <p:nvPr/>
+        </p:nvSpPr>
+        <p:spPr>
+          <a:xfrm>
+            <a:off x="9116568" y="182880"/>
+            <a:ext cx="91440" cy="91440"/>
+          </a:xfrm>
+          <a:prstGeom prst="ellipse">
+            <a:avLst/>
+          </a:prstGeom>
+          <a:solidFill>
+            <a:srgbClr val="2E7D5B"/>
+          </a:solidFill>
+          <a:ln w="12700">
+            <a:solidFill>
+              <a:srgbClr val="2E7D5B"/>
+            </a:solidFill>
+            <a:prstDash val="solid"/>
+          </a:ln>
+        </p:spPr>
+      </p:sp>
+      <p:sp>
+        <p:nvSpPr>
+          <p:cNvPr id="10" name="Text 7"/>
+          <p:cNvSpPr/>
+          <p:nvPr/>
+        </p:nvSpPr>
+        <p:spPr>
+          <a:xfrm>
+            <a:off x="9299448" y="109728"/>
+            <a:ext cx="2286000" cy="237744"/>
+          </a:xfrm>
+          <a:prstGeom prst="rect">
+            <a:avLst/>
+          </a:prstGeom>
+          <a:noFill/>
+          <a:ln/>
+        </p:spPr>
+        <p:txBody>
+          <a:bodyPr wrap="square" lIns="0" tIns="0" rIns="0" bIns="0" rtlCol="0" anchor="ctr"/>
+          <a:lstStyle/>
+          <a:p>
+            <a:pPr indent="0" marL="0">
+              <a:buNone/>
+            </a:pPr>
+            <a:r>
+              <a:rPr lang="en-US" sz="800" b="1" spc="100" kern="0" dirty="0">
+                <a:solidFill>
+                  <a:srgbClr val="9FB2C2"/>
+                </a:solidFill>
+                <a:latin typeface="Inter" pitchFamily="34" charset="0"/>
+                <a:ea typeface="Inter" pitchFamily="34" charset="-122"/>
+                <a:cs typeface="Inter" pitchFamily="34" charset="-120"/>
+              </a:rPr>
+              <a:t>MS. RIVERA'S SCREEN · SO FAR</a:t>
+            </a:r>
+            <a:endParaRPr lang="en-US" sz="800" dirty="0"/>
+          </a:p>
+        </p:txBody>
+      </p:sp>
+      <p:sp>
+        <p:nvSpPr>
+          <p:cNvPr id="11" name="Text 8"/>
+          <p:cNvSpPr/>
+          <p:nvPr/>
+        </p:nvSpPr>
+        <p:spPr>
+          <a:xfrm>
+            <a:off x="8860536" y="365760"/>
+            <a:ext cx="2670048" cy="566928"/>
+          </a:xfrm>
+          <a:prstGeom prst="rect">
+            <a:avLst/>
+          </a:prstGeom>
+          <a:noFill/>
+          <a:ln/>
+        </p:spPr>
+        <p:txBody>
+          <a:bodyPr wrap="square" lIns="0" tIns="0" rIns="0" bIns="0" rtlCol="0" anchor="ctr"/>
+          <a:lstStyle/>
+          <a:p>
+            <a:pPr indent="0" marL="0">
+              <a:buNone/>
+            </a:pPr>
+            <a:r>
+              <a:rPr lang="en-US" sz="1000" dirty="0">
+                <a:solidFill>
+                  <a:srgbClr val="1B1F24"/>
+                </a:solidFill>
+                <a:latin typeface="Inter" pitchFamily="34" charset="0"/>
+                <a:ea typeface="Inter" pitchFamily="34" charset="-122"/>
+                <a:cs typeface="Inter" pitchFamily="34" charset="-120"/>
+              </a:rPr>
+              <a:t>Her vetting rep: found the weak question, caught and cut it.</a:t>
+            </a:r>
+            <a:endParaRPr lang="en-US" sz="1000" dirty="0"/>
+          </a:p>
+        </p:txBody>
+      </p:sp>
+      <p:sp>
+        <p:nvSpPr>
+          <p:cNvPr id="12" name="Text 9"/>
           <p:cNvSpPr/>
           <p:nvPr/>
         </p:nvSpPr>
@@ -9700,7 +12391,7 @@
       </p:sp>
       <p:sp>
         <p:nvSpPr>
-          <p:cNvPr id="6" name="Text 3"/>
+          <p:cNvPr id="13" name="Text 10"/>
           <p:cNvSpPr/>
           <p:nvPr/>
         </p:nvSpPr>
@@ -9739,7 +12430,7 @@
       </p:sp>
       <p:sp>
         <p:nvSpPr>
-          <p:cNvPr id="7" name="Shape 4"/>
+          <p:cNvPr id="14" name="Shape 11"/>
           <p:cNvSpPr/>
           <p:nvPr/>
         </p:nvSpPr>
@@ -9766,7 +12457,7 @@
       </p:sp>
       <p:sp>
         <p:nvSpPr>
-          <p:cNvPr id="8" name="Text 5"/>
+          <p:cNvPr id="15" name="Text 12"/>
           <p:cNvSpPr/>
           <p:nvPr/>
         </p:nvSpPr>
@@ -9805,7 +12496,7 @@
       </p:sp>
       <p:sp>
         <p:nvSpPr>
-          <p:cNvPr id="9" name="Shape 6"/>
+          <p:cNvPr id="16" name="Shape 13"/>
           <p:cNvSpPr/>
           <p:nvPr/>
         </p:nvSpPr>
@@ -9832,7 +12523,7 @@
       </p:sp>
       <p:sp>
         <p:nvSpPr>
-          <p:cNvPr id="10" name="Text 7"/>
+          <p:cNvPr id="17" name="Text 14"/>
           <p:cNvSpPr/>
           <p:nvPr/>
         </p:nvSpPr>
@@ -9871,7 +12562,7 @@
       </p:sp>
       <p:sp>
         <p:nvSpPr>
-          <p:cNvPr id="11" name="Shape 8"/>
+          <p:cNvPr id="18" name="Shape 15"/>
           <p:cNvSpPr/>
           <p:nvPr/>
         </p:nvSpPr>
@@ -9898,7 +12589,7 @@
       </p:sp>
       <p:sp>
         <p:nvSpPr>
-          <p:cNvPr id="12" name="Text 9"/>
+          <p:cNvPr id="19" name="Text 16"/>
           <p:cNvSpPr/>
           <p:nvPr/>
         </p:nvSpPr>
@@ -9937,7 +12628,7 @@
       </p:sp>
       <p:sp>
         <p:nvSpPr>
-          <p:cNvPr id="13" name="Shape 10"/>
+          <p:cNvPr id="20" name="Shape 17"/>
           <p:cNvSpPr/>
           <p:nvPr/>
         </p:nvSpPr>
@@ -9964,7 +12655,7 @@
       </p:sp>
       <p:sp>
         <p:nvSpPr>
-          <p:cNvPr id="14" name="Text 11"/>
+          <p:cNvPr id="21" name="Text 18"/>
           <p:cNvSpPr/>
           <p:nvPr/>
         </p:nvSpPr>
@@ -10003,7 +12694,7 @@
       </p:sp>
       <p:sp>
         <p:nvSpPr>
-          <p:cNvPr id="15" name="Text 12"/>
+          <p:cNvPr id="22" name="Text 19"/>
           <p:cNvSpPr/>
           <p:nvPr/>
         </p:nvSpPr>
@@ -10190,7 +12881,214 @@
       </p:sp>
       <p:sp>
         <p:nvSpPr>
-          <p:cNvPr id="5" name="Text 2"/>
+          <p:cNvPr id="5" name="Shape 2"/>
+          <p:cNvSpPr/>
+          <p:nvPr/>
+        </p:nvSpPr>
+        <p:spPr>
+          <a:xfrm>
+            <a:off x="8732520" y="109728"/>
+            <a:ext cx="2926080" cy="896112"/>
+          </a:xfrm>
+          <a:prstGeom prst="roundRect">
+            <a:avLst>
+              <a:gd name="adj" fmla="val 7143"/>
+            </a:avLst>
+          </a:prstGeom>
+          <a:solidFill>
+            <a:srgbClr val="F7F5F0"/>
+          </a:solidFill>
+          <a:ln w="12700">
+            <a:solidFill>
+              <a:srgbClr val="DCE3EA"/>
+            </a:solidFill>
+            <a:prstDash val="solid"/>
+          </a:ln>
+        </p:spPr>
+      </p:sp>
+      <p:sp>
+        <p:nvSpPr>
+          <p:cNvPr id="6" name="Shape 3"/>
+          <p:cNvSpPr/>
+          <p:nvPr/>
+        </p:nvSpPr>
+        <p:spPr>
+          <a:xfrm>
+            <a:off x="8732520" y="109728"/>
+            <a:ext cx="2926080" cy="237744"/>
+          </a:xfrm>
+          <a:prstGeom prst="roundRect">
+            <a:avLst>
+              <a:gd name="adj" fmla="val 26923"/>
+            </a:avLst>
+          </a:prstGeom>
+          <a:solidFill>
+            <a:srgbClr val="0D1E2E"/>
+          </a:solidFill>
+          <a:ln w="12700">
+            <a:solidFill>
+              <a:srgbClr val="0D1E2E"/>
+            </a:solidFill>
+            <a:prstDash val="solid"/>
+          </a:ln>
+        </p:spPr>
+      </p:sp>
+      <p:sp>
+        <p:nvSpPr>
+          <p:cNvPr id="7" name="Shape 4"/>
+          <p:cNvSpPr/>
+          <p:nvPr/>
+        </p:nvSpPr>
+        <p:spPr>
+          <a:xfrm>
+            <a:off x="8823960" y="182880"/>
+            <a:ext cx="91440" cy="91440"/>
+          </a:xfrm>
+          <a:prstGeom prst="ellipse">
+            <a:avLst/>
+          </a:prstGeom>
+          <a:solidFill>
+            <a:srgbClr val="E8837A"/>
+          </a:solidFill>
+          <a:ln w="12700">
+            <a:solidFill>
+              <a:srgbClr val="E8837A"/>
+            </a:solidFill>
+            <a:prstDash val="solid"/>
+          </a:ln>
+        </p:spPr>
+      </p:sp>
+      <p:sp>
+        <p:nvSpPr>
+          <p:cNvPr id="8" name="Shape 5"/>
+          <p:cNvSpPr/>
+          <p:nvPr/>
+        </p:nvSpPr>
+        <p:spPr>
+          <a:xfrm>
+            <a:off x="8970264" y="182880"/>
+            <a:ext cx="91440" cy="91440"/>
+          </a:xfrm>
+          <a:prstGeom prst="ellipse">
+            <a:avLst/>
+          </a:prstGeom>
+          <a:solidFill>
+            <a:srgbClr val="F4A825"/>
+          </a:solidFill>
+          <a:ln w="12700">
+            <a:solidFill>
+              <a:srgbClr val="F4A825"/>
+            </a:solidFill>
+            <a:prstDash val="solid"/>
+          </a:ln>
+        </p:spPr>
+      </p:sp>
+      <p:sp>
+        <p:nvSpPr>
+          <p:cNvPr id="9" name="Shape 6"/>
+          <p:cNvSpPr/>
+          <p:nvPr/>
+        </p:nvSpPr>
+        <p:spPr>
+          <a:xfrm>
+            <a:off x="9116568" y="182880"/>
+            <a:ext cx="91440" cy="91440"/>
+          </a:xfrm>
+          <a:prstGeom prst="ellipse">
+            <a:avLst/>
+          </a:prstGeom>
+          <a:solidFill>
+            <a:srgbClr val="2E7D5B"/>
+          </a:solidFill>
+          <a:ln w="12700">
+            <a:solidFill>
+              <a:srgbClr val="2E7D5B"/>
+            </a:solidFill>
+            <a:prstDash val="solid"/>
+          </a:ln>
+        </p:spPr>
+      </p:sp>
+      <p:sp>
+        <p:nvSpPr>
+          <p:cNvPr id="10" name="Text 7"/>
+          <p:cNvSpPr/>
+          <p:nvPr/>
+        </p:nvSpPr>
+        <p:spPr>
+          <a:xfrm>
+            <a:off x="9299448" y="109728"/>
+            <a:ext cx="2286000" cy="237744"/>
+          </a:xfrm>
+          <a:prstGeom prst="rect">
+            <a:avLst/>
+          </a:prstGeom>
+          <a:noFill/>
+          <a:ln/>
+        </p:spPr>
+        <p:txBody>
+          <a:bodyPr wrap="square" lIns="0" tIns="0" rIns="0" bIns="0" rtlCol="0" anchor="ctr"/>
+          <a:lstStyle/>
+          <a:p>
+            <a:pPr indent="0" marL="0">
+              <a:buNone/>
+            </a:pPr>
+            <a:r>
+              <a:rPr lang="en-US" sz="800" b="1" spc="100" kern="0" dirty="0">
+                <a:solidFill>
+                  <a:srgbClr val="9FB2C2"/>
+                </a:solidFill>
+                <a:latin typeface="Inter" pitchFamily="34" charset="0"/>
+                <a:ea typeface="Inter" pitchFamily="34" charset="-122"/>
+                <a:cs typeface="Inter" pitchFamily="34" charset="-120"/>
+              </a:rPr>
+              <a:t>MS. RIVERA'S SCREEN · SO FAR</a:t>
+            </a:r>
+            <a:endParaRPr lang="en-US" sz="800" dirty="0"/>
+          </a:p>
+        </p:txBody>
+      </p:sp>
+      <p:sp>
+        <p:nvSpPr>
+          <p:cNvPr id="11" name="Text 8"/>
+          <p:cNvSpPr/>
+          <p:nvPr/>
+        </p:nvSpPr>
+        <p:spPr>
+          <a:xfrm>
+            <a:off x="8860536" y="365760"/>
+            <a:ext cx="2670048" cy="566928"/>
+          </a:xfrm>
+          <a:prstGeom prst="rect">
+            <a:avLst/>
+          </a:prstGeom>
+          <a:noFill/>
+          <a:ln/>
+        </p:spPr>
+        <p:txBody>
+          <a:bodyPr wrap="square" lIns="0" tIns="0" rIns="0" bIns="0" rtlCol="0" anchor="ctr"/>
+          <a:lstStyle/>
+          <a:p>
+            <a:pPr indent="0" marL="0">
+              <a:buNone/>
+            </a:pPr>
+            <a:r>
+              <a:rPr lang="en-US" sz="1000" dirty="0">
+                <a:solidFill>
+                  <a:srgbClr val="1B1F24"/>
+                </a:solidFill>
+                <a:latin typeface="Inter" pitchFamily="34" charset="0"/>
+                <a:ea typeface="Inter" pitchFamily="34" charset="-122"/>
+                <a:cs typeface="Inter" pitchFamily="34" charset="-120"/>
+              </a:rPr>
+              <a:t>Her starters: three patterns she writes every stack, drafted once.</a:t>
+            </a:r>
+            <a:endParaRPr lang="en-US" sz="1000" dirty="0"/>
+          </a:p>
+        </p:txBody>
+      </p:sp>
+      <p:sp>
+        <p:nvSpPr>
+          <p:cNvPr id="12" name="Text 9"/>
           <p:cNvSpPr/>
           <p:nvPr/>
         </p:nvSpPr>
@@ -10229,7 +13127,7 @@
       </p:sp>
       <p:sp>
         <p:nvSpPr>
-          <p:cNvPr id="6" name="Text 3"/>
+          <p:cNvPr id="13" name="Text 10"/>
           <p:cNvSpPr/>
           <p:nvPr/>
         </p:nvSpPr>
@@ -10268,7 +13166,7 @@
       </p:sp>
       <p:sp>
         <p:nvSpPr>
-          <p:cNvPr id="7" name="Text 4"/>
+          <p:cNvPr id="14" name="Text 11"/>
           <p:cNvSpPr/>
           <p:nvPr/>
         </p:nvSpPr>
@@ -10353,7 +13251,7 @@
       </p:sp>
       <p:sp>
         <p:nvSpPr>
-          <p:cNvPr id="8" name="Shape 5"/>
+          <p:cNvPr id="15" name="Shape 12"/>
           <p:cNvSpPr/>
           <p:nvPr/>
         </p:nvSpPr>
@@ -10380,7 +13278,7 @@
       </p:sp>
       <p:sp>
         <p:nvSpPr>
-          <p:cNvPr id="9" name="Text 6"/>
+          <p:cNvPr id="16" name="Text 13"/>
           <p:cNvSpPr/>
           <p:nvPr/>
         </p:nvSpPr>
@@ -10567,7 +13465,214 @@
       </p:sp>
       <p:sp>
         <p:nvSpPr>
-          <p:cNvPr id="5" name="Text 2"/>
+          <p:cNvPr id="5" name="Shape 2"/>
+          <p:cNvSpPr/>
+          <p:nvPr/>
+        </p:nvSpPr>
+        <p:spPr>
+          <a:xfrm>
+            <a:off x="8732520" y="109728"/>
+            <a:ext cx="2926080" cy="896112"/>
+          </a:xfrm>
+          <a:prstGeom prst="roundRect">
+            <a:avLst>
+              <a:gd name="adj" fmla="val 7143"/>
+            </a:avLst>
+          </a:prstGeom>
+          <a:solidFill>
+            <a:srgbClr val="F7F5F0"/>
+          </a:solidFill>
+          <a:ln w="12700">
+            <a:solidFill>
+              <a:srgbClr val="DCE3EA"/>
+            </a:solidFill>
+            <a:prstDash val="solid"/>
+          </a:ln>
+        </p:spPr>
+      </p:sp>
+      <p:sp>
+        <p:nvSpPr>
+          <p:cNvPr id="6" name="Shape 3"/>
+          <p:cNvSpPr/>
+          <p:nvPr/>
+        </p:nvSpPr>
+        <p:spPr>
+          <a:xfrm>
+            <a:off x="8732520" y="109728"/>
+            <a:ext cx="2926080" cy="237744"/>
+          </a:xfrm>
+          <a:prstGeom prst="roundRect">
+            <a:avLst>
+              <a:gd name="adj" fmla="val 26923"/>
+            </a:avLst>
+          </a:prstGeom>
+          <a:solidFill>
+            <a:srgbClr val="0D1E2E"/>
+          </a:solidFill>
+          <a:ln w="12700">
+            <a:solidFill>
+              <a:srgbClr val="0D1E2E"/>
+            </a:solidFill>
+            <a:prstDash val="solid"/>
+          </a:ln>
+        </p:spPr>
+      </p:sp>
+      <p:sp>
+        <p:nvSpPr>
+          <p:cNvPr id="7" name="Shape 4"/>
+          <p:cNvSpPr/>
+          <p:nvPr/>
+        </p:nvSpPr>
+        <p:spPr>
+          <a:xfrm>
+            <a:off x="8823960" y="182880"/>
+            <a:ext cx="91440" cy="91440"/>
+          </a:xfrm>
+          <a:prstGeom prst="ellipse">
+            <a:avLst/>
+          </a:prstGeom>
+          <a:solidFill>
+            <a:srgbClr val="E8837A"/>
+          </a:solidFill>
+          <a:ln w="12700">
+            <a:solidFill>
+              <a:srgbClr val="E8837A"/>
+            </a:solidFill>
+            <a:prstDash val="solid"/>
+          </a:ln>
+        </p:spPr>
+      </p:sp>
+      <p:sp>
+        <p:nvSpPr>
+          <p:cNvPr id="8" name="Shape 5"/>
+          <p:cNvSpPr/>
+          <p:nvPr/>
+        </p:nvSpPr>
+        <p:spPr>
+          <a:xfrm>
+            <a:off x="8970264" y="182880"/>
+            <a:ext cx="91440" cy="91440"/>
+          </a:xfrm>
+          <a:prstGeom prst="ellipse">
+            <a:avLst/>
+          </a:prstGeom>
+          <a:solidFill>
+            <a:srgbClr val="F4A825"/>
+          </a:solidFill>
+          <a:ln w="12700">
+            <a:solidFill>
+              <a:srgbClr val="F4A825"/>
+            </a:solidFill>
+            <a:prstDash val="solid"/>
+          </a:ln>
+        </p:spPr>
+      </p:sp>
+      <p:sp>
+        <p:nvSpPr>
+          <p:cNvPr id="9" name="Shape 6"/>
+          <p:cNvSpPr/>
+          <p:nvPr/>
+        </p:nvSpPr>
+        <p:spPr>
+          <a:xfrm>
+            <a:off x="9116568" y="182880"/>
+            <a:ext cx="91440" cy="91440"/>
+          </a:xfrm>
+          <a:prstGeom prst="ellipse">
+            <a:avLst/>
+          </a:prstGeom>
+          <a:solidFill>
+            <a:srgbClr val="2E7D5B"/>
+          </a:solidFill>
+          <a:ln w="12700">
+            <a:solidFill>
+              <a:srgbClr val="2E7D5B"/>
+            </a:solidFill>
+            <a:prstDash val="solid"/>
+          </a:ln>
+        </p:spPr>
+      </p:sp>
+      <p:sp>
+        <p:nvSpPr>
+          <p:cNvPr id="10" name="Text 7"/>
+          <p:cNvSpPr/>
+          <p:nvPr/>
+        </p:nvSpPr>
+        <p:spPr>
+          <a:xfrm>
+            <a:off x="9299448" y="109728"/>
+            <a:ext cx="2286000" cy="237744"/>
+          </a:xfrm>
+          <a:prstGeom prst="rect">
+            <a:avLst/>
+          </a:prstGeom>
+          <a:noFill/>
+          <a:ln/>
+        </p:spPr>
+        <p:txBody>
+          <a:bodyPr wrap="square" lIns="0" tIns="0" rIns="0" bIns="0" rtlCol="0" anchor="ctr"/>
+          <a:lstStyle/>
+          <a:p>
+            <a:pPr indent="0" marL="0">
+              <a:buNone/>
+            </a:pPr>
+            <a:r>
+              <a:rPr lang="en-US" sz="800" b="1" spc="100" kern="0" dirty="0">
+                <a:solidFill>
+                  <a:srgbClr val="9FB2C2"/>
+                </a:solidFill>
+                <a:latin typeface="Inter" pitchFamily="34" charset="0"/>
+                <a:ea typeface="Inter" pitchFamily="34" charset="-122"/>
+                <a:cs typeface="Inter" pitchFamily="34" charset="-120"/>
+              </a:rPr>
+              <a:t>MS. RIVERA'S SCREEN · SO FAR</a:t>
+            </a:r>
+            <a:endParaRPr lang="en-US" sz="800" dirty="0"/>
+          </a:p>
+        </p:txBody>
+      </p:sp>
+      <p:sp>
+        <p:nvSpPr>
+          <p:cNvPr id="11" name="Text 8"/>
+          <p:cNvSpPr/>
+          <p:nvPr/>
+        </p:nvSpPr>
+        <p:spPr>
+          <a:xfrm>
+            <a:off x="8860536" y="365760"/>
+            <a:ext cx="2670048" cy="566928"/>
+          </a:xfrm>
+          <a:prstGeom prst="rect">
+            <a:avLst/>
+          </a:prstGeom>
+          <a:noFill/>
+          <a:ln/>
+        </p:spPr>
+        <p:txBody>
+          <a:bodyPr wrap="square" lIns="0" tIns="0" rIns="0" bIns="0" rtlCol="0" anchor="ctr"/>
+          <a:lstStyle/>
+          <a:p>
+            <a:pPr indent="0" marL="0">
+              <a:buNone/>
+            </a:pPr>
+            <a:r>
+              <a:rPr lang="en-US" sz="1000" dirty="0">
+                <a:solidFill>
+                  <a:srgbClr val="1B1F24"/>
+                </a:solidFill>
+                <a:latin typeface="Inter" pitchFamily="34" charset="0"/>
+                <a:ea typeface="Inter" pitchFamily="34" charset="-122"/>
+                <a:cs typeface="Inter" pitchFamily="34" charset="-120"/>
+              </a:rPr>
+              <a:t>Her share-out: the catch story goes first.</a:t>
+            </a:r>
+            <a:endParaRPr lang="en-US" sz="1000" dirty="0"/>
+          </a:p>
+        </p:txBody>
+      </p:sp>
+      <p:sp>
+        <p:nvSpPr>
+          <p:cNvPr id="12" name="Text 9"/>
           <p:cNvSpPr/>
           <p:nvPr/>
         </p:nvSpPr>
@@ -10606,7 +13711,7 @@
       </p:sp>
       <p:sp>
         <p:nvSpPr>
-          <p:cNvPr id="6" name="Text 3"/>
+          <p:cNvPr id="13" name="Text 10"/>
           <p:cNvSpPr/>
           <p:nvPr/>
         </p:nvSpPr>
@@ -10645,7 +13750,7 @@
       </p:sp>
       <p:sp>
         <p:nvSpPr>
-          <p:cNvPr id="7" name="Text 4"/>
+          <p:cNvPr id="14" name="Text 11"/>
           <p:cNvSpPr/>
           <p:nvPr/>
         </p:nvSpPr>
@@ -10878,7 +13983,214 @@
       </p:sp>
       <p:sp>
         <p:nvSpPr>
-          <p:cNvPr id="5" name="Text 2"/>
+          <p:cNvPr id="5" name="Shape 2"/>
+          <p:cNvSpPr/>
+          <p:nvPr/>
+        </p:nvSpPr>
+        <p:spPr>
+          <a:xfrm>
+            <a:off x="8732520" y="109728"/>
+            <a:ext cx="2926080" cy="896112"/>
+          </a:xfrm>
+          <a:prstGeom prst="roundRect">
+            <a:avLst>
+              <a:gd name="adj" fmla="val 7143"/>
+            </a:avLst>
+          </a:prstGeom>
+          <a:solidFill>
+            <a:srgbClr val="F7F5F0"/>
+          </a:solidFill>
+          <a:ln w="12700">
+            <a:solidFill>
+              <a:srgbClr val="DCE3EA"/>
+            </a:solidFill>
+            <a:prstDash val="solid"/>
+          </a:ln>
+        </p:spPr>
+      </p:sp>
+      <p:sp>
+        <p:nvSpPr>
+          <p:cNvPr id="6" name="Shape 3"/>
+          <p:cNvSpPr/>
+          <p:nvPr/>
+        </p:nvSpPr>
+        <p:spPr>
+          <a:xfrm>
+            <a:off x="8732520" y="109728"/>
+            <a:ext cx="2926080" cy="237744"/>
+          </a:xfrm>
+          <a:prstGeom prst="roundRect">
+            <a:avLst>
+              <a:gd name="adj" fmla="val 26923"/>
+            </a:avLst>
+          </a:prstGeom>
+          <a:solidFill>
+            <a:srgbClr val="0D1E2E"/>
+          </a:solidFill>
+          <a:ln w="12700">
+            <a:solidFill>
+              <a:srgbClr val="0D1E2E"/>
+            </a:solidFill>
+            <a:prstDash val="solid"/>
+          </a:ln>
+        </p:spPr>
+      </p:sp>
+      <p:sp>
+        <p:nvSpPr>
+          <p:cNvPr id="7" name="Shape 4"/>
+          <p:cNvSpPr/>
+          <p:nvPr/>
+        </p:nvSpPr>
+        <p:spPr>
+          <a:xfrm>
+            <a:off x="8823960" y="182880"/>
+            <a:ext cx="91440" cy="91440"/>
+          </a:xfrm>
+          <a:prstGeom prst="ellipse">
+            <a:avLst/>
+          </a:prstGeom>
+          <a:solidFill>
+            <a:srgbClr val="E8837A"/>
+          </a:solidFill>
+          <a:ln w="12700">
+            <a:solidFill>
+              <a:srgbClr val="E8837A"/>
+            </a:solidFill>
+            <a:prstDash val="solid"/>
+          </a:ln>
+        </p:spPr>
+      </p:sp>
+      <p:sp>
+        <p:nvSpPr>
+          <p:cNvPr id="8" name="Shape 5"/>
+          <p:cNvSpPr/>
+          <p:nvPr/>
+        </p:nvSpPr>
+        <p:spPr>
+          <a:xfrm>
+            <a:off x="8970264" y="182880"/>
+            <a:ext cx="91440" cy="91440"/>
+          </a:xfrm>
+          <a:prstGeom prst="ellipse">
+            <a:avLst/>
+          </a:prstGeom>
+          <a:solidFill>
+            <a:srgbClr val="F4A825"/>
+          </a:solidFill>
+          <a:ln w="12700">
+            <a:solidFill>
+              <a:srgbClr val="F4A825"/>
+            </a:solidFill>
+            <a:prstDash val="solid"/>
+          </a:ln>
+        </p:spPr>
+      </p:sp>
+      <p:sp>
+        <p:nvSpPr>
+          <p:cNvPr id="9" name="Shape 6"/>
+          <p:cNvSpPr/>
+          <p:nvPr/>
+        </p:nvSpPr>
+        <p:spPr>
+          <a:xfrm>
+            <a:off x="9116568" y="182880"/>
+            <a:ext cx="91440" cy="91440"/>
+          </a:xfrm>
+          <a:prstGeom prst="ellipse">
+            <a:avLst/>
+          </a:prstGeom>
+          <a:solidFill>
+            <a:srgbClr val="2E7D5B"/>
+          </a:solidFill>
+          <a:ln w="12700">
+            <a:solidFill>
+              <a:srgbClr val="2E7D5B"/>
+            </a:solidFill>
+            <a:prstDash val="solid"/>
+          </a:ln>
+        </p:spPr>
+      </p:sp>
+      <p:sp>
+        <p:nvSpPr>
+          <p:cNvPr id="10" name="Text 7"/>
+          <p:cNvSpPr/>
+          <p:nvPr/>
+        </p:nvSpPr>
+        <p:spPr>
+          <a:xfrm>
+            <a:off x="9299448" y="109728"/>
+            <a:ext cx="2286000" cy="237744"/>
+          </a:xfrm>
+          <a:prstGeom prst="rect">
+            <a:avLst/>
+          </a:prstGeom>
+          <a:noFill/>
+          <a:ln/>
+        </p:spPr>
+        <p:txBody>
+          <a:bodyPr wrap="square" lIns="0" tIns="0" rIns="0" bIns="0" rtlCol="0" anchor="ctr"/>
+          <a:lstStyle/>
+          <a:p>
+            <a:pPr indent="0" marL="0">
+              <a:buNone/>
+            </a:pPr>
+            <a:r>
+              <a:rPr lang="en-US" sz="800" b="1" spc="100" kern="0" dirty="0">
+                <a:solidFill>
+                  <a:srgbClr val="9FB2C2"/>
+                </a:solidFill>
+                <a:latin typeface="Inter" pitchFamily="34" charset="0"/>
+                <a:ea typeface="Inter" pitchFamily="34" charset="-122"/>
+                <a:cs typeface="Inter" pitchFamily="34" charset="-120"/>
+              </a:rPr>
+              <a:t>MS. RIVERA'S SCREEN · SO FAR</a:t>
+            </a:r>
+            <a:endParaRPr lang="en-US" sz="800" dirty="0"/>
+          </a:p>
+        </p:txBody>
+      </p:sp>
+      <p:sp>
+        <p:nvSpPr>
+          <p:cNvPr id="11" name="Text 8"/>
+          <p:cNvSpPr/>
+          <p:nvPr/>
+        </p:nvSpPr>
+        <p:spPr>
+          <a:xfrm>
+            <a:off x="8860536" y="365760"/>
+            <a:ext cx="2670048" cy="566928"/>
+          </a:xfrm>
+          <a:prstGeom prst="rect">
+            <a:avLst/>
+          </a:prstGeom>
+          <a:noFill/>
+          <a:ln/>
+        </p:spPr>
+        <p:txBody>
+          <a:bodyPr wrap="square" lIns="0" tIns="0" rIns="0" bIns="0" rtlCol="0" anchor="ctr"/>
+          <a:lstStyle/>
+          <a:p>
+            <a:pPr indent="0" marL="0">
+              <a:buNone/>
+            </a:pPr>
+            <a:r>
+              <a:rPr lang="en-US" sz="1000" dirty="0">
+                <a:solidFill>
+                  <a:srgbClr val="1B1F24"/>
+                </a:solidFill>
+                <a:latin typeface="Inter" pitchFamily="34" charset="0"/>
+                <a:ea typeface="Inter" pitchFamily="34" charset="-122"/>
+                <a:cs typeface="Inter" pitchFamily="34" charset="-120"/>
+              </a:rPr>
+              <a:t>Her inventory: rubric, vetted bank, three starters, one caught question.</a:t>
+            </a:r>
+            <a:endParaRPr lang="en-US" sz="1000" dirty="0"/>
+          </a:p>
+        </p:txBody>
+      </p:sp>
+      <p:sp>
+        <p:nvSpPr>
+          <p:cNvPr id="12" name="Text 9"/>
           <p:cNvSpPr/>
           <p:nvPr/>
         </p:nvSpPr>
@@ -10917,7 +14229,7 @@
       </p:sp>
       <p:sp>
         <p:nvSpPr>
-          <p:cNvPr id="6" name="Text 3"/>
+          <p:cNvPr id="13" name="Text 10"/>
           <p:cNvSpPr/>
           <p:nvPr/>
         </p:nvSpPr>
@@ -10956,7 +14268,7 @@
       </p:sp>
       <p:sp>
         <p:nvSpPr>
-          <p:cNvPr id="7" name="Shape 4"/>
+          <p:cNvPr id="14" name="Shape 11"/>
           <p:cNvSpPr/>
           <p:nvPr/>
         </p:nvSpPr>
@@ -10983,7 +14295,7 @@
       </p:sp>
       <p:sp>
         <p:nvSpPr>
-          <p:cNvPr id="8" name="Text 5"/>
+          <p:cNvPr id="15" name="Text 12"/>
           <p:cNvSpPr/>
           <p:nvPr/>
         </p:nvSpPr>
@@ -11185,7 +14497,214 @@
       </p:sp>
       <p:sp>
         <p:nvSpPr>
-          <p:cNvPr id="5" name="Text 2"/>
+          <p:cNvPr id="5" name="Shape 2"/>
+          <p:cNvSpPr/>
+          <p:nvPr/>
+        </p:nvSpPr>
+        <p:spPr>
+          <a:xfrm>
+            <a:off x="8732520" y="109728"/>
+            <a:ext cx="2926080" cy="896112"/>
+          </a:xfrm>
+          <a:prstGeom prst="roundRect">
+            <a:avLst>
+              <a:gd name="adj" fmla="val 7143"/>
+            </a:avLst>
+          </a:prstGeom>
+          <a:solidFill>
+            <a:srgbClr val="F7F5F0"/>
+          </a:solidFill>
+          <a:ln w="12700">
+            <a:solidFill>
+              <a:srgbClr val="DCE3EA"/>
+            </a:solidFill>
+            <a:prstDash val="solid"/>
+          </a:ln>
+        </p:spPr>
+      </p:sp>
+      <p:sp>
+        <p:nvSpPr>
+          <p:cNvPr id="6" name="Shape 3"/>
+          <p:cNvSpPr/>
+          <p:nvPr/>
+        </p:nvSpPr>
+        <p:spPr>
+          <a:xfrm>
+            <a:off x="8732520" y="109728"/>
+            <a:ext cx="2926080" cy="237744"/>
+          </a:xfrm>
+          <a:prstGeom prst="roundRect">
+            <a:avLst>
+              <a:gd name="adj" fmla="val 26923"/>
+            </a:avLst>
+          </a:prstGeom>
+          <a:solidFill>
+            <a:srgbClr val="0D1E2E"/>
+          </a:solidFill>
+          <a:ln w="12700">
+            <a:solidFill>
+              <a:srgbClr val="0D1E2E"/>
+            </a:solidFill>
+            <a:prstDash val="solid"/>
+          </a:ln>
+        </p:spPr>
+      </p:sp>
+      <p:sp>
+        <p:nvSpPr>
+          <p:cNvPr id="7" name="Shape 4"/>
+          <p:cNvSpPr/>
+          <p:nvPr/>
+        </p:nvSpPr>
+        <p:spPr>
+          <a:xfrm>
+            <a:off x="8823960" y="182880"/>
+            <a:ext cx="91440" cy="91440"/>
+          </a:xfrm>
+          <a:prstGeom prst="ellipse">
+            <a:avLst/>
+          </a:prstGeom>
+          <a:solidFill>
+            <a:srgbClr val="E8837A"/>
+          </a:solidFill>
+          <a:ln w="12700">
+            <a:solidFill>
+              <a:srgbClr val="E8837A"/>
+            </a:solidFill>
+            <a:prstDash val="solid"/>
+          </a:ln>
+        </p:spPr>
+      </p:sp>
+      <p:sp>
+        <p:nvSpPr>
+          <p:cNvPr id="8" name="Shape 5"/>
+          <p:cNvSpPr/>
+          <p:nvPr/>
+        </p:nvSpPr>
+        <p:spPr>
+          <a:xfrm>
+            <a:off x="8970264" y="182880"/>
+            <a:ext cx="91440" cy="91440"/>
+          </a:xfrm>
+          <a:prstGeom prst="ellipse">
+            <a:avLst/>
+          </a:prstGeom>
+          <a:solidFill>
+            <a:srgbClr val="F4A825"/>
+          </a:solidFill>
+          <a:ln w="12700">
+            <a:solidFill>
+              <a:srgbClr val="F4A825"/>
+            </a:solidFill>
+            <a:prstDash val="solid"/>
+          </a:ln>
+        </p:spPr>
+      </p:sp>
+      <p:sp>
+        <p:nvSpPr>
+          <p:cNvPr id="9" name="Shape 6"/>
+          <p:cNvSpPr/>
+          <p:nvPr/>
+        </p:nvSpPr>
+        <p:spPr>
+          <a:xfrm>
+            <a:off x="9116568" y="182880"/>
+            <a:ext cx="91440" cy="91440"/>
+          </a:xfrm>
+          <a:prstGeom prst="ellipse">
+            <a:avLst/>
+          </a:prstGeom>
+          <a:solidFill>
+            <a:srgbClr val="2E7D5B"/>
+          </a:solidFill>
+          <a:ln w="12700">
+            <a:solidFill>
+              <a:srgbClr val="2E7D5B"/>
+            </a:solidFill>
+            <a:prstDash val="solid"/>
+          </a:ln>
+        </p:spPr>
+      </p:sp>
+      <p:sp>
+        <p:nvSpPr>
+          <p:cNvPr id="10" name="Text 7"/>
+          <p:cNvSpPr/>
+          <p:nvPr/>
+        </p:nvSpPr>
+        <p:spPr>
+          <a:xfrm>
+            <a:off x="9299448" y="109728"/>
+            <a:ext cx="2286000" cy="237744"/>
+          </a:xfrm>
+          <a:prstGeom prst="rect">
+            <a:avLst/>
+          </a:prstGeom>
+          <a:noFill/>
+          <a:ln/>
+        </p:spPr>
+        <p:txBody>
+          <a:bodyPr wrap="square" lIns="0" tIns="0" rIns="0" bIns="0" rtlCol="0" anchor="ctr"/>
+          <a:lstStyle/>
+          <a:p>
+            <a:pPr indent="0" marL="0">
+              <a:buNone/>
+            </a:pPr>
+            <a:r>
+              <a:rPr lang="en-US" sz="800" b="1" spc="100" kern="0" dirty="0">
+                <a:solidFill>
+                  <a:srgbClr val="9FB2C2"/>
+                </a:solidFill>
+                <a:latin typeface="Inter" pitchFamily="34" charset="0"/>
+                <a:ea typeface="Inter" pitchFamily="34" charset="-122"/>
+                <a:cs typeface="Inter" pitchFamily="34" charset="-120"/>
+              </a:rPr>
+              <a:t>MS. RIVERA'S SCREEN · SO FAR</a:t>
+            </a:r>
+            <a:endParaRPr lang="en-US" sz="800" dirty="0"/>
+          </a:p>
+        </p:txBody>
+      </p:sp>
+      <p:sp>
+        <p:nvSpPr>
+          <p:cNvPr id="11" name="Text 8"/>
+          <p:cNvSpPr/>
+          <p:nvPr/>
+        </p:nvSpPr>
+        <p:spPr>
+          <a:xfrm>
+            <a:off x="8860536" y="365760"/>
+            <a:ext cx="2670048" cy="566928"/>
+          </a:xfrm>
+          <a:prstGeom prst="rect">
+            <a:avLst/>
+          </a:prstGeom>
+          <a:noFill/>
+          <a:ln/>
+        </p:spPr>
+        <p:txBody>
+          <a:bodyPr wrap="square" lIns="0" tIns="0" rIns="0" bIns="0" rtlCol="0" anchor="ctr"/>
+          <a:lstStyle/>
+          <a:p>
+            <a:pPr indent="0" marL="0">
+              <a:buNone/>
+            </a:pPr>
+            <a:r>
+              <a:rPr lang="en-US" sz="1000" dirty="0">
+                <a:solidFill>
+                  <a:srgbClr val="1B1F24"/>
+                </a:solidFill>
+                <a:latin typeface="Inter" pitchFamily="34" charset="0"/>
+                <a:ea typeface="Inter" pitchFamily="34" charset="-122"/>
+                <a:cs typeface="Inter" pitchFamily="34" charset="-120"/>
+              </a:rPr>
+              <a:t>Her templates: filed in the staff doc's Assessment section.</a:t>
+            </a:r>
+            <a:endParaRPr lang="en-US" sz="1000" dirty="0"/>
+          </a:p>
+        </p:txBody>
+      </p:sp>
+      <p:sp>
+        <p:nvSpPr>
+          <p:cNvPr id="12" name="Text 9"/>
           <p:cNvSpPr/>
           <p:nvPr/>
         </p:nvSpPr>
@@ -11224,7 +14743,7 @@
       </p:sp>
       <p:sp>
         <p:nvSpPr>
-          <p:cNvPr id="6" name="Text 3"/>
+          <p:cNvPr id="13" name="Text 10"/>
           <p:cNvSpPr/>
           <p:nvPr/>
         </p:nvSpPr>
@@ -11263,7 +14782,7 @@
       </p:sp>
       <p:sp>
         <p:nvSpPr>
-          <p:cNvPr id="7" name="Text 4"/>
+          <p:cNvPr id="14" name="Text 11"/>
           <p:cNvSpPr/>
           <p:nvPr/>
         </p:nvSpPr>
@@ -11348,7 +14867,7 @@
       </p:sp>
       <p:sp>
         <p:nvSpPr>
-          <p:cNvPr id="8" name="Shape 5"/>
+          <p:cNvPr id="15" name="Shape 12"/>
           <p:cNvSpPr/>
           <p:nvPr/>
         </p:nvSpPr>
@@ -11375,7 +14894,7 @@
       </p:sp>
       <p:sp>
         <p:nvSpPr>
-          <p:cNvPr id="9" name="Text 6"/>
+          <p:cNvPr id="16" name="Text 13"/>
           <p:cNvSpPr/>
           <p:nvPr/>
         </p:nvSpPr>
@@ -11562,7 +15081,214 @@
       </p:sp>
       <p:sp>
         <p:nvSpPr>
-          <p:cNvPr id="5" name="Text 2"/>
+          <p:cNvPr id="5" name="Shape 2"/>
+          <p:cNvSpPr/>
+          <p:nvPr/>
+        </p:nvSpPr>
+        <p:spPr>
+          <a:xfrm>
+            <a:off x="8732520" y="109728"/>
+            <a:ext cx="2926080" cy="896112"/>
+          </a:xfrm>
+          <a:prstGeom prst="roundRect">
+            <a:avLst>
+              <a:gd name="adj" fmla="val 7143"/>
+            </a:avLst>
+          </a:prstGeom>
+          <a:solidFill>
+            <a:srgbClr val="1E3A50"/>
+          </a:solidFill>
+          <a:ln w="12700">
+            <a:solidFill>
+              <a:srgbClr val="2A4A63"/>
+            </a:solidFill>
+            <a:prstDash val="solid"/>
+          </a:ln>
+        </p:spPr>
+      </p:sp>
+      <p:sp>
+        <p:nvSpPr>
+          <p:cNvPr id="6" name="Shape 3"/>
+          <p:cNvSpPr/>
+          <p:nvPr/>
+        </p:nvSpPr>
+        <p:spPr>
+          <a:xfrm>
+            <a:off x="8732520" y="109728"/>
+            <a:ext cx="2926080" cy="237744"/>
+          </a:xfrm>
+          <a:prstGeom prst="roundRect">
+            <a:avLst>
+              <a:gd name="adj" fmla="val 26923"/>
+            </a:avLst>
+          </a:prstGeom>
+          <a:solidFill>
+            <a:srgbClr val="0D1E2E"/>
+          </a:solidFill>
+          <a:ln w="12700">
+            <a:solidFill>
+              <a:srgbClr val="0D1E2E"/>
+            </a:solidFill>
+            <a:prstDash val="solid"/>
+          </a:ln>
+        </p:spPr>
+      </p:sp>
+      <p:sp>
+        <p:nvSpPr>
+          <p:cNvPr id="7" name="Shape 4"/>
+          <p:cNvSpPr/>
+          <p:nvPr/>
+        </p:nvSpPr>
+        <p:spPr>
+          <a:xfrm>
+            <a:off x="8823960" y="182880"/>
+            <a:ext cx="91440" cy="91440"/>
+          </a:xfrm>
+          <a:prstGeom prst="ellipse">
+            <a:avLst/>
+          </a:prstGeom>
+          <a:solidFill>
+            <a:srgbClr val="E8837A"/>
+          </a:solidFill>
+          <a:ln w="12700">
+            <a:solidFill>
+              <a:srgbClr val="E8837A"/>
+            </a:solidFill>
+            <a:prstDash val="solid"/>
+          </a:ln>
+        </p:spPr>
+      </p:sp>
+      <p:sp>
+        <p:nvSpPr>
+          <p:cNvPr id="8" name="Shape 5"/>
+          <p:cNvSpPr/>
+          <p:nvPr/>
+        </p:nvSpPr>
+        <p:spPr>
+          <a:xfrm>
+            <a:off x="8970264" y="182880"/>
+            <a:ext cx="91440" cy="91440"/>
+          </a:xfrm>
+          <a:prstGeom prst="ellipse">
+            <a:avLst/>
+          </a:prstGeom>
+          <a:solidFill>
+            <a:srgbClr val="F4A825"/>
+          </a:solidFill>
+          <a:ln w="12700">
+            <a:solidFill>
+              <a:srgbClr val="F4A825"/>
+            </a:solidFill>
+            <a:prstDash val="solid"/>
+          </a:ln>
+        </p:spPr>
+      </p:sp>
+      <p:sp>
+        <p:nvSpPr>
+          <p:cNvPr id="9" name="Shape 6"/>
+          <p:cNvSpPr/>
+          <p:nvPr/>
+        </p:nvSpPr>
+        <p:spPr>
+          <a:xfrm>
+            <a:off x="9116568" y="182880"/>
+            <a:ext cx="91440" cy="91440"/>
+          </a:xfrm>
+          <a:prstGeom prst="ellipse">
+            <a:avLst/>
+          </a:prstGeom>
+          <a:solidFill>
+            <a:srgbClr val="2E7D5B"/>
+          </a:solidFill>
+          <a:ln w="12700">
+            <a:solidFill>
+              <a:srgbClr val="2E7D5B"/>
+            </a:solidFill>
+            <a:prstDash val="solid"/>
+          </a:ln>
+        </p:spPr>
+      </p:sp>
+      <p:sp>
+        <p:nvSpPr>
+          <p:cNvPr id="10" name="Text 7"/>
+          <p:cNvSpPr/>
+          <p:nvPr/>
+        </p:nvSpPr>
+        <p:spPr>
+          <a:xfrm>
+            <a:off x="9299448" y="109728"/>
+            <a:ext cx="2286000" cy="237744"/>
+          </a:xfrm>
+          <a:prstGeom prst="rect">
+            <a:avLst/>
+          </a:prstGeom>
+          <a:noFill/>
+          <a:ln/>
+        </p:spPr>
+        <p:txBody>
+          <a:bodyPr wrap="square" lIns="0" tIns="0" rIns="0" bIns="0" rtlCol="0" anchor="ctr"/>
+          <a:lstStyle/>
+          <a:p>
+            <a:pPr indent="0" marL="0">
+              <a:buNone/>
+            </a:pPr>
+            <a:r>
+              <a:rPr lang="en-US" sz="800" b="1" spc="100" kern="0" dirty="0">
+                <a:solidFill>
+                  <a:srgbClr val="9FB2C2"/>
+                </a:solidFill>
+                <a:latin typeface="Inter" pitchFamily="34" charset="0"/>
+                <a:ea typeface="Inter" pitchFamily="34" charset="-122"/>
+                <a:cs typeface="Inter" pitchFamily="34" charset="-120"/>
+              </a:rPr>
+              <a:t>MS. RIVERA'S SCREEN · SO FAR</a:t>
+            </a:r>
+            <a:endParaRPr lang="en-US" sz="800" dirty="0"/>
+          </a:p>
+        </p:txBody>
+      </p:sp>
+      <p:sp>
+        <p:nvSpPr>
+          <p:cNvPr id="11" name="Text 8"/>
+          <p:cNvSpPr/>
+          <p:nvPr/>
+        </p:nvSpPr>
+        <p:spPr>
+          <a:xfrm>
+            <a:off x="8860536" y="365760"/>
+            <a:ext cx="2670048" cy="566928"/>
+          </a:xfrm>
+          <a:prstGeom prst="rect">
+            <a:avLst/>
+          </a:prstGeom>
+          <a:noFill/>
+          <a:ln/>
+        </p:spPr>
+        <p:txBody>
+          <a:bodyPr wrap="square" lIns="0" tIns="0" rIns="0" bIns="0" rtlCol="0" anchor="ctr"/>
+          <a:lstStyle/>
+          <a:p>
+            <a:pPr indent="0" marL="0">
+              <a:buNone/>
+            </a:pPr>
+            <a:r>
+              <a:rPr lang="en-US" sz="1000" dirty="0">
+                <a:solidFill>
+                  <a:srgbClr val="C9D4DE"/>
+                </a:solidFill>
+                <a:latin typeface="Inter" pitchFamily="34" charset="0"/>
+                <a:ea typeface="Inter" pitchFamily="34" charset="-122"/>
+                <a:cs typeface="Inter" pitchFamily="34" charset="-120"/>
+              </a:rPr>
+              <a:t>Her five hours: the drafting share just moved to a faster tool.</a:t>
+            </a:r>
+            <a:endParaRPr lang="en-US" sz="1000" dirty="0"/>
+          </a:p>
+        </p:txBody>
+      </p:sp>
+      <p:sp>
+        <p:nvSpPr>
+          <p:cNvPr id="12" name="Text 9"/>
           <p:cNvSpPr/>
           <p:nvPr/>
         </p:nvSpPr>
@@ -11601,7 +15327,7 @@
       </p:sp>
       <p:sp>
         <p:nvSpPr>
-          <p:cNvPr id="6" name="Text 3"/>
+          <p:cNvPr id="13" name="Text 10"/>
           <p:cNvSpPr/>
           <p:nvPr/>
         </p:nvSpPr>
@@ -11640,7 +15366,7 @@
       </p:sp>
       <p:sp>
         <p:nvSpPr>
-          <p:cNvPr id="7" name="Text 4"/>
+          <p:cNvPr id="14" name="Text 11"/>
           <p:cNvSpPr/>
           <p:nvPr/>
         </p:nvSpPr>
@@ -11679,7 +15405,7 @@
       </p:sp>
       <p:sp>
         <p:nvSpPr>
-          <p:cNvPr id="8" name="Text 5"/>
+          <p:cNvPr id="15" name="Text 12"/>
           <p:cNvSpPr/>
           <p:nvPr/>
         </p:nvSpPr>
@@ -11718,7 +15444,7 @@
       </p:sp>
       <p:sp>
         <p:nvSpPr>
-          <p:cNvPr id="9" name="Text 6"/>
+          <p:cNvPr id="16" name="Text 13"/>
           <p:cNvSpPr/>
           <p:nvPr/>
         </p:nvSpPr>
@@ -11905,7 +15631,214 @@
       </p:sp>
       <p:sp>
         <p:nvSpPr>
-          <p:cNvPr id="5" name="Text 2"/>
+          <p:cNvPr id="5" name="Shape 2"/>
+          <p:cNvSpPr/>
+          <p:nvPr/>
+        </p:nvSpPr>
+        <p:spPr>
+          <a:xfrm>
+            <a:off x="8732520" y="109728"/>
+            <a:ext cx="2926080" cy="896112"/>
+          </a:xfrm>
+          <a:prstGeom prst="roundRect">
+            <a:avLst>
+              <a:gd name="adj" fmla="val 7143"/>
+            </a:avLst>
+          </a:prstGeom>
+          <a:solidFill>
+            <a:srgbClr val="F7F5F0"/>
+          </a:solidFill>
+          <a:ln w="12700">
+            <a:solidFill>
+              <a:srgbClr val="DCE3EA"/>
+            </a:solidFill>
+            <a:prstDash val="solid"/>
+          </a:ln>
+        </p:spPr>
+      </p:sp>
+      <p:sp>
+        <p:nvSpPr>
+          <p:cNvPr id="6" name="Shape 3"/>
+          <p:cNvSpPr/>
+          <p:nvPr/>
+        </p:nvSpPr>
+        <p:spPr>
+          <a:xfrm>
+            <a:off x="8732520" y="109728"/>
+            <a:ext cx="2926080" cy="237744"/>
+          </a:xfrm>
+          <a:prstGeom prst="roundRect">
+            <a:avLst>
+              <a:gd name="adj" fmla="val 26923"/>
+            </a:avLst>
+          </a:prstGeom>
+          <a:solidFill>
+            <a:srgbClr val="0D1E2E"/>
+          </a:solidFill>
+          <a:ln w="12700">
+            <a:solidFill>
+              <a:srgbClr val="0D1E2E"/>
+            </a:solidFill>
+            <a:prstDash val="solid"/>
+          </a:ln>
+        </p:spPr>
+      </p:sp>
+      <p:sp>
+        <p:nvSpPr>
+          <p:cNvPr id="7" name="Shape 4"/>
+          <p:cNvSpPr/>
+          <p:nvPr/>
+        </p:nvSpPr>
+        <p:spPr>
+          <a:xfrm>
+            <a:off x="8823960" y="182880"/>
+            <a:ext cx="91440" cy="91440"/>
+          </a:xfrm>
+          <a:prstGeom prst="ellipse">
+            <a:avLst/>
+          </a:prstGeom>
+          <a:solidFill>
+            <a:srgbClr val="E8837A"/>
+          </a:solidFill>
+          <a:ln w="12700">
+            <a:solidFill>
+              <a:srgbClr val="E8837A"/>
+            </a:solidFill>
+            <a:prstDash val="solid"/>
+          </a:ln>
+        </p:spPr>
+      </p:sp>
+      <p:sp>
+        <p:nvSpPr>
+          <p:cNvPr id="8" name="Shape 5"/>
+          <p:cNvSpPr/>
+          <p:nvPr/>
+        </p:nvSpPr>
+        <p:spPr>
+          <a:xfrm>
+            <a:off x="8970264" y="182880"/>
+            <a:ext cx="91440" cy="91440"/>
+          </a:xfrm>
+          <a:prstGeom prst="ellipse">
+            <a:avLst/>
+          </a:prstGeom>
+          <a:solidFill>
+            <a:srgbClr val="F4A825"/>
+          </a:solidFill>
+          <a:ln w="12700">
+            <a:solidFill>
+              <a:srgbClr val="F4A825"/>
+            </a:solidFill>
+            <a:prstDash val="solid"/>
+          </a:ln>
+        </p:spPr>
+      </p:sp>
+      <p:sp>
+        <p:nvSpPr>
+          <p:cNvPr id="9" name="Shape 6"/>
+          <p:cNvSpPr/>
+          <p:nvPr/>
+        </p:nvSpPr>
+        <p:spPr>
+          <a:xfrm>
+            <a:off x="9116568" y="182880"/>
+            <a:ext cx="91440" cy="91440"/>
+          </a:xfrm>
+          <a:prstGeom prst="ellipse">
+            <a:avLst/>
+          </a:prstGeom>
+          <a:solidFill>
+            <a:srgbClr val="2E7D5B"/>
+          </a:solidFill>
+          <a:ln w="12700">
+            <a:solidFill>
+              <a:srgbClr val="2E7D5B"/>
+            </a:solidFill>
+            <a:prstDash val="solid"/>
+          </a:ln>
+        </p:spPr>
+      </p:sp>
+      <p:sp>
+        <p:nvSpPr>
+          <p:cNvPr id="10" name="Text 7"/>
+          <p:cNvSpPr/>
+          <p:nvPr/>
+        </p:nvSpPr>
+        <p:spPr>
+          <a:xfrm>
+            <a:off x="9299448" y="109728"/>
+            <a:ext cx="2286000" cy="237744"/>
+          </a:xfrm>
+          <a:prstGeom prst="rect">
+            <a:avLst/>
+          </a:prstGeom>
+          <a:noFill/>
+          <a:ln/>
+        </p:spPr>
+        <p:txBody>
+          <a:bodyPr wrap="square" lIns="0" tIns="0" rIns="0" bIns="0" rtlCol="0" anchor="ctr"/>
+          <a:lstStyle/>
+          <a:p>
+            <a:pPr indent="0" marL="0">
+              <a:buNone/>
+            </a:pPr>
+            <a:r>
+              <a:rPr lang="en-US" sz="800" b="1" spc="100" kern="0" dirty="0">
+                <a:solidFill>
+                  <a:srgbClr val="9FB2C2"/>
+                </a:solidFill>
+                <a:latin typeface="Inter" pitchFamily="34" charset="0"/>
+                <a:ea typeface="Inter" pitchFamily="34" charset="-122"/>
+                <a:cs typeface="Inter" pitchFamily="34" charset="-120"/>
+              </a:rPr>
+              <a:t>MS. RIVERA'S SCREEN · SO FAR</a:t>
+            </a:r>
+            <a:endParaRPr lang="en-US" sz="800" dirty="0"/>
+          </a:p>
+        </p:txBody>
+      </p:sp>
+      <p:sp>
+        <p:nvSpPr>
+          <p:cNvPr id="11" name="Text 8"/>
+          <p:cNvSpPr/>
+          <p:nvPr/>
+        </p:nvSpPr>
+        <p:spPr>
+          <a:xfrm>
+            <a:off x="8860536" y="365760"/>
+            <a:ext cx="2670048" cy="566928"/>
+          </a:xfrm>
+          <a:prstGeom prst="rect">
+            <a:avLst/>
+          </a:prstGeom>
+          <a:noFill/>
+          <a:ln/>
+        </p:spPr>
+        <p:txBody>
+          <a:bodyPr wrap="square" lIns="0" tIns="0" rIns="0" bIns="0" rtlCol="0" anchor="ctr"/>
+          <a:lstStyle/>
+          <a:p>
+            <a:pPr indent="0" marL="0">
+              <a:buNone/>
+            </a:pPr>
+            <a:r>
+              <a:rPr lang="en-US" sz="1000" dirty="0">
+                <a:solidFill>
+                  <a:srgbClr val="1B1F24"/>
+                </a:solidFill>
+                <a:latin typeface="Inter" pitchFamily="34" charset="0"/>
+                <a:ea typeface="Inter" pitchFamily="34" charset="-122"/>
+                <a:cs typeface="Inter" pitchFamily="34" charset="-120"/>
+              </a:rPr>
+              <a:t>Her next kit: the student side. Integrity and clear expectations.</a:t>
+            </a:r>
+            <a:endParaRPr lang="en-US" sz="1000" dirty="0"/>
+          </a:p>
+        </p:txBody>
+      </p:sp>
+      <p:sp>
+        <p:nvSpPr>
+          <p:cNvPr id="12" name="Text 9"/>
           <p:cNvSpPr/>
           <p:nvPr/>
         </p:nvSpPr>
@@ -11944,7 +15877,7 @@
       </p:sp>
       <p:sp>
         <p:nvSpPr>
-          <p:cNvPr id="6" name="Text 3"/>
+          <p:cNvPr id="13" name="Text 10"/>
           <p:cNvSpPr/>
           <p:nvPr/>
         </p:nvSpPr>
@@ -11983,7 +15916,7 @@
       </p:sp>
       <p:sp>
         <p:nvSpPr>
-          <p:cNvPr id="7" name="Shape 4"/>
+          <p:cNvPr id="14" name="Shape 11"/>
           <p:cNvSpPr/>
           <p:nvPr/>
         </p:nvSpPr>
@@ -12010,7 +15943,7 @@
       </p:sp>
       <p:sp>
         <p:nvSpPr>
-          <p:cNvPr id="8" name="Text 5"/>
+          <p:cNvPr id="15" name="Text 12"/>
           <p:cNvSpPr/>
           <p:nvPr/>
         </p:nvSpPr>
@@ -12049,7 +15982,7 @@
       </p:sp>
       <p:sp>
         <p:nvSpPr>
-          <p:cNvPr id="9" name="Shape 6"/>
+          <p:cNvPr id="16" name="Shape 13"/>
           <p:cNvSpPr/>
           <p:nvPr/>
         </p:nvSpPr>
@@ -12076,7 +16009,7 @@
       </p:sp>
       <p:sp>
         <p:nvSpPr>
-          <p:cNvPr id="10" name="Text 7"/>
+          <p:cNvPr id="17" name="Text 14"/>
           <p:cNvSpPr/>
           <p:nvPr/>
         </p:nvSpPr>
@@ -12115,7 +16048,7 @@
       </p:sp>
       <p:sp>
         <p:nvSpPr>
-          <p:cNvPr id="11" name="Shape 8"/>
+          <p:cNvPr id="18" name="Shape 15"/>
           <p:cNvSpPr/>
           <p:nvPr/>
         </p:nvSpPr>
@@ -12142,7 +16075,7 @@
       </p:sp>
       <p:sp>
         <p:nvSpPr>
-          <p:cNvPr id="12" name="Text 9"/>
+          <p:cNvPr id="19" name="Text 16"/>
           <p:cNvSpPr/>
           <p:nvPr/>
         </p:nvSpPr>
@@ -12181,7 +16114,7 @@
       </p:sp>
       <p:sp>
         <p:nvSpPr>
-          <p:cNvPr id="13" name="Shape 10"/>
+          <p:cNvPr id="20" name="Shape 17"/>
           <p:cNvSpPr/>
           <p:nvPr/>
         </p:nvSpPr>
@@ -12208,7 +16141,7 @@
       </p:sp>
       <p:sp>
         <p:nvSpPr>
-          <p:cNvPr id="14" name="Text 11"/>
+          <p:cNvPr id="21" name="Text 18"/>
           <p:cNvSpPr/>
           <p:nvPr/>
         </p:nvSpPr>
@@ -12247,7 +16180,7 @@
       </p:sp>
       <p:sp>
         <p:nvSpPr>
-          <p:cNvPr id="15" name="Shape 12"/>
+          <p:cNvPr id="22" name="Shape 19"/>
           <p:cNvSpPr/>
           <p:nvPr/>
         </p:nvSpPr>
@@ -12274,7 +16207,7 @@
       </p:sp>
       <p:sp>
         <p:nvSpPr>
-          <p:cNvPr id="16" name="Text 13"/>
+          <p:cNvPr id="23" name="Text 20"/>
           <p:cNvSpPr/>
           <p:nvPr/>
         </p:nvSpPr>
@@ -12313,7 +16246,7 @@
       </p:sp>
       <p:sp>
         <p:nvSpPr>
-          <p:cNvPr id="17" name="Shape 14"/>
+          <p:cNvPr id="24" name="Shape 21"/>
           <p:cNvSpPr/>
           <p:nvPr/>
         </p:nvSpPr>
@@ -12340,7 +16273,7 @@
       </p:sp>
       <p:sp>
         <p:nvSpPr>
-          <p:cNvPr id="18" name="Text 15"/>
+          <p:cNvPr id="25" name="Text 22"/>
           <p:cNvSpPr/>
           <p:nvPr/>
         </p:nvSpPr>
@@ -12379,7 +16312,7 @@
       </p:sp>
       <p:sp>
         <p:nvSpPr>
-          <p:cNvPr id="19" name="Shape 16"/>
+          <p:cNvPr id="26" name="Shape 23"/>
           <p:cNvSpPr/>
           <p:nvPr/>
         </p:nvSpPr>
@@ -12406,7 +16339,7 @@
       </p:sp>
       <p:sp>
         <p:nvSpPr>
-          <p:cNvPr id="20" name="Text 17"/>
+          <p:cNvPr id="27" name="Text 24"/>
           <p:cNvSpPr/>
           <p:nvPr/>
         </p:nvSpPr>
@@ -12445,7 +16378,7 @@
       </p:sp>
       <p:sp>
         <p:nvSpPr>
-          <p:cNvPr id="21" name="Shape 18"/>
+          <p:cNvPr id="28" name="Shape 25"/>
           <p:cNvSpPr/>
           <p:nvPr/>
         </p:nvSpPr>
@@ -12472,7 +16405,7 @@
       </p:sp>
       <p:sp>
         <p:nvSpPr>
-          <p:cNvPr id="22" name="Text 19"/>
+          <p:cNvPr id="29" name="Text 26"/>
           <p:cNvSpPr/>
           <p:nvPr/>
         </p:nvSpPr>
@@ -12511,7 +16444,7 @@
       </p:sp>
       <p:sp>
         <p:nvSpPr>
-          <p:cNvPr id="23" name="Shape 20"/>
+          <p:cNvPr id="30" name="Shape 27"/>
           <p:cNvSpPr/>
           <p:nvPr/>
         </p:nvSpPr>
@@ -12538,7 +16471,7 @@
       </p:sp>
       <p:sp>
         <p:nvSpPr>
-          <p:cNvPr id="24" name="Text 21"/>
+          <p:cNvPr id="31" name="Text 28"/>
           <p:cNvSpPr/>
           <p:nvPr/>
         </p:nvSpPr>
@@ -12739,7 +16672,214 @@
       </p:sp>
       <p:sp>
         <p:nvSpPr>
-          <p:cNvPr id="5" name="Text 2"/>
+          <p:cNvPr id="5" name="Shape 2"/>
+          <p:cNvSpPr/>
+          <p:nvPr/>
+        </p:nvSpPr>
+        <p:spPr>
+          <a:xfrm>
+            <a:off x="8732520" y="109728"/>
+            <a:ext cx="2926080" cy="896112"/>
+          </a:xfrm>
+          <a:prstGeom prst="roundRect">
+            <a:avLst>
+              <a:gd name="adj" fmla="val 7143"/>
+            </a:avLst>
+          </a:prstGeom>
+          <a:solidFill>
+            <a:srgbClr val="F7F5F0"/>
+          </a:solidFill>
+          <a:ln w="12700">
+            <a:solidFill>
+              <a:srgbClr val="DCE3EA"/>
+            </a:solidFill>
+            <a:prstDash val="solid"/>
+          </a:ln>
+        </p:spPr>
+      </p:sp>
+      <p:sp>
+        <p:nvSpPr>
+          <p:cNvPr id="6" name="Shape 3"/>
+          <p:cNvSpPr/>
+          <p:nvPr/>
+        </p:nvSpPr>
+        <p:spPr>
+          <a:xfrm>
+            <a:off x="8732520" y="109728"/>
+            <a:ext cx="2926080" cy="237744"/>
+          </a:xfrm>
+          <a:prstGeom prst="roundRect">
+            <a:avLst>
+              <a:gd name="adj" fmla="val 26923"/>
+            </a:avLst>
+          </a:prstGeom>
+          <a:solidFill>
+            <a:srgbClr val="0D1E2E"/>
+          </a:solidFill>
+          <a:ln w="12700">
+            <a:solidFill>
+              <a:srgbClr val="0D1E2E"/>
+            </a:solidFill>
+            <a:prstDash val="solid"/>
+          </a:ln>
+        </p:spPr>
+      </p:sp>
+      <p:sp>
+        <p:nvSpPr>
+          <p:cNvPr id="7" name="Shape 4"/>
+          <p:cNvSpPr/>
+          <p:nvPr/>
+        </p:nvSpPr>
+        <p:spPr>
+          <a:xfrm>
+            <a:off x="8823960" y="182880"/>
+            <a:ext cx="91440" cy="91440"/>
+          </a:xfrm>
+          <a:prstGeom prst="ellipse">
+            <a:avLst/>
+          </a:prstGeom>
+          <a:solidFill>
+            <a:srgbClr val="E8837A"/>
+          </a:solidFill>
+          <a:ln w="12700">
+            <a:solidFill>
+              <a:srgbClr val="E8837A"/>
+            </a:solidFill>
+            <a:prstDash val="solid"/>
+          </a:ln>
+        </p:spPr>
+      </p:sp>
+      <p:sp>
+        <p:nvSpPr>
+          <p:cNvPr id="8" name="Shape 5"/>
+          <p:cNvSpPr/>
+          <p:nvPr/>
+        </p:nvSpPr>
+        <p:spPr>
+          <a:xfrm>
+            <a:off x="8970264" y="182880"/>
+            <a:ext cx="91440" cy="91440"/>
+          </a:xfrm>
+          <a:prstGeom prst="ellipse">
+            <a:avLst/>
+          </a:prstGeom>
+          <a:solidFill>
+            <a:srgbClr val="F4A825"/>
+          </a:solidFill>
+          <a:ln w="12700">
+            <a:solidFill>
+              <a:srgbClr val="F4A825"/>
+            </a:solidFill>
+            <a:prstDash val="solid"/>
+          </a:ln>
+        </p:spPr>
+      </p:sp>
+      <p:sp>
+        <p:nvSpPr>
+          <p:cNvPr id="9" name="Shape 6"/>
+          <p:cNvSpPr/>
+          <p:nvPr/>
+        </p:nvSpPr>
+        <p:spPr>
+          <a:xfrm>
+            <a:off x="9116568" y="182880"/>
+            <a:ext cx="91440" cy="91440"/>
+          </a:xfrm>
+          <a:prstGeom prst="ellipse">
+            <a:avLst/>
+          </a:prstGeom>
+          <a:solidFill>
+            <a:srgbClr val="2E7D5B"/>
+          </a:solidFill>
+          <a:ln w="12700">
+            <a:solidFill>
+              <a:srgbClr val="2E7D5B"/>
+            </a:solidFill>
+            <a:prstDash val="solid"/>
+          </a:ln>
+        </p:spPr>
+      </p:sp>
+      <p:sp>
+        <p:nvSpPr>
+          <p:cNvPr id="10" name="Text 7"/>
+          <p:cNvSpPr/>
+          <p:nvPr/>
+        </p:nvSpPr>
+        <p:spPr>
+          <a:xfrm>
+            <a:off x="9299448" y="109728"/>
+            <a:ext cx="2286000" cy="237744"/>
+          </a:xfrm>
+          <a:prstGeom prst="rect">
+            <a:avLst/>
+          </a:prstGeom>
+          <a:noFill/>
+          <a:ln/>
+        </p:spPr>
+        <p:txBody>
+          <a:bodyPr wrap="square" lIns="0" tIns="0" rIns="0" bIns="0" rtlCol="0" anchor="ctr"/>
+          <a:lstStyle/>
+          <a:p>
+            <a:pPr indent="0" marL="0">
+              <a:buNone/>
+            </a:pPr>
+            <a:r>
+              <a:rPr lang="en-US" sz="800" b="1" spc="100" kern="0" dirty="0">
+                <a:solidFill>
+                  <a:srgbClr val="9FB2C2"/>
+                </a:solidFill>
+                <a:latin typeface="Inter" pitchFamily="34" charset="0"/>
+                <a:ea typeface="Inter" pitchFamily="34" charset="-122"/>
+                <a:cs typeface="Inter" pitchFamily="34" charset="-120"/>
+              </a:rPr>
+              <a:t>MS. RIVERA'S SCREEN · SO FAR</a:t>
+            </a:r>
+            <a:endParaRPr lang="en-US" sz="800" dirty="0"/>
+          </a:p>
+        </p:txBody>
+      </p:sp>
+      <p:sp>
+        <p:nvSpPr>
+          <p:cNvPr id="11" name="Text 8"/>
+          <p:cNvSpPr/>
+          <p:nvPr/>
+        </p:nvSpPr>
+        <p:spPr>
+          <a:xfrm>
+            <a:off x="8860536" y="365760"/>
+            <a:ext cx="2670048" cy="566928"/>
+          </a:xfrm>
+          <a:prstGeom prst="rect">
+            <a:avLst/>
+          </a:prstGeom>
+          <a:noFill/>
+          <a:ln/>
+        </p:spPr>
+        <p:txBody>
+          <a:bodyPr wrap="square" lIns="0" tIns="0" rIns="0" bIns="0" rtlCol="0" anchor="ctr"/>
+          <a:lstStyle/>
+          <a:p>
+            <a:pPr indent="0" marL="0">
+              <a:buNone/>
+            </a:pPr>
+            <a:r>
+              <a:rPr lang="en-US" sz="1000" dirty="0">
+                <a:solidFill>
+                  <a:srgbClr val="1B1F24"/>
+                </a:solidFill>
+                <a:latin typeface="Inter" pitchFamily="34" charset="0"/>
+                <a:ea typeface="Inter" pitchFamily="34" charset="-122"/>
+                <a:cs typeface="Inter" pitchFamily="34" charset="-120"/>
+              </a:rPr>
+              <a:t>Her 48 hours: rubric out with the assignment, finish vetting, use one starter.</a:t>
+            </a:r>
+            <a:endParaRPr lang="en-US" sz="1000" dirty="0"/>
+          </a:p>
+        </p:txBody>
+      </p:sp>
+      <p:sp>
+        <p:nvSpPr>
+          <p:cNvPr id="12" name="Text 9"/>
           <p:cNvSpPr/>
           <p:nvPr/>
         </p:nvSpPr>
@@ -12778,7 +16918,7 @@
       </p:sp>
       <p:sp>
         <p:nvSpPr>
-          <p:cNvPr id="6" name="Text 3"/>
+          <p:cNvPr id="13" name="Text 10"/>
           <p:cNvSpPr/>
           <p:nvPr/>
         </p:nvSpPr>
@@ -12817,7 +16957,7 @@
       </p:sp>
       <p:sp>
         <p:nvSpPr>
-          <p:cNvPr id="7" name="Shape 4"/>
+          <p:cNvPr id="14" name="Shape 11"/>
           <p:cNvSpPr/>
           <p:nvPr/>
         </p:nvSpPr>
@@ -12844,7 +16984,7 @@
       </p:sp>
       <p:sp>
         <p:nvSpPr>
-          <p:cNvPr id="8" name="Text 5"/>
+          <p:cNvPr id="15" name="Text 12"/>
           <p:cNvSpPr/>
           <p:nvPr/>
         </p:nvSpPr>
@@ -12883,7 +17023,7 @@
       </p:sp>
       <p:sp>
         <p:nvSpPr>
-          <p:cNvPr id="9" name="Text 6"/>
+          <p:cNvPr id="16" name="Text 13"/>
           <p:cNvSpPr/>
           <p:nvPr/>
         </p:nvSpPr>
@@ -12922,7 +17062,7 @@
       </p:sp>
       <p:sp>
         <p:nvSpPr>
-          <p:cNvPr id="10" name="Text 7"/>
+          <p:cNvPr id="17" name="Text 14"/>
           <p:cNvSpPr/>
           <p:nvPr/>
         </p:nvSpPr>
@@ -12961,7 +17101,7 @@
       </p:sp>
       <p:sp>
         <p:nvSpPr>
-          <p:cNvPr id="11" name="Shape 8"/>
+          <p:cNvPr id="18" name="Shape 15"/>
           <p:cNvSpPr/>
           <p:nvPr/>
         </p:nvSpPr>
@@ -12988,7 +17128,7 @@
       </p:sp>
       <p:sp>
         <p:nvSpPr>
-          <p:cNvPr id="12" name="Text 9"/>
+          <p:cNvPr id="19" name="Text 16"/>
           <p:cNvSpPr/>
           <p:nvPr/>
         </p:nvSpPr>
@@ -13027,7 +17167,7 @@
       </p:sp>
       <p:sp>
         <p:nvSpPr>
-          <p:cNvPr id="13" name="Text 10"/>
+          <p:cNvPr id="20" name="Text 17"/>
           <p:cNvSpPr/>
           <p:nvPr/>
         </p:nvSpPr>
@@ -13066,7 +17206,7 @@
       </p:sp>
       <p:sp>
         <p:nvSpPr>
-          <p:cNvPr id="14" name="Text 11"/>
+          <p:cNvPr id="21" name="Text 18"/>
           <p:cNvSpPr/>
           <p:nvPr/>
         </p:nvSpPr>
@@ -13105,7 +17245,7 @@
       </p:sp>
       <p:sp>
         <p:nvSpPr>
-          <p:cNvPr id="15" name="Shape 12"/>
+          <p:cNvPr id="22" name="Shape 19"/>
           <p:cNvSpPr/>
           <p:nvPr/>
         </p:nvSpPr>
@@ -13132,7 +17272,7 @@
       </p:sp>
       <p:sp>
         <p:nvSpPr>
-          <p:cNvPr id="16" name="Text 13"/>
+          <p:cNvPr id="23" name="Text 20"/>
           <p:cNvSpPr/>
           <p:nvPr/>
         </p:nvSpPr>
@@ -13171,7 +17311,7 @@
       </p:sp>
       <p:sp>
         <p:nvSpPr>
-          <p:cNvPr id="17" name="Text 14"/>
+          <p:cNvPr id="24" name="Text 21"/>
           <p:cNvSpPr/>
           <p:nvPr/>
         </p:nvSpPr>
@@ -13210,7 +17350,7 @@
       </p:sp>
       <p:sp>
         <p:nvSpPr>
-          <p:cNvPr id="18" name="Text 15"/>
+          <p:cNvPr id="25" name="Text 22"/>
           <p:cNvSpPr/>
           <p:nvPr/>
         </p:nvSpPr>
@@ -13397,7 +17537,214 @@
       </p:sp>
       <p:sp>
         <p:nvSpPr>
-          <p:cNvPr id="5" name="Text 2"/>
+          <p:cNvPr id="5" name="Shape 2"/>
+          <p:cNvSpPr/>
+          <p:nvPr/>
+        </p:nvSpPr>
+        <p:spPr>
+          <a:xfrm>
+            <a:off x="8732520" y="109728"/>
+            <a:ext cx="2926080" cy="896112"/>
+          </a:xfrm>
+          <a:prstGeom prst="roundRect">
+            <a:avLst>
+              <a:gd name="adj" fmla="val 7143"/>
+            </a:avLst>
+          </a:prstGeom>
+          <a:solidFill>
+            <a:srgbClr val="F7F5F0"/>
+          </a:solidFill>
+          <a:ln w="12700">
+            <a:solidFill>
+              <a:srgbClr val="DCE3EA"/>
+            </a:solidFill>
+            <a:prstDash val="solid"/>
+          </a:ln>
+        </p:spPr>
+      </p:sp>
+      <p:sp>
+        <p:nvSpPr>
+          <p:cNvPr id="6" name="Shape 3"/>
+          <p:cNvSpPr/>
+          <p:nvPr/>
+        </p:nvSpPr>
+        <p:spPr>
+          <a:xfrm>
+            <a:off x="8732520" y="109728"/>
+            <a:ext cx="2926080" cy="237744"/>
+          </a:xfrm>
+          <a:prstGeom prst="roundRect">
+            <a:avLst>
+              <a:gd name="adj" fmla="val 26923"/>
+            </a:avLst>
+          </a:prstGeom>
+          <a:solidFill>
+            <a:srgbClr val="0D1E2E"/>
+          </a:solidFill>
+          <a:ln w="12700">
+            <a:solidFill>
+              <a:srgbClr val="0D1E2E"/>
+            </a:solidFill>
+            <a:prstDash val="solid"/>
+          </a:ln>
+        </p:spPr>
+      </p:sp>
+      <p:sp>
+        <p:nvSpPr>
+          <p:cNvPr id="7" name="Shape 4"/>
+          <p:cNvSpPr/>
+          <p:nvPr/>
+        </p:nvSpPr>
+        <p:spPr>
+          <a:xfrm>
+            <a:off x="8823960" y="182880"/>
+            <a:ext cx="91440" cy="91440"/>
+          </a:xfrm>
+          <a:prstGeom prst="ellipse">
+            <a:avLst/>
+          </a:prstGeom>
+          <a:solidFill>
+            <a:srgbClr val="E8837A"/>
+          </a:solidFill>
+          <a:ln w="12700">
+            <a:solidFill>
+              <a:srgbClr val="E8837A"/>
+            </a:solidFill>
+            <a:prstDash val="solid"/>
+          </a:ln>
+        </p:spPr>
+      </p:sp>
+      <p:sp>
+        <p:nvSpPr>
+          <p:cNvPr id="8" name="Shape 5"/>
+          <p:cNvSpPr/>
+          <p:nvPr/>
+        </p:nvSpPr>
+        <p:spPr>
+          <a:xfrm>
+            <a:off x="8970264" y="182880"/>
+            <a:ext cx="91440" cy="91440"/>
+          </a:xfrm>
+          <a:prstGeom prst="ellipse">
+            <a:avLst/>
+          </a:prstGeom>
+          <a:solidFill>
+            <a:srgbClr val="F4A825"/>
+          </a:solidFill>
+          <a:ln w="12700">
+            <a:solidFill>
+              <a:srgbClr val="F4A825"/>
+            </a:solidFill>
+            <a:prstDash val="solid"/>
+          </a:ln>
+        </p:spPr>
+      </p:sp>
+      <p:sp>
+        <p:nvSpPr>
+          <p:cNvPr id="9" name="Shape 6"/>
+          <p:cNvSpPr/>
+          <p:nvPr/>
+        </p:nvSpPr>
+        <p:spPr>
+          <a:xfrm>
+            <a:off x="9116568" y="182880"/>
+            <a:ext cx="91440" cy="91440"/>
+          </a:xfrm>
+          <a:prstGeom prst="ellipse">
+            <a:avLst/>
+          </a:prstGeom>
+          <a:solidFill>
+            <a:srgbClr val="2E7D5B"/>
+          </a:solidFill>
+          <a:ln w="12700">
+            <a:solidFill>
+              <a:srgbClr val="2E7D5B"/>
+            </a:solidFill>
+            <a:prstDash val="solid"/>
+          </a:ln>
+        </p:spPr>
+      </p:sp>
+      <p:sp>
+        <p:nvSpPr>
+          <p:cNvPr id="10" name="Text 7"/>
+          <p:cNvSpPr/>
+          <p:nvPr/>
+        </p:nvSpPr>
+        <p:spPr>
+          <a:xfrm>
+            <a:off x="9299448" y="109728"/>
+            <a:ext cx="2286000" cy="237744"/>
+          </a:xfrm>
+          <a:prstGeom prst="rect">
+            <a:avLst/>
+          </a:prstGeom>
+          <a:noFill/>
+          <a:ln/>
+        </p:spPr>
+        <p:txBody>
+          <a:bodyPr wrap="square" lIns="0" tIns="0" rIns="0" bIns="0" rtlCol="0" anchor="ctr"/>
+          <a:lstStyle/>
+          <a:p>
+            <a:pPr indent="0" marL="0">
+              <a:buNone/>
+            </a:pPr>
+            <a:r>
+              <a:rPr lang="en-US" sz="800" b="1" spc="100" kern="0" dirty="0">
+                <a:solidFill>
+                  <a:srgbClr val="9FB2C2"/>
+                </a:solidFill>
+                <a:latin typeface="Inter" pitchFamily="34" charset="0"/>
+                <a:ea typeface="Inter" pitchFamily="34" charset="-122"/>
+                <a:cs typeface="Inter" pitchFamily="34" charset="-120"/>
+              </a:rPr>
+              <a:t>MS. RIVERA'S SCREEN · SO FAR</a:t>
+            </a:r>
+            <a:endParaRPr lang="en-US" sz="800" dirty="0"/>
+          </a:p>
+        </p:txBody>
+      </p:sp>
+      <p:sp>
+        <p:nvSpPr>
+          <p:cNvPr id="11" name="Text 8"/>
+          <p:cNvSpPr/>
+          <p:nvPr/>
+        </p:nvSpPr>
+        <p:spPr>
+          <a:xfrm>
+            <a:off x="8860536" y="365760"/>
+            <a:ext cx="2670048" cy="566928"/>
+          </a:xfrm>
+          <a:prstGeom prst="rect">
+            <a:avLst/>
+          </a:prstGeom>
+          <a:noFill/>
+          <a:ln/>
+        </p:spPr>
+        <p:txBody>
+          <a:bodyPr wrap="square" lIns="0" tIns="0" rIns="0" bIns="0" rtlCol="0" anchor="ctr"/>
+          <a:lstStyle/>
+          <a:p>
+            <a:pPr indent="0" marL="0">
+              <a:buNone/>
+            </a:pPr>
+            <a:r>
+              <a:rPr lang="en-US" sz="1000" dirty="0">
+                <a:solidFill>
+                  <a:srgbClr val="1B1F24"/>
+                </a:solidFill>
+                <a:latin typeface="Inter" pitchFamily="34" charset="0"/>
+                <a:ea typeface="Inter" pitchFamily="34" charset="-122"/>
+                <a:cs typeface="Inter" pitchFamily="34" charset="-120"/>
+              </a:rPr>
+              <a:t>Her exit ticket: what she built, the weak question she caught.</a:t>
+            </a:r>
+            <a:endParaRPr lang="en-US" sz="1000" dirty="0"/>
+          </a:p>
+        </p:txBody>
+      </p:sp>
+      <p:sp>
+        <p:nvSpPr>
+          <p:cNvPr id="12" name="Text 9"/>
           <p:cNvSpPr/>
           <p:nvPr/>
         </p:nvSpPr>
@@ -13436,7 +17783,7 @@
       </p:sp>
       <p:sp>
         <p:nvSpPr>
-          <p:cNvPr id="6" name="Text 3"/>
+          <p:cNvPr id="13" name="Text 10"/>
           <p:cNvSpPr/>
           <p:nvPr/>
         </p:nvSpPr>
@@ -13475,7 +17822,7 @@
       </p:sp>
       <p:sp>
         <p:nvSpPr>
-          <p:cNvPr id="7" name="Text 4"/>
+          <p:cNvPr id="14" name="Text 11"/>
           <p:cNvSpPr/>
           <p:nvPr/>
         </p:nvSpPr>
@@ -13560,7 +17907,7 @@
       </p:sp>
       <p:sp>
         <p:nvSpPr>
-          <p:cNvPr id="8" name="Text 5"/>
+          <p:cNvPr id="15" name="Text 12"/>
           <p:cNvSpPr/>
           <p:nvPr/>
         </p:nvSpPr>
@@ -13747,7 +18094,214 @@
       </p:sp>
       <p:sp>
         <p:nvSpPr>
-          <p:cNvPr id="5" name="Text 2"/>
+          <p:cNvPr id="5" name="Shape 2"/>
+          <p:cNvSpPr/>
+          <p:nvPr/>
+        </p:nvSpPr>
+        <p:spPr>
+          <a:xfrm>
+            <a:off x="8732520" y="109728"/>
+            <a:ext cx="2926080" cy="896112"/>
+          </a:xfrm>
+          <a:prstGeom prst="roundRect">
+            <a:avLst>
+              <a:gd name="adj" fmla="val 7143"/>
+            </a:avLst>
+          </a:prstGeom>
+          <a:solidFill>
+            <a:srgbClr val="F7F5F0"/>
+          </a:solidFill>
+          <a:ln w="12700">
+            <a:solidFill>
+              <a:srgbClr val="DCE3EA"/>
+            </a:solidFill>
+            <a:prstDash val="solid"/>
+          </a:ln>
+        </p:spPr>
+      </p:sp>
+      <p:sp>
+        <p:nvSpPr>
+          <p:cNvPr id="6" name="Shape 3"/>
+          <p:cNvSpPr/>
+          <p:nvPr/>
+        </p:nvSpPr>
+        <p:spPr>
+          <a:xfrm>
+            <a:off x="8732520" y="109728"/>
+            <a:ext cx="2926080" cy="237744"/>
+          </a:xfrm>
+          <a:prstGeom prst="roundRect">
+            <a:avLst>
+              <a:gd name="adj" fmla="val 26923"/>
+            </a:avLst>
+          </a:prstGeom>
+          <a:solidFill>
+            <a:srgbClr val="0D1E2E"/>
+          </a:solidFill>
+          <a:ln w="12700">
+            <a:solidFill>
+              <a:srgbClr val="0D1E2E"/>
+            </a:solidFill>
+            <a:prstDash val="solid"/>
+          </a:ln>
+        </p:spPr>
+      </p:sp>
+      <p:sp>
+        <p:nvSpPr>
+          <p:cNvPr id="7" name="Shape 4"/>
+          <p:cNvSpPr/>
+          <p:nvPr/>
+        </p:nvSpPr>
+        <p:spPr>
+          <a:xfrm>
+            <a:off x="8823960" y="182880"/>
+            <a:ext cx="91440" cy="91440"/>
+          </a:xfrm>
+          <a:prstGeom prst="ellipse">
+            <a:avLst/>
+          </a:prstGeom>
+          <a:solidFill>
+            <a:srgbClr val="E8837A"/>
+          </a:solidFill>
+          <a:ln w="12700">
+            <a:solidFill>
+              <a:srgbClr val="E8837A"/>
+            </a:solidFill>
+            <a:prstDash val="solid"/>
+          </a:ln>
+        </p:spPr>
+      </p:sp>
+      <p:sp>
+        <p:nvSpPr>
+          <p:cNvPr id="8" name="Shape 5"/>
+          <p:cNvSpPr/>
+          <p:nvPr/>
+        </p:nvSpPr>
+        <p:spPr>
+          <a:xfrm>
+            <a:off x="8970264" y="182880"/>
+            <a:ext cx="91440" cy="91440"/>
+          </a:xfrm>
+          <a:prstGeom prst="ellipse">
+            <a:avLst/>
+          </a:prstGeom>
+          <a:solidFill>
+            <a:srgbClr val="F4A825"/>
+          </a:solidFill>
+          <a:ln w="12700">
+            <a:solidFill>
+              <a:srgbClr val="F4A825"/>
+            </a:solidFill>
+            <a:prstDash val="solid"/>
+          </a:ln>
+        </p:spPr>
+      </p:sp>
+      <p:sp>
+        <p:nvSpPr>
+          <p:cNvPr id="9" name="Shape 6"/>
+          <p:cNvSpPr/>
+          <p:nvPr/>
+        </p:nvSpPr>
+        <p:spPr>
+          <a:xfrm>
+            <a:off x="9116568" y="182880"/>
+            <a:ext cx="91440" cy="91440"/>
+          </a:xfrm>
+          <a:prstGeom prst="ellipse">
+            <a:avLst/>
+          </a:prstGeom>
+          <a:solidFill>
+            <a:srgbClr val="2E7D5B"/>
+          </a:solidFill>
+          <a:ln w="12700">
+            <a:solidFill>
+              <a:srgbClr val="2E7D5B"/>
+            </a:solidFill>
+            <a:prstDash val="solid"/>
+          </a:ln>
+        </p:spPr>
+      </p:sp>
+      <p:sp>
+        <p:nvSpPr>
+          <p:cNvPr id="10" name="Text 7"/>
+          <p:cNvSpPr/>
+          <p:nvPr/>
+        </p:nvSpPr>
+        <p:spPr>
+          <a:xfrm>
+            <a:off x="9299448" y="109728"/>
+            <a:ext cx="2286000" cy="237744"/>
+          </a:xfrm>
+          <a:prstGeom prst="rect">
+            <a:avLst/>
+          </a:prstGeom>
+          <a:noFill/>
+          <a:ln/>
+        </p:spPr>
+        <p:txBody>
+          <a:bodyPr wrap="square" lIns="0" tIns="0" rIns="0" bIns="0" rtlCol="0" anchor="ctr"/>
+          <a:lstStyle/>
+          <a:p>
+            <a:pPr indent="0" marL="0">
+              <a:buNone/>
+            </a:pPr>
+            <a:r>
+              <a:rPr lang="en-US" sz="800" b="1" spc="100" kern="0" dirty="0">
+                <a:solidFill>
+                  <a:srgbClr val="9FB2C2"/>
+                </a:solidFill>
+                <a:latin typeface="Inter" pitchFamily="34" charset="0"/>
+                <a:ea typeface="Inter" pitchFamily="34" charset="-122"/>
+                <a:cs typeface="Inter" pitchFamily="34" charset="-120"/>
+              </a:rPr>
+              <a:t>MS. RIVERA'S SCREEN · SO FAR</a:t>
+            </a:r>
+            <a:endParaRPr lang="en-US" sz="800" dirty="0"/>
+          </a:p>
+        </p:txBody>
+      </p:sp>
+      <p:sp>
+        <p:nvSpPr>
+          <p:cNvPr id="11" name="Text 8"/>
+          <p:cNvSpPr/>
+          <p:nvPr/>
+        </p:nvSpPr>
+        <p:spPr>
+          <a:xfrm>
+            <a:off x="8860536" y="365760"/>
+            <a:ext cx="2670048" cy="566928"/>
+          </a:xfrm>
+          <a:prstGeom prst="rect">
+            <a:avLst/>
+          </a:prstGeom>
+          <a:noFill/>
+          <a:ln/>
+        </p:spPr>
+        <p:txBody>
+          <a:bodyPr wrap="square" lIns="0" tIns="0" rIns="0" bIns="0" rtlCol="0" anchor="ctr"/>
+          <a:lstStyle/>
+          <a:p>
+            <a:pPr indent="0" marL="0">
+              <a:buNone/>
+            </a:pPr>
+            <a:r>
+              <a:rPr lang="en-US" sz="1000" dirty="0">
+                <a:solidFill>
+                  <a:srgbClr val="1B1F24"/>
+                </a:solidFill>
+                <a:latin typeface="Inter" pitchFamily="34" charset="0"/>
+                <a:ea typeface="Inter" pitchFamily="34" charset="-122"/>
+                <a:cs typeface="Inter" pitchFamily="34" charset="-120"/>
+              </a:rPr>
+              <a:t>Her gap: feedback is her highest-leverage move, and AI never touched it.</a:t>
+            </a:r>
+            <a:endParaRPr lang="en-US" sz="1000" dirty="0"/>
+          </a:p>
+        </p:txBody>
+      </p:sp>
+      <p:sp>
+        <p:nvSpPr>
+          <p:cNvPr id="12" name="Text 9"/>
           <p:cNvSpPr/>
           <p:nvPr/>
         </p:nvSpPr>
@@ -13786,30 +18340,30 @@
       </p:sp>
       <p:sp>
         <p:nvSpPr>
-          <p:cNvPr id="6" name="Text 3"/>
+          <p:cNvPr id="13" name="Text 10"/>
           <p:cNvSpPr/>
           <p:nvPr/>
         </p:nvSpPr>
         <p:spPr>
           <a:xfrm>
             <a:off x="548640" y="384048"/>
-            <a:ext cx="11091672" cy="777240"/>
-          </a:xfrm>
-          <a:prstGeom prst="rect">
-            <a:avLst/>
-          </a:prstGeom>
-          <a:noFill/>
-          <a:ln/>
-        </p:spPr>
-        <p:txBody>
-          <a:bodyPr wrap="square" lIns="0" tIns="0" rIns="0" bIns="0" rtlCol="0" anchor="ctr"/>
-          <a:lstStyle/>
-          <a:p>
-            <a:pPr indent="0" marL="0">
-              <a:buNone/>
-            </a:pPr>
-            <a:r>
-              <a:rPr lang="en-US" sz="3200" b="1" dirty="0">
+            <a:ext cx="7955280" cy="777240"/>
+          </a:xfrm>
+          <a:prstGeom prst="rect">
+            <a:avLst/>
+          </a:prstGeom>
+          <a:noFill/>
+          <a:ln/>
+        </p:spPr>
+        <p:txBody>
+          <a:bodyPr wrap="square" lIns="0" tIns="0" rIns="0" bIns="0" rtlCol="0" anchor="ctr"/>
+          <a:lstStyle/>
+          <a:p>
+            <a:pPr indent="0" marL="0">
+              <a:buNone/>
+            </a:pPr>
+            <a:r>
+              <a:rPr lang="en-US" sz="2800" b="1" dirty="0">
                 <a:solidFill>
                   <a:srgbClr val="13293D"/>
                 </a:solidFill>
@@ -13819,13 +18373,13 @@
               </a:rPr>
               <a:t>The most powerful lever, the least-tapped use</a:t>
             </a:r>
-            <a:endParaRPr lang="en-US" sz="3200" dirty="0"/>
-          </a:p>
-        </p:txBody>
-      </p:sp>
-      <p:sp>
-        <p:nvSpPr>
-          <p:cNvPr id="7" name="Shape 4"/>
+            <a:endParaRPr lang="en-US" sz="2800" dirty="0"/>
+          </a:p>
+        </p:txBody>
+      </p:sp>
+      <p:sp>
+        <p:nvSpPr>
+          <p:cNvPr id="14" name="Shape 11"/>
           <p:cNvSpPr/>
           <p:nvPr/>
         </p:nvSpPr>
@@ -13852,7 +18406,7 @@
       </p:sp>
       <p:sp>
         <p:nvSpPr>
-          <p:cNvPr id="8" name="Text 5"/>
+          <p:cNvPr id="15" name="Text 12"/>
           <p:cNvSpPr/>
           <p:nvPr/>
         </p:nvSpPr>
@@ -13891,7 +18445,7 @@
       </p:sp>
       <p:sp>
         <p:nvSpPr>
-          <p:cNvPr id="9" name="Text 6"/>
+          <p:cNvPr id="16" name="Text 13"/>
           <p:cNvSpPr/>
           <p:nvPr/>
         </p:nvSpPr>
@@ -13930,7 +18484,7 @@
       </p:sp>
       <p:sp>
         <p:nvSpPr>
-          <p:cNvPr id="10" name="Text 7"/>
+          <p:cNvPr id="17" name="Text 14"/>
           <p:cNvSpPr/>
           <p:nvPr/>
         </p:nvSpPr>
@@ -13969,7 +18523,7 @@
       </p:sp>
       <p:sp>
         <p:nvSpPr>
-          <p:cNvPr id="11" name="Shape 8"/>
+          <p:cNvPr id="18" name="Shape 15"/>
           <p:cNvSpPr/>
           <p:nvPr/>
         </p:nvSpPr>
@@ -13996,7 +18550,7 @@
       </p:sp>
       <p:sp>
         <p:nvSpPr>
-          <p:cNvPr id="12" name="Text 9"/>
+          <p:cNvPr id="19" name="Text 16"/>
           <p:cNvSpPr/>
           <p:nvPr/>
         </p:nvSpPr>
@@ -14035,7 +18589,7 @@
       </p:sp>
       <p:sp>
         <p:nvSpPr>
-          <p:cNvPr id="13" name="Text 10"/>
+          <p:cNvPr id="20" name="Text 17"/>
           <p:cNvSpPr/>
           <p:nvPr/>
         </p:nvSpPr>
@@ -14074,7 +18628,7 @@
       </p:sp>
       <p:sp>
         <p:nvSpPr>
-          <p:cNvPr id="14" name="Text 11"/>
+          <p:cNvPr id="21" name="Text 18"/>
           <p:cNvSpPr/>
           <p:nvPr/>
         </p:nvSpPr>
@@ -14113,7 +18667,7 @@
       </p:sp>
       <p:sp>
         <p:nvSpPr>
-          <p:cNvPr id="15" name="Text 12"/>
+          <p:cNvPr id="22" name="Text 19"/>
           <p:cNvSpPr/>
           <p:nvPr/>
         </p:nvSpPr>
@@ -14611,7 +19165,214 @@
       </p:sp>
       <p:sp>
         <p:nvSpPr>
-          <p:cNvPr id="5" name="Text 2"/>
+          <p:cNvPr id="5" name="Shape 2"/>
+          <p:cNvSpPr/>
+          <p:nvPr/>
+        </p:nvSpPr>
+        <p:spPr>
+          <a:xfrm>
+            <a:off x="8732520" y="109728"/>
+            <a:ext cx="2926080" cy="896112"/>
+          </a:xfrm>
+          <a:prstGeom prst="roundRect">
+            <a:avLst>
+              <a:gd name="adj" fmla="val 7143"/>
+            </a:avLst>
+          </a:prstGeom>
+          <a:solidFill>
+            <a:srgbClr val="F7F5F0"/>
+          </a:solidFill>
+          <a:ln w="12700">
+            <a:solidFill>
+              <a:srgbClr val="DCE3EA"/>
+            </a:solidFill>
+            <a:prstDash val="solid"/>
+          </a:ln>
+        </p:spPr>
+      </p:sp>
+      <p:sp>
+        <p:nvSpPr>
+          <p:cNvPr id="6" name="Shape 3"/>
+          <p:cNvSpPr/>
+          <p:nvPr/>
+        </p:nvSpPr>
+        <p:spPr>
+          <a:xfrm>
+            <a:off x="8732520" y="109728"/>
+            <a:ext cx="2926080" cy="237744"/>
+          </a:xfrm>
+          <a:prstGeom prst="roundRect">
+            <a:avLst>
+              <a:gd name="adj" fmla="val 26923"/>
+            </a:avLst>
+          </a:prstGeom>
+          <a:solidFill>
+            <a:srgbClr val="0D1E2E"/>
+          </a:solidFill>
+          <a:ln w="12700">
+            <a:solidFill>
+              <a:srgbClr val="0D1E2E"/>
+            </a:solidFill>
+            <a:prstDash val="solid"/>
+          </a:ln>
+        </p:spPr>
+      </p:sp>
+      <p:sp>
+        <p:nvSpPr>
+          <p:cNvPr id="7" name="Shape 4"/>
+          <p:cNvSpPr/>
+          <p:nvPr/>
+        </p:nvSpPr>
+        <p:spPr>
+          <a:xfrm>
+            <a:off x="8823960" y="182880"/>
+            <a:ext cx="91440" cy="91440"/>
+          </a:xfrm>
+          <a:prstGeom prst="ellipse">
+            <a:avLst/>
+          </a:prstGeom>
+          <a:solidFill>
+            <a:srgbClr val="E8837A"/>
+          </a:solidFill>
+          <a:ln w="12700">
+            <a:solidFill>
+              <a:srgbClr val="E8837A"/>
+            </a:solidFill>
+            <a:prstDash val="solid"/>
+          </a:ln>
+        </p:spPr>
+      </p:sp>
+      <p:sp>
+        <p:nvSpPr>
+          <p:cNvPr id="8" name="Shape 5"/>
+          <p:cNvSpPr/>
+          <p:nvPr/>
+        </p:nvSpPr>
+        <p:spPr>
+          <a:xfrm>
+            <a:off x="8970264" y="182880"/>
+            <a:ext cx="91440" cy="91440"/>
+          </a:xfrm>
+          <a:prstGeom prst="ellipse">
+            <a:avLst/>
+          </a:prstGeom>
+          <a:solidFill>
+            <a:srgbClr val="F4A825"/>
+          </a:solidFill>
+          <a:ln w="12700">
+            <a:solidFill>
+              <a:srgbClr val="F4A825"/>
+            </a:solidFill>
+            <a:prstDash val="solid"/>
+          </a:ln>
+        </p:spPr>
+      </p:sp>
+      <p:sp>
+        <p:nvSpPr>
+          <p:cNvPr id="9" name="Shape 6"/>
+          <p:cNvSpPr/>
+          <p:nvPr/>
+        </p:nvSpPr>
+        <p:spPr>
+          <a:xfrm>
+            <a:off x="9116568" y="182880"/>
+            <a:ext cx="91440" cy="91440"/>
+          </a:xfrm>
+          <a:prstGeom prst="ellipse">
+            <a:avLst/>
+          </a:prstGeom>
+          <a:solidFill>
+            <a:srgbClr val="2E7D5B"/>
+          </a:solidFill>
+          <a:ln w="12700">
+            <a:solidFill>
+              <a:srgbClr val="2E7D5B"/>
+            </a:solidFill>
+            <a:prstDash val="solid"/>
+          </a:ln>
+        </p:spPr>
+      </p:sp>
+      <p:sp>
+        <p:nvSpPr>
+          <p:cNvPr id="10" name="Text 7"/>
+          <p:cNvSpPr/>
+          <p:nvPr/>
+        </p:nvSpPr>
+        <p:spPr>
+          <a:xfrm>
+            <a:off x="9299448" y="109728"/>
+            <a:ext cx="2286000" cy="237744"/>
+          </a:xfrm>
+          <a:prstGeom prst="rect">
+            <a:avLst/>
+          </a:prstGeom>
+          <a:noFill/>
+          <a:ln/>
+        </p:spPr>
+        <p:txBody>
+          <a:bodyPr wrap="square" lIns="0" tIns="0" rIns="0" bIns="0" rtlCol="0" anchor="ctr"/>
+          <a:lstStyle/>
+          <a:p>
+            <a:pPr indent="0" marL="0">
+              <a:buNone/>
+            </a:pPr>
+            <a:r>
+              <a:rPr lang="en-US" sz="800" b="1" spc="100" kern="0" dirty="0">
+                <a:solidFill>
+                  <a:srgbClr val="9FB2C2"/>
+                </a:solidFill>
+                <a:latin typeface="Inter" pitchFamily="34" charset="0"/>
+                <a:ea typeface="Inter" pitchFamily="34" charset="-122"/>
+                <a:cs typeface="Inter" pitchFamily="34" charset="-120"/>
+              </a:rPr>
+              <a:t>MS. RIVERA'S SCREEN · SO FAR</a:t>
+            </a:r>
+            <a:endParaRPr lang="en-US" sz="800" dirty="0"/>
+          </a:p>
+        </p:txBody>
+      </p:sp>
+      <p:sp>
+        <p:nvSpPr>
+          <p:cNvPr id="11" name="Text 8"/>
+          <p:cNvSpPr/>
+          <p:nvPr/>
+        </p:nvSpPr>
+        <p:spPr>
+          <a:xfrm>
+            <a:off x="8860536" y="365760"/>
+            <a:ext cx="2670048" cy="566928"/>
+          </a:xfrm>
+          <a:prstGeom prst="rect">
+            <a:avLst/>
+          </a:prstGeom>
+          <a:noFill/>
+          <a:ln/>
+        </p:spPr>
+        <p:txBody>
+          <a:bodyPr wrap="square" lIns="0" tIns="0" rIns="0" bIns="0" rtlCol="0" anchor="ctr"/>
+          <a:lstStyle/>
+          <a:p>
+            <a:pPr indent="0" marL="0">
+              <a:buNone/>
+            </a:pPr>
+            <a:r>
+              <a:rPr lang="en-US" sz="1000" dirty="0">
+                <a:solidFill>
+                  <a:srgbClr val="1B1F24"/>
+                </a:solidFill>
+                <a:latin typeface="Inter" pitchFamily="34" charset="0"/>
+                <a:ea typeface="Inter" pitchFamily="34" charset="-122"/>
+                <a:cs typeface="Inter" pitchFamily="34" charset="-120"/>
+              </a:rPr>
+              <a:t>Her goal: a rubric and question bank for a real upcoming assessment.</a:t>
+            </a:r>
+            <a:endParaRPr lang="en-US" sz="1000" dirty="0"/>
+          </a:p>
+        </p:txBody>
+      </p:sp>
+      <p:sp>
+        <p:nvSpPr>
+          <p:cNvPr id="12" name="Text 9"/>
           <p:cNvSpPr/>
           <p:nvPr/>
         </p:nvSpPr>
@@ -14650,7 +19411,7 @@
       </p:sp>
       <p:sp>
         <p:nvSpPr>
-          <p:cNvPr id="6" name="Text 3"/>
+          <p:cNvPr id="13" name="Text 10"/>
           <p:cNvSpPr/>
           <p:nvPr/>
         </p:nvSpPr>
@@ -14689,7 +19450,7 @@
       </p:sp>
       <p:sp>
         <p:nvSpPr>
-          <p:cNvPr id="7" name="Text 4"/>
+          <p:cNvPr id="14" name="Text 11"/>
           <p:cNvSpPr/>
           <p:nvPr/>
         </p:nvSpPr>
@@ -14728,7 +19489,7 @@
       </p:sp>
       <p:sp>
         <p:nvSpPr>
-          <p:cNvPr id="8" name="Text 5"/>
+          <p:cNvPr id="15" name="Text 12"/>
           <p:cNvSpPr/>
           <p:nvPr/>
         </p:nvSpPr>
@@ -14767,7 +19528,7 @@
       </p:sp>
       <p:sp>
         <p:nvSpPr>
-          <p:cNvPr id="9" name="Text 6"/>
+          <p:cNvPr id="16" name="Text 13"/>
           <p:cNvSpPr/>
           <p:nvPr/>
         </p:nvSpPr>
@@ -14806,7 +19567,7 @@
       </p:sp>
       <p:sp>
         <p:nvSpPr>
-          <p:cNvPr id="10" name="Text 7"/>
+          <p:cNvPr id="17" name="Text 14"/>
           <p:cNvSpPr/>
           <p:nvPr/>
         </p:nvSpPr>
@@ -14845,7 +19606,7 @@
       </p:sp>
       <p:sp>
         <p:nvSpPr>
-          <p:cNvPr id="11" name="Text 8"/>
+          <p:cNvPr id="18" name="Text 15"/>
           <p:cNvSpPr/>
           <p:nvPr/>
         </p:nvSpPr>
@@ -14884,7 +19645,7 @@
       </p:sp>
       <p:sp>
         <p:nvSpPr>
-          <p:cNvPr id="12" name="Text 9"/>
+          <p:cNvPr id="19" name="Text 16"/>
           <p:cNvSpPr/>
           <p:nvPr/>
         </p:nvSpPr>
@@ -14923,7 +19684,7 @@
       </p:sp>
       <p:sp>
         <p:nvSpPr>
-          <p:cNvPr id="13" name="Text 10"/>
+          <p:cNvPr id="20" name="Text 17"/>
           <p:cNvSpPr/>
           <p:nvPr/>
         </p:nvSpPr>
@@ -14962,7 +19723,7 @@
       </p:sp>
       <p:sp>
         <p:nvSpPr>
-          <p:cNvPr id="14" name="Text 11"/>
+          <p:cNvPr id="21" name="Text 18"/>
           <p:cNvSpPr/>
           <p:nvPr/>
         </p:nvSpPr>
@@ -15001,7 +19762,7 @@
       </p:sp>
       <p:sp>
         <p:nvSpPr>
-          <p:cNvPr id="15" name="Text 12"/>
+          <p:cNvPr id="22" name="Text 19"/>
           <p:cNvSpPr/>
           <p:nvPr/>
         </p:nvSpPr>
@@ -15040,7 +19801,7 @@
       </p:sp>
       <p:sp>
         <p:nvSpPr>
-          <p:cNvPr id="16" name="Text 13"/>
+          <p:cNvPr id="23" name="Text 20"/>
           <p:cNvSpPr/>
           <p:nvPr/>
         </p:nvSpPr>
@@ -15079,7 +19840,7 @@
       </p:sp>
       <p:sp>
         <p:nvSpPr>
-          <p:cNvPr id="17" name="Shape 14"/>
+          <p:cNvPr id="24" name="Shape 21"/>
           <p:cNvSpPr/>
           <p:nvPr/>
         </p:nvSpPr>
@@ -15106,7 +19867,7 @@
       </p:sp>
       <p:sp>
         <p:nvSpPr>
-          <p:cNvPr id="18" name="Text 15"/>
+          <p:cNvPr id="25" name="Text 22"/>
           <p:cNvSpPr/>
           <p:nvPr/>
         </p:nvSpPr>
@@ -15145,7 +19906,7 @@
       </p:sp>
       <p:sp>
         <p:nvSpPr>
-          <p:cNvPr id="19" name="Text 16"/>
+          <p:cNvPr id="26" name="Text 23"/>
           <p:cNvSpPr/>
           <p:nvPr/>
         </p:nvSpPr>
@@ -15332,7 +20093,214 @@
       </p:sp>
       <p:sp>
         <p:nvSpPr>
-          <p:cNvPr id="5" name="Text 2"/>
+          <p:cNvPr id="5" name="Shape 2"/>
+          <p:cNvSpPr/>
+          <p:nvPr/>
+        </p:nvSpPr>
+        <p:spPr>
+          <a:xfrm>
+            <a:off x="8732520" y="109728"/>
+            <a:ext cx="2926080" cy="896112"/>
+          </a:xfrm>
+          <a:prstGeom prst="roundRect">
+            <a:avLst>
+              <a:gd name="adj" fmla="val 7143"/>
+            </a:avLst>
+          </a:prstGeom>
+          <a:solidFill>
+            <a:srgbClr val="F7F5F0"/>
+          </a:solidFill>
+          <a:ln w="12700">
+            <a:solidFill>
+              <a:srgbClr val="DCE3EA"/>
+            </a:solidFill>
+            <a:prstDash val="solid"/>
+          </a:ln>
+        </p:spPr>
+      </p:sp>
+      <p:sp>
+        <p:nvSpPr>
+          <p:cNvPr id="6" name="Shape 3"/>
+          <p:cNvSpPr/>
+          <p:nvPr/>
+        </p:nvSpPr>
+        <p:spPr>
+          <a:xfrm>
+            <a:off x="8732520" y="109728"/>
+            <a:ext cx="2926080" cy="237744"/>
+          </a:xfrm>
+          <a:prstGeom prst="roundRect">
+            <a:avLst>
+              <a:gd name="adj" fmla="val 26923"/>
+            </a:avLst>
+          </a:prstGeom>
+          <a:solidFill>
+            <a:srgbClr val="0D1E2E"/>
+          </a:solidFill>
+          <a:ln w="12700">
+            <a:solidFill>
+              <a:srgbClr val="0D1E2E"/>
+            </a:solidFill>
+            <a:prstDash val="solid"/>
+          </a:ln>
+        </p:spPr>
+      </p:sp>
+      <p:sp>
+        <p:nvSpPr>
+          <p:cNvPr id="7" name="Shape 4"/>
+          <p:cNvSpPr/>
+          <p:nvPr/>
+        </p:nvSpPr>
+        <p:spPr>
+          <a:xfrm>
+            <a:off x="8823960" y="182880"/>
+            <a:ext cx="91440" cy="91440"/>
+          </a:xfrm>
+          <a:prstGeom prst="ellipse">
+            <a:avLst/>
+          </a:prstGeom>
+          <a:solidFill>
+            <a:srgbClr val="E8837A"/>
+          </a:solidFill>
+          <a:ln w="12700">
+            <a:solidFill>
+              <a:srgbClr val="E8837A"/>
+            </a:solidFill>
+            <a:prstDash val="solid"/>
+          </a:ln>
+        </p:spPr>
+      </p:sp>
+      <p:sp>
+        <p:nvSpPr>
+          <p:cNvPr id="8" name="Shape 5"/>
+          <p:cNvSpPr/>
+          <p:nvPr/>
+        </p:nvSpPr>
+        <p:spPr>
+          <a:xfrm>
+            <a:off x="8970264" y="182880"/>
+            <a:ext cx="91440" cy="91440"/>
+          </a:xfrm>
+          <a:prstGeom prst="ellipse">
+            <a:avLst/>
+          </a:prstGeom>
+          <a:solidFill>
+            <a:srgbClr val="F4A825"/>
+          </a:solidFill>
+          <a:ln w="12700">
+            <a:solidFill>
+              <a:srgbClr val="F4A825"/>
+            </a:solidFill>
+            <a:prstDash val="solid"/>
+          </a:ln>
+        </p:spPr>
+      </p:sp>
+      <p:sp>
+        <p:nvSpPr>
+          <p:cNvPr id="9" name="Shape 6"/>
+          <p:cNvSpPr/>
+          <p:nvPr/>
+        </p:nvSpPr>
+        <p:spPr>
+          <a:xfrm>
+            <a:off x="9116568" y="182880"/>
+            <a:ext cx="91440" cy="91440"/>
+          </a:xfrm>
+          <a:prstGeom prst="ellipse">
+            <a:avLst/>
+          </a:prstGeom>
+          <a:solidFill>
+            <a:srgbClr val="2E7D5B"/>
+          </a:solidFill>
+          <a:ln w="12700">
+            <a:solidFill>
+              <a:srgbClr val="2E7D5B"/>
+            </a:solidFill>
+            <a:prstDash val="solid"/>
+          </a:ln>
+        </p:spPr>
+      </p:sp>
+      <p:sp>
+        <p:nvSpPr>
+          <p:cNvPr id="10" name="Text 7"/>
+          <p:cNvSpPr/>
+          <p:nvPr/>
+        </p:nvSpPr>
+        <p:spPr>
+          <a:xfrm>
+            <a:off x="9299448" y="109728"/>
+            <a:ext cx="2286000" cy="237744"/>
+          </a:xfrm>
+          <a:prstGeom prst="rect">
+            <a:avLst/>
+          </a:prstGeom>
+          <a:noFill/>
+          <a:ln/>
+        </p:spPr>
+        <p:txBody>
+          <a:bodyPr wrap="square" lIns="0" tIns="0" rIns="0" bIns="0" rtlCol="0" anchor="ctr"/>
+          <a:lstStyle/>
+          <a:p>
+            <a:pPr indent="0" marL="0">
+              <a:buNone/>
+            </a:pPr>
+            <a:r>
+              <a:rPr lang="en-US" sz="800" b="1" spc="100" kern="0" dirty="0">
+                <a:solidFill>
+                  <a:srgbClr val="9FB2C2"/>
+                </a:solidFill>
+                <a:latin typeface="Inter" pitchFamily="34" charset="0"/>
+                <a:ea typeface="Inter" pitchFamily="34" charset="-122"/>
+                <a:cs typeface="Inter" pitchFamily="34" charset="-120"/>
+              </a:rPr>
+              <a:t>MS. RIVERA'S SCREEN · SO FAR</a:t>
+            </a:r>
+            <a:endParaRPr lang="en-US" sz="800" dirty="0"/>
+          </a:p>
+        </p:txBody>
+      </p:sp>
+      <p:sp>
+        <p:nvSpPr>
+          <p:cNvPr id="11" name="Text 8"/>
+          <p:cNvSpPr/>
+          <p:nvPr/>
+        </p:nvSpPr>
+        <p:spPr>
+          <a:xfrm>
+            <a:off x="8860536" y="365760"/>
+            <a:ext cx="2670048" cy="566928"/>
+          </a:xfrm>
+          <a:prstGeom prst="rect">
+            <a:avLst/>
+          </a:prstGeom>
+          <a:noFill/>
+          <a:ln/>
+        </p:spPr>
+        <p:txBody>
+          <a:bodyPr wrap="square" lIns="0" tIns="0" rIns="0" bIns="0" rtlCol="0" anchor="ctr"/>
+          <a:lstStyle/>
+          <a:p>
+            <a:pPr indent="0" marL="0">
+              <a:buNone/>
+            </a:pPr>
+            <a:r>
+              <a:rPr lang="en-US" sz="1000" dirty="0">
+                <a:solidFill>
+                  <a:srgbClr val="1B1F24"/>
+                </a:solidFill>
+                <a:latin typeface="Inter" pitchFamily="34" charset="0"/>
+                <a:ea typeface="Inter" pitchFamily="34" charset="-122"/>
+                <a:cs typeface="Inter" pitchFamily="34" charset="-120"/>
+              </a:rPr>
+              <a:t>Her formative habit: check understanding, adapt. AI drafts the materials.</a:t>
+            </a:r>
+            <a:endParaRPr lang="en-US" sz="1000" dirty="0"/>
+          </a:p>
+        </p:txBody>
+      </p:sp>
+      <p:sp>
+        <p:nvSpPr>
+          <p:cNvPr id="12" name="Text 9"/>
           <p:cNvSpPr/>
           <p:nvPr/>
         </p:nvSpPr>
@@ -15371,7 +20339,7 @@
       </p:sp>
       <p:sp>
         <p:nvSpPr>
-          <p:cNvPr id="6" name="Text 3"/>
+          <p:cNvPr id="13" name="Text 10"/>
           <p:cNvSpPr/>
           <p:nvPr/>
         </p:nvSpPr>
@@ -15410,7 +20378,7 @@
       </p:sp>
       <p:sp>
         <p:nvSpPr>
-          <p:cNvPr id="7" name="Shape 4"/>
+          <p:cNvPr id="14" name="Shape 11"/>
           <p:cNvSpPr/>
           <p:nvPr/>
         </p:nvSpPr>
@@ -15437,7 +20405,7 @@
       </p:sp>
       <p:sp>
         <p:nvSpPr>
-          <p:cNvPr id="8" name="Text 5"/>
+          <p:cNvPr id="15" name="Text 12"/>
           <p:cNvSpPr/>
           <p:nvPr/>
         </p:nvSpPr>
@@ -15476,7 +20444,7 @@
       </p:sp>
       <p:sp>
         <p:nvSpPr>
-          <p:cNvPr id="9" name="Text 6"/>
+          <p:cNvPr id="16" name="Text 13"/>
           <p:cNvSpPr/>
           <p:nvPr/>
         </p:nvSpPr>
@@ -15515,7 +20483,7 @@
       </p:sp>
       <p:sp>
         <p:nvSpPr>
-          <p:cNvPr id="10" name="Text 7"/>
+          <p:cNvPr id="17" name="Text 14"/>
           <p:cNvSpPr/>
           <p:nvPr/>
         </p:nvSpPr>
@@ -15727,7 +20695,214 @@
       </p:sp>
       <p:sp>
         <p:nvSpPr>
-          <p:cNvPr id="5" name="Text 2"/>
+          <p:cNvPr id="5" name="Shape 2"/>
+          <p:cNvSpPr/>
+          <p:nvPr/>
+        </p:nvSpPr>
+        <p:spPr>
+          <a:xfrm>
+            <a:off x="8732520" y="109728"/>
+            <a:ext cx="2926080" cy="896112"/>
+          </a:xfrm>
+          <a:prstGeom prst="roundRect">
+            <a:avLst>
+              <a:gd name="adj" fmla="val 7143"/>
+            </a:avLst>
+          </a:prstGeom>
+          <a:solidFill>
+            <a:srgbClr val="F7F5F0"/>
+          </a:solidFill>
+          <a:ln w="12700">
+            <a:solidFill>
+              <a:srgbClr val="DCE3EA"/>
+            </a:solidFill>
+            <a:prstDash val="solid"/>
+          </a:ln>
+        </p:spPr>
+      </p:sp>
+      <p:sp>
+        <p:nvSpPr>
+          <p:cNvPr id="6" name="Shape 3"/>
+          <p:cNvSpPr/>
+          <p:nvPr/>
+        </p:nvSpPr>
+        <p:spPr>
+          <a:xfrm>
+            <a:off x="8732520" y="109728"/>
+            <a:ext cx="2926080" cy="237744"/>
+          </a:xfrm>
+          <a:prstGeom prst="roundRect">
+            <a:avLst>
+              <a:gd name="adj" fmla="val 26923"/>
+            </a:avLst>
+          </a:prstGeom>
+          <a:solidFill>
+            <a:srgbClr val="0D1E2E"/>
+          </a:solidFill>
+          <a:ln w="12700">
+            <a:solidFill>
+              <a:srgbClr val="0D1E2E"/>
+            </a:solidFill>
+            <a:prstDash val="solid"/>
+          </a:ln>
+        </p:spPr>
+      </p:sp>
+      <p:sp>
+        <p:nvSpPr>
+          <p:cNvPr id="7" name="Shape 4"/>
+          <p:cNvSpPr/>
+          <p:nvPr/>
+        </p:nvSpPr>
+        <p:spPr>
+          <a:xfrm>
+            <a:off x="8823960" y="182880"/>
+            <a:ext cx="91440" cy="91440"/>
+          </a:xfrm>
+          <a:prstGeom prst="ellipse">
+            <a:avLst/>
+          </a:prstGeom>
+          <a:solidFill>
+            <a:srgbClr val="E8837A"/>
+          </a:solidFill>
+          <a:ln w="12700">
+            <a:solidFill>
+              <a:srgbClr val="E8837A"/>
+            </a:solidFill>
+            <a:prstDash val="solid"/>
+          </a:ln>
+        </p:spPr>
+      </p:sp>
+      <p:sp>
+        <p:nvSpPr>
+          <p:cNvPr id="8" name="Shape 5"/>
+          <p:cNvSpPr/>
+          <p:nvPr/>
+        </p:nvSpPr>
+        <p:spPr>
+          <a:xfrm>
+            <a:off x="8970264" y="182880"/>
+            <a:ext cx="91440" cy="91440"/>
+          </a:xfrm>
+          <a:prstGeom prst="ellipse">
+            <a:avLst/>
+          </a:prstGeom>
+          <a:solidFill>
+            <a:srgbClr val="F4A825"/>
+          </a:solidFill>
+          <a:ln w="12700">
+            <a:solidFill>
+              <a:srgbClr val="F4A825"/>
+            </a:solidFill>
+            <a:prstDash val="solid"/>
+          </a:ln>
+        </p:spPr>
+      </p:sp>
+      <p:sp>
+        <p:nvSpPr>
+          <p:cNvPr id="9" name="Shape 6"/>
+          <p:cNvSpPr/>
+          <p:nvPr/>
+        </p:nvSpPr>
+        <p:spPr>
+          <a:xfrm>
+            <a:off x="9116568" y="182880"/>
+            <a:ext cx="91440" cy="91440"/>
+          </a:xfrm>
+          <a:prstGeom prst="ellipse">
+            <a:avLst/>
+          </a:prstGeom>
+          <a:solidFill>
+            <a:srgbClr val="2E7D5B"/>
+          </a:solidFill>
+          <a:ln w="12700">
+            <a:solidFill>
+              <a:srgbClr val="2E7D5B"/>
+            </a:solidFill>
+            <a:prstDash val="solid"/>
+          </a:ln>
+        </p:spPr>
+      </p:sp>
+      <p:sp>
+        <p:nvSpPr>
+          <p:cNvPr id="10" name="Text 7"/>
+          <p:cNvSpPr/>
+          <p:nvPr/>
+        </p:nvSpPr>
+        <p:spPr>
+          <a:xfrm>
+            <a:off x="9299448" y="109728"/>
+            <a:ext cx="2286000" cy="237744"/>
+          </a:xfrm>
+          <a:prstGeom prst="rect">
+            <a:avLst/>
+          </a:prstGeom>
+          <a:noFill/>
+          <a:ln/>
+        </p:spPr>
+        <p:txBody>
+          <a:bodyPr wrap="square" lIns="0" tIns="0" rIns="0" bIns="0" rtlCol="0" anchor="ctr"/>
+          <a:lstStyle/>
+          <a:p>
+            <a:pPr indent="0" marL="0">
+              <a:buNone/>
+            </a:pPr>
+            <a:r>
+              <a:rPr lang="en-US" sz="800" b="1" spc="100" kern="0" dirty="0">
+                <a:solidFill>
+                  <a:srgbClr val="9FB2C2"/>
+                </a:solidFill>
+                <a:latin typeface="Inter" pitchFamily="34" charset="0"/>
+                <a:ea typeface="Inter" pitchFamily="34" charset="-122"/>
+                <a:cs typeface="Inter" pitchFamily="34" charset="-120"/>
+              </a:rPr>
+              <a:t>MS. RIVERA'S SCREEN · SO FAR</a:t>
+            </a:r>
+            <a:endParaRPr lang="en-US" sz="800" dirty="0"/>
+          </a:p>
+        </p:txBody>
+      </p:sp>
+      <p:sp>
+        <p:nvSpPr>
+          <p:cNvPr id="11" name="Text 8"/>
+          <p:cNvSpPr/>
+          <p:nvPr/>
+        </p:nvSpPr>
+        <p:spPr>
+          <a:xfrm>
+            <a:off x="8860536" y="365760"/>
+            <a:ext cx="2670048" cy="566928"/>
+          </a:xfrm>
+          <a:prstGeom prst="rect">
+            <a:avLst/>
+          </a:prstGeom>
+          <a:noFill/>
+          <a:ln/>
+        </p:spPr>
+        <p:txBody>
+          <a:bodyPr wrap="square" lIns="0" tIns="0" rIns="0" bIns="0" rtlCol="0" anchor="ctr"/>
+          <a:lstStyle/>
+          <a:p>
+            <a:pPr indent="0" marL="0">
+              <a:buNone/>
+            </a:pPr>
+            <a:r>
+              <a:rPr lang="en-US" sz="1000" dirty="0">
+                <a:solidFill>
+                  <a:srgbClr val="1B1F24"/>
+                </a:solidFill>
+                <a:latin typeface="Inter" pitchFamily="34" charset="0"/>
+                <a:ea typeface="Inter" pitchFamily="34" charset="-122"/>
+                <a:cs typeface="Inter" pitchFamily="34" charset="-120"/>
+              </a:rPr>
+              <a:t>Her rubric bar: students can read it. That's what makes the research pay.</a:t>
+            </a:r>
+            <a:endParaRPr lang="en-US" sz="1000" dirty="0"/>
+          </a:p>
+        </p:txBody>
+      </p:sp>
+      <p:sp>
+        <p:nvSpPr>
+          <p:cNvPr id="12" name="Text 9"/>
           <p:cNvSpPr/>
           <p:nvPr/>
         </p:nvSpPr>
@@ -15766,7 +20941,7 @@
       </p:sp>
       <p:sp>
         <p:nvSpPr>
-          <p:cNvPr id="6" name="Text 3"/>
+          <p:cNvPr id="13" name="Text 10"/>
           <p:cNvSpPr/>
           <p:nvPr/>
         </p:nvSpPr>
@@ -15805,7 +20980,7 @@
       </p:sp>
       <p:sp>
         <p:nvSpPr>
-          <p:cNvPr id="7" name="Text 4"/>
+          <p:cNvPr id="14" name="Text 11"/>
           <p:cNvSpPr/>
           <p:nvPr/>
         </p:nvSpPr>
@@ -15890,7 +21065,7 @@
       </p:sp>
       <p:sp>
         <p:nvSpPr>
-          <p:cNvPr id="8" name="Shape 5"/>
+          <p:cNvPr id="15" name="Shape 12"/>
           <p:cNvSpPr/>
           <p:nvPr/>
         </p:nvSpPr>
@@ -15917,7 +21092,7 @@
       </p:sp>
       <p:sp>
         <p:nvSpPr>
-          <p:cNvPr id="9" name="Text 6"/>
+          <p:cNvPr id="16" name="Text 13"/>
           <p:cNvSpPr/>
           <p:nvPr/>
         </p:nvSpPr>
@@ -16104,7 +21279,214 @@
       </p:sp>
       <p:sp>
         <p:nvSpPr>
-          <p:cNvPr id="5" name="Text 2"/>
+          <p:cNvPr id="5" name="Shape 2"/>
+          <p:cNvSpPr/>
+          <p:nvPr/>
+        </p:nvSpPr>
+        <p:spPr>
+          <a:xfrm>
+            <a:off x="8732520" y="109728"/>
+            <a:ext cx="2926080" cy="896112"/>
+          </a:xfrm>
+          <a:prstGeom prst="roundRect">
+            <a:avLst>
+              <a:gd name="adj" fmla="val 7143"/>
+            </a:avLst>
+          </a:prstGeom>
+          <a:solidFill>
+            <a:srgbClr val="F7F5F0"/>
+          </a:solidFill>
+          <a:ln w="12700">
+            <a:solidFill>
+              <a:srgbClr val="DCE3EA"/>
+            </a:solidFill>
+            <a:prstDash val="solid"/>
+          </a:ln>
+        </p:spPr>
+      </p:sp>
+      <p:sp>
+        <p:nvSpPr>
+          <p:cNvPr id="6" name="Shape 3"/>
+          <p:cNvSpPr/>
+          <p:nvPr/>
+        </p:nvSpPr>
+        <p:spPr>
+          <a:xfrm>
+            <a:off x="8732520" y="109728"/>
+            <a:ext cx="2926080" cy="237744"/>
+          </a:xfrm>
+          <a:prstGeom prst="roundRect">
+            <a:avLst>
+              <a:gd name="adj" fmla="val 26923"/>
+            </a:avLst>
+          </a:prstGeom>
+          <a:solidFill>
+            <a:srgbClr val="0D1E2E"/>
+          </a:solidFill>
+          <a:ln w="12700">
+            <a:solidFill>
+              <a:srgbClr val="0D1E2E"/>
+            </a:solidFill>
+            <a:prstDash val="solid"/>
+          </a:ln>
+        </p:spPr>
+      </p:sp>
+      <p:sp>
+        <p:nvSpPr>
+          <p:cNvPr id="7" name="Shape 4"/>
+          <p:cNvSpPr/>
+          <p:nvPr/>
+        </p:nvSpPr>
+        <p:spPr>
+          <a:xfrm>
+            <a:off x="8823960" y="182880"/>
+            <a:ext cx="91440" cy="91440"/>
+          </a:xfrm>
+          <a:prstGeom prst="ellipse">
+            <a:avLst/>
+          </a:prstGeom>
+          <a:solidFill>
+            <a:srgbClr val="E8837A"/>
+          </a:solidFill>
+          <a:ln w="12700">
+            <a:solidFill>
+              <a:srgbClr val="E8837A"/>
+            </a:solidFill>
+            <a:prstDash val="solid"/>
+          </a:ln>
+        </p:spPr>
+      </p:sp>
+      <p:sp>
+        <p:nvSpPr>
+          <p:cNvPr id="8" name="Shape 5"/>
+          <p:cNvSpPr/>
+          <p:nvPr/>
+        </p:nvSpPr>
+        <p:spPr>
+          <a:xfrm>
+            <a:off x="8970264" y="182880"/>
+            <a:ext cx="91440" cy="91440"/>
+          </a:xfrm>
+          <a:prstGeom prst="ellipse">
+            <a:avLst/>
+          </a:prstGeom>
+          <a:solidFill>
+            <a:srgbClr val="F4A825"/>
+          </a:solidFill>
+          <a:ln w="12700">
+            <a:solidFill>
+              <a:srgbClr val="F4A825"/>
+            </a:solidFill>
+            <a:prstDash val="solid"/>
+          </a:ln>
+        </p:spPr>
+      </p:sp>
+      <p:sp>
+        <p:nvSpPr>
+          <p:cNvPr id="9" name="Shape 6"/>
+          <p:cNvSpPr/>
+          <p:nvPr/>
+        </p:nvSpPr>
+        <p:spPr>
+          <a:xfrm>
+            <a:off x="9116568" y="182880"/>
+            <a:ext cx="91440" cy="91440"/>
+          </a:xfrm>
+          <a:prstGeom prst="ellipse">
+            <a:avLst/>
+          </a:prstGeom>
+          <a:solidFill>
+            <a:srgbClr val="2E7D5B"/>
+          </a:solidFill>
+          <a:ln w="12700">
+            <a:solidFill>
+              <a:srgbClr val="2E7D5B"/>
+            </a:solidFill>
+            <a:prstDash val="solid"/>
+          </a:ln>
+        </p:spPr>
+      </p:sp>
+      <p:sp>
+        <p:nvSpPr>
+          <p:cNvPr id="10" name="Text 7"/>
+          <p:cNvSpPr/>
+          <p:nvPr/>
+        </p:nvSpPr>
+        <p:spPr>
+          <a:xfrm>
+            <a:off x="9299448" y="109728"/>
+            <a:ext cx="2286000" cy="237744"/>
+          </a:xfrm>
+          <a:prstGeom prst="rect">
+            <a:avLst/>
+          </a:prstGeom>
+          <a:noFill/>
+          <a:ln/>
+        </p:spPr>
+        <p:txBody>
+          <a:bodyPr wrap="square" lIns="0" tIns="0" rIns="0" bIns="0" rtlCol="0" anchor="ctr"/>
+          <a:lstStyle/>
+          <a:p>
+            <a:pPr indent="0" marL="0">
+              <a:buNone/>
+            </a:pPr>
+            <a:r>
+              <a:rPr lang="en-US" sz="800" b="1" spc="100" kern="0" dirty="0">
+                <a:solidFill>
+                  <a:srgbClr val="9FB2C2"/>
+                </a:solidFill>
+                <a:latin typeface="Inter" pitchFamily="34" charset="0"/>
+                <a:ea typeface="Inter" pitchFamily="34" charset="-122"/>
+                <a:cs typeface="Inter" pitchFamily="34" charset="-120"/>
+              </a:rPr>
+              <a:t>MS. RIVERA'S SCREEN · SO FAR</a:t>
+            </a:r>
+            <a:endParaRPr lang="en-US" sz="800" dirty="0"/>
+          </a:p>
+        </p:txBody>
+      </p:sp>
+      <p:sp>
+        <p:nvSpPr>
+          <p:cNvPr id="11" name="Text 8"/>
+          <p:cNvSpPr/>
+          <p:nvPr/>
+        </p:nvSpPr>
+        <p:spPr>
+          <a:xfrm>
+            <a:off x="8860536" y="365760"/>
+            <a:ext cx="2670048" cy="566928"/>
+          </a:xfrm>
+          <a:prstGeom prst="rect">
+            <a:avLst/>
+          </a:prstGeom>
+          <a:noFill/>
+          <a:ln/>
+        </p:spPr>
+        <p:txBody>
+          <a:bodyPr wrap="square" lIns="0" tIns="0" rIns="0" bIns="0" rtlCol="0" anchor="ctr"/>
+          <a:lstStyle/>
+          <a:p>
+            <a:pPr indent="0" marL="0">
+              <a:buNone/>
+            </a:pPr>
+            <a:r>
+              <a:rPr lang="en-US" sz="1000" dirty="0">
+                <a:solidFill>
+                  <a:srgbClr val="1B1F24"/>
+                </a:solidFill>
+                <a:latin typeface="Inter" pitchFamily="34" charset="0"/>
+                <a:ea typeface="Inter" pitchFamily="34" charset="-122"/>
+                <a:cs typeface="Inter" pitchFamily="34" charset="-120"/>
+              </a:rPr>
+              <a:t>Her question bar: quality beats quantity; the misconception does the work.</a:t>
+            </a:r>
+            <a:endParaRPr lang="en-US" sz="1000" dirty="0"/>
+          </a:p>
+        </p:txBody>
+      </p:sp>
+      <p:sp>
+        <p:nvSpPr>
+          <p:cNvPr id="12" name="Text 9"/>
           <p:cNvSpPr/>
           <p:nvPr/>
         </p:nvSpPr>
@@ -16143,7 +21525,7 @@
       </p:sp>
       <p:sp>
         <p:nvSpPr>
-          <p:cNvPr id="6" name="Text 3"/>
+          <p:cNvPr id="13" name="Text 10"/>
           <p:cNvSpPr/>
           <p:nvPr/>
         </p:nvSpPr>
@@ -16182,7 +21564,7 @@
       </p:sp>
       <p:sp>
         <p:nvSpPr>
-          <p:cNvPr id="7" name="Text 4"/>
+          <p:cNvPr id="14" name="Text 11"/>
           <p:cNvSpPr/>
           <p:nvPr/>
         </p:nvSpPr>
@@ -16267,7 +21649,7 @@
       </p:sp>
       <p:sp>
         <p:nvSpPr>
-          <p:cNvPr id="8" name="Shape 5"/>
+          <p:cNvPr id="15" name="Shape 12"/>
           <p:cNvSpPr/>
           <p:nvPr/>
         </p:nvSpPr>
@@ -16294,7 +21676,7 @@
       </p:sp>
       <p:sp>
         <p:nvSpPr>
-          <p:cNvPr id="9" name="Text 6"/>
+          <p:cNvPr id="16" name="Text 13"/>
           <p:cNvSpPr/>
           <p:nvPr/>
         </p:nvSpPr>
@@ -16481,7 +21863,214 @@
       </p:sp>
       <p:sp>
         <p:nvSpPr>
-          <p:cNvPr id="5" name="Text 2"/>
+          <p:cNvPr id="5" name="Shape 2"/>
+          <p:cNvSpPr/>
+          <p:nvPr/>
+        </p:nvSpPr>
+        <p:spPr>
+          <a:xfrm>
+            <a:off x="8732520" y="109728"/>
+            <a:ext cx="2926080" cy="896112"/>
+          </a:xfrm>
+          <a:prstGeom prst="roundRect">
+            <a:avLst>
+              <a:gd name="adj" fmla="val 7143"/>
+            </a:avLst>
+          </a:prstGeom>
+          <a:solidFill>
+            <a:srgbClr val="F7F5F0"/>
+          </a:solidFill>
+          <a:ln w="12700">
+            <a:solidFill>
+              <a:srgbClr val="DCE3EA"/>
+            </a:solidFill>
+            <a:prstDash val="solid"/>
+          </a:ln>
+        </p:spPr>
+      </p:sp>
+      <p:sp>
+        <p:nvSpPr>
+          <p:cNvPr id="6" name="Shape 3"/>
+          <p:cNvSpPr/>
+          <p:nvPr/>
+        </p:nvSpPr>
+        <p:spPr>
+          <a:xfrm>
+            <a:off x="8732520" y="109728"/>
+            <a:ext cx="2926080" cy="237744"/>
+          </a:xfrm>
+          <a:prstGeom prst="roundRect">
+            <a:avLst>
+              <a:gd name="adj" fmla="val 26923"/>
+            </a:avLst>
+          </a:prstGeom>
+          <a:solidFill>
+            <a:srgbClr val="0D1E2E"/>
+          </a:solidFill>
+          <a:ln w="12700">
+            <a:solidFill>
+              <a:srgbClr val="0D1E2E"/>
+            </a:solidFill>
+            <a:prstDash val="solid"/>
+          </a:ln>
+        </p:spPr>
+      </p:sp>
+      <p:sp>
+        <p:nvSpPr>
+          <p:cNvPr id="7" name="Shape 4"/>
+          <p:cNvSpPr/>
+          <p:nvPr/>
+        </p:nvSpPr>
+        <p:spPr>
+          <a:xfrm>
+            <a:off x="8823960" y="182880"/>
+            <a:ext cx="91440" cy="91440"/>
+          </a:xfrm>
+          <a:prstGeom prst="ellipse">
+            <a:avLst/>
+          </a:prstGeom>
+          <a:solidFill>
+            <a:srgbClr val="E8837A"/>
+          </a:solidFill>
+          <a:ln w="12700">
+            <a:solidFill>
+              <a:srgbClr val="E8837A"/>
+            </a:solidFill>
+            <a:prstDash val="solid"/>
+          </a:ln>
+        </p:spPr>
+      </p:sp>
+      <p:sp>
+        <p:nvSpPr>
+          <p:cNvPr id="8" name="Shape 5"/>
+          <p:cNvSpPr/>
+          <p:nvPr/>
+        </p:nvSpPr>
+        <p:spPr>
+          <a:xfrm>
+            <a:off x="8970264" y="182880"/>
+            <a:ext cx="91440" cy="91440"/>
+          </a:xfrm>
+          <a:prstGeom prst="ellipse">
+            <a:avLst/>
+          </a:prstGeom>
+          <a:solidFill>
+            <a:srgbClr val="F4A825"/>
+          </a:solidFill>
+          <a:ln w="12700">
+            <a:solidFill>
+              <a:srgbClr val="F4A825"/>
+            </a:solidFill>
+            <a:prstDash val="solid"/>
+          </a:ln>
+        </p:spPr>
+      </p:sp>
+      <p:sp>
+        <p:nvSpPr>
+          <p:cNvPr id="9" name="Shape 6"/>
+          <p:cNvSpPr/>
+          <p:nvPr/>
+        </p:nvSpPr>
+        <p:spPr>
+          <a:xfrm>
+            <a:off x="9116568" y="182880"/>
+            <a:ext cx="91440" cy="91440"/>
+          </a:xfrm>
+          <a:prstGeom prst="ellipse">
+            <a:avLst/>
+          </a:prstGeom>
+          <a:solidFill>
+            <a:srgbClr val="2E7D5B"/>
+          </a:solidFill>
+          <a:ln w="12700">
+            <a:solidFill>
+              <a:srgbClr val="2E7D5B"/>
+            </a:solidFill>
+            <a:prstDash val="solid"/>
+          </a:ln>
+        </p:spPr>
+      </p:sp>
+      <p:sp>
+        <p:nvSpPr>
+          <p:cNvPr id="10" name="Text 7"/>
+          <p:cNvSpPr/>
+          <p:nvPr/>
+        </p:nvSpPr>
+        <p:spPr>
+          <a:xfrm>
+            <a:off x="9299448" y="109728"/>
+            <a:ext cx="2286000" cy="237744"/>
+          </a:xfrm>
+          <a:prstGeom prst="rect">
+            <a:avLst/>
+          </a:prstGeom>
+          <a:noFill/>
+          <a:ln/>
+        </p:spPr>
+        <p:txBody>
+          <a:bodyPr wrap="square" lIns="0" tIns="0" rIns="0" bIns="0" rtlCol="0" anchor="ctr"/>
+          <a:lstStyle/>
+          <a:p>
+            <a:pPr indent="0" marL="0">
+              <a:buNone/>
+            </a:pPr>
+            <a:r>
+              <a:rPr lang="en-US" sz="800" b="1" spc="100" kern="0" dirty="0">
+                <a:solidFill>
+                  <a:srgbClr val="9FB2C2"/>
+                </a:solidFill>
+                <a:latin typeface="Inter" pitchFamily="34" charset="0"/>
+                <a:ea typeface="Inter" pitchFamily="34" charset="-122"/>
+                <a:cs typeface="Inter" pitchFamily="34" charset="-120"/>
+              </a:rPr>
+              <a:t>MS. RIVERA'S SCREEN · SO FAR</a:t>
+            </a:r>
+            <a:endParaRPr lang="en-US" sz="800" dirty="0"/>
+          </a:p>
+        </p:txBody>
+      </p:sp>
+      <p:sp>
+        <p:nvSpPr>
+          <p:cNvPr id="11" name="Text 8"/>
+          <p:cNvSpPr/>
+          <p:nvPr/>
+        </p:nvSpPr>
+        <p:spPr>
+          <a:xfrm>
+            <a:off x="8860536" y="365760"/>
+            <a:ext cx="2670048" cy="566928"/>
+          </a:xfrm>
+          <a:prstGeom prst="rect">
+            <a:avLst/>
+          </a:prstGeom>
+          <a:noFill/>
+          <a:ln/>
+        </p:spPr>
+        <p:txBody>
+          <a:bodyPr wrap="square" lIns="0" tIns="0" rIns="0" bIns="0" rtlCol="0" anchor="ctr"/>
+          <a:lstStyle/>
+          <a:p>
+            <a:pPr indent="0" marL="0">
+              <a:buNone/>
+            </a:pPr>
+            <a:r>
+              <a:rPr lang="en-US" sz="1000" dirty="0">
+                <a:solidFill>
+                  <a:srgbClr val="1B1F24"/>
+                </a:solidFill>
+                <a:latin typeface="Inter" pitchFamily="34" charset="0"/>
+                <a:ea typeface="Inter" pitchFamily="34" charset="-122"/>
+                <a:cs typeface="Inter" pitchFamily="34" charset="-120"/>
+              </a:rPr>
+              <a:t>Her division of labor: AI drafts the materials, she makes every judgment.</a:t>
+            </a:r>
+            <a:endParaRPr lang="en-US" sz="1000" dirty="0"/>
+          </a:p>
+        </p:txBody>
+      </p:sp>
+      <p:sp>
+        <p:nvSpPr>
+          <p:cNvPr id="12" name="Text 9"/>
           <p:cNvSpPr/>
           <p:nvPr/>
         </p:nvSpPr>
@@ -16520,7 +22109,7 @@
       </p:sp>
       <p:sp>
         <p:nvSpPr>
-          <p:cNvPr id="6" name="Text 3"/>
+          <p:cNvPr id="13" name="Text 10"/>
           <p:cNvSpPr/>
           <p:nvPr/>
         </p:nvSpPr>
@@ -16559,7 +22148,7 @@
       </p:sp>
       <p:sp>
         <p:nvSpPr>
-          <p:cNvPr id="7" name="Shape 4"/>
+          <p:cNvPr id="14" name="Shape 11"/>
           <p:cNvSpPr/>
           <p:nvPr/>
         </p:nvSpPr>
@@ -16586,7 +22175,7 @@
       </p:sp>
       <p:sp>
         <p:nvSpPr>
-          <p:cNvPr id="8" name="Text 5"/>
+          <p:cNvPr id="15" name="Text 12"/>
           <p:cNvSpPr/>
           <p:nvPr/>
         </p:nvSpPr>
@@ -16625,7 +22214,7 @@
       </p:sp>
       <p:sp>
         <p:nvSpPr>
-          <p:cNvPr id="9" name="Text 6"/>
+          <p:cNvPr id="16" name="Text 13"/>
           <p:cNvSpPr/>
           <p:nvPr/>
         </p:nvSpPr>
@@ -16664,7 +22253,7 @@
       </p:sp>
       <p:sp>
         <p:nvSpPr>
-          <p:cNvPr id="10" name="Shape 7"/>
+          <p:cNvPr id="17" name="Shape 14"/>
           <p:cNvSpPr/>
           <p:nvPr/>
         </p:nvSpPr>
@@ -16691,7 +22280,7 @@
       </p:sp>
       <p:sp>
         <p:nvSpPr>
-          <p:cNvPr id="11" name="Text 8"/>
+          <p:cNvPr id="18" name="Text 15"/>
           <p:cNvSpPr/>
           <p:nvPr/>
         </p:nvSpPr>
@@ -16730,7 +22319,7 @@
       </p:sp>
       <p:sp>
         <p:nvSpPr>
-          <p:cNvPr id="12" name="Text 9"/>
+          <p:cNvPr id="19" name="Text 16"/>
           <p:cNvSpPr/>
           <p:nvPr/>
         </p:nvSpPr>
@@ -16769,7 +22358,7 @@
       </p:sp>
       <p:sp>
         <p:nvSpPr>
-          <p:cNvPr id="13" name="Text 10"/>
+          <p:cNvPr id="20" name="Text 17"/>
           <p:cNvSpPr/>
           <p:nvPr/>
         </p:nvSpPr>

--- a/kits/kit04/Kit04_PresentationDeck.pptx
+++ b/kits/kit04/Kit04_PresentationDeck.pptx
@@ -1323,7 +1323,7 @@
           <a:p>
             <a:r>
               <a:rPr lang="en-US" dirty="0"/>
-              <a:t>Pairs, devices out inside two minutes, announce the tool. If you grade with a rubric of your own, show it here; one real rubric from a real room tells the lab what "done" looks like.</a:t>
+              <a:t>Pairs, devices out inside two minutes, announce the tool. Ms. Rivera builds for ONE assessment across all three steps: her 7th grade persuasive essay, the same one from workshop 1. Her exemplar appears large on every step slide; anyone lost can copy her structure. If you grade with a rubric of your own, show it here; one real rubric from a real room tells the lab what "done" looks like.</a:t>
             </a:r>
             <a:endParaRPr lang="en-US" dirty="0"/>
           </a:p>
@@ -1411,7 +1411,7 @@
           <a:p>
             <a:r>
               <a:rPr lang="en-US" dirty="0"/>
-              <a:t>Circulate. Weak rubrics are usually missing the teacher’s notes; nudge with "what do you actually look for when you grade this? Type that."</a:t>
+              <a:t>Circulate. Weak rubrics are usually missing the teacher’s notes; nudge with "what do you actually look for when you grade this? Type that." The big card is Ms. Rivera's persuasive-essay rubric mid-build, the same assessment she carries through all three steps: her messy note went in, a readable level-4 descriptor came out. Anyone stuck can copy that shape with their own notes.</a:t>
             </a:r>
             <a:endParaRPr lang="en-US" dirty="0"/>
           </a:p>
@@ -1587,7 +1587,7 @@
           <a:p>
             <a:r>
               <a:rPr lang="en-US" dirty="0"/>
-              <a:t>45-min cut: six questions instead of ten. Listen for the misconception sentences; they’re the best writing that happens all day.</a:t>
+              <a:t>45-min cut: six questions instead of ten. Listen for the misconception sentences; they’re the best writing that happens all day. The big card is Ms. Rivera's bank for the same persuasive essay: her misconception sentence went into the prompt, and one distractor now restates the claim, exactly the mix-up her students make. Mimic her sentence with your own X and Y.</a:t>
             </a:r>
             <a:endParaRPr lang="en-US" dirty="0"/>
           </a:p>
@@ -1675,7 +1675,7 @@
           <a:p>
             <a:r>
               <a:rPr lang="en-US" dirty="0"/>
-              <a:t>This rep is a requirement, not a suggestion: it installs the habit that makes the whole workflow safe. Celebrate every catch audibly.</a:t>
+              <a:t>This rep is a requirement, not a suggestion: it installs the habit that makes the whole workflow safe. The big card shows Ms. Rivera's catch in her own essay bank: a question with two defensible answers, cut and rewritten by hand. Celebrate every catch audibly.</a:t>
             </a:r>
             <a:endParaRPr lang="en-US" dirty="0"/>
           </a:p>
@@ -1763,7 +1763,7 @@
           <a:p>
             <a:r>
               <a:rPr lang="en-US" dirty="0"/>
-              <a:t>If someone starts pasting a student’s work, redirect gently: describe the pattern instead; excerpts only if fully anonymous by Kit 1’s test.</a:t>
+              <a:t>If someone starts pasting a student’s work, redirect gently: describe the pattern instead; excerpts only if fully anonymous by Kit 1’s test. The big card is one of Ms. Rivera's three starters for the same persuasive essay: strength, pattern, next step, in words a 7th grader can read. Copy its shape for your own patterns.</a:t>
             </a:r>
             <a:endParaRPr lang="en-US" dirty="0"/>
           </a:p>
@@ -9493,7 +9493,7 @@
                 <a:ea typeface="Inter" pitchFamily="34" charset="-122"/>
                 <a:cs typeface="Inter" pitchFamily="34" charset="-120"/>
               </a:rPr>
-              <a:t>Her lab: the assessment on her calendar, materials built tonight-free.</a:t>
+              <a:t>Her lab pick, one assessment through every step: her persuasive essay.</a:t>
             </a:r>
             <a:endParaRPr lang="en-US" sz="1000" dirty="0"/>
           </a:p>
@@ -10274,7 +10274,7 @@
                 <a:ea typeface="Inter" pitchFamily="34" charset="-122"/>
                 <a:cs typeface="Inter" pitchFamily="34" charset="-120"/>
               </a:rPr>
-              <a:t>On her screen: notes in, rubric out, hand-it-to-a-student pass next.</a:t>
+              <a:t>Her essay rubric, on screen big: messy notes in, four readable levels out.</a:t>
             </a:r>
             <a:endParaRPr lang="en-US" sz="1000" dirty="0"/>
           </a:p>
@@ -10328,7 +10328,7 @@
         <p:spPr>
           <a:xfrm>
             <a:off x="548640" y="384048"/>
-            <a:ext cx="11091672" cy="777240"/>
+            <a:ext cx="7955280" cy="777240"/>
           </a:xfrm>
           <a:prstGeom prst="rect">
             <a:avLst/>
@@ -10360,26 +10360,132 @@
       </p:sp>
       <p:sp>
         <p:nvSpPr>
-          <p:cNvPr id="14" name="Shape 11"/>
-          <p:cNvSpPr/>
-          <p:nvPr/>
-        </p:nvSpPr>
-        <p:spPr>
-          <a:xfrm>
-            <a:off x="640080" y="1508760"/>
-            <a:ext cx="10972800" cy="731520"/>
+          <p:cNvPr id="14" name="Text 11"/>
+          <p:cNvSpPr/>
+          <p:nvPr/>
+        </p:nvSpPr>
+        <p:spPr>
+          <a:xfrm>
+            <a:off x="640080" y="1554480"/>
+            <a:ext cx="5394960" cy="3566160"/>
+          </a:xfrm>
+          <a:prstGeom prst="rect">
+            <a:avLst/>
+          </a:prstGeom>
+          <a:noFill/>
+          <a:ln/>
+        </p:spPr>
+        <p:txBody>
+          <a:bodyPr wrap="square" rtlCol="0" anchor="t"/>
+          <a:lstStyle/>
+          <a:p>
+            <a:pPr marL="342900" indent="-342900">
+              <a:spcAft>
+                <a:spcPts val="1000"/>
+              </a:spcAft>
+              <a:buSzPct val="100000"/>
+              <a:buChar char="•"/>
+            </a:pPr>
+            <a:r>
+              <a:rPr lang="en-US" sz="1600" dirty="0">
+                <a:solidFill>
+                  <a:srgbClr val="1B1F24"/>
+                </a:solidFill>
+                <a:latin typeface="Inter" pitchFamily="34" charset="0"/>
+                <a:ea typeface="Inter" pitchFamily="34" charset="-122"/>
+                <a:cs typeface="Inter" pitchFamily="34" charset="-120"/>
+              </a:rPr>
+              <a:t>Run the rubric prompt with your grade, subject, criteria, and pasted notes</a:t>
+            </a:r>
+            <a:endParaRPr lang="en-US" sz="1600" dirty="0"/>
+          </a:p>
+          <a:p>
+            <a:pPr marL="342900" indent="-342900">
+              <a:spcAft>
+                <a:spcPts val="1000"/>
+              </a:spcAft>
+              <a:buSzPct val="100000"/>
+              <a:buChar char="•"/>
+            </a:pPr>
+            <a:r>
+              <a:rPr lang="en-US" sz="1600" dirty="0">
+                <a:solidFill>
+                  <a:srgbClr val="1B1F24"/>
+                </a:solidFill>
+                <a:latin typeface="Inter" pitchFamily="34" charset="0"/>
+                <a:ea typeface="Inter" pitchFamily="34" charset="-122"/>
+                <a:cs typeface="Inter" pitchFamily="34" charset="-120"/>
+              </a:rPr>
+              <a:t>Content round: are these the right criteria? Is anything you actually grade for missing?</a:t>
+            </a:r>
+            <a:endParaRPr lang="en-US" sz="1600" dirty="0"/>
+          </a:p>
+          <a:p>
+            <a:pPr marL="342900" indent="-342900">
+              <a:spcAft>
+                <a:spcPts val="1000"/>
+              </a:spcAft>
+              <a:buSzPct val="100000"/>
+              <a:buChar char="•"/>
+            </a:pPr>
+            <a:r>
+              <a:rPr lang="en-US" sz="1600" dirty="0">
+                <a:solidFill>
+                  <a:srgbClr val="1B1F24"/>
+                </a:solidFill>
+                <a:latin typeface="Inter" pitchFamily="34" charset="0"/>
+                <a:ea typeface="Inter" pitchFamily="34" charset="-122"/>
+                <a:cs typeface="Inter" pitchFamily="34" charset="-120"/>
+              </a:rPr>
+              <a:t>Voice round: the hand-it-to-a-student test, on every descriptor</a:t>
+            </a:r>
+            <a:endParaRPr lang="en-US" sz="1600" dirty="0"/>
+          </a:p>
+          <a:p>
+            <a:pPr marL="342900" indent="-342900">
+              <a:spcAft>
+                <a:spcPts val="1000"/>
+              </a:spcAft>
+              <a:buSzPct val="100000"/>
+              <a:buChar char="•"/>
+            </a:pPr>
+            <a:r>
+              <a:rPr lang="en-US" sz="1600" dirty="0">
+                <a:solidFill>
+                  <a:srgbClr val="1B1F24"/>
+                </a:solidFill>
+                <a:latin typeface="Inter" pitchFamily="34" charset="0"/>
+                <a:ea typeface="Inter" pitchFamily="34" charset="-122"/>
+                <a:cs typeface="Inter" pitchFamily="34" charset="-120"/>
+              </a:rPr>
+              <a:t>Details round: table format, level names, point values if you use them</a:t>
+            </a:r>
+            <a:endParaRPr lang="en-US" sz="1600" dirty="0"/>
+          </a:p>
+        </p:txBody>
+      </p:sp>
+      <p:sp>
+        <p:nvSpPr>
+          <p:cNvPr id="15" name="Shape 12"/>
+          <p:cNvSpPr/>
+          <p:nvPr/>
+        </p:nvSpPr>
+        <p:spPr>
+          <a:xfrm>
+            <a:off x="6263640" y="1554480"/>
+            <a:ext cx="5394960" cy="3566160"/>
           </a:xfrm>
           <a:prstGeom prst="roundRect">
             <a:avLst>
-              <a:gd name="adj" fmla="val 11250"/>
+              <a:gd name="adj" fmla="val 2308"/>
             </a:avLst>
           </a:prstGeom>
           <a:solidFill>
-            <a:srgbClr val="F7F5F0"/>
+            <a:srgbClr val="EAF5F3"/>
           </a:solidFill>
           <a:ln w="12700">
             <a:solidFill>
-              <a:srgbClr val="F7F5F0"/>
+              <a:srgbClr val="EAF5F3"/>
             </a:solidFill>
             <a:prstDash val="solid"/>
           </a:ln>
@@ -10387,30 +10493,89 @@
       </p:sp>
       <p:sp>
         <p:nvSpPr>
-          <p:cNvPr id="15" name="Text 12"/>
-          <p:cNvSpPr/>
-          <p:nvPr/>
-        </p:nvSpPr>
-        <p:spPr>
-          <a:xfrm>
-            <a:off x="960120" y="1563624"/>
-            <a:ext cx="10332720" cy="621792"/>
-          </a:xfrm>
-          <a:prstGeom prst="rect">
-            <a:avLst/>
-          </a:prstGeom>
-          <a:noFill/>
-          <a:ln/>
-        </p:spPr>
-        <p:txBody>
-          <a:bodyPr wrap="square" lIns="0" tIns="0" rIns="0" bIns="0" rtlCol="0" anchor="ctr"/>
-          <a:lstStyle/>
-          <a:p>
-            <a:pPr indent="0" marL="0">
-              <a:buNone/>
-            </a:pPr>
-            <a:r>
-              <a:rPr lang="en-US" sz="1800" dirty="0">
+          <p:cNvPr id="16" name="Text 13"/>
+          <p:cNvSpPr/>
+          <p:nvPr/>
+        </p:nvSpPr>
+        <p:spPr>
+          <a:xfrm>
+            <a:off x="6537960" y="1737360"/>
+            <a:ext cx="4937760" cy="292608"/>
+          </a:xfrm>
+          <a:prstGeom prst="rect">
+            <a:avLst/>
+          </a:prstGeom>
+          <a:noFill/>
+          <a:ln/>
+        </p:spPr>
+        <p:txBody>
+          <a:bodyPr wrap="square" lIns="0" tIns="0" rIns="0" bIns="0" rtlCol="0" anchor="ctr"/>
+          <a:lstStyle/>
+          <a:p>
+            <a:pPr indent="0" marL="0">
+              <a:buNone/>
+            </a:pPr>
+            <a:r>
+              <a:rPr lang="en-US" sz="1250" b="1" spc="150" kern="0" dirty="0">
+                <a:solidFill>
+                  <a:srgbClr val="2A9D8F"/>
+                </a:solidFill>
+                <a:latin typeface="Inter" pitchFamily="34" charset="0"/>
+                <a:ea typeface="Inter" pitchFamily="34" charset="-122"/>
+                <a:cs typeface="Inter" pitchFamily="34" charset="-120"/>
+              </a:rPr>
+              <a:t>MS. RIVERA'S ESSAY · STEP 1 · HER RUBRIC</a:t>
+            </a:r>
+            <a:endParaRPr lang="en-US" sz="1250" dirty="0"/>
+          </a:p>
+        </p:txBody>
+      </p:sp>
+      <p:sp>
+        <p:nvSpPr>
+          <p:cNvPr id="17" name="Text 14"/>
+          <p:cNvSpPr/>
+          <p:nvPr/>
+        </p:nvSpPr>
+        <p:spPr>
+          <a:xfrm>
+            <a:off x="6537960" y="2148840"/>
+            <a:ext cx="4892040" cy="2834640"/>
+          </a:xfrm>
+          <a:prstGeom prst="rect">
+            <a:avLst/>
+          </a:prstGeom>
+          <a:noFill/>
+          <a:ln/>
+        </p:spPr>
+        <p:txBody>
+          <a:bodyPr wrap="square" lIns="0" tIns="0" rIns="0" bIns="0" rtlCol="0" anchor="t"/>
+          <a:lstStyle/>
+          <a:p>
+            <a:pPr indent="0" marL="0">
+              <a:lnSpc>
+                <a:spcPct val="120000"/>
+              </a:lnSpc>
+              <a:buNone/>
+            </a:pPr>
+            <a:r>
+              <a:rPr lang="en-US" sz="1600" b="1" dirty="0">
+                <a:solidFill>
+                  <a:srgbClr val="13293D"/>
+                </a:solidFill>
+                <a:latin typeface="Inter" pitchFamily="34" charset="0"/>
+                <a:ea typeface="Inter" pitchFamily="34" charset="-122"/>
+                <a:cs typeface="Inter" pitchFamily="34" charset="-120"/>
+              </a:rPr>
+              <a:t>Her note: </a:t>
+            </a:r>
+            <a:pPr indent="0" marL="0">
+              <a:lnSpc>
+                <a:spcPct val="120000"/>
+              </a:lnSpc>
+              <a:buNone/>
+            </a:pPr>
+            <a:r>
+              <a:rPr lang="en-US" sz="1600" i="1" dirty="0">
                 <a:solidFill>
                   <a:srgbClr val="1B1F24"/>
                 </a:solidFill>
@@ -10418,65 +10583,34 @@
                 <a:ea typeface="Inter" pitchFamily="34" charset="-122"/>
                 <a:cs typeface="Inter" pitchFamily="34" charset="-120"/>
               </a:rPr>
-              <a:t>Run the rubric prompt with your grade, subject, criteria, and pasted notes</a:t>
-            </a:r>
-            <a:endParaRPr lang="en-US" sz="1800" dirty="0"/>
-          </a:p>
-        </p:txBody>
-      </p:sp>
-      <p:sp>
-        <p:nvSpPr>
-          <p:cNvPr id="16" name="Shape 13"/>
-          <p:cNvSpPr/>
-          <p:nvPr/>
-        </p:nvSpPr>
-        <p:spPr>
-          <a:xfrm>
-            <a:off x="640080" y="2377440"/>
-            <a:ext cx="10972800" cy="731520"/>
-          </a:xfrm>
-          <a:prstGeom prst="roundRect">
-            <a:avLst>
-              <a:gd name="adj" fmla="val 11250"/>
-            </a:avLst>
-          </a:prstGeom>
-          <a:solidFill>
-            <a:srgbClr val="F7F5F0"/>
-          </a:solidFill>
-          <a:ln w="12700">
-            <a:solidFill>
-              <a:srgbClr val="F7F5F0"/>
-            </a:solidFill>
-            <a:prstDash val="solid"/>
-          </a:ln>
-        </p:spPr>
-      </p:sp>
-      <p:sp>
-        <p:nvSpPr>
-          <p:cNvPr id="17" name="Text 14"/>
-          <p:cNvSpPr/>
-          <p:nvPr/>
-        </p:nvSpPr>
-        <p:spPr>
-          <a:xfrm>
-            <a:off x="960120" y="2432304"/>
-            <a:ext cx="10332720" cy="621792"/>
-          </a:xfrm>
-          <a:prstGeom prst="rect">
-            <a:avLst/>
-          </a:prstGeom>
-          <a:noFill/>
-          <a:ln/>
-        </p:spPr>
-        <p:txBody>
-          <a:bodyPr wrap="square" lIns="0" tIns="0" rIns="0" bIns="0" rtlCol="0" anchor="ctr"/>
-          <a:lstStyle/>
-          <a:p>
-            <a:pPr indent="0" marL="0">
-              <a:buNone/>
-            </a:pPr>
-            <a:r>
-              <a:rPr lang="en-US" sz="1800" dirty="0">
+              <a:t>"an A backs every claim and says why the evidence matters."
+</a:t>
+            </a:r>
+            <a:pPr indent="0" marL="0">
+              <a:lnSpc>
+                <a:spcPct val="120000"/>
+              </a:lnSpc>
+              <a:buNone/>
+            </a:pPr>
+            <a:r>
+              <a:rPr lang="en-US" sz="1600" b="1" dirty="0">
+                <a:solidFill>
+                  <a:srgbClr val="13293D"/>
+                </a:solidFill>
+                <a:latin typeface="Inter" pitchFamily="34" charset="0"/>
+                <a:ea typeface="Inter" pitchFamily="34" charset="-122"/>
+                <a:cs typeface="Inter" pitchFamily="34" charset="-120"/>
+              </a:rPr>
+              <a:t>Level 4 · Evidence: </a:t>
+            </a:r>
+            <a:pPr indent="0" marL="0">
+              <a:lnSpc>
+                <a:spcPct val="120000"/>
+              </a:lnSpc>
+              <a:buNone/>
+            </a:pPr>
+            <a:r>
+              <a:rPr lang="en-US" sz="1600" dirty="0">
                 <a:solidFill>
                   <a:srgbClr val="1B1F24"/>
                 </a:solidFill>
@@ -10484,153 +10618,39 @@
                 <a:ea typeface="Inter" pitchFamily="34" charset="-122"/>
                 <a:cs typeface="Inter" pitchFamily="34" charset="-120"/>
               </a:rPr>
-              <a:t>Content round: are these the right criteria? Is anything you actually grade for missing?</a:t>
-            </a:r>
-            <a:endParaRPr lang="en-US" sz="1800" dirty="0"/>
-          </a:p>
-        </p:txBody>
-      </p:sp>
-      <p:sp>
-        <p:nvSpPr>
-          <p:cNvPr id="18" name="Shape 15"/>
-          <p:cNvSpPr/>
-          <p:nvPr/>
-        </p:nvSpPr>
-        <p:spPr>
-          <a:xfrm>
-            <a:off x="640080" y="3246120"/>
-            <a:ext cx="10972800" cy="731520"/>
-          </a:xfrm>
-          <a:prstGeom prst="roundRect">
-            <a:avLst>
-              <a:gd name="adj" fmla="val 11250"/>
-            </a:avLst>
-          </a:prstGeom>
-          <a:solidFill>
-            <a:srgbClr val="F7F5F0"/>
-          </a:solidFill>
-          <a:ln w="12700">
-            <a:solidFill>
-              <a:srgbClr val="F7F5F0"/>
-            </a:solidFill>
-            <a:prstDash val="solid"/>
-          </a:ln>
-        </p:spPr>
-      </p:sp>
-      <p:sp>
-        <p:nvSpPr>
-          <p:cNvPr id="19" name="Text 16"/>
-          <p:cNvSpPr/>
-          <p:nvPr/>
-        </p:nvSpPr>
-        <p:spPr>
-          <a:xfrm>
-            <a:off x="960120" y="3300984"/>
-            <a:ext cx="10332720" cy="621792"/>
-          </a:xfrm>
-          <a:prstGeom prst="rect">
-            <a:avLst/>
-          </a:prstGeom>
-          <a:noFill/>
-          <a:ln/>
-        </p:spPr>
-        <p:txBody>
-          <a:bodyPr wrap="square" lIns="0" tIns="0" rIns="0" bIns="0" rtlCol="0" anchor="ctr"/>
-          <a:lstStyle/>
-          <a:p>
-            <a:pPr indent="0" marL="0">
-              <a:buNone/>
-            </a:pPr>
-            <a:r>
-              <a:rPr lang="en-US" sz="1800" dirty="0">
-                <a:solidFill>
-                  <a:srgbClr val="1B1F24"/>
-                </a:solidFill>
-                <a:latin typeface="Inter" pitchFamily="34" charset="0"/>
-                <a:ea typeface="Inter" pitchFamily="34" charset="-122"/>
-                <a:cs typeface="Inter" pitchFamily="34" charset="-120"/>
-              </a:rPr>
-              <a:t>Voice round: the hand-it-to-a-student test, on every descriptor</a:t>
-            </a:r>
-            <a:endParaRPr lang="en-US" sz="1800" dirty="0"/>
-          </a:p>
-        </p:txBody>
-      </p:sp>
-      <p:sp>
-        <p:nvSpPr>
-          <p:cNvPr id="20" name="Shape 17"/>
-          <p:cNvSpPr/>
-          <p:nvPr/>
-        </p:nvSpPr>
-        <p:spPr>
-          <a:xfrm>
-            <a:off x="640080" y="4114800"/>
-            <a:ext cx="10972800" cy="731520"/>
-          </a:xfrm>
-          <a:prstGeom prst="roundRect">
-            <a:avLst>
-              <a:gd name="adj" fmla="val 11250"/>
-            </a:avLst>
-          </a:prstGeom>
-          <a:solidFill>
-            <a:srgbClr val="F7F5F0"/>
-          </a:solidFill>
-          <a:ln w="12700">
-            <a:solidFill>
-              <a:srgbClr val="F7F5F0"/>
-            </a:solidFill>
-            <a:prstDash val="solid"/>
-          </a:ln>
-        </p:spPr>
-      </p:sp>
-      <p:sp>
-        <p:nvSpPr>
-          <p:cNvPr id="21" name="Text 18"/>
-          <p:cNvSpPr/>
-          <p:nvPr/>
-        </p:nvSpPr>
-        <p:spPr>
-          <a:xfrm>
-            <a:off x="960120" y="4169664"/>
-            <a:ext cx="10332720" cy="621792"/>
-          </a:xfrm>
-          <a:prstGeom prst="rect">
-            <a:avLst/>
-          </a:prstGeom>
-          <a:noFill/>
-          <a:ln/>
-        </p:spPr>
-        <p:txBody>
-          <a:bodyPr wrap="square" lIns="0" tIns="0" rIns="0" bIns="0" rtlCol="0" anchor="ctr"/>
-          <a:lstStyle/>
-          <a:p>
-            <a:pPr indent="0" marL="0">
-              <a:buNone/>
-            </a:pPr>
-            <a:r>
-              <a:rPr lang="en-US" sz="1800" dirty="0">
-                <a:solidFill>
-                  <a:srgbClr val="1B1F24"/>
-                </a:solidFill>
-                <a:latin typeface="Inter" pitchFamily="34" charset="0"/>
-                <a:ea typeface="Inter" pitchFamily="34" charset="-122"/>
-                <a:cs typeface="Inter" pitchFamily="34" charset="-120"/>
-              </a:rPr>
-              <a:t>Details round: table format, level names, point values if you use them</a:t>
-            </a:r>
-            <a:endParaRPr lang="en-US" sz="1800" dirty="0"/>
-          </a:p>
-        </p:txBody>
-      </p:sp>
-      <p:sp>
-        <p:nvSpPr>
-          <p:cNvPr id="22" name="Text 19"/>
-          <p:cNvSpPr/>
-          <p:nvPr/>
-        </p:nvSpPr>
-        <p:spPr>
-          <a:xfrm>
-            <a:off x="640080" y="5212080"/>
+              <a:t>"Every claim has a quote or fact behind it, and you explain why it proves your point."
+</a:t>
+            </a:r>
+            <a:pPr indent="0" marL="0">
+              <a:lnSpc>
+                <a:spcPct val="120000"/>
+              </a:lnSpc>
+              <a:buNone/>
+            </a:pPr>
+            <a:r>
+              <a:rPr lang="en-US" sz="1600" i="1" dirty="0">
+                <a:solidFill>
+                  <a:srgbClr val="5B6B7A"/>
+                </a:solidFill>
+                <a:latin typeface="Inter" pitchFamily="34" charset="0"/>
+                <a:ea typeface="Inter" pitchFamily="34" charset="-122"/>
+                <a:cs typeface="Inter" pitchFamily="34" charset="-120"/>
+              </a:rPr>
+              <a:t>Passed the hand-it-to-a-student test on round two.</a:t>
+            </a:r>
+            <a:endParaRPr lang="en-US" sz="1600" dirty="0"/>
+          </a:p>
+        </p:txBody>
+      </p:sp>
+      <p:sp>
+        <p:nvSpPr>
+          <p:cNvPr id="18" name="Text 15"/>
+          <p:cNvSpPr/>
+          <p:nvPr/>
+        </p:nvSpPr>
+        <p:spPr>
+          <a:xfrm>
+            <a:off x="640080" y="5349240"/>
             <a:ext cx="10972800" cy="457200"/>
           </a:xfrm>
           <a:prstGeom prst="rect">
@@ -11760,7 +11780,7 @@
                 <a:ea typeface="Inter" pitchFamily="34" charset="-122"/>
                 <a:cs typeface="Inter" pitchFamily="34" charset="-120"/>
               </a:rPr>
-              <a:t>Her bank: ten questions, misconception distractors, key checked.</a:t>
+              <a:t>Her essay bank, on screen: the claim-repeat confusion built into a distractor.</a:t>
             </a:r>
             <a:endParaRPr lang="en-US" sz="1000" dirty="0"/>
           </a:p>
@@ -11814,7 +11834,7 @@
         <p:spPr>
           <a:xfrm>
             <a:off x="548640" y="384048"/>
-            <a:ext cx="11091672" cy="777240"/>
+            <a:ext cx="7955280" cy="777240"/>
           </a:xfrm>
           <a:prstGeom prst="rect">
             <a:avLst/>
@@ -11852,8 +11872,8 @@
         </p:nvSpPr>
         <p:spPr>
           <a:xfrm>
-            <a:off x="640080" y="1463040"/>
-            <a:ext cx="10908792" cy="2377440"/>
+            <a:off x="640080" y="1554480"/>
+            <a:ext cx="5394960" cy="3566160"/>
           </a:xfrm>
           <a:prstGeom prst="rect">
             <a:avLst/>
@@ -11873,7 +11893,7 @@
               <a:buChar char="•"/>
             </a:pPr>
             <a:r>
-              <a:rPr lang="en-US" sz="2100" dirty="0">
+              <a:rPr lang="en-US" sz="1600" dirty="0">
                 <a:solidFill>
                   <a:srgbClr val="1B1F24"/>
                 </a:solidFill>
@@ -11883,7 +11903,7 @@
               </a:rPr>
               <a:t>Same assessment: 10 questions, mixed format, full answer key, distractor rationale</a:t>
             </a:r>
-            <a:endParaRPr lang="en-US" sz="2100" dirty="0"/>
+            <a:endParaRPr lang="en-US" sz="1600" dirty="0"/>
           </a:p>
           <a:p>
             <a:pPr marL="342900" indent="-342900">
@@ -11894,7 +11914,7 @@
               <a:buChar char="•"/>
             </a:pPr>
             <a:r>
-              <a:rPr lang="en-US" sz="2100" b="1" dirty="0">
+              <a:rPr lang="en-US" sz="1600" b="1" dirty="0">
                 <a:solidFill>
                   <a:srgbClr val="13293D"/>
                 </a:solidFill>
@@ -11904,7 +11924,7 @@
               </a:rPr>
               <a:t>First, finish this sentence: “My students keep confusing X with Y.”</a:t>
             </a:r>
-            <a:endParaRPr lang="en-US" sz="2100" dirty="0"/>
+            <a:endParaRPr lang="en-US" sz="1600" dirty="0"/>
           </a:p>
           <a:p>
             <a:pPr marL="342900" indent="-342900">
@@ -11915,7 +11935,7 @@
               <a:buChar char="•"/>
             </a:pPr>
             <a:r>
-              <a:rPr lang="en-US" sz="2100" dirty="0">
+              <a:rPr lang="en-US" sz="1600" dirty="0">
                 <a:solidFill>
                   <a:srgbClr val="1B1F24"/>
                 </a:solidFill>
@@ -11925,7 +11945,7 @@
               </a:rPr>
               <a:t>Put that sentence in the prompt and make the misconception a distractor</a:t>
             </a:r>
-            <a:endParaRPr lang="en-US" sz="2100" dirty="0"/>
+            <a:endParaRPr lang="en-US" sz="1600" dirty="0"/>
           </a:p>
         </p:txBody>
       </p:sp>
@@ -11937,12 +11957,12 @@
         </p:nvSpPr>
         <p:spPr>
           <a:xfrm>
-            <a:off x="640080" y="4023360"/>
-            <a:ext cx="10972800" cy="1554480"/>
+            <a:off x="6263640" y="1554480"/>
+            <a:ext cx="5394960" cy="3566160"/>
           </a:xfrm>
           <a:prstGeom prst="roundRect">
             <a:avLst>
-              <a:gd name="adj" fmla="val 5294"/>
+              <a:gd name="adj" fmla="val 2308"/>
             </a:avLst>
           </a:prstGeom>
           <a:solidFill>
@@ -11964,24 +11984,66 @@
         </p:nvSpPr>
         <p:spPr>
           <a:xfrm>
-            <a:off x="960120" y="4251960"/>
-            <a:ext cx="10332720" cy="1097280"/>
-          </a:xfrm>
-          <a:prstGeom prst="rect">
-            <a:avLst/>
-          </a:prstGeom>
-          <a:noFill/>
-          <a:ln/>
-        </p:spPr>
-        <p:txBody>
-          <a:bodyPr wrap="square" lIns="0" tIns="0" rIns="0" bIns="0" rtlCol="0" anchor="ctr"/>
-          <a:lstStyle/>
-          <a:p>
-            <a:pPr indent="0" marL="0">
-              <a:buNone/>
-            </a:pPr>
-            <a:r>
-              <a:rPr lang="en-US" sz="2400" b="1" dirty="0">
+            <a:off x="6537960" y="1737360"/>
+            <a:ext cx="4937760" cy="292608"/>
+          </a:xfrm>
+          <a:prstGeom prst="rect">
+            <a:avLst/>
+          </a:prstGeom>
+          <a:noFill/>
+          <a:ln/>
+        </p:spPr>
+        <p:txBody>
+          <a:bodyPr wrap="square" lIns="0" tIns="0" rIns="0" bIns="0" rtlCol="0" anchor="ctr"/>
+          <a:lstStyle/>
+          <a:p>
+            <a:pPr indent="0" marL="0">
+              <a:buNone/>
+            </a:pPr>
+            <a:r>
+              <a:rPr lang="en-US" sz="1250" b="1" spc="150" kern="0" dirty="0">
+                <a:solidFill>
+                  <a:srgbClr val="2A9D8F"/>
+                </a:solidFill>
+                <a:latin typeface="Inter" pitchFamily="34" charset="0"/>
+                <a:ea typeface="Inter" pitchFamily="34" charset="-122"/>
+                <a:cs typeface="Inter" pitchFamily="34" charset="-120"/>
+              </a:rPr>
+              <a:t>MS. RIVERA'S ESSAY · STEP 2 · HER BANK</a:t>
+            </a:r>
+            <a:endParaRPr lang="en-US" sz="1250" dirty="0"/>
+          </a:p>
+        </p:txBody>
+      </p:sp>
+      <p:sp>
+        <p:nvSpPr>
+          <p:cNvPr id="17" name="Text 14"/>
+          <p:cNvSpPr/>
+          <p:nvPr/>
+        </p:nvSpPr>
+        <p:spPr>
+          <a:xfrm>
+            <a:off x="6537960" y="2148840"/>
+            <a:ext cx="4892040" cy="2834640"/>
+          </a:xfrm>
+          <a:prstGeom prst="rect">
+            <a:avLst/>
+          </a:prstGeom>
+          <a:noFill/>
+          <a:ln/>
+        </p:spPr>
+        <p:txBody>
+          <a:bodyPr wrap="square" lIns="0" tIns="0" rIns="0" bIns="0" rtlCol="0" anchor="t"/>
+          <a:lstStyle/>
+          <a:p>
+            <a:pPr indent="0" marL="0">
+              <a:lnSpc>
+                <a:spcPct val="120000"/>
+              </a:lnSpc>
+              <a:buNone/>
+            </a:pPr>
+            <a:r>
+              <a:rPr lang="en-US" sz="1600" b="1" dirty="0">
                 <a:solidFill>
                   <a:srgbClr val="13293D"/>
                 </a:solidFill>
@@ -11989,9 +12051,145 @@
                 <a:ea typeface="Inter" pitchFamily="34" charset="-122"/>
                 <a:cs typeface="Inter" pitchFamily="34" charset="-120"/>
               </a:rPr>
+              <a:t>Her sentence: </a:t>
+            </a:r>
+            <a:pPr indent="0" marL="0">
+              <a:lnSpc>
+                <a:spcPct val="120000"/>
+              </a:lnSpc>
+              <a:buNone/>
+            </a:pPr>
+            <a:r>
+              <a:rPr lang="en-US" sz="1600" i="1" dirty="0">
+                <a:solidFill>
+                  <a:srgbClr val="1B1F24"/>
+                </a:solidFill>
+                <a:latin typeface="Inter" pitchFamily="34" charset="0"/>
+                <a:ea typeface="Inter" pitchFamily="34" charset="-122"/>
+                <a:cs typeface="Inter" pitchFamily="34" charset="-120"/>
+              </a:rPr>
+              <a:t>"My students keep confusing restating the claim with giving evidence."
+</a:t>
+            </a:r>
+            <a:pPr indent="0" marL="0">
+              <a:lnSpc>
+                <a:spcPct val="120000"/>
+              </a:lnSpc>
+              <a:buNone/>
+            </a:pPr>
+            <a:r>
+              <a:rPr lang="en-US" sz="1600" b="1" dirty="0">
+                <a:solidFill>
+                  <a:srgbClr val="13293D"/>
+                </a:solidFill>
+                <a:latin typeface="Inter" pitchFamily="34" charset="0"/>
+                <a:ea typeface="Inter" pitchFamily="34" charset="-122"/>
+                <a:cs typeface="Inter" pitchFamily="34" charset="-120"/>
+              </a:rPr>
+              <a:t>Q4: </a:t>
+            </a:r>
+            <a:pPr indent="0" marL="0">
+              <a:lnSpc>
+                <a:spcPct val="120000"/>
+              </a:lnSpc>
+              <a:buNone/>
+            </a:pPr>
+            <a:r>
+              <a:rPr lang="en-US" sz="1600" dirty="0">
+                <a:solidFill>
+                  <a:srgbClr val="1B1F24"/>
+                </a:solidFill>
+                <a:latin typeface="Inter" pitchFamily="34" charset="0"/>
+                <a:ea typeface="Inter" pitchFamily="34" charset="-122"/>
+                <a:cs typeface="Inter" pitchFamily="34" charset="-120"/>
+              </a:rPr>
+              <a:t>"Which sentence gives evidence for the claim?" Distractor C restates the claim, louder.
+</a:t>
+            </a:r>
+            <a:pPr indent="0" marL="0">
+              <a:lnSpc>
+                <a:spcPct val="120000"/>
+              </a:lnSpc>
+              <a:buNone/>
+            </a:pPr>
+            <a:r>
+              <a:rPr lang="en-US" sz="1600" i="1" dirty="0">
+                <a:solidFill>
+                  <a:srgbClr val="5B6B7A"/>
+                </a:solidFill>
+                <a:latin typeface="Inter" pitchFamily="34" charset="0"/>
+                <a:ea typeface="Inter" pitchFamily="34" charset="-122"/>
+                <a:cs typeface="Inter" pitchFamily="34" charset="-120"/>
+              </a:rPr>
+              <a:t>That distractor finds exactly who holds the mix-up.</a:t>
+            </a:r>
+            <a:endParaRPr lang="en-US" sz="1600" dirty="0"/>
+          </a:p>
+        </p:txBody>
+      </p:sp>
+      <p:sp>
+        <p:nvSpPr>
+          <p:cNvPr id="18" name="Shape 15"/>
+          <p:cNvSpPr/>
+          <p:nvPr/>
+        </p:nvSpPr>
+        <p:spPr>
+          <a:xfrm>
+            <a:off x="640080" y="5257800"/>
+            <a:ext cx="10972800" cy="777240"/>
+          </a:xfrm>
+          <a:prstGeom prst="roundRect">
+            <a:avLst>
+              <a:gd name="adj" fmla="val 10588"/>
+            </a:avLst>
+          </a:prstGeom>
+          <a:solidFill>
+            <a:srgbClr val="EAF5F3"/>
+          </a:solidFill>
+          <a:ln w="12700">
+            <a:solidFill>
+              <a:srgbClr val="EAF5F3"/>
+            </a:solidFill>
+            <a:prstDash val="solid"/>
+          </a:ln>
+        </p:spPr>
+      </p:sp>
+      <p:sp>
+        <p:nvSpPr>
+          <p:cNvPr id="19" name="Text 16"/>
+          <p:cNvSpPr/>
+          <p:nvPr/>
+        </p:nvSpPr>
+        <p:spPr>
+          <a:xfrm>
+            <a:off x="960120" y="5257800"/>
+            <a:ext cx="10332720" cy="777240"/>
+          </a:xfrm>
+          <a:prstGeom prst="rect">
+            <a:avLst/>
+          </a:prstGeom>
+          <a:noFill/>
+          <a:ln/>
+        </p:spPr>
+        <p:txBody>
+          <a:bodyPr wrap="square" lIns="0" tIns="0" rIns="0" bIns="0" rtlCol="0" anchor="ctr"/>
+          <a:lstStyle/>
+          <a:p>
+            <a:pPr indent="0" marL="0">
+              <a:buNone/>
+            </a:pPr>
+            <a:r>
+              <a:rPr lang="en-US" sz="2000" b="1" dirty="0">
+                <a:solidFill>
+                  <a:srgbClr val="13293D"/>
+                </a:solidFill>
+                <a:latin typeface="Inter" pitchFamily="34" charset="0"/>
+                <a:ea typeface="Inter" pitchFamily="34" charset="-122"/>
+                <a:cs typeface="Inter" pitchFamily="34" charset="-120"/>
+              </a:rPr>
               <a:t>The misconception is the one ingredient only you can supply.</a:t>
             </a:r>
-            <a:endParaRPr lang="en-US" sz="2400" dirty="0"/>
+            <a:endParaRPr lang="en-US" sz="2000" dirty="0"/>
           </a:p>
         </p:txBody>
       </p:sp>
@@ -12344,7 +12542,7 @@
                 <a:ea typeface="Inter" pitchFamily="34" charset="-122"/>
                 <a:cs typeface="Inter" pitchFamily="34" charset="-120"/>
               </a:rPr>
-              <a:t>Her vetting rep: found the weak question, caught and cut it.</a:t>
+              <a:t>Her essay bank, vetted: question 7 had two fair answers. Caught and cut.</a:t>
             </a:r>
             <a:endParaRPr lang="en-US" sz="1000" dirty="0"/>
           </a:p>
@@ -12398,23 +12596,23 @@
         <p:spPr>
           <a:xfrm>
             <a:off x="548640" y="384048"/>
-            <a:ext cx="11091672" cy="777240"/>
-          </a:xfrm>
-          <a:prstGeom prst="rect">
-            <a:avLst/>
-          </a:prstGeom>
-          <a:noFill/>
-          <a:ln/>
-        </p:spPr>
-        <p:txBody>
-          <a:bodyPr wrap="square" lIns="0" tIns="0" rIns="0" bIns="0" rtlCol="0" anchor="ctr"/>
-          <a:lstStyle/>
-          <a:p>
-            <a:pPr indent="0" marL="0">
-              <a:buNone/>
-            </a:pPr>
-            <a:r>
-              <a:rPr lang="en-US" sz="3200" b="1" dirty="0">
+            <a:ext cx="7955280" cy="777240"/>
+          </a:xfrm>
+          <a:prstGeom prst="rect">
+            <a:avLst/>
+          </a:prstGeom>
+          <a:noFill/>
+          <a:ln/>
+        </p:spPr>
+        <p:txBody>
+          <a:bodyPr wrap="square" lIns="0" tIns="0" rIns="0" bIns="0" rtlCol="0" anchor="ctr"/>
+          <a:lstStyle/>
+          <a:p>
+            <a:pPr indent="0" marL="0">
+              <a:buNone/>
+            </a:pPr>
+            <a:r>
+              <a:rPr lang="en-US" sz="2800" b="1" dirty="0">
                 <a:solidFill>
                   <a:srgbClr val="13293D"/>
                 </a:solidFill>
@@ -12424,32 +12622,138 @@
               </a:rPr>
               <a:t>The vetting rep: find the weak one</a:t>
             </a:r>
-            <a:endParaRPr lang="en-US" sz="3200" dirty="0"/>
-          </a:p>
-        </p:txBody>
-      </p:sp>
-      <p:sp>
-        <p:nvSpPr>
-          <p:cNvPr id="14" name="Shape 11"/>
-          <p:cNvSpPr/>
-          <p:nvPr/>
-        </p:nvSpPr>
-        <p:spPr>
-          <a:xfrm>
-            <a:off x="640080" y="1508760"/>
-            <a:ext cx="10972800" cy="731520"/>
+            <a:endParaRPr lang="en-US" sz="2800" dirty="0"/>
+          </a:p>
+        </p:txBody>
+      </p:sp>
+      <p:sp>
+        <p:nvSpPr>
+          <p:cNvPr id="14" name="Text 11"/>
+          <p:cNvSpPr/>
+          <p:nvPr/>
+        </p:nvSpPr>
+        <p:spPr>
+          <a:xfrm>
+            <a:off x="640080" y="1554480"/>
+            <a:ext cx="5394960" cy="3566160"/>
+          </a:xfrm>
+          <a:prstGeom prst="rect">
+            <a:avLst/>
+          </a:prstGeom>
+          <a:noFill/>
+          <a:ln/>
+        </p:spPr>
+        <p:txBody>
+          <a:bodyPr wrap="square" rtlCol="0" anchor="t"/>
+          <a:lstStyle/>
+          <a:p>
+            <a:pPr marL="342900" indent="-342900">
+              <a:spcAft>
+                <a:spcPts val="1000"/>
+              </a:spcAft>
+              <a:buSzPct val="100000"/>
+              <a:buChar char="•"/>
+            </a:pPr>
+            <a:r>
+              <a:rPr lang="en-US" sz="1600" dirty="0">
+                <a:solidFill>
+                  <a:srgbClr val="1B1F24"/>
+                </a:solidFill>
+                <a:latin typeface="Inter" pitchFamily="34" charset="0"/>
+                <a:ea typeface="Inter" pitchFamily="34" charset="-122"/>
+                <a:cs typeface="Inter" pitchFamily="34" charset="-120"/>
+              </a:rPr>
+              <a:t>Answer key checked against your own professional knowledge</a:t>
+            </a:r>
+            <a:endParaRPr lang="en-US" sz="1600" dirty="0"/>
+          </a:p>
+          <a:p>
+            <a:pPr marL="342900" indent="-342900">
+              <a:spcAft>
+                <a:spcPts val="1000"/>
+              </a:spcAft>
+              <a:buSzPct val="100000"/>
+              <a:buChar char="•"/>
+            </a:pPr>
+            <a:r>
+              <a:rPr lang="en-US" sz="1600" dirty="0">
+                <a:solidFill>
+                  <a:srgbClr val="1B1F24"/>
+                </a:solidFill>
+                <a:latin typeface="Inter" pitchFamily="34" charset="0"/>
+                <a:ea typeface="Inter" pitchFamily="34" charset="-122"/>
+                <a:cs typeface="Inter" pitchFamily="34" charset="-120"/>
+              </a:rPr>
+              <a:t>Every distractor checked for accidental truth</a:t>
+            </a:r>
+            <a:endParaRPr lang="en-US" sz="1600" dirty="0"/>
+          </a:p>
+          <a:p>
+            <a:pPr marL="342900" indent="-342900">
+              <a:spcAft>
+                <a:spcPts val="1000"/>
+              </a:spcAft>
+              <a:buSzPct val="100000"/>
+              <a:buChar char="•"/>
+            </a:pPr>
+            <a:r>
+              <a:rPr lang="en-US" sz="1600" dirty="0">
+                <a:solidFill>
+                  <a:srgbClr val="1B1F24"/>
+                </a:solidFill>
+                <a:latin typeface="Inter" pitchFamily="34" charset="0"/>
+                <a:ea typeface="Inter" pitchFamily="34" charset="-122"/>
+                <a:cs typeface="Inter" pitchFamily="34" charset="-120"/>
+              </a:rPr>
+              <a:t>Reading level right? Exactly one fair answer per question?</a:t>
+            </a:r>
+            <a:endParaRPr lang="en-US" sz="1600" dirty="0"/>
+          </a:p>
+          <a:p>
+            <a:pPr marL="342900" indent="-342900">
+              <a:spcAft>
+                <a:spcPts val="1000"/>
+              </a:spcAft>
+              <a:buSzPct val="100000"/>
+              <a:buChar char="•"/>
+            </a:pPr>
+            <a:r>
+              <a:rPr lang="en-US" sz="1600" dirty="0">
+                <a:solidFill>
+                  <a:srgbClr val="1B1F24"/>
+                </a:solidFill>
+                <a:latin typeface="Inter" pitchFamily="34" charset="0"/>
+                <a:ea typeface="Inter" pitchFamily="34" charset="-122"/>
+                <a:cs typeface="Inter" pitchFamily="34" charset="-120"/>
+              </a:rPr>
+              <a:t>Weakest question: fix it by hand, or delete it and write its replacement yourself</a:t>
+            </a:r>
+            <a:endParaRPr lang="en-US" sz="1600" dirty="0"/>
+          </a:p>
+        </p:txBody>
+      </p:sp>
+      <p:sp>
+        <p:nvSpPr>
+          <p:cNvPr id="15" name="Shape 12"/>
+          <p:cNvSpPr/>
+          <p:nvPr/>
+        </p:nvSpPr>
+        <p:spPr>
+          <a:xfrm>
+            <a:off x="6263640" y="1554480"/>
+            <a:ext cx="5394960" cy="3566160"/>
           </a:xfrm>
           <a:prstGeom prst="roundRect">
             <a:avLst>
-              <a:gd name="adj" fmla="val 11250"/>
+              <a:gd name="adj" fmla="val 2308"/>
             </a:avLst>
           </a:prstGeom>
           <a:solidFill>
-            <a:srgbClr val="F7F5F0"/>
+            <a:srgbClr val="EAF5F3"/>
           </a:solidFill>
           <a:ln w="12700">
             <a:solidFill>
-              <a:srgbClr val="F7F5F0"/>
+              <a:srgbClr val="EAF5F3"/>
             </a:solidFill>
             <a:prstDash val="solid"/>
           </a:ln>
@@ -12457,30 +12761,89 @@
       </p:sp>
       <p:sp>
         <p:nvSpPr>
-          <p:cNvPr id="15" name="Text 12"/>
-          <p:cNvSpPr/>
-          <p:nvPr/>
-        </p:nvSpPr>
-        <p:spPr>
-          <a:xfrm>
-            <a:off x="960120" y="1563624"/>
-            <a:ext cx="10332720" cy="621792"/>
-          </a:xfrm>
-          <a:prstGeom prst="rect">
-            <a:avLst/>
-          </a:prstGeom>
-          <a:noFill/>
-          <a:ln/>
-        </p:spPr>
-        <p:txBody>
-          <a:bodyPr wrap="square" lIns="0" tIns="0" rIns="0" bIns="0" rtlCol="0" anchor="ctr"/>
-          <a:lstStyle/>
-          <a:p>
-            <a:pPr indent="0" marL="0">
-              <a:buNone/>
-            </a:pPr>
-            <a:r>
-              <a:rPr lang="en-US" sz="1800" dirty="0">
+          <p:cNvPr id="16" name="Text 13"/>
+          <p:cNvSpPr/>
+          <p:nvPr/>
+        </p:nvSpPr>
+        <p:spPr>
+          <a:xfrm>
+            <a:off x="6537960" y="1737360"/>
+            <a:ext cx="4937760" cy="292608"/>
+          </a:xfrm>
+          <a:prstGeom prst="rect">
+            <a:avLst/>
+          </a:prstGeom>
+          <a:noFill/>
+          <a:ln/>
+        </p:spPr>
+        <p:txBody>
+          <a:bodyPr wrap="square" lIns="0" tIns="0" rIns="0" bIns="0" rtlCol="0" anchor="ctr"/>
+          <a:lstStyle/>
+          <a:p>
+            <a:pPr indent="0" marL="0">
+              <a:buNone/>
+            </a:pPr>
+            <a:r>
+              <a:rPr lang="en-US" sz="1250" b="1" spc="150" kern="0" dirty="0">
+                <a:solidFill>
+                  <a:srgbClr val="2A9D8F"/>
+                </a:solidFill>
+                <a:latin typeface="Inter" pitchFamily="34" charset="0"/>
+                <a:ea typeface="Inter" pitchFamily="34" charset="-122"/>
+                <a:cs typeface="Inter" pitchFamily="34" charset="-120"/>
+              </a:rPr>
+              <a:t>MS. RIVERA'S ESSAY · STEP 2 · HER CATCH</a:t>
+            </a:r>
+            <a:endParaRPr lang="en-US" sz="1250" dirty="0"/>
+          </a:p>
+        </p:txBody>
+      </p:sp>
+      <p:sp>
+        <p:nvSpPr>
+          <p:cNvPr id="17" name="Text 14"/>
+          <p:cNvSpPr/>
+          <p:nvPr/>
+        </p:nvSpPr>
+        <p:spPr>
+          <a:xfrm>
+            <a:off x="6537960" y="2148840"/>
+            <a:ext cx="4892040" cy="2834640"/>
+          </a:xfrm>
+          <a:prstGeom prst="rect">
+            <a:avLst/>
+          </a:prstGeom>
+          <a:noFill/>
+          <a:ln/>
+        </p:spPr>
+        <p:txBody>
+          <a:bodyPr wrap="square" lIns="0" tIns="0" rIns="0" bIns="0" rtlCol="0" anchor="t"/>
+          <a:lstStyle/>
+          <a:p>
+            <a:pPr indent="0" marL="0">
+              <a:lnSpc>
+                <a:spcPct val="125000"/>
+              </a:lnSpc>
+              <a:buNone/>
+            </a:pPr>
+            <a:r>
+              <a:rPr lang="en-US" sz="1700" b="1" dirty="0">
+                <a:solidFill>
+                  <a:srgbClr val="13293D"/>
+                </a:solidFill>
+                <a:latin typeface="Inter" pitchFamily="34" charset="0"/>
+                <a:ea typeface="Inter" pitchFamily="34" charset="-122"/>
+                <a:cs typeface="Inter" pitchFamily="34" charset="-120"/>
+              </a:rPr>
+              <a:t>The catch: </a:t>
+            </a:r>
+            <a:pPr indent="0" marL="0">
+              <a:lnSpc>
+                <a:spcPct val="125000"/>
+              </a:lnSpc>
+              <a:buNone/>
+            </a:pPr>
+            <a:r>
+              <a:rPr lang="en-US" sz="1700" dirty="0">
                 <a:solidFill>
                   <a:srgbClr val="1B1F24"/>
                 </a:solidFill>
@@ -12488,65 +12851,34 @@
                 <a:ea typeface="Inter" pitchFamily="34" charset="-122"/>
                 <a:cs typeface="Inter" pitchFamily="34" charset="-120"/>
               </a:rPr>
-              <a:t>Answer key checked against your own professional knowledge</a:t>
-            </a:r>
-            <a:endParaRPr lang="en-US" sz="1800" dirty="0"/>
-          </a:p>
-        </p:txBody>
-      </p:sp>
-      <p:sp>
-        <p:nvSpPr>
-          <p:cNvPr id="16" name="Shape 13"/>
-          <p:cNvSpPr/>
-          <p:nvPr/>
-        </p:nvSpPr>
-        <p:spPr>
-          <a:xfrm>
-            <a:off x="640080" y="2377440"/>
-            <a:ext cx="10972800" cy="731520"/>
-          </a:xfrm>
-          <a:prstGeom prst="roundRect">
-            <a:avLst>
-              <a:gd name="adj" fmla="val 11250"/>
-            </a:avLst>
-          </a:prstGeom>
-          <a:solidFill>
-            <a:srgbClr val="F7F5F0"/>
-          </a:solidFill>
-          <a:ln w="12700">
-            <a:solidFill>
-              <a:srgbClr val="F7F5F0"/>
-            </a:solidFill>
-            <a:prstDash val="solid"/>
-          </a:ln>
-        </p:spPr>
-      </p:sp>
-      <p:sp>
-        <p:nvSpPr>
-          <p:cNvPr id="17" name="Text 14"/>
-          <p:cNvSpPr/>
-          <p:nvPr/>
-        </p:nvSpPr>
-        <p:spPr>
-          <a:xfrm>
-            <a:off x="960120" y="2432304"/>
-            <a:ext cx="10332720" cy="621792"/>
-          </a:xfrm>
-          <a:prstGeom prst="rect">
-            <a:avLst/>
-          </a:prstGeom>
-          <a:noFill/>
-          <a:ln/>
-        </p:spPr>
-        <p:txBody>
-          <a:bodyPr wrap="square" lIns="0" tIns="0" rIns="0" bIns="0" rtlCol="0" anchor="ctr"/>
-          <a:lstStyle/>
-          <a:p>
-            <a:pPr indent="0" marL="0">
-              <a:buNone/>
-            </a:pPr>
-            <a:r>
-              <a:rPr lang="en-US" sz="1800" dirty="0">
+              <a:t>question 7's "wrong" answer was defensible too. Two fair answers, one question.
+</a:t>
+            </a:r>
+            <a:pPr indent="0" marL="0">
+              <a:lnSpc>
+                <a:spcPct val="125000"/>
+              </a:lnSpc>
+              <a:buNone/>
+            </a:pPr>
+            <a:r>
+              <a:rPr lang="en-US" sz="1700" b="1" dirty="0">
+                <a:solidFill>
+                  <a:srgbClr val="13293D"/>
+                </a:solidFill>
+                <a:latin typeface="Inter" pitchFamily="34" charset="0"/>
+                <a:ea typeface="Inter" pitchFamily="34" charset="-122"/>
+                <a:cs typeface="Inter" pitchFamily="34" charset="-120"/>
+              </a:rPr>
+              <a:t>The fix: </a:t>
+            </a:r>
+            <a:pPr indent="0" marL="0">
+              <a:lnSpc>
+                <a:spcPct val="125000"/>
+              </a:lnSpc>
+              <a:buNone/>
+            </a:pPr>
+            <a:r>
+              <a:rPr lang="en-US" sz="1700" dirty="0">
                 <a:solidFill>
                   <a:srgbClr val="1B1F24"/>
                 </a:solidFill>
@@ -12554,153 +12886,39 @@
                 <a:ea typeface="Inter" pitchFamily="34" charset="-122"/>
                 <a:cs typeface="Inter" pitchFamily="34" charset="-120"/>
               </a:rPr>
-              <a:t>Every distractor checked for accidental truth</a:t>
-            </a:r>
-            <a:endParaRPr lang="en-US" sz="1800" dirty="0"/>
-          </a:p>
-        </p:txBody>
-      </p:sp>
-      <p:sp>
-        <p:nvSpPr>
-          <p:cNvPr id="18" name="Shape 15"/>
-          <p:cNvSpPr/>
-          <p:nvPr/>
-        </p:nvSpPr>
-        <p:spPr>
-          <a:xfrm>
-            <a:off x="640080" y="3246120"/>
-            <a:ext cx="10972800" cy="731520"/>
-          </a:xfrm>
-          <a:prstGeom prst="roundRect">
-            <a:avLst>
-              <a:gd name="adj" fmla="val 11250"/>
-            </a:avLst>
-          </a:prstGeom>
-          <a:solidFill>
-            <a:srgbClr val="F7F5F0"/>
-          </a:solidFill>
-          <a:ln w="12700">
-            <a:solidFill>
-              <a:srgbClr val="F7F5F0"/>
-            </a:solidFill>
-            <a:prstDash val="solid"/>
-          </a:ln>
-        </p:spPr>
-      </p:sp>
-      <p:sp>
-        <p:nvSpPr>
-          <p:cNvPr id="19" name="Text 16"/>
-          <p:cNvSpPr/>
-          <p:nvPr/>
-        </p:nvSpPr>
-        <p:spPr>
-          <a:xfrm>
-            <a:off x="960120" y="3300984"/>
-            <a:ext cx="10332720" cy="621792"/>
-          </a:xfrm>
-          <a:prstGeom prst="rect">
-            <a:avLst/>
-          </a:prstGeom>
-          <a:noFill/>
-          <a:ln/>
-        </p:spPr>
-        <p:txBody>
-          <a:bodyPr wrap="square" lIns="0" tIns="0" rIns="0" bIns="0" rtlCol="0" anchor="ctr"/>
-          <a:lstStyle/>
-          <a:p>
-            <a:pPr indent="0" marL="0">
-              <a:buNone/>
-            </a:pPr>
-            <a:r>
-              <a:rPr lang="en-US" sz="1800" dirty="0">
-                <a:solidFill>
-                  <a:srgbClr val="1B1F24"/>
-                </a:solidFill>
-                <a:latin typeface="Inter" pitchFamily="34" charset="0"/>
-                <a:ea typeface="Inter" pitchFamily="34" charset="-122"/>
-                <a:cs typeface="Inter" pitchFamily="34" charset="-120"/>
-              </a:rPr>
-              <a:t>Reading level right? Exactly one fair answer per question?</a:t>
-            </a:r>
-            <a:endParaRPr lang="en-US" sz="1800" dirty="0"/>
-          </a:p>
-        </p:txBody>
-      </p:sp>
-      <p:sp>
-        <p:nvSpPr>
-          <p:cNvPr id="20" name="Shape 17"/>
-          <p:cNvSpPr/>
-          <p:nvPr/>
-        </p:nvSpPr>
-        <p:spPr>
-          <a:xfrm>
-            <a:off x="640080" y="4114800"/>
-            <a:ext cx="10972800" cy="731520"/>
-          </a:xfrm>
-          <a:prstGeom prst="roundRect">
-            <a:avLst>
-              <a:gd name="adj" fmla="val 11250"/>
-            </a:avLst>
-          </a:prstGeom>
-          <a:solidFill>
-            <a:srgbClr val="F7F5F0"/>
-          </a:solidFill>
-          <a:ln w="12700">
-            <a:solidFill>
-              <a:srgbClr val="F7F5F0"/>
-            </a:solidFill>
-            <a:prstDash val="solid"/>
-          </a:ln>
-        </p:spPr>
-      </p:sp>
-      <p:sp>
-        <p:nvSpPr>
-          <p:cNvPr id="21" name="Text 18"/>
-          <p:cNvSpPr/>
-          <p:nvPr/>
-        </p:nvSpPr>
-        <p:spPr>
-          <a:xfrm>
-            <a:off x="960120" y="4169664"/>
-            <a:ext cx="10332720" cy="621792"/>
-          </a:xfrm>
-          <a:prstGeom prst="rect">
-            <a:avLst/>
-          </a:prstGeom>
-          <a:noFill/>
-          <a:ln/>
-        </p:spPr>
-        <p:txBody>
-          <a:bodyPr wrap="square" lIns="0" tIns="0" rIns="0" bIns="0" rtlCol="0" anchor="ctr"/>
-          <a:lstStyle/>
-          <a:p>
-            <a:pPr indent="0" marL="0">
-              <a:buNone/>
-            </a:pPr>
-            <a:r>
-              <a:rPr lang="en-US" sz="1800" dirty="0">
-                <a:solidFill>
-                  <a:srgbClr val="1B1F24"/>
-                </a:solidFill>
-                <a:latin typeface="Inter" pitchFamily="34" charset="0"/>
-                <a:ea typeface="Inter" pitchFamily="34" charset="-122"/>
-                <a:cs typeface="Inter" pitchFamily="34" charset="-120"/>
-              </a:rPr>
-              <a:t>Weakest question: fix it by hand, or delete it and write its replacement yourself</a:t>
-            </a:r>
-            <a:endParaRPr lang="en-US" sz="1800" dirty="0"/>
-          </a:p>
-        </p:txBody>
-      </p:sp>
-      <p:sp>
-        <p:nvSpPr>
-          <p:cNvPr id="22" name="Text 19"/>
-          <p:cNvSpPr/>
-          <p:nvPr/>
-        </p:nvSpPr>
-        <p:spPr>
-          <a:xfrm>
-            <a:off x="640080" y="5212080"/>
+              <a:t>she cut it and wrote the replacement herself.
+</a:t>
+            </a:r>
+            <a:pPr indent="0" marL="0">
+              <a:lnSpc>
+                <a:spcPct val="125000"/>
+              </a:lnSpc>
+              <a:buNone/>
+            </a:pPr>
+            <a:r>
+              <a:rPr lang="en-US" sz="1700" b="1" i="1" dirty="0">
+                <a:solidFill>
+                  <a:srgbClr val="13293D"/>
+                </a:solidFill>
+                <a:latin typeface="Inter" pitchFamily="34" charset="0"/>
+                <a:ea typeface="Inter" pitchFamily="34" charset="-122"/>
+                <a:cs typeface="Inter" pitchFamily="34" charset="-120"/>
+              </a:rPr>
+              <a:t>"Got one."</a:t>
+            </a:r>
+            <a:endParaRPr lang="en-US" sz="1700" dirty="0"/>
+          </a:p>
+        </p:txBody>
+      </p:sp>
+      <p:sp>
+        <p:nvSpPr>
+          <p:cNvPr id="18" name="Text 15"/>
+          <p:cNvSpPr/>
+          <p:nvPr/>
+        </p:nvSpPr>
+        <p:spPr>
+          <a:xfrm>
+            <a:off x="640080" y="5349240"/>
             <a:ext cx="10972800" cy="457200"/>
           </a:xfrm>
           <a:prstGeom prst="rect">
@@ -13080,7 +13298,7 @@
                 <a:ea typeface="Inter" pitchFamily="34" charset="-122"/>
                 <a:cs typeface="Inter" pitchFamily="34" charset="-120"/>
               </a:rPr>
-              <a:t>Her starters: three patterns she writes every stack, drafted once.</a:t>
+              <a:t>Her essay starters, on screen: three patterns from her essay stacks, drafted once.</a:t>
             </a:r>
             <a:endParaRPr lang="en-US" sz="1000" dirty="0"/>
           </a:p>
@@ -13134,7 +13352,7 @@
         <p:spPr>
           <a:xfrm>
             <a:off x="548640" y="384048"/>
-            <a:ext cx="11091672" cy="777240"/>
+            <a:ext cx="7955280" cy="777240"/>
           </a:xfrm>
           <a:prstGeom prst="rect">
             <a:avLst/>
@@ -13172,8 +13390,8 @@
         </p:nvSpPr>
         <p:spPr>
           <a:xfrm>
-            <a:off x="640080" y="1463040"/>
-            <a:ext cx="10908792" cy="2286000"/>
+            <a:off x="640080" y="1554480"/>
+            <a:ext cx="5394960" cy="3566160"/>
           </a:xfrm>
           <a:prstGeom prst="rect">
             <a:avLst/>
@@ -13193,7 +13411,7 @@
               <a:buChar char="•"/>
             </a:pPr>
             <a:r>
-              <a:rPr lang="en-US" sz="2100" dirty="0">
+              <a:rPr lang="en-US" sz="1600" dirty="0">
                 <a:solidFill>
                   <a:srgbClr val="1B1F24"/>
                 </a:solidFill>
@@ -13203,7 +13421,7 @@
               </a:rPr>
               <a:t>Name your three most common student patterns for this kind of work</a:t>
             </a:r>
-            <a:endParaRPr lang="en-US" sz="2100" dirty="0"/>
+            <a:endParaRPr lang="en-US" sz="1600" dirty="0"/>
           </a:p>
           <a:p>
             <a:pPr marL="342900" indent="-342900">
@@ -13214,7 +13432,7 @@
               <a:buChar char="•"/>
             </a:pPr>
             <a:r>
-              <a:rPr lang="en-US" sz="2100" dirty="0">
+              <a:rPr lang="en-US" sz="1600" dirty="0">
                 <a:solidFill>
                   <a:srgbClr val="1B1F24"/>
                 </a:solidFill>
@@ -13224,7 +13442,7 @@
               </a:rPr>
               <a:t>Run the pattern prompt: strength, pattern, next step, in plain student language</a:t>
             </a:r>
-            <a:endParaRPr lang="en-US" sz="2100" dirty="0"/>
+            <a:endParaRPr lang="en-US" sz="1600" dirty="0"/>
           </a:p>
           <a:p>
             <a:pPr marL="342900" indent="-342900">
@@ -13235,7 +13453,7 @@
               <a:buChar char="•"/>
             </a:pPr>
             <a:r>
-              <a:rPr lang="en-US" sz="2100" dirty="0">
+              <a:rPr lang="en-US" sz="1600" dirty="0">
                 <a:solidFill>
                   <a:srgbClr val="1B1F24"/>
                 </a:solidFill>
@@ -13245,7 +13463,7 @@
               </a:rPr>
               <a:t>Save all three where you grade; paste your best one into the staff doc’s Assessment section</a:t>
             </a:r>
-            <a:endParaRPr lang="en-US" sz="2100" dirty="0"/>
+            <a:endParaRPr lang="en-US" sz="1600" dirty="0"/>
           </a:p>
         </p:txBody>
       </p:sp>
@@ -13257,12 +13475,12 @@
         </p:nvSpPr>
         <p:spPr>
           <a:xfrm>
-            <a:off x="640080" y="3931920"/>
-            <a:ext cx="10972800" cy="1737360"/>
+            <a:off x="6263640" y="1554480"/>
+            <a:ext cx="5394960" cy="3566160"/>
           </a:xfrm>
           <a:prstGeom prst="roundRect">
             <a:avLst>
-              <a:gd name="adj" fmla="val 4737"/>
+              <a:gd name="adj" fmla="val 2308"/>
             </a:avLst>
           </a:prstGeom>
           <a:solidFill>
@@ -13284,24 +13502,66 @@
         </p:nvSpPr>
         <p:spPr>
           <a:xfrm>
-            <a:off x="960120" y="4160520"/>
-            <a:ext cx="10332720" cy="1280160"/>
-          </a:xfrm>
-          <a:prstGeom prst="rect">
-            <a:avLst/>
-          </a:prstGeom>
-          <a:noFill/>
-          <a:ln/>
-        </p:spPr>
-        <p:txBody>
-          <a:bodyPr wrap="square" lIns="0" tIns="0" rIns="0" bIns="0" rtlCol="0" anchor="ctr"/>
-          <a:lstStyle/>
-          <a:p>
-            <a:pPr indent="0" marL="0">
-              <a:buNone/>
-            </a:pPr>
-            <a:r>
-              <a:rPr lang="en-US" sz="2100" b="1" dirty="0">
+            <a:off x="6537960" y="1737360"/>
+            <a:ext cx="4937760" cy="292608"/>
+          </a:xfrm>
+          <a:prstGeom prst="rect">
+            <a:avLst/>
+          </a:prstGeom>
+          <a:noFill/>
+          <a:ln/>
+        </p:spPr>
+        <p:txBody>
+          <a:bodyPr wrap="square" lIns="0" tIns="0" rIns="0" bIns="0" rtlCol="0" anchor="ctr"/>
+          <a:lstStyle/>
+          <a:p>
+            <a:pPr indent="0" marL="0">
+              <a:buNone/>
+            </a:pPr>
+            <a:r>
+              <a:rPr lang="en-US" sz="1250" b="1" spc="150" kern="0" dirty="0">
+                <a:solidFill>
+                  <a:srgbClr val="2A9D8F"/>
+                </a:solidFill>
+                <a:latin typeface="Inter" pitchFamily="34" charset="0"/>
+                <a:ea typeface="Inter" pitchFamily="34" charset="-122"/>
+                <a:cs typeface="Inter" pitchFamily="34" charset="-120"/>
+              </a:rPr>
+              <a:t>MS. RIVERA'S ESSAY · STEP 3 · HER STARTERS</a:t>
+            </a:r>
+            <a:endParaRPr lang="en-US" sz="1250" dirty="0"/>
+          </a:p>
+        </p:txBody>
+      </p:sp>
+      <p:sp>
+        <p:nvSpPr>
+          <p:cNvPr id="17" name="Text 14"/>
+          <p:cNvSpPr/>
+          <p:nvPr/>
+        </p:nvSpPr>
+        <p:spPr>
+          <a:xfrm>
+            <a:off x="6537960" y="2148840"/>
+            <a:ext cx="4892040" cy="2834640"/>
+          </a:xfrm>
+          <a:prstGeom prst="rect">
+            <a:avLst/>
+          </a:prstGeom>
+          <a:noFill/>
+          <a:ln/>
+        </p:spPr>
+        <p:txBody>
+          <a:bodyPr wrap="square" lIns="0" tIns="0" rIns="0" bIns="0" rtlCol="0" anchor="t"/>
+          <a:lstStyle/>
+          <a:p>
+            <a:pPr indent="0" marL="0">
+              <a:lnSpc>
+                <a:spcPct val="120000"/>
+              </a:lnSpc>
+              <a:buNone/>
+            </a:pPr>
+            <a:r>
+              <a:rPr lang="en-US" sz="1550" b="1" dirty="0">
                 <a:solidFill>
                   <a:srgbClr val="13293D"/>
                 </a:solidFill>
@@ -13309,9 +13569,128 @@
                 <a:ea typeface="Inter" pitchFamily="34" charset="-122"/>
                 <a:cs typeface="Inter" pitchFamily="34" charset="-120"/>
               </a:rPr>
+              <a:t>Her pattern: </a:t>
+            </a:r>
+            <a:pPr indent="0" marL="0">
+              <a:lnSpc>
+                <a:spcPct val="120000"/>
+              </a:lnSpc>
+              <a:buNone/>
+            </a:pPr>
+            <a:r>
+              <a:rPr lang="en-US" sz="1550" dirty="0">
+                <a:solidFill>
+                  <a:srgbClr val="1B1F24"/>
+                </a:solidFill>
+                <a:latin typeface="Inter" pitchFamily="34" charset="0"/>
+                <a:ea typeface="Inter" pitchFamily="34" charset="-122"/>
+                <a:cs typeface="Inter" pitchFamily="34" charset="-120"/>
+              </a:rPr>
+              <a:t>claims with no evidence.
+</a:t>
+            </a:r>
+            <a:pPr indent="0" marL="0">
+              <a:lnSpc>
+                <a:spcPct val="120000"/>
+              </a:lnSpc>
+              <a:buNone/>
+            </a:pPr>
+            <a:r>
+              <a:rPr lang="en-US" sz="1550" i="1" dirty="0">
+                <a:solidFill>
+                  <a:srgbClr val="1B1F24"/>
+                </a:solidFill>
+                <a:latin typeface="Inter" pitchFamily="34" charset="0"/>
+                <a:ea typeface="Inter" pitchFamily="34" charset="-122"/>
+                <a:cs typeface="Inter" pitchFamily="34" charset="-120"/>
+              </a:rPr>
+              <a:t>"Your claim is clear and confident. Right now the essay repeats it instead of backing it up. Pick your strongest fact and add one sentence on why it proves your point."
+</a:t>
+            </a:r>
+            <a:pPr indent="0" marL="0">
+              <a:lnSpc>
+                <a:spcPct val="120000"/>
+              </a:lnSpc>
+              <a:buNone/>
+            </a:pPr>
+            <a:r>
+              <a:rPr lang="en-US" sz="1550" i="1" dirty="0">
+                <a:solidFill>
+                  <a:srgbClr val="5B6B7A"/>
+                </a:solidFill>
+                <a:latin typeface="Inter" pitchFamily="34" charset="0"/>
+                <a:ea typeface="Inter" pitchFamily="34" charset="-122"/>
+                <a:cs typeface="Inter" pitchFamily="34" charset="-120"/>
+              </a:rPr>
+              <a:t>Personalized before any student sees it.</a:t>
+            </a:r>
+            <a:endParaRPr lang="en-US" sz="1550" dirty="0"/>
+          </a:p>
+        </p:txBody>
+      </p:sp>
+      <p:sp>
+        <p:nvSpPr>
+          <p:cNvPr id="18" name="Shape 15"/>
+          <p:cNvSpPr/>
+          <p:nvPr/>
+        </p:nvSpPr>
+        <p:spPr>
+          <a:xfrm>
+            <a:off x="640080" y="5257800"/>
+            <a:ext cx="10972800" cy="777240"/>
+          </a:xfrm>
+          <a:prstGeom prst="roundRect">
+            <a:avLst>
+              <a:gd name="adj" fmla="val 10588"/>
+            </a:avLst>
+          </a:prstGeom>
+          <a:solidFill>
+            <a:srgbClr val="EAF5F3"/>
+          </a:solidFill>
+          <a:ln w="12700">
+            <a:solidFill>
+              <a:srgbClr val="EAF5F3"/>
+            </a:solidFill>
+            <a:prstDash val="solid"/>
+          </a:ln>
+        </p:spPr>
+      </p:sp>
+      <p:sp>
+        <p:nvSpPr>
+          <p:cNvPr id="19" name="Text 16"/>
+          <p:cNvSpPr/>
+          <p:nvPr/>
+        </p:nvSpPr>
+        <p:spPr>
+          <a:xfrm>
+            <a:off x="960120" y="5257800"/>
+            <a:ext cx="10332720" cy="777240"/>
+          </a:xfrm>
+          <a:prstGeom prst="rect">
+            <a:avLst/>
+          </a:prstGeom>
+          <a:noFill/>
+          <a:ln/>
+        </p:spPr>
+        <p:txBody>
+          <a:bodyPr wrap="square" lIns="0" tIns="0" rIns="0" bIns="0" rtlCol="0" anchor="ctr"/>
+          <a:lstStyle/>
+          <a:p>
+            <a:pPr indent="0" marL="0">
+              <a:buNone/>
+            </a:pPr>
+            <a:r>
+              <a:rPr lang="en-US" sz="1800" b="1" dirty="0">
+                <a:solidFill>
+                  <a:srgbClr val="13293D"/>
+                </a:solidFill>
+                <a:latin typeface="Inter" pitchFamily="34" charset="0"/>
+                <a:ea typeface="Inter" pitchFamily="34" charset="-122"/>
+                <a:cs typeface="Inter" pitchFamily="34" charset="-120"/>
+              </a:rPr>
               <a:t>Starters, not stamps: in real grading you’ll personalize every one before it reaches a kid.</a:t>
             </a:r>
-            <a:endParaRPr lang="en-US" sz="2100" dirty="0"/>
+            <a:endParaRPr lang="en-US" sz="1800" dirty="0"/>
           </a:p>
         </p:txBody>
       </p:sp>
@@ -13664,7 +14043,7 @@
                 <a:ea typeface="Inter" pitchFamily="34" charset="-122"/>
                 <a:cs typeface="Inter" pitchFamily="34" charset="-120"/>
               </a:rPr>
-              <a:t>Her share-out: the catch story goes first.</a:t>
+              <a:t>Her share-out: the catch from her essay bank goes first.</a:t>
             </a:r>
             <a:endParaRPr lang="en-US" sz="1000" dirty="0"/>
           </a:p>
@@ -14182,7 +14561,7 @@
                 <a:ea typeface="Inter" pitchFamily="34" charset="-122"/>
                 <a:cs typeface="Inter" pitchFamily="34" charset="-120"/>
               </a:rPr>
-              <a:t>Her inventory: rubric, vetted bank, three starters, one caught question.</a:t>
+              <a:t>Her essay inventory: rubric, vetted bank, three starters, one catch.</a:t>
             </a:r>
             <a:endParaRPr lang="en-US" sz="1000" dirty="0"/>
           </a:p>

--- a/kits/kit04/Kit04_PresentationDeck.pptx
+++ b/kits/kit04/Kit04_PresentationDeck.pptx
@@ -2467,7 +2467,7 @@
           <a:p>
             <a:r>
               <a:rPr lang="en-US" dirty="0"/>
-              <a:t>Hattie &amp; Timperley: 0.79 average, roughly double the typical intervention, but impact swings widely with feedback type and delivery. RAND: assessment writing is the least-tapped use among AI-using teachers. That gap is why this hour exists.</a:t>
+              <a:t>Say: define the number before you use it. An effect size is just a way to compare practices that are otherwise hard to compare, on one scale. Across everything schools try, the average is around 0.40. Feedback comes in at 0.79, about double, which puts it among the most powerful things we do. Say the same review is clear the impact swings widely with how feedback is given. RAND: assessment writing is the least-tapped use among AI-using teachers. That gap is why this hour exists.</a:t>
             </a:r>
             <a:endParaRPr lang="en-US" dirty="0"/>
           </a:p>
@@ -4076,7 +4076,7 @@
         <p:spPr>
           <a:xfrm>
             <a:off x="566928" y="128016"/>
-            <a:ext cx="11055096" cy="274320"/>
+            <a:ext cx="7955280" cy="274320"/>
           </a:xfrm>
           <a:prstGeom prst="rect">
             <a:avLst/>
@@ -4610,7 +4610,7 @@
         <p:spPr>
           <a:xfrm>
             <a:off x="566928" y="128016"/>
-            <a:ext cx="11055096" cy="274320"/>
+            <a:ext cx="7955280" cy="274320"/>
           </a:xfrm>
           <a:prstGeom prst="rect">
             <a:avLst/>
@@ -4649,7 +4649,7 @@
         <p:spPr>
           <a:xfrm>
             <a:off x="548640" y="384048"/>
-            <a:ext cx="11091672" cy="777240"/>
+            <a:ext cx="7955280" cy="777240"/>
           </a:xfrm>
           <a:prstGeom prst="rect">
             <a:avLst/>
@@ -5253,7 +5253,7 @@
         <p:spPr>
           <a:xfrm>
             <a:off x="566928" y="128016"/>
-            <a:ext cx="11055096" cy="274320"/>
+            <a:ext cx="7955280" cy="274320"/>
           </a:xfrm>
           <a:prstGeom prst="rect">
             <a:avLst/>
@@ -5292,23 +5292,23 @@
         <p:spPr>
           <a:xfrm>
             <a:off x="548640" y="384048"/>
-            <a:ext cx="11091672" cy="777240"/>
-          </a:xfrm>
-          <a:prstGeom prst="rect">
-            <a:avLst/>
-          </a:prstGeom>
-          <a:noFill/>
-          <a:ln/>
-        </p:spPr>
-        <p:txBody>
-          <a:bodyPr wrap="square" lIns="0" tIns="0" rIns="0" bIns="0" rtlCol="0" anchor="ctr"/>
-          <a:lstStyle/>
-          <a:p>
-            <a:pPr indent="0" marL="0">
-              <a:buNone/>
-            </a:pPr>
-            <a:r>
-              <a:rPr lang="en-US" sz="3200" b="1" dirty="0">
+            <a:ext cx="7955280" cy="777240"/>
+          </a:xfrm>
+          <a:prstGeom prst="rect">
+            <a:avLst/>
+          </a:prstGeom>
+          <a:noFill/>
+          <a:ln/>
+        </p:spPr>
+        <p:txBody>
+          <a:bodyPr wrap="square" lIns="0" tIns="0" rIns="0" bIns="0" rtlCol="0" anchor="ctr"/>
+          <a:lstStyle/>
+          <a:p>
+            <a:pPr indent="0" marL="0">
+              <a:buNone/>
+            </a:pPr>
+            <a:r>
+              <a:rPr lang="en-US" sz="2800" b="1" dirty="0">
                 <a:solidFill>
                   <a:srgbClr val="13293D"/>
                 </a:solidFill>
@@ -5318,7 +5318,7 @@
               </a:rPr>
               <a:t>Good, and not good enough to skip you</a:t>
             </a:r>
-            <a:endParaRPr lang="en-US" sz="3200" dirty="0"/>
+            <a:endParaRPr lang="en-US" sz="2800" dirty="0"/>
           </a:p>
         </p:txBody>
       </p:sp>
@@ -6013,7 +6013,7 @@
         <p:spPr>
           <a:xfrm>
             <a:off x="566928" y="128016"/>
-            <a:ext cx="11055096" cy="274320"/>
+            <a:ext cx="7955280" cy="274320"/>
           </a:xfrm>
           <a:prstGeom prst="rect">
             <a:avLst/>
@@ -6052,7 +6052,7 @@
         <p:spPr>
           <a:xfrm>
             <a:off x="548640" y="384048"/>
-            <a:ext cx="11091672" cy="777240"/>
+            <a:ext cx="7955280" cy="777240"/>
           </a:xfrm>
           <a:prstGeom prst="rect">
             <a:avLst/>
@@ -6695,7 +6695,7 @@
         <p:spPr>
           <a:xfrm>
             <a:off x="566928" y="128016"/>
-            <a:ext cx="11055096" cy="274320"/>
+            <a:ext cx="7955280" cy="274320"/>
           </a:xfrm>
           <a:prstGeom prst="rect">
             <a:avLst/>
@@ -6734,23 +6734,23 @@
         <p:spPr>
           <a:xfrm>
             <a:off x="548640" y="384048"/>
-            <a:ext cx="11091672" cy="777240"/>
-          </a:xfrm>
-          <a:prstGeom prst="rect">
-            <a:avLst/>
-          </a:prstGeom>
-          <a:noFill/>
-          <a:ln/>
-        </p:spPr>
-        <p:txBody>
-          <a:bodyPr wrap="square" lIns="0" tIns="0" rIns="0" bIns="0" rtlCol="0" anchor="ctr"/>
-          <a:lstStyle/>
-          <a:p>
-            <a:pPr indent="0" marL="0">
-              <a:buNone/>
-            </a:pPr>
-            <a:r>
-              <a:rPr lang="en-US" sz="3200" b="1" dirty="0">
+            <a:ext cx="7955280" cy="777240"/>
+          </a:xfrm>
+          <a:prstGeom prst="rect">
+            <a:avLst/>
+          </a:prstGeom>
+          <a:noFill/>
+          <a:ln/>
+        </p:spPr>
+        <p:txBody>
+          <a:bodyPr wrap="square" lIns="0" tIns="0" rIns="0" bIns="0" rtlCol="0" anchor="ctr"/>
+          <a:lstStyle/>
+          <a:p>
+            <a:pPr indent="0" marL="0">
+              <a:buNone/>
+            </a:pPr>
+            <a:r>
+              <a:rPr lang="en-US" sz="2800" b="1" dirty="0">
                 <a:solidFill>
                   <a:srgbClr val="13293D"/>
                 </a:solidFill>
@@ -6760,7 +6760,7 @@
               </a:rPr>
               <a:t>Feedback starters for common patterns</a:t>
             </a:r>
-            <a:endParaRPr lang="en-US" sz="3200" dirty="0"/>
+            <a:endParaRPr lang="en-US" sz="2800" dirty="0"/>
           </a:p>
         </p:txBody>
       </p:sp>
@@ -7258,7 +7258,7 @@
         <p:spPr>
           <a:xfrm>
             <a:off x="566928" y="128016"/>
-            <a:ext cx="11055096" cy="274320"/>
+            <a:ext cx="7955280" cy="274320"/>
           </a:xfrm>
           <a:prstGeom prst="rect">
             <a:avLst/>
@@ -8039,7 +8039,7 @@
         <p:spPr>
           <a:xfrm>
             <a:off x="566928" y="128016"/>
-            <a:ext cx="11055096" cy="274320"/>
+            <a:ext cx="7955280" cy="274320"/>
           </a:xfrm>
           <a:prstGeom prst="rect">
             <a:avLst/>
@@ -8078,7 +8078,7 @@
         <p:spPr>
           <a:xfrm>
             <a:off x="548640" y="384048"/>
-            <a:ext cx="11091672" cy="777240"/>
+            <a:ext cx="7955280" cy="777240"/>
           </a:xfrm>
           <a:prstGeom prst="rect">
             <a:avLst/>
@@ -8721,7 +8721,7 @@
         <p:spPr>
           <a:xfrm>
             <a:off x="566928" y="128016"/>
-            <a:ext cx="11055096" cy="274320"/>
+            <a:ext cx="7955280" cy="274320"/>
           </a:xfrm>
           <a:prstGeom prst="rect">
             <a:avLst/>
@@ -8760,7 +8760,7 @@
         <p:spPr>
           <a:xfrm>
             <a:off x="548640" y="384048"/>
-            <a:ext cx="11091672" cy="777240"/>
+            <a:ext cx="7955280" cy="777240"/>
           </a:xfrm>
           <a:prstGeom prst="rect">
             <a:avLst/>
@@ -9508,7 +9508,7 @@
         <p:spPr>
           <a:xfrm>
             <a:off x="566928" y="128016"/>
-            <a:ext cx="11055096" cy="274320"/>
+            <a:ext cx="7955280" cy="274320"/>
           </a:xfrm>
           <a:prstGeom prst="rect">
             <a:avLst/>
@@ -10289,7 +10289,7 @@
         <p:spPr>
           <a:xfrm>
             <a:off x="566928" y="128016"/>
-            <a:ext cx="11055096" cy="274320"/>
+            <a:ext cx="7955280" cy="274320"/>
           </a:xfrm>
           <a:prstGeom prst="rect">
             <a:avLst/>
@@ -11045,7 +11045,7 @@
         <p:spPr>
           <a:xfrm>
             <a:off x="566928" y="128016"/>
-            <a:ext cx="11055096" cy="274320"/>
+            <a:ext cx="7955280" cy="274320"/>
           </a:xfrm>
           <a:prstGeom prst="rect">
             <a:avLst/>
@@ -11084,7 +11084,7 @@
         <p:spPr>
           <a:xfrm>
             <a:off x="548640" y="384048"/>
-            <a:ext cx="11091672" cy="777240"/>
+            <a:ext cx="7955280" cy="777240"/>
           </a:xfrm>
           <a:prstGeom prst="rect">
             <a:avLst/>
@@ -11795,7 +11795,7 @@
         <p:spPr>
           <a:xfrm>
             <a:off x="566928" y="128016"/>
-            <a:ext cx="11055096" cy="274320"/>
+            <a:ext cx="7955280" cy="274320"/>
           </a:xfrm>
           <a:prstGeom prst="rect">
             <a:avLst/>
@@ -12557,7 +12557,7 @@
         <p:spPr>
           <a:xfrm>
             <a:off x="566928" y="128016"/>
-            <a:ext cx="11055096" cy="274320"/>
+            <a:ext cx="7955280" cy="274320"/>
           </a:xfrm>
           <a:prstGeom prst="rect">
             <a:avLst/>
@@ -13313,7 +13313,7 @@
         <p:spPr>
           <a:xfrm>
             <a:off x="566928" y="128016"/>
-            <a:ext cx="11055096" cy="274320"/>
+            <a:ext cx="7955280" cy="274320"/>
           </a:xfrm>
           <a:prstGeom prst="rect">
             <a:avLst/>
@@ -14058,7 +14058,7 @@
         <p:spPr>
           <a:xfrm>
             <a:off x="566928" y="128016"/>
-            <a:ext cx="11055096" cy="274320"/>
+            <a:ext cx="7955280" cy="274320"/>
           </a:xfrm>
           <a:prstGeom prst="rect">
             <a:avLst/>
@@ -14097,7 +14097,7 @@
         <p:spPr>
           <a:xfrm>
             <a:off x="548640" y="384048"/>
-            <a:ext cx="11091672" cy="777240"/>
+            <a:ext cx="7955280" cy="777240"/>
           </a:xfrm>
           <a:prstGeom prst="rect">
             <a:avLst/>
@@ -14576,7 +14576,7 @@
         <p:spPr>
           <a:xfrm>
             <a:off x="566928" y="128016"/>
-            <a:ext cx="11055096" cy="274320"/>
+            <a:ext cx="7955280" cy="274320"/>
           </a:xfrm>
           <a:prstGeom prst="rect">
             <a:avLst/>
@@ -14615,7 +14615,7 @@
         <p:spPr>
           <a:xfrm>
             <a:off x="548640" y="384048"/>
-            <a:ext cx="11091672" cy="777240"/>
+            <a:ext cx="7955280" cy="777240"/>
           </a:xfrm>
           <a:prstGeom prst="rect">
             <a:avLst/>
@@ -15090,7 +15090,7 @@
         <p:spPr>
           <a:xfrm>
             <a:off x="566928" y="128016"/>
-            <a:ext cx="11055096" cy="274320"/>
+            <a:ext cx="7955280" cy="274320"/>
           </a:xfrm>
           <a:prstGeom prst="rect">
             <a:avLst/>
@@ -15129,23 +15129,23 @@
         <p:spPr>
           <a:xfrm>
             <a:off x="548640" y="384048"/>
-            <a:ext cx="11091672" cy="777240"/>
-          </a:xfrm>
-          <a:prstGeom prst="rect">
-            <a:avLst/>
-          </a:prstGeom>
-          <a:noFill/>
-          <a:ln/>
-        </p:spPr>
-        <p:txBody>
-          <a:bodyPr wrap="square" lIns="0" tIns="0" rIns="0" bIns="0" rtlCol="0" anchor="ctr"/>
-          <a:lstStyle/>
-          <a:p>
-            <a:pPr indent="0" marL="0">
-              <a:buNone/>
-            </a:pPr>
-            <a:r>
-              <a:rPr lang="en-US" sz="3200" b="1" dirty="0">
+            <a:ext cx="7955280" cy="777240"/>
+          </a:xfrm>
+          <a:prstGeom prst="rect">
+            <a:avLst/>
+          </a:prstGeom>
+          <a:noFill/>
+          <a:ln/>
+        </p:spPr>
+        <p:txBody>
+          <a:bodyPr wrap="square" lIns="0" tIns="0" rIns="0" bIns="0" rtlCol="0" anchor="ctr"/>
+          <a:lstStyle/>
+          <a:p>
+            <a:pPr indent="0" marL="0">
+              <a:buNone/>
+            </a:pPr>
+            <a:r>
+              <a:rPr lang="en-US" sz="2800" b="1" dirty="0">
                 <a:solidFill>
                   <a:srgbClr val="13293D"/>
                 </a:solidFill>
@@ -15155,7 +15155,7 @@
               </a:rPr>
               <a:t>The staff doc grows an Assessment section</a:t>
             </a:r>
-            <a:endParaRPr lang="en-US" sz="3200" dirty="0"/>
+            <a:endParaRPr lang="en-US" sz="2800" dirty="0"/>
           </a:p>
         </p:txBody>
       </p:sp>
@@ -15674,7 +15674,7 @@
         <p:spPr>
           <a:xfrm>
             <a:off x="566928" y="128016"/>
-            <a:ext cx="11055096" cy="274320"/>
+            <a:ext cx="7955280" cy="274320"/>
           </a:xfrm>
           <a:prstGeom prst="rect">
             <a:avLst/>
@@ -16224,7 +16224,7 @@
         <p:spPr>
           <a:xfrm>
             <a:off x="566928" y="128016"/>
-            <a:ext cx="11055096" cy="274320"/>
+            <a:ext cx="7955280" cy="274320"/>
           </a:xfrm>
           <a:prstGeom prst="rect">
             <a:avLst/>
@@ -16263,7 +16263,7 @@
         <p:spPr>
           <a:xfrm>
             <a:off x="548640" y="384048"/>
-            <a:ext cx="11091672" cy="777240"/>
+            <a:ext cx="7955280" cy="777240"/>
           </a:xfrm>
           <a:prstGeom prst="rect">
             <a:avLst/>
@@ -17265,7 +17265,7 @@
         <p:spPr>
           <a:xfrm>
             <a:off x="566928" y="128016"/>
-            <a:ext cx="11055096" cy="274320"/>
+            <a:ext cx="7955280" cy="274320"/>
           </a:xfrm>
           <a:prstGeom prst="rect">
             <a:avLst/>
@@ -17304,23 +17304,23 @@
         <p:spPr>
           <a:xfrm>
             <a:off x="548640" y="384048"/>
-            <a:ext cx="11091672" cy="777240"/>
-          </a:xfrm>
-          <a:prstGeom prst="rect">
-            <a:avLst/>
-          </a:prstGeom>
-          <a:noFill/>
-          <a:ln/>
-        </p:spPr>
-        <p:txBody>
-          <a:bodyPr wrap="square" lIns="0" tIns="0" rIns="0" bIns="0" rtlCol="0" anchor="ctr"/>
-          <a:lstStyle/>
-          <a:p>
-            <a:pPr indent="0" marL="0">
-              <a:buNone/>
-            </a:pPr>
-            <a:r>
-              <a:rPr lang="en-US" sz="3200" b="1" dirty="0">
+            <a:ext cx="7955280" cy="777240"/>
+          </a:xfrm>
+          <a:prstGeom prst="rect">
+            <a:avLst/>
+          </a:prstGeom>
+          <a:noFill/>
+          <a:ln/>
+        </p:spPr>
+        <p:txBody>
+          <a:bodyPr wrap="square" lIns="0" tIns="0" rIns="0" bIns="0" rtlCol="0" anchor="ctr"/>
+          <a:lstStyle/>
+          <a:p>
+            <a:pPr indent="0" marL="0">
+              <a:buNone/>
+            </a:pPr>
+            <a:r>
+              <a:rPr lang="en-US" sz="2800" b="1" dirty="0">
                 <a:solidFill>
                   <a:srgbClr val="13293D"/>
                 </a:solidFill>
@@ -17330,7 +17330,7 @@
               </a:rPr>
               <a:t>Your first 48 hours: three small things</a:t>
             </a:r>
-            <a:endParaRPr lang="en-US" sz="3200" dirty="0"/>
+            <a:endParaRPr lang="en-US" sz="2800" dirty="0"/>
           </a:p>
         </p:txBody>
       </p:sp>
@@ -18130,7 +18130,7 @@
         <p:spPr>
           <a:xfrm>
             <a:off x="566928" y="128016"/>
-            <a:ext cx="11055096" cy="274320"/>
+            <a:ext cx="7955280" cy="274320"/>
           </a:xfrm>
           <a:prstGeom prst="rect">
             <a:avLst/>
@@ -18169,7 +18169,7 @@
         <p:spPr>
           <a:xfrm>
             <a:off x="548640" y="384048"/>
-            <a:ext cx="11091672" cy="777240"/>
+            <a:ext cx="7955280" cy="777240"/>
           </a:xfrm>
           <a:prstGeom prst="rect">
             <a:avLst/>
@@ -18687,7 +18687,7 @@
         <p:spPr>
           <a:xfrm>
             <a:off x="566928" y="128016"/>
-            <a:ext cx="11055096" cy="274320"/>
+            <a:ext cx="7955280" cy="274320"/>
           </a:xfrm>
           <a:prstGeom prst="rect">
             <a:avLst/>
@@ -18869,8 +18869,8 @@
         </p:nvSpPr>
         <p:spPr>
           <a:xfrm>
-            <a:off x="914400" y="3108960"/>
-            <a:ext cx="4709160" cy="1737360"/>
+            <a:off x="914400" y="3063240"/>
+            <a:ext cx="4709160" cy="685800"/>
           </a:xfrm>
           <a:prstGeom prst="rect">
             <a:avLst/>
@@ -18894,7 +18894,7 @@
                 <a:ea typeface="Inter" pitchFamily="34" charset="-122"/>
                 <a:cs typeface="Inter" pitchFamily="34" charset="-120"/>
               </a:rPr>
-              <a:t>Feedback’s average “effect size” on student achievement: roughly double the impact of the typical educational intervention. (Hattie &amp; Timperley, 2007)</a:t>
+              <a:t>Feedback’s average effect size on student achievement. (Hattie &amp; Timperley, 2007)</a:t>
             </a:r>
             <a:endParaRPr lang="en-US" sz="1600" dirty="0"/>
           </a:p>
@@ -18902,7 +18902,46 @@
       </p:sp>
       <p:sp>
         <p:nvSpPr>
-          <p:cNvPr id="18" name="Shape 15"/>
+          <p:cNvPr id="18" name="Text 15"/>
+          <p:cNvSpPr/>
+          <p:nvPr/>
+        </p:nvSpPr>
+        <p:spPr>
+          <a:xfrm>
+            <a:off x="914400" y="3794760"/>
+            <a:ext cx="4709160" cy="1051560"/>
+          </a:xfrm>
+          <a:prstGeom prst="rect">
+            <a:avLst/>
+          </a:prstGeom>
+          <a:noFill/>
+          <a:ln/>
+        </p:spPr>
+        <p:txBody>
+          <a:bodyPr wrap="square" lIns="0" tIns="0" rIns="0" bIns="0" rtlCol="0" anchor="ctr"/>
+          <a:lstStyle/>
+          <a:p>
+            <a:pPr algn="ctr" indent="0" marL="0">
+              <a:buNone/>
+            </a:pPr>
+            <a:r>
+              <a:rPr lang="en-US" sz="1300" dirty="0">
+                <a:solidFill>
+                  <a:srgbClr val="5B6B7A"/>
+                </a:solidFill>
+                <a:latin typeface="Inter" pitchFamily="34" charset="0"/>
+                <a:ea typeface="Inter" pitchFamily="34" charset="-122"/>
+                <a:cs typeface="Inter" pitchFamily="34" charset="-120"/>
+              </a:rPr>
+              <a:t>“Effect size” is how researchers put very different practices on one scale, so they can be compared. Most things schools try land near 0.40. Feedback runs about double that.</a:t>
+            </a:r>
+            <a:endParaRPr lang="en-US" sz="1300" dirty="0"/>
+          </a:p>
+        </p:txBody>
+      </p:sp>
+      <p:sp>
+        <p:nvSpPr>
+          <p:cNvPr id="19" name="Shape 16"/>
           <p:cNvSpPr/>
           <p:nvPr/>
         </p:nvSpPr>
@@ -18929,7 +18968,7 @@
       </p:sp>
       <p:sp>
         <p:nvSpPr>
-          <p:cNvPr id="19" name="Text 16"/>
+          <p:cNvPr id="20" name="Text 17"/>
           <p:cNvSpPr/>
           <p:nvPr/>
         </p:nvSpPr>
@@ -18968,7 +19007,7 @@
       </p:sp>
       <p:sp>
         <p:nvSpPr>
-          <p:cNvPr id="20" name="Text 17"/>
+          <p:cNvPr id="21" name="Text 18"/>
           <p:cNvSpPr/>
           <p:nvPr/>
         </p:nvSpPr>
@@ -19007,7 +19046,7 @@
       </p:sp>
       <p:sp>
         <p:nvSpPr>
-          <p:cNvPr id="21" name="Text 18"/>
+          <p:cNvPr id="22" name="Text 19"/>
           <p:cNvSpPr/>
           <p:nvPr/>
         </p:nvSpPr>
@@ -19046,7 +19085,7 @@
       </p:sp>
       <p:sp>
         <p:nvSpPr>
-          <p:cNvPr id="22" name="Text 19"/>
+          <p:cNvPr id="23" name="Text 20"/>
           <p:cNvSpPr/>
           <p:nvPr/>
         </p:nvSpPr>
@@ -19758,7 +19797,7 @@
         <p:spPr>
           <a:xfrm>
             <a:off x="566928" y="128016"/>
-            <a:ext cx="11055096" cy="274320"/>
+            <a:ext cx="7955280" cy="274320"/>
           </a:xfrm>
           <a:prstGeom prst="rect">
             <a:avLst/>
@@ -19797,7 +19836,7 @@
         <p:spPr>
           <a:xfrm>
             <a:off x="548640" y="384048"/>
-            <a:ext cx="11091672" cy="777240"/>
+            <a:ext cx="7955280" cy="777240"/>
           </a:xfrm>
           <a:prstGeom prst="rect">
             <a:avLst/>
@@ -20686,7 +20725,7 @@
         <p:spPr>
           <a:xfrm>
             <a:off x="566928" y="128016"/>
-            <a:ext cx="11055096" cy="274320"/>
+            <a:ext cx="7955280" cy="274320"/>
           </a:xfrm>
           <a:prstGeom prst="rect">
             <a:avLst/>
@@ -20725,7 +20764,7 @@
         <p:spPr>
           <a:xfrm>
             <a:off x="548640" y="384048"/>
-            <a:ext cx="11091672" cy="777240"/>
+            <a:ext cx="7955280" cy="777240"/>
           </a:xfrm>
           <a:prstGeom prst="rect">
             <a:avLst/>
@@ -21288,7 +21327,7 @@
         <p:spPr>
           <a:xfrm>
             <a:off x="566928" y="128016"/>
-            <a:ext cx="11055096" cy="274320"/>
+            <a:ext cx="7955280" cy="274320"/>
           </a:xfrm>
           <a:prstGeom prst="rect">
             <a:avLst/>
@@ -21327,7 +21366,7 @@
         <p:spPr>
           <a:xfrm>
             <a:off x="548640" y="384048"/>
-            <a:ext cx="11091672" cy="777240"/>
+            <a:ext cx="7955280" cy="777240"/>
           </a:xfrm>
           <a:prstGeom prst="rect">
             <a:avLst/>
@@ -21872,7 +21911,7 @@
         <p:spPr>
           <a:xfrm>
             <a:off x="566928" y="128016"/>
-            <a:ext cx="11055096" cy="274320"/>
+            <a:ext cx="7955280" cy="274320"/>
           </a:xfrm>
           <a:prstGeom prst="rect">
             <a:avLst/>
@@ -21911,23 +21950,23 @@
         <p:spPr>
           <a:xfrm>
             <a:off x="548640" y="384048"/>
-            <a:ext cx="11091672" cy="777240"/>
-          </a:xfrm>
-          <a:prstGeom prst="rect">
-            <a:avLst/>
-          </a:prstGeom>
-          <a:noFill/>
-          <a:ln/>
-        </p:spPr>
-        <p:txBody>
-          <a:bodyPr wrap="square" lIns="0" tIns="0" rIns="0" bIns="0" rtlCol="0" anchor="ctr"/>
-          <a:lstStyle/>
-          <a:p>
-            <a:pPr indent="0" marL="0">
-              <a:buNone/>
-            </a:pPr>
-            <a:r>
-              <a:rPr lang="en-US" sz="3200" b="1" dirty="0">
+            <a:ext cx="7955280" cy="777240"/>
+          </a:xfrm>
+          <a:prstGeom prst="rect">
+            <a:avLst/>
+          </a:prstGeom>
+          <a:noFill/>
+          <a:ln/>
+        </p:spPr>
+        <p:txBody>
+          <a:bodyPr wrap="square" lIns="0" tIns="0" rIns="0" bIns="0" rtlCol="0" anchor="ctr"/>
+          <a:lstStyle/>
+          <a:p>
+            <a:pPr indent="0" marL="0">
+              <a:buNone/>
+            </a:pPr>
+            <a:r>
+              <a:rPr lang="en-US" sz="2800" b="1" dirty="0">
                 <a:solidFill>
                   <a:srgbClr val="13293D"/>
                 </a:solidFill>
@@ -21937,7 +21976,7 @@
               </a:rPr>
               <a:t>Question quality beats question quantity</a:t>
             </a:r>
-            <a:endParaRPr lang="en-US" sz="3200" dirty="0"/>
+            <a:endParaRPr lang="en-US" sz="2800" dirty="0"/>
           </a:p>
         </p:txBody>
       </p:sp>
@@ -22456,7 +22495,7 @@
         <p:spPr>
           <a:xfrm>
             <a:off x="566928" y="128016"/>
-            <a:ext cx="11055096" cy="274320"/>
+            <a:ext cx="7955280" cy="274320"/>
           </a:xfrm>
           <a:prstGeom prst="rect">
             <a:avLst/>
@@ -22495,7 +22534,7 @@
         <p:spPr>
           <a:xfrm>
             <a:off x="548640" y="384048"/>
-            <a:ext cx="11091672" cy="777240"/>
+            <a:ext cx="7955280" cy="777240"/>
           </a:xfrm>
           <a:prstGeom prst="rect">
             <a:avLst/>

--- a/kits/kit04/Kit04_PresentationDeck.pptx
+++ b/kits/kit04/Kit04_PresentationDeck.pptx
@@ -6220,17 +6220,17 @@
         </p:nvSpPr>
         <p:spPr>
           <a:xfrm>
-            <a:off x="548640" y="384048"/>
-            <a:ext cx="7955280" cy="777240"/>
-          </a:xfrm>
-          <a:prstGeom prst="rect">
-            <a:avLst/>
-          </a:prstGeom>
-          <a:noFill/>
-          <a:ln/>
-        </p:spPr>
-        <p:txBody>
-          <a:bodyPr wrap="square" lIns="0" tIns="0" rIns="0" bIns="0" rtlCol="0" anchor="ctr"/>
+            <a:off x="548640" y="457200"/>
+            <a:ext cx="7955280" cy="914400"/>
+          </a:xfrm>
+          <a:prstGeom prst="rect">
+            <a:avLst/>
+          </a:prstGeom>
+          <a:noFill/>
+          <a:ln/>
+        </p:spPr>
+        <p:txBody>
+          <a:bodyPr wrap="square" lIns="0" tIns="0" rIns="0" bIns="0" rtlCol="0" anchor="t"/>
           <a:lstStyle/>
           <a:p>
             <a:pPr indent="0" marL="0">
@@ -6980,24 +6980,24 @@
         </p:nvSpPr>
         <p:spPr>
           <a:xfrm>
-            <a:off x="548640" y="384048"/>
-            <a:ext cx="7955280" cy="777240"/>
-          </a:xfrm>
-          <a:prstGeom prst="rect">
-            <a:avLst/>
-          </a:prstGeom>
-          <a:noFill/>
-          <a:ln/>
-        </p:spPr>
-        <p:txBody>
-          <a:bodyPr wrap="square" lIns="0" tIns="0" rIns="0" bIns="0" rtlCol="0" anchor="ctr"/>
-          <a:lstStyle/>
-          <a:p>
-            <a:pPr indent="0" marL="0">
-              <a:buNone/>
-            </a:pPr>
-            <a:r>
-              <a:rPr lang="en-US" sz="3200" b="1" dirty="0">
+            <a:off x="548640" y="457200"/>
+            <a:ext cx="7955280" cy="914400"/>
+          </a:xfrm>
+          <a:prstGeom prst="rect">
+            <a:avLst/>
+          </a:prstGeom>
+          <a:noFill/>
+          <a:ln/>
+        </p:spPr>
+        <p:txBody>
+          <a:bodyPr wrap="square" lIns="0" tIns="0" rIns="0" bIns="0" rtlCol="0" anchor="t"/>
+          <a:lstStyle/>
+          <a:p>
+            <a:pPr indent="0" marL="0">
+              <a:buNone/>
+            </a:pPr>
+            <a:r>
+              <a:rPr lang="en-US" sz="2800" b="1" dirty="0">
                 <a:solidFill>
                   <a:srgbClr val="13293D"/>
                 </a:solidFill>
@@ -7007,7 +7007,7 @@
               </a:rPr>
               <a:t>The honest evidence on AI feedback</a:t>
             </a:r>
-            <a:endParaRPr lang="en-US" sz="3200" dirty="0"/>
+            <a:endParaRPr lang="en-US" sz="2800" dirty="0"/>
           </a:p>
         </p:txBody>
       </p:sp>
@@ -9327,24 +9327,24 @@
         </p:nvSpPr>
         <p:spPr>
           <a:xfrm>
-            <a:off x="548640" y="384048"/>
-            <a:ext cx="7955280" cy="777240"/>
-          </a:xfrm>
-          <a:prstGeom prst="rect">
-            <a:avLst/>
-          </a:prstGeom>
-          <a:noFill/>
-          <a:ln/>
-        </p:spPr>
-        <p:txBody>
-          <a:bodyPr wrap="square" lIns="0" tIns="0" rIns="0" bIns="0" rtlCol="0" anchor="ctr"/>
-          <a:lstStyle/>
-          <a:p>
-            <a:pPr indent="0" marL="0">
-              <a:buNone/>
-            </a:pPr>
-            <a:r>
-              <a:rPr lang="en-US" sz="3200" b="1" dirty="0">
+            <a:off x="548640" y="457200"/>
+            <a:ext cx="7955280" cy="914400"/>
+          </a:xfrm>
+          <a:prstGeom prst="rect">
+            <a:avLst/>
+          </a:prstGeom>
+          <a:noFill/>
+          <a:ln/>
+        </p:spPr>
+        <p:txBody>
+          <a:bodyPr wrap="square" lIns="0" tIns="0" rIns="0" bIns="0" rtlCol="0" anchor="t"/>
+          <a:lstStyle/>
+          <a:p>
+            <a:pPr indent="0" marL="0">
+              <a:buNone/>
+            </a:pPr>
+            <a:r>
+              <a:rPr lang="en-US" sz="2800" b="1" dirty="0">
                 <a:solidFill>
                   <a:srgbClr val="13293D"/>
                 </a:solidFill>
@@ -9354,7 +9354,7 @@
               </a:rPr>
               <a:t>Can I ever paste student work in?</a:t>
             </a:r>
-            <a:endParaRPr lang="en-US" sz="3200" dirty="0"/>
+            <a:endParaRPr lang="en-US" sz="2800" dirty="0"/>
           </a:p>
         </p:txBody>
       </p:sp>
@@ -16080,24 +16080,24 @@
         </p:nvSpPr>
         <p:spPr>
           <a:xfrm>
-            <a:off x="548640" y="384048"/>
-            <a:ext cx="7955280" cy="777240"/>
-          </a:xfrm>
-          <a:prstGeom prst="rect">
-            <a:avLst/>
-          </a:prstGeom>
-          <a:noFill/>
-          <a:ln/>
-        </p:spPr>
-        <p:txBody>
-          <a:bodyPr wrap="square" lIns="0" tIns="0" rIns="0" bIns="0" rtlCol="0" anchor="ctr"/>
-          <a:lstStyle/>
-          <a:p>
-            <a:pPr indent="0" marL="0">
-              <a:buNone/>
-            </a:pPr>
-            <a:r>
-              <a:rPr lang="en-US" sz="3200" b="1" dirty="0">
+            <a:off x="548640" y="457200"/>
+            <a:ext cx="7955280" cy="914400"/>
+          </a:xfrm>
+          <a:prstGeom prst="rect">
+            <a:avLst/>
+          </a:prstGeom>
+          <a:noFill/>
+          <a:ln/>
+        </p:spPr>
+        <p:txBody>
+          <a:bodyPr wrap="square" lIns="0" tIns="0" rIns="0" bIns="0" rtlCol="0" anchor="t"/>
+          <a:lstStyle/>
+          <a:p>
+            <a:pPr indent="0" marL="0">
+              <a:buNone/>
+            </a:pPr>
+            <a:r>
+              <a:rPr lang="en-US" sz="2800" b="1" dirty="0">
                 <a:solidFill>
                   <a:srgbClr val="13293D"/>
                 </a:solidFill>
@@ -16107,7 +16107,7 @@
               </a:rPr>
               <a:t>Her question 4, doing real work</a:t>
             </a:r>
-            <a:endParaRPr lang="en-US" sz="3200" dirty="0"/>
+            <a:endParaRPr lang="en-US" sz="2800" dirty="0"/>
           </a:p>
         </p:txBody>
       </p:sp>
@@ -16978,17 +16978,17 @@
         </p:nvSpPr>
         <p:spPr>
           <a:xfrm>
-            <a:off x="548640" y="384048"/>
-            <a:ext cx="7955280" cy="777240"/>
-          </a:xfrm>
-          <a:prstGeom prst="rect">
-            <a:avLst/>
-          </a:prstGeom>
-          <a:noFill/>
-          <a:ln/>
-        </p:spPr>
-        <p:txBody>
-          <a:bodyPr wrap="square" lIns="0" tIns="0" rIns="0" bIns="0" rtlCol="0" anchor="ctr"/>
+            <a:off x="548640" y="457200"/>
+            <a:ext cx="7955280" cy="914400"/>
+          </a:xfrm>
+          <a:prstGeom prst="rect">
+            <a:avLst/>
+          </a:prstGeom>
+          <a:noFill/>
+          <a:ln/>
+        </p:spPr>
+        <p:txBody>
+          <a:bodyPr wrap="square" lIns="0" tIns="0" rIns="0" bIns="0" rtlCol="0" anchor="t"/>
           <a:lstStyle/>
           <a:p>
             <a:pPr indent="0" marL="0">
@@ -17716,24 +17716,24 @@
         </p:nvSpPr>
         <p:spPr>
           <a:xfrm>
-            <a:off x="548640" y="384048"/>
-            <a:ext cx="7955280" cy="777240"/>
-          </a:xfrm>
-          <a:prstGeom prst="rect">
-            <a:avLst/>
-          </a:prstGeom>
-          <a:noFill/>
-          <a:ln/>
-        </p:spPr>
-        <p:txBody>
-          <a:bodyPr wrap="square" lIns="0" tIns="0" rIns="0" bIns="0" rtlCol="0" anchor="ctr"/>
-          <a:lstStyle/>
-          <a:p>
-            <a:pPr indent="0" marL="0">
-              <a:buNone/>
-            </a:pPr>
-            <a:r>
-              <a:rPr lang="en-US" sz="3200" b="1" dirty="0">
+            <a:off x="548640" y="457200"/>
+            <a:ext cx="7955280" cy="914400"/>
+          </a:xfrm>
+          <a:prstGeom prst="rect">
+            <a:avLst/>
+          </a:prstGeom>
+          <a:noFill/>
+          <a:ln/>
+        </p:spPr>
+        <p:txBody>
+          <a:bodyPr wrap="square" lIns="0" tIns="0" rIns="0" bIns="0" rtlCol="0" anchor="t"/>
+          <a:lstStyle/>
+          <a:p>
+            <a:pPr indent="0" marL="0">
+              <a:buNone/>
+            </a:pPr>
+            <a:r>
+              <a:rPr lang="en-US" sz="2800" b="1" dirty="0">
                 <a:solidFill>
                   <a:srgbClr val="13293D"/>
                 </a:solidFill>
@@ -17743,7 +17743,7 @@
               </a:rPr>
               <a:t>Three reusable feedback starters</a:t>
             </a:r>
-            <a:endParaRPr lang="en-US" sz="3200" dirty="0"/>
+            <a:endParaRPr lang="en-US" sz="2800" dirty="0"/>
           </a:p>
         </p:txBody>
       </p:sp>
@@ -18348,24 +18348,24 @@
         </p:nvSpPr>
         <p:spPr>
           <a:xfrm>
-            <a:off x="548640" y="384048"/>
-            <a:ext cx="7955280" cy="777240"/>
-          </a:xfrm>
-          <a:prstGeom prst="rect">
-            <a:avLst/>
-          </a:prstGeom>
-          <a:noFill/>
-          <a:ln/>
-        </p:spPr>
-        <p:txBody>
-          <a:bodyPr wrap="square" lIns="0" tIns="0" rIns="0" bIns="0" rtlCol="0" anchor="ctr"/>
-          <a:lstStyle/>
-          <a:p>
-            <a:pPr indent="0" marL="0">
-              <a:buNone/>
-            </a:pPr>
-            <a:r>
-              <a:rPr lang="en-US" sz="3200" b="1" dirty="0">
+            <a:off x="548640" y="457200"/>
+            <a:ext cx="7955280" cy="914400"/>
+          </a:xfrm>
+          <a:prstGeom prst="rect">
+            <a:avLst/>
+          </a:prstGeom>
+          <a:noFill/>
+          <a:ln/>
+        </p:spPr>
+        <p:txBody>
+          <a:bodyPr wrap="square" lIns="0" tIns="0" rIns="0" bIns="0" rtlCol="0" anchor="t"/>
+          <a:lstStyle/>
+          <a:p>
+            <a:pPr indent="0" marL="0">
+              <a:buNone/>
+            </a:pPr>
+            <a:r>
+              <a:rPr lang="en-US" sz="2800" b="1" dirty="0">
                 <a:solidFill>
                   <a:srgbClr val="13293D"/>
                 </a:solidFill>
@@ -18375,7 +18375,7 @@
               </a:rPr>
               <a:t>Her three starters, ready to use</a:t>
             </a:r>
-            <a:endParaRPr lang="en-US" sz="3200" dirty="0"/>
+            <a:endParaRPr lang="en-US" sz="2800" dirty="0"/>
           </a:p>
         </p:txBody>
       </p:sp>
@@ -20584,17 +20584,17 @@
         </p:nvSpPr>
         <p:spPr>
           <a:xfrm>
-            <a:off x="548640" y="384048"/>
-            <a:ext cx="7955280" cy="777240"/>
-          </a:xfrm>
-          <a:prstGeom prst="rect">
-            <a:avLst/>
-          </a:prstGeom>
-          <a:noFill/>
-          <a:ln/>
-        </p:spPr>
-        <p:txBody>
-          <a:bodyPr wrap="square" lIns="0" tIns="0" rIns="0" bIns="0" rtlCol="0" anchor="ctr"/>
+            <a:off x="548640" y="457200"/>
+            <a:ext cx="7955280" cy="914400"/>
+          </a:xfrm>
+          <a:prstGeom prst="rect">
+            <a:avLst/>
+          </a:prstGeom>
+          <a:noFill/>
+          <a:ln/>
+        </p:spPr>
+        <p:txBody>
+          <a:bodyPr wrap="square" lIns="0" tIns="0" rIns="0" bIns="0" rtlCol="0" anchor="t"/>
           <a:lstStyle/>
           <a:p>
             <a:pPr indent="0" marL="0">
@@ -21897,17 +21897,17 @@
         </p:nvSpPr>
         <p:spPr>
           <a:xfrm>
-            <a:off x="548640" y="384048"/>
-            <a:ext cx="7955280" cy="777240"/>
-          </a:xfrm>
-          <a:prstGeom prst="rect">
-            <a:avLst/>
-          </a:prstGeom>
-          <a:noFill/>
-          <a:ln/>
-        </p:spPr>
-        <p:txBody>
-          <a:bodyPr wrap="square" lIns="0" tIns="0" rIns="0" bIns="0" rtlCol="0" anchor="ctr"/>
+            <a:off x="548640" y="457200"/>
+            <a:ext cx="7955280" cy="914400"/>
+          </a:xfrm>
+          <a:prstGeom prst="rect">
+            <a:avLst/>
+          </a:prstGeom>
+          <a:noFill/>
+          <a:ln/>
+        </p:spPr>
+        <p:txBody>
+          <a:bodyPr wrap="square" lIns="0" tIns="0" rIns="0" bIns="0" rtlCol="0" anchor="t"/>
           <a:lstStyle/>
           <a:p>
             <a:pPr indent="0" marL="0">
@@ -24072,17 +24072,17 @@
         </p:nvSpPr>
         <p:spPr>
           <a:xfrm>
-            <a:off x="548640" y="384048"/>
-            <a:ext cx="7955280" cy="777240"/>
-          </a:xfrm>
-          <a:prstGeom prst="rect">
-            <a:avLst/>
-          </a:prstGeom>
-          <a:noFill/>
-          <a:ln/>
-        </p:spPr>
-        <p:txBody>
-          <a:bodyPr wrap="square" lIns="0" tIns="0" rIns="0" bIns="0" rtlCol="0" anchor="ctr"/>
+            <a:off x="548640" y="457200"/>
+            <a:ext cx="7955280" cy="914400"/>
+          </a:xfrm>
+          <a:prstGeom prst="rect">
+            <a:avLst/>
+          </a:prstGeom>
+          <a:noFill/>
+          <a:ln/>
+        </p:spPr>
+        <p:txBody>
+          <a:bodyPr wrap="square" lIns="0" tIns="0" rIns="0" bIns="0" rtlCol="0" anchor="t"/>
           <a:lstStyle/>
           <a:p>
             <a:pPr indent="0" marL="0">
@@ -27919,17 +27919,17 @@
         </p:nvSpPr>
         <p:spPr>
           <a:xfrm>
-            <a:off x="548640" y="384048"/>
-            <a:ext cx="7955280" cy="777240"/>
-          </a:xfrm>
-          <a:prstGeom prst="rect">
-            <a:avLst/>
-          </a:prstGeom>
-          <a:noFill/>
-          <a:ln/>
-        </p:spPr>
-        <p:txBody>
-          <a:bodyPr wrap="square" lIns="0" tIns="0" rIns="0" bIns="0" rtlCol="0" anchor="ctr"/>
+            <a:off x="548640" y="457200"/>
+            <a:ext cx="7955280" cy="914400"/>
+          </a:xfrm>
+          <a:prstGeom prst="rect">
+            <a:avLst/>
+          </a:prstGeom>
+          <a:noFill/>
+          <a:ln/>
+        </p:spPr>
+        <p:txBody>
+          <a:bodyPr wrap="square" lIns="0" tIns="0" rIns="0" bIns="0" rtlCol="0" anchor="t"/>
           <a:lstStyle/>
           <a:p>
             <a:pPr indent="0" marL="0">

--- a/kits/kit04/Kit04_PresentationDeck.pptx
+++ b/kits/kit04/Kit04_PresentationDeck.pptx
@@ -2473,7 +2473,7 @@
           <a:p>
             <a:r>
               <a:rPr lang="en-US" dirty="0"/>
-              <a:t>Say: define the number before you use it. An effect size is just a way to compare practices that are otherwise hard to compare, on one scale. Across everything schools try, the average is around 0.40. Feedback comes in at 0.79, about double, which puts it among the most powerful things we do. Say the same review is clear the impact swings widely with how feedback is given. RAND: assessment writing is the least-tapped use among AI-using teachers. That gap is why this hour exists.</a:t>
+              <a:t>Say: define the number before you use it. An effect size is just a way to compare practices that are otherwise hard to compare, on one scale. Across the influences researchers have measured the average is about 0.40, and feedback sits at 0.79, which puts it among the most powerful things we do. Say the same review is clear the impact swings widely with how feedback is given. On the RAND side, be precise: about one in five teachers used AI for instructional planning at all that year, and among those who did, roughly a quarter used it to help assess students. Assessment was in fact their second most common use after generating lesson materials. So this is not an untouched frontier; it is real work that most teachers have not yet brought AI to, and the point of the hour is doing it well rather than doing it first.</a:t>
             </a:r>
             <a:endParaRPr lang="en-US" dirty="0"/>
           </a:p>
@@ -20570,7 +20570,7 @@
                 <a:ea typeface="Inter" pitchFamily="34" charset="-122"/>
                 <a:cs typeface="Inter" pitchFamily="34" charset="-120"/>
               </a:rPr>
-              <a:t>HIGH LEVERAGE, BARELY TOUCHED</a:t>
+              <a:t>HIGH LEVERAGE, AND STILL NEW TO MOST DESKS</a:t>
             </a:r>
             <a:endParaRPr lang="en-US" sz="1200" dirty="0"/>
           </a:p>
@@ -20609,7 +20609,7 @@
                 <a:ea typeface="Inter" pitchFamily="34" charset="-122"/>
                 <a:cs typeface="Inter" pitchFamily="34" charset="-120"/>
               </a:rPr>
-              <a:t>The most powerful lever, the least-tapped use</a:t>
+              <a:t>A powerful lever, newly delegable</a:t>
             </a:r>
             <a:endParaRPr lang="en-US" sz="2800" dirty="0"/>
           </a:p>
@@ -20792,7 +20792,7 @@
                 <a:ea typeface="Inter" pitchFamily="34" charset="-122"/>
                 <a:cs typeface="Inter" pitchFamily="34" charset="-120"/>
               </a:rPr>
-              <a:t>“Effect size” is how researchers put very different practices on one scale, so they can be compared. Most things schools try land near 0.40. Feedback runs about double that.</a:t>
+              <a:t>“Effect size” is how researchers put very different practices on one scale, so they can be compared. Across the influences researchers have measured, the average is about 0.40. Feedback sits at roughly double that.</a:t>
             </a:r>
             <a:endParaRPr lang="en-US" sz="1300" dirty="0"/>
           </a:p>
@@ -20850,7 +20850,7 @@
               <a:buNone/>
             </a:pPr>
             <a:r>
-              <a:rPr lang="en-US" sz="1300" b="1" spc="200" kern="0" dirty="0">
+              <a:rPr lang="en-US" sz="1200" b="1" spc="140" kern="0" dirty="0">
                 <a:solidFill>
                   <a:srgbClr val="5B6B7A"/>
                 </a:solidFill>
@@ -20858,9 +20858,9 @@
                 <a:ea typeface="Inter" pitchFamily="34" charset="-122"/>
                 <a:cs typeface="Inter" pitchFamily="34" charset="-120"/>
               </a:rPr>
-              <a:t>HOW MANY TEACHERS TAP IT WITH AI</a:t>
-            </a:r>
-            <a:endParaRPr lang="en-US" sz="1300" dirty="0"/>
+              <a:t>HOW MANY BROUGHT AI TO THE PLANNING WORK</a:t>
+            </a:r>
+            <a:endParaRPr lang="en-US" sz="1200" dirty="0"/>
           </a:p>
         </p:txBody>
       </p:sp>
@@ -20897,7 +20897,7 @@
                 <a:ea typeface="Inter" pitchFamily="34" charset="-122"/>
                 <a:cs typeface="Inter" pitchFamily="34" charset="-120"/>
               </a:rPr>
-              <a:t>≤15%</a:t>
+              <a:t>1 in 5</a:t>
             </a:r>
             <a:endParaRPr lang="en-US" sz="5200" dirty="0"/>
           </a:p>
@@ -20911,8 +20911,8 @@
         </p:nvSpPr>
         <p:spPr>
           <a:xfrm>
-            <a:off x="6537960" y="3108960"/>
-            <a:ext cx="4709160" cy="1737360"/>
+            <a:off x="6537960" y="3063240"/>
+            <a:ext cx="4709160" cy="1828800"/>
           </a:xfrm>
           <a:prstGeom prst="rect">
             <a:avLst/>
@@ -20928,7 +20928,7 @@
               <a:buNone/>
             </a:pPr>
             <a:r>
-              <a:rPr lang="en-US" sz="1600" dirty="0">
+              <a:rPr lang="en-US" sz="1500" dirty="0">
                 <a:solidFill>
                   <a:srgbClr val="1B1F24"/>
                 </a:solidFill>
@@ -20936,9 +20936,9 @@
                 <a:ea typeface="Inter" pitchFamily="34" charset="-122"/>
                 <a:cs typeface="Inter" pitchFamily="34" charset="-120"/>
               </a:rPr>
-              <a:t>Of teachers who already used AI in 2023–24, 15% or fewer used it for writing assessments: the least-tapped use, sitting under the highest-leverage work. (RAND, 2025)</a:t>
-            </a:r>
-            <a:endParaRPr lang="en-US" sz="1600" dirty="0"/>
+              <a:t>About one in five teachers used AI to plan their instruction at all in 2023–24. Among those who did, about a quarter used it to help assess students, most often to build assessments, quizzes, and rubrics. (RAND, 2025)</a:t>
+            </a:r>
+            <a:endParaRPr lang="en-US" sz="1500" dirty="0"/>
           </a:p>
         </p:txBody>
       </p:sp>
@@ -20967,7 +20967,7 @@
               <a:buNone/>
             </a:pPr>
             <a:r>
-              <a:rPr lang="en-US" sz="2000" b="1" dirty="0">
+              <a:rPr lang="en-US" sz="1900" b="1" dirty="0">
                 <a:solidFill>
                   <a:srgbClr val="13293D"/>
                 </a:solidFill>
@@ -20975,9 +20975,9 @@
                 <a:ea typeface="Inter" pitchFamily="34" charset="-122"/>
                 <a:cs typeface="Inter" pitchFamily="34" charset="-120"/>
               </a:rPr>
-              <a:t>Feedback’s power varies with how it’s given. That skill is yours; the drafting is delegable.</a:t>
-            </a:r>
-            <a:endParaRPr lang="en-US" sz="2000" dirty="0"/>
+              <a:t>Our stance: assessment drafting is worth delegating because the workload is real and your review stays explicit.</a:t>
+            </a:r>
+            <a:endParaRPr lang="en-US" sz="1900" dirty="0"/>
           </a:p>
         </p:txBody>
       </p:sp>
@@ -27403,7 +27403,7 @@
                 <a:ea typeface="Inter" pitchFamily="34" charset="-122"/>
                 <a:cs typeface="Inter" pitchFamily="34" charset="-120"/>
               </a:rPr>
-              <a:t>2023 meta-analysis (Panadero et al.): rubric use has a positive, moderate effect on performance</a:t>
+              <a:t>2023 meta-analysis (Panadero et al.): rubric use has a moderate positive effect on academic performance</a:t>
             </a:r>
             <a:endParaRPr lang="en-US" sz="2100" dirty="0"/>
           </a:p>
@@ -27424,7 +27424,7 @@
                 <a:ea typeface="Inter" pitchFamily="34" charset="-122"/>
                 <a:cs typeface="Inter" pitchFamily="34" charset="-120"/>
               </a:rPr>
-              <a:t>Same finding for self-regulated learning and self-efficacy</a:t>
+              <a:t>Smaller, less certain effects on self-regulated learning and self-efficacy</a:t>
             </a:r>
             <a:endParaRPr lang="en-US" sz="2100" dirty="0"/>
           </a:p>
